--- a/docs/superpowers/specs/capstone_proposal.pptx
+++ b/docs/superpowers/specs/capstone_proposal.pptx
@@ -27,9 +27,10 @@
     <p:sldId id="275" r:id="rId21"/>
     <p:sldId id="276" r:id="rId22"/>
     <p:sldId id="277" r:id="rId23"/>
+    <p:sldId id="278" r:id="rId24"/>
   </p:sldIdLst>
   <p:notesMasterIdLst>
-    <p:notesMasterId r:id="rId24"/>
+    <p:notesMasterId r:id="rId25"/>
   </p:notesMasterIdLst>
   <p:sldSz cx="12192000" cy="6858000"/>
   <p:notesSz cx="6858000" cy="12192000"/>
@@ -128,7 +129,7 @@
   <p:extLst>
     <p:ext uri="{521415D9-36F7-43E2-AB2F-B90AF26B5E84}">
       <p14:sectionLst xmlns:p14="http://schemas.microsoft.com/office/powerpoint/2010/main">
-        <p14:section name="開場" id="{ef04ea6c-496c-8803-d522-11b0e6e7b82d}">
+        <p14:section name="開場" id="{dcf9e5e5-311d-cd20-9212-b37b4d77a911}">
           <p14:sldIdLst>
             <p14:sldId id="256"/>
             <p14:sldId id="257"/>
@@ -136,7 +137,7 @@
             <p14:sldId id="259"/>
           </p14:sldIdLst>
         </p14:section>
-        <p14:section name="名詞" id="{daf6325b-53a2-e032-4641-514b6183724f}">
+        <p14:section name="名詞" id="{f13b8f84-3733-3ffc-2b54-3ab0b44d52b9}">
           <p14:sldIdLst>
             <p14:sldId id="260"/>
             <p14:sldId id="261"/>
@@ -144,7 +145,7 @@
             <p14:sldId id="263"/>
           </p14:sldIdLst>
         </p14:section>
-        <p14:section name="發現與結果" id="{571e691c-7cc6-061a-2f99-64210eba7349}">
+        <p14:section name="發現與結果" id="{2b0db44c-e47a-1769-b3d8-03e5c58910e0}">
           <p14:sldIdLst>
             <p14:sldId id="264"/>
             <p14:sldId id="265"/>
@@ -153,25 +154,26 @@
             <p14:sldId id="268"/>
           </p14:sldIdLst>
         </p14:section>
-        <p14:section name="提示線與 Demo" id="{c2b5ff1b-4e9b-b099-6579-317c371ed488}">
+        <p14:section name="提示線與 Demo" id="{352abb38-ea3e-8b17-6893-79a20c11ae72}">
           <p14:sldIdLst>
             <p14:sldId id="269"/>
             <p14:sldId id="270"/>
           </p14:sldIdLst>
         </p14:section>
-        <p14:section name="結尾" id="{f863cba0-cb09-f834-579b-ea922f5a9b15}">
+        <p14:section name="結尾" id="{72aafb8a-e252-c19f-5d0b-ff8d09570c8a}">
           <p14:sldIdLst>
             <p14:sldId id="271"/>
             <p14:sldId id="272"/>
           </p14:sldIdLst>
         </p14:section>
-        <p14:section name="附錄" id="{d5b9f288-2503-f160-218f-5fa2d8198dc3}">
+        <p14:section name="附錄" id="{19723ba2-e516-b915-1cbd-9122505e3215}">
           <p14:sldIdLst>
             <p14:sldId id="273"/>
             <p14:sldId id="274"/>
             <p14:sldId id="275"/>
             <p14:sldId id="276"/>
             <p14:sldId id="277"/>
+            <p14:sldId id="278"/>
           </p14:sldIdLst>
         </p14:section>
       </p14:sectionLst>
@@ -181,364 +183,6 @@
     </p:ext>
   </p:extLst>
 </p:presentation>
-</file>
-
-<file path=ppt/charts/chart1.xml><?xml version="1.0" encoding="utf-8"?>
-<c:chartSpace xmlns:c="http://schemas.openxmlformats.org/drawingml/2006/chart" xmlns:a="http://schemas.openxmlformats.org/drawingml/2006/main" xmlns:r="http://schemas.openxmlformats.org/officeDocument/2006/relationships">
-  <c:date1904 val="0"/>
-  <c:roundedCorners val="1"/>
-  <c:chart>
-    <c:title>
-      <c:tx>
-        <c:rich>
-          <a:bodyPr/>
-          <a:lstStyle/>
-          <a:p>
-            <a:pPr>
-              <a:defRPr sz="1400" b="0" i="0" u="none" strike="noStrike">
-                <a:solidFill>
-                  <a:srgbClr val="A89E8C"/>
-                </a:solidFill>
-                <a:latin typeface="+mn-lt"/>
-              </a:defRPr>
-            </a:pPr>
-            <a:r>
-              <a:rPr sz="1400" b="0" i="0" u="none" strike="noStrike">
-                <a:solidFill>
-                  <a:srgbClr val="A89E8C"/>
-                </a:solidFill>
-                <a:latin typeface="+mn-lt"/>
-              </a:rPr>
-              <a:t>買賣股票：補強前後</a:t>
-            </a:r>
-          </a:p>
-        </c:rich>
-      </c:tx>
-      <c:layout/>
-      <c:overlay val="0"/>
-    </c:title>
-    <c:autoTitleDeleted val="0"/>
-    <c:plotArea>
-      <c:layout/>
-      <c:barChart>
-        <c:barDir val="col"/>
-        <c:grouping val="clustered"/>
-        <c:varyColors val="0"/>
-        <c:ser>
-          <c:idx val="0"/>
-          <c:order val="0"/>
-          <c:tx>
-            <c:strRef>
-              <c:f>Sheet1!$B$1</c:f>
-              <c:strCache>
-                <c:ptCount val="1"/>
-                <c:pt idx="0">
-                  <c:v>補強前（4 道）</c:v>
-                </c:pt>
-              </c:strCache>
-            </c:strRef>
-          </c:tx>
-          <c:spPr>
-            <a:solidFill>
-              <a:srgbClr val="6B6459"/>
-            </a:solidFill>
-            <a:effectLst/>
-          </c:spPr>
-          <c:invertIfNegative val="0"/>
-          <c:dLbls>
-            <c:numFmt formatCode="0.000" sourceLinked="0"/>
-            <c:txPr>
-              <a:bodyPr/>
-              <a:lstStyle/>
-              <a:p>
-                <a:pPr>
-                  <a:defRPr b="0" i="0" strike="noStrike" sz="1300" u="none">
-                    <a:solidFill>
-                      <a:srgbClr val="EDE4D0"/>
-                    </a:solidFill>
-                    <a:latin typeface="+mn-lt"/>
-                  </a:defRPr>
-                </a:pPr>
-              </a:p>
-            </c:txPr>
-            <c:showLegendKey val="0"/>
-            <c:showVal val="1"/>
-            <c:showCatName val="0"/>
-            <c:showSerName val="0"/>
-            <c:showPercent val="0"/>
-            <c:showBubbleSize val="0"/>
-            <c:showLeaderLines val="0"/>
-          </c:dLbls>
-          <c:cat>
-            <c:multiLvlStrRef>
-              <c:f>Sheet1!$A$2:$A$3</c:f>
-              <c:multiLvlStrCache>
-                <c:ptCount val="2"/>
-                <c:lvl>
-                  <c:pt idx="0">
-                    <c:v>調整組 TNR</c:v>
-                  </c:pt>
-                  <c:pt idx="1">
-                    <c:v>驗收組 TNR</c:v>
-                  </c:pt>
-                </c:lvl>
-              </c:multiLvlStrCache>
-            </c:multiLvlStrRef>
-          </c:cat>
-          <c:val>
-            <c:numRef>
-              <c:f>Sheet1!$B$2:$B$3</c:f>
-              <c:numCache>
-                <c:formatCode>General</c:formatCode>
-                <c:ptCount val="2"/>
-                <c:pt idx="0">
-                  <c:v>0.583</c:v>
-                </c:pt>
-                <c:pt idx="1">
-                  <c:v>0.417</c:v>
-                </c:pt>
-              </c:numCache>
-            </c:numRef>
-          </c:val>
-        </c:ser>
-        <c:ser>
-          <c:idx val="1"/>
-          <c:order val="1"/>
-          <c:tx>
-            <c:strRef>
-              <c:f>Sheet1!$C$1</c:f>
-              <c:strCache>
-                <c:ptCount val="1"/>
-                <c:pt idx="0">
-                  <c:v>補強後（10 道）</c:v>
-                </c:pt>
-              </c:strCache>
-            </c:strRef>
-          </c:tx>
-          <c:spPr>
-            <a:solidFill>
-              <a:srgbClr val="DFA050"/>
-            </a:solidFill>
-            <a:effectLst/>
-          </c:spPr>
-          <c:invertIfNegative val="0"/>
-          <c:dLbls>
-            <c:numFmt formatCode="0.000" sourceLinked="0"/>
-            <c:txPr>
-              <a:bodyPr/>
-              <a:lstStyle/>
-              <a:p>
-                <a:pPr>
-                  <a:defRPr b="0" i="0" strike="noStrike" sz="1300" u="none">
-                    <a:solidFill>
-                      <a:srgbClr val="EDE4D0"/>
-                    </a:solidFill>
-                    <a:latin typeface="+mn-lt"/>
-                  </a:defRPr>
-                </a:pPr>
-              </a:p>
-            </c:txPr>
-            <c:showLegendKey val="0"/>
-            <c:showVal val="1"/>
-            <c:showCatName val="0"/>
-            <c:showSerName val="0"/>
-            <c:showPercent val="0"/>
-            <c:showBubbleSize val="0"/>
-            <c:showLeaderLines val="0"/>
-          </c:dLbls>
-          <c:cat>
-            <c:multiLvlStrRef>
-              <c:f>Sheet1!$A$2:$A$3</c:f>
-              <c:multiLvlStrCache>
-                <c:ptCount val="2"/>
-                <c:lvl>
-                  <c:pt idx="0">
-                    <c:v>調整組 TNR</c:v>
-                  </c:pt>
-                  <c:pt idx="1">
-                    <c:v>驗收組 TNR</c:v>
-                  </c:pt>
-                </c:lvl>
-              </c:multiLvlStrCache>
-            </c:multiLvlStrRef>
-          </c:cat>
-          <c:val>
-            <c:numRef>
-              <c:f>Sheet1!$C$2:$C$3</c:f>
-              <c:numCache>
-                <c:formatCode>General</c:formatCode>
-                <c:ptCount val="2"/>
-                <c:pt idx="0">
-                  <c:v>0.383</c:v>
-                </c:pt>
-                <c:pt idx="1">
-                  <c:v>0.467</c:v>
-                </c:pt>
-              </c:numCache>
-            </c:numRef>
-          </c:val>
-        </c:ser>
-        <c:dLbls>
-          <c:numFmt formatCode="0.000" sourceLinked="0"/>
-          <c:txPr>
-            <a:bodyPr/>
-            <a:lstStyle/>
-            <a:p>
-              <a:pPr>
-                <a:defRPr b="0" i="0" strike="noStrike" sz="1300" u="none">
-                  <a:solidFill>
-                    <a:srgbClr val="EDE4D0"/>
-                  </a:solidFill>
-                  <a:latin typeface="+mn-lt"/>
-                </a:defRPr>
-              </a:pPr>
-            </a:p>
-          </c:txPr>
-          <c:showLegendKey val="0"/>
-          <c:showVal val="1"/>
-          <c:showCatName val="0"/>
-          <c:showSerName val="0"/>
-          <c:showPercent val="0"/>
-          <c:showBubbleSize val="0"/>
-          <c:showLeaderLines val="0"/>
-        </c:dLbls>
-        <c:gapWidth val="150"/>
-        <c:overlap val="0"/>
-        <c:axId val="2094734554"/>
-        <c:axId val="2094734552"/>
-        <c:axId val="2094734556"/>
-      </c:barChart>
-      <c:catAx>
-        <c:axId val="2094734554"/>
-        <c:scaling>
-          <c:orientation val="minMax"/>
-        </c:scaling>
-        <c:delete val="0"/>
-        <c:axPos val="b"/>
-        <c:numFmt formatCode="General" sourceLinked="1"/>
-        <c:majorTickMark val="out"/>
-        <c:minorTickMark val="none"/>
-        <c:tickLblPos val="low"/>
-        <c:spPr>
-          <a:ln w="12700" cap="flat">
-            <a:noFill/>
-            <a:prstDash val="solid"/>
-            <a:round/>
-          </a:ln>
-        </c:spPr>
-        <c:txPr>
-          <a:bodyPr/>
-          <a:lstStyle/>
-          <a:p>
-            <a:pPr>
-              <a:defRPr sz="1400" b="0" i="0" u="none" strike="noStrike">
-                <a:solidFill>
-                  <a:srgbClr val="EDE4D0"/>
-                </a:solidFill>
-                <a:latin typeface="+mn-lt"/>
-              </a:defRPr>
-            </a:pPr>
-            <a:endParaRPr lang="en-US"/>
-          </a:p>
-        </c:txPr>
-        <c:crossAx val="2094734552"/>
-        <c:crosses val="autoZero"/>
-        <c:auto val="1"/>
-        <c:lblAlgn val="ctr"/>
-        <c:noMultiLvlLbl val="1"/>
-      </c:catAx>
-      <c:valAx>
-        <c:axId val="2094734552"/>
-        <c:scaling>
-          <c:orientation val="minMax"/>
-          <c:max val="0.8"/>
-          <c:min val="0"/>
-        </c:scaling>
-        <c:delete val="0"/>
-        <c:axPos val="l"/>
-        <c:majorGridlines>
-          <c:spPr>
-            <a:ln w="6350" cap="flat">
-              <a:solidFill>
-                <a:srgbClr val="3A352C"/>
-              </a:solidFill>
-              <a:prstDash val="solid"/>
-              <a:round/>
-            </a:ln>
-          </c:spPr>
-        </c:majorGridlines>
-        <c:numFmt formatCode="0.0" sourceLinked="0"/>
-        <c:majorTickMark val="out"/>
-        <c:minorTickMark val="none"/>
-        <c:tickLblPos val="nextTo"/>
-        <c:spPr>
-          <a:ln w="12700" cap="flat">
-            <a:noFill/>
-            <a:prstDash val="solid"/>
-            <a:round/>
-          </a:ln>
-        </c:spPr>
-        <c:txPr>
-          <a:bodyPr/>
-          <a:lstStyle/>
-          <a:p>
-            <a:pPr>
-              <a:defRPr sz="1100" b="0" i="0" u="none" strike="noStrike">
-                <a:solidFill>
-                  <a:srgbClr val="A89E8C"/>
-                </a:solidFill>
-                <a:latin typeface="+mn-lt"/>
-              </a:defRPr>
-            </a:pPr>
-            <a:endParaRPr lang="en-US"/>
-          </a:p>
-        </c:txPr>
-        <c:crossAx val="2094734554"/>
-        <c:crosses val="autoZero"/>
-        <c:crossBetween val="between"/>
-      </c:valAx>
-      <c:spPr>
-        <a:noFill/>
-        <a:ln>
-          <a:noFill/>
-        </a:ln>
-        <a:effectLst/>
-      </c:spPr>
-    </c:plotArea>
-    <c:legend>
-      <c:legendPos val="b"/>
-      <c:overlay val="0"/>
-      <c:txPr>
-        <a:bodyPr/>
-        <a:lstStyle/>
-        <a:p>
-          <a:pPr>
-            <a:defRPr sz="1200">
-              <a:solidFill>
-                <a:srgbClr val="EDE4D0"/>
-              </a:solidFill>
-              <a:latin typeface="+mn-lt"/>
-              <a:cs typeface="+mn-lt"/>
-            </a:defRPr>
-          </a:pPr>
-          <a:endParaRPr lang="en-US"/>
-        </a:p>
-      </c:txPr>
-    </c:legend>
-    <c:plotVisOnly val="1"/>
-    <c:dispBlanksAs val="span"/>
-  </c:chart>
-  <c:spPr>
-    <a:noFill/>
-    <a:ln>
-      <a:noFill/>
-    </a:ln>
-    <a:effectLst/>
-  </c:spPr>
-  <c:externalData r:id="rId1">
-    <c:autoUpdate val="0"/>
-  </c:externalData>
-</c:chartSpace>
 </file>
 
 <file path=ppt/notesMasters/notesMaster1.xml><?xml version="1.0" encoding="utf-8"?>
@@ -1200,7 +844,7 @@
           <a:p>
             <a:r>
               <a:rPr lang="en-US" dirty="0"/>
-              <a:t>全自動流程在兩題上都從頭跑到結束，沒有人工介入，TNR 都比起點高；但兩題都沒有達到 0.85。最長不重複子字串是人工迭代的結果，放著當對照。觀察：最長合法括號有一種錯誤，只從左往右掃一遍，AI 連續兩輪說要抓它、實際抓到 0 道，到第 5 輪才擋到。樣本：每題一次實驗，模型 gpt-oss-120b。</a:t>
+              <a:t>這一頁從文獻出發。Cai 等人提出 CodeContests-O：只靠 LLM 自己產生的測資不夠多樣，所以把測資拿去跑已知的正確解和錯誤解，再把執行結果回饋給 LLM 一輪一輪修正。他們在大規模資料上得到很高的 TPR 和 TNR。Wang 等人則提出驗證器把關的協作方式：LLM 產出、驗證器評分、再決定怎麼處理。本專題把這兩個想法放進同一個全自動流程：我們的 TPR、TNR 評測就是驗證器，自動審核只看分數。觀察到的是：在兩題上，流程都能從頭跑到尾，測資都比起點進步；但都沒有達到 0.85。和文獻不同的是，我們每題只有一次實驗、6 份錯誤程式，所以只當可行性的觀察。細節數字：困難題 0.278 到 0.676，簡單題 0.500 到 0.583。</a:t>
             </a:r>
             <a:endParaRPr lang="en-US" dirty="0"/>
           </a:p>
@@ -1288,7 +932,7 @@
           <a:p>
             <a:r>
               <a:rPr lang="en-US" dirty="0"/>
-              <a:t>買賣股票為什麼停在 4 道？自動審核只收能提高平均的測資。只抓到 1、2 種錯的測資，就算能補漏洞也會被拒絕，所以驗收組漏掉一種錯誤。我們在實驗之外補了 6 道，實驗紀錄不變。補強後驗收組不再漏網，但調整組 TNR 反而從 0.583 降到 0.383。為什麼分數會下降？補的邊界案例，例如只有 1 天、價格全部相同，抓不到錯誤，會把平均拉低，但它們正是學生最該看到的測試。分數高不等於覆蓋完整。只追平均，會把教學上需要的測資擋在門外。這也指出下一步：審核規則可以改成覆蓋優先。</a:t>
+              <a:t>Yang 等人在 TestCase-Eval 裡，用兩個面向評估 LLM 產生的測資：錯誤覆蓋，是一組測資能涵蓋多少種失敗方式；錯誤暴露，是能不能針對某一個錯誤寫法，產生讓它出錯的輸入。我們在買賣股票這題觀察到，這兩個面向會互相拉扯。自動審核只收能提高平均 TNR 的測資，平均 TNR 比較接近每道測資能擋下多少錯，所以只抓到少數錯誤、但能補漏洞的測資被拒絕，結果停在 4 道，驗收組漏掉一種錯誤。實驗之外補了邊界案例後，覆蓋變完整，驗收組不再漏網，但平均 TNR 從 0.583 降到 0.383。意涵是：評估測資要同時看兩個面向，只追平均會犧牲覆蓋。下一步是覆蓋優先的審核。</a:t>
             </a:r>
             <a:endParaRPr lang="en-US" dirty="0"/>
           </a:p>
@@ -1376,7 +1020,7 @@
           <a:p>
             <a:r>
               <a:rPr lang="en-US" dirty="0"/>
-              <a:t>產生提示的程式沒有學生程式碼這個輸入，AI 想代寫也辦不到。AI 只看得到題目和哪道測資錯了；答錯、執行時出錯或超時的時候，還會參考虛擬碼。虛擬碼是用文字一步步寫出解法，不是能執行的程式。我們用往返檢查確認虛擬碼品質：一個 AI 寫虛擬碼，另一個 AI 只看虛擬碼寫程式，寫出來的程式要和正解行為一致才算過關；三題各重複 3 次，都一次通過。檢查關會擋下夾帶程式碼或整段照抄虛擬碼的提示。觀察：6 種錯誤各試 1 次，提示都通過自動檢查；但提示方向對不對，機器判斷不了。</a:t>
+              <a:t>提示線也從文獻出發。Kazemitabaar 等人的 CodeAid 在 700 名學生的課堂部署了 12 週，設計原則之一是避免直接給答案，改用帶逐行說明的虛擬碼。Xiao 等人則提醒：只有高層次的文字提示，可能沒有幫助，甚至會誤導；更具體的提示比較能幫到新手。這兩點之間有張力：太抽象沒用，太具體又變成給答案。我們的做法是：AI 結構上拿不到學生的程式碼；用通過往返檢查的虛擬碼，當作比文字提示具體、但又不是可以直接貼上的答案的中間層；檢查關會擋下夾帶程式碼或整段照抄虛擬碼的提示。觀察：6 種錯誤各試一次都通過自動檢查，但提示方向好不好，仍需要人判斷。</a:t>
             </a:r>
             <a:endParaRPr lang="en-US" dirty="0"/>
           </a:p>
@@ -1464,7 +1108,7 @@
           <a:p>
             <a:r>
               <a:rPr lang="en-US" dirty="0"/>
-              <a:t>Demo 流程：打開最長合法括號題目頁，展開虛擬碼。交一份常見錯解，例如只認相鄰的括號對，系統會顯示第一道失敗的測資。接著 AI 給提示：沒有程式碼，用問句引導，可能提到虛擬碼的步驟編號。有時間再到終端機跑 pipeline --plan，展示每一輪的測資數和 TNR。事先錄好影片當備案。</a:t>
+              <a:t>Demo 時請大家對照三個設計原則來看。第一，不給完整答案，來自 CodeAid：看提示裡有沒有可以直接貼上的程式。第二，比高層次文字更具體，來自 Xiao 等人：看提示有沒有指到虛擬碼的步驟。第三，讓學生自己判斷，也是 CodeAid 的透明原則：看失敗測資的輸入、預期、實際結果是不是都攤開給學生。操作：打開最長合法括號題目頁、展開虛擬碼，交一份常見錯解，看系統怎麼判、AI 怎麼提示。事先錄好影片當備案。</a:t>
             </a:r>
             <a:endParaRPr lang="en-US" dirty="0"/>
           </a:p>
@@ -1728,7 +1372,7 @@
           <a:p>
             <a:r>
               <a:rPr lang="en-US" dirty="0"/>
-              <a:t>問答時翻回這頁查名詞。</a:t>
+              <a:t>第 12 到 15 頁引用的文獻，編號與論文 IEEE_Paper.md 的參考文獻一致。</a:t>
             </a:r>
             <a:endParaRPr lang="en-US" dirty="0"/>
           </a:p>
@@ -1816,7 +1460,7 @@
           <a:p>
             <a:r>
               <a:rPr lang="en-US" dirty="0"/>
-              <a:t>被問到「這套方法能不能用在別的題目」時使用。</a:t>
+              <a:t>問答時翻回這頁查名詞。</a:t>
             </a:r>
             <a:endParaRPr lang="en-US" dirty="0"/>
           </a:p>
@@ -1992,7 +1636,7 @@
           <a:p>
             <a:r>
               <a:rPr lang="en-US" dirty="0"/>
-              <a:t>被問到 AI 提案怎麼調整時使用。看分數再改只有 3 次觀察，只當線索。</a:t>
+              <a:t>被問到「這套方法能不能用在別的題目」時使用。</a:t>
             </a:r>
             <a:endParaRPr lang="en-US" dirty="0"/>
           </a:p>
@@ -2080,7 +1724,7 @@
           <a:p>
             <a:r>
               <a:rPr lang="en-US" dirty="0"/>
-              <a:t>被問到工程細節時使用。</a:t>
+              <a:t>被問到 AI 提案怎麼調整時使用。看分數再改只有 3 次觀察，只當線索。</a:t>
             </a:r>
             <a:endParaRPr lang="en-US" dirty="0"/>
           </a:p>
@@ -2168,7 +1812,7 @@
           <a:p>
             <a:r>
               <a:rPr lang="en-US" dirty="0"/>
-              <a:t>被問到實驗是否可信時使用。</a:t>
+              <a:t>被問到工程細節時使用。</a:t>
             </a:r>
             <a:endParaRPr lang="en-US" dirty="0"/>
           </a:p>
@@ -2192,6 +1836,94 @@
             <a:fld id="{F7021451-1387-4CA6-816F-3879F97B5CBC}" type="slidenum">
               <a:rPr lang="en-US"/>
               <a:t>22</a:t>
+            </a:fld>
+            <a:endParaRPr lang="en-US"/>
+          </a:p>
+        </p:txBody>
+      </p:sp>
+    </p:spTree>
+    <p:extLst>
+      <p:ext uri="{BB962C8B-B14F-4D97-AF65-F5344CB8AC3E}">
+        <p14:creationId xmlns:p14="http://schemas.microsoft.com/office/powerpoint/2010/main" val="1024086991"/>
+      </p:ext>
+    </p:extLst>
+  </p:cSld>
+  <p:clrMapOvr>
+    <a:masterClrMapping/>
+  </p:clrMapOvr>
+</p:notes>
+</file>
+
+<file path=ppt/notesSlides/notesSlide23.xml><?xml version="1.0" encoding="utf-8"?>
+<p:notes xmlns:a="http://schemas.openxmlformats.org/drawingml/2006/main" xmlns:r="http://schemas.openxmlformats.org/officeDocument/2006/relationships" xmlns:p="http://schemas.openxmlformats.org/presentationml/2006/main">
+  <p:cSld>
+    <p:spTree>
+      <p:nvGrpSpPr>
+        <p:cNvPr id="1" name=""/>
+        <p:cNvGrpSpPr/>
+        <p:nvPr/>
+      </p:nvGrpSpPr>
+      <p:grpSpPr>
+        <a:xfrm>
+          <a:off x="0" y="0"/>
+          <a:ext cx="0" cy="0"/>
+          <a:chOff x="0" y="0"/>
+          <a:chExt cx="0" cy="0"/>
+        </a:xfrm>
+      </p:grpSpPr>
+      <p:sp>
+        <p:nvSpPr>
+          <p:cNvPr id="2" name="Slide Image Placeholder 1"/>
+          <p:cNvSpPr>
+            <a:spLocks noGrp="1" noRot="1" noChangeAspect="1"/>
+          </p:cNvSpPr>
+          <p:nvPr>
+            <p:ph type="sldImg"/>
+          </p:nvPr>
+        </p:nvSpPr>
+        <p:spPr/>
+      </p:sp>
+      <p:sp>
+        <p:nvSpPr>
+          <p:cNvPr id="3" name="Notes Placeholder 2"/>
+          <p:cNvSpPr>
+            <a:spLocks noGrp="1"/>
+          </p:cNvSpPr>
+          <p:nvPr>
+            <p:ph type="body" idx="1"/>
+          </p:nvPr>
+        </p:nvSpPr>
+        <p:spPr/>
+        <p:txBody>
+          <a:bodyPr/>
+          <a:lstStyle/>
+          <a:p>
+            <a:r>
+              <a:rPr lang="en-US" dirty="0"/>
+              <a:t>被問到實驗是否可信時使用。</a:t>
+            </a:r>
+            <a:endParaRPr lang="en-US" dirty="0"/>
+          </a:p>
+        </p:txBody>
+      </p:sp>
+      <p:sp>
+        <p:nvSpPr>
+          <p:cNvPr id="4" name="Slide Number Placeholder 3"/>
+          <p:cNvSpPr>
+            <a:spLocks noGrp="1"/>
+          </p:cNvSpPr>
+          <p:nvPr>
+            <p:ph type="sldNum" sz="quarter" idx="10"/>
+          </p:nvPr>
+        </p:nvSpPr>
+        <p:spPr/>
+        <p:txBody>
+          <a:bodyPr/>
+          <a:lstStyle/>
+          <a:p>
+            <a:fld id="{F7021451-1387-4CA6-816F-3879F97B5CBC}" type="slidenum">
+              <a:rPr lang="en-US"/>
+              <a:t>23</a:t>
             </a:fld>
             <a:endParaRPr lang="en-US"/>
           </a:p>
@@ -5513,1623 +5245,26 @@
                   <a:schemeClr val="tx1"/>
                 </a:solidFill>
               </a:rPr>
-              <a:t>三題環境測試結果</a:t>
+              <a:t>回饋驅動迭代：文獻怎麼說，我們觀察到什麼</a:t>
             </a:r>
             <a:endParaRPr lang="en-US" sz="3000" dirty="0"/>
           </a:p>
         </p:txBody>
       </p:sp>
-      <p:graphicFrame>
-        <p:nvGraphicFramePr>
-          <p:cNvPr id="13" name="table-176"/>
-          <p:cNvGraphicFramePr>
-            <a:graphicFrameLocks noGrp="1"/>
-          </p:cNvGraphicFramePr>
-          <p:nvPr>
-            <p:extLst>
-              <p:ext uri="{D42A27DB-BD31-4B8C-83A1-F6EECF244321}">
-                <p14:modId xmlns:p14="http://schemas.microsoft.com/office/powerpoint/2010/main" val="1579011935"/>
-              </p:ext>
-            </p:extLst>
-          </p:nvPr>
-        </p:nvGraphicFramePr>
-        <p:xfrm>
-          <a:off x="548640" y="1691640"/>
-          <a:ext cx="11094415" cy="914400"/>
-        </p:xfrm>
-        <a:graphic>
-          <a:graphicData uri="http://schemas.openxmlformats.org/drawingml/2006/table">
-            <a:tbl>
-              <a:tblPr/>
-              <a:tblGrid>
-                <a:gridCol w="2926080"/>
-                <a:gridCol w="1828800"/>
-                <a:gridCol w="1828800"/>
-                <a:gridCol w="1143000"/>
-                <a:gridCol w="1417320"/>
-                <a:gridCol w="1947672"/>
-              </a:tblGrid>
-              <a:tr h="566928">
-                <a:tc>
-                  <a:txBody>
-                    <a:bodyPr/>
-                    <a:lstStyle/>
-                    <a:p>
-                      <a:pPr indent="0" marL="0">
-                        <a:buNone/>
-                      </a:pPr>
-                      <a:r>
-                        <a:rPr lang="en-US" sz="1300" b="1" dirty="0">
-                          <a:solidFill>
-                            <a:schemeClr val="tx2"/>
-                          </a:solidFill>
-                        </a:rPr>
-                        <a:t>題目</a:t>
-                      </a:r>
-                      <a:endParaRPr lang="en-US" sz="1300" dirty="0"/>
-                    </a:p>
-                  </a:txBody>
-                  <a:tcPr marL="101600" marR="101600" marT="50800" marB="50800" anchor="ctr">
-                    <a:lnL w="9525" cap="flat" cmpd="sng" algn="ctr">
-                      <a:solidFill>
-                        <a:srgbClr val="3A352C"/>
-                      </a:solidFill>
-                      <a:prstDash val="solid"/>
-                      <a:round/>
-                      <a:headEnd type="none" w="med" len="med"/>
-                      <a:tailEnd type="none" w="med" len="med"/>
-                    </a:lnL>
-                    <a:lnR w="9525" cap="flat" cmpd="sng" algn="ctr">
-                      <a:solidFill>
-                        <a:srgbClr val="3A352C"/>
-                      </a:solidFill>
-                      <a:prstDash val="solid"/>
-                      <a:round/>
-                      <a:headEnd type="none" w="med" len="med"/>
-                      <a:tailEnd type="none" w="med" len="med"/>
-                    </a:lnR>
-                    <a:lnT w="9525" cap="flat" cmpd="sng" algn="ctr">
-                      <a:solidFill>
-                        <a:srgbClr val="3A352C"/>
-                      </a:solidFill>
-                      <a:prstDash val="solid"/>
-                      <a:round/>
-                      <a:headEnd type="none" w="med" len="med"/>
-                      <a:tailEnd type="none" w="med" len="med"/>
-                    </a:lnT>
-                    <a:lnB w="9525" cap="flat" cmpd="sng" algn="ctr">
-                      <a:solidFill>
-                        <a:srgbClr val="3A352C"/>
-                      </a:solidFill>
-                      <a:prstDash val="solid"/>
-                      <a:round/>
-                      <a:headEnd type="none" w="med" len="med"/>
-                      <a:tailEnd type="none" w="med" len="med"/>
-                    </a:lnB>
-                    <a:solidFill>
-                      <a:schemeClr val="bg1"/>
-                    </a:solidFill>
-                  </a:tcPr>
-                </a:tc>
-                <a:tc>
-                  <a:txBody>
-                    <a:bodyPr/>
-                    <a:lstStyle/>
-                    <a:p>
-                      <a:pPr indent="0" marL="0">
-                        <a:buNone/>
-                      </a:pPr>
-                      <a:r>
-                        <a:rPr lang="en-US" sz="1300" b="1" dirty="0">
-                          <a:solidFill>
-                            <a:schemeClr val="tx2"/>
-                          </a:solidFill>
-                        </a:rPr>
-                        <a:t>起點 TNR</a:t>
-                      </a:r>
-                      <a:endParaRPr lang="en-US" sz="1300" dirty="0"/>
-                    </a:p>
-                  </a:txBody>
-                  <a:tcPr marL="101600" marR="101600" marT="50800" marB="50800" anchor="ctr">
-                    <a:lnL w="9525" cap="flat" cmpd="sng" algn="ctr">
-                      <a:solidFill>
-                        <a:srgbClr val="3A352C"/>
-                      </a:solidFill>
-                      <a:prstDash val="solid"/>
-                      <a:round/>
-                      <a:headEnd type="none" w="med" len="med"/>
-                      <a:tailEnd type="none" w="med" len="med"/>
-                    </a:lnL>
-                    <a:lnR w="9525" cap="flat" cmpd="sng" algn="ctr">
-                      <a:solidFill>
-                        <a:srgbClr val="3A352C"/>
-                      </a:solidFill>
-                      <a:prstDash val="solid"/>
-                      <a:round/>
-                      <a:headEnd type="none" w="med" len="med"/>
-                      <a:tailEnd type="none" w="med" len="med"/>
-                    </a:lnR>
-                    <a:lnT w="9525" cap="flat" cmpd="sng" algn="ctr">
-                      <a:solidFill>
-                        <a:srgbClr val="3A352C"/>
-                      </a:solidFill>
-                      <a:prstDash val="solid"/>
-                      <a:round/>
-                      <a:headEnd type="none" w="med" len="med"/>
-                      <a:tailEnd type="none" w="med" len="med"/>
-                    </a:lnT>
-                    <a:lnB w="9525" cap="flat" cmpd="sng" algn="ctr">
-                      <a:solidFill>
-                        <a:srgbClr val="3A352C"/>
-                      </a:solidFill>
-                      <a:prstDash val="solid"/>
-                      <a:round/>
-                      <a:headEnd type="none" w="med" len="med"/>
-                      <a:tailEnd type="none" w="med" len="med"/>
-                    </a:lnB>
-                    <a:solidFill>
-                      <a:schemeClr val="bg1"/>
-                    </a:solidFill>
-                  </a:tcPr>
-                </a:tc>
-                <a:tc>
-                  <a:txBody>
-                    <a:bodyPr/>
-                    <a:lstStyle/>
-                    <a:p>
-                      <a:pPr indent="0" marL="0">
-                        <a:buNone/>
-                      </a:pPr>
-                      <a:r>
-                        <a:rPr lang="en-US" sz="1300" b="1" dirty="0">
-                          <a:solidFill>
-                            <a:schemeClr val="tx2"/>
-                          </a:solidFill>
-                        </a:rPr>
-                        <a:t>最終 TNR</a:t>
-                      </a:r>
-                      <a:endParaRPr lang="en-US" sz="1300" dirty="0"/>
-                    </a:p>
-                  </a:txBody>
-                  <a:tcPr marL="101600" marR="101600" marT="50800" marB="50800" anchor="ctr">
-                    <a:lnL w="9525" cap="flat" cmpd="sng" algn="ctr">
-                      <a:solidFill>
-                        <a:srgbClr val="3A352C"/>
-                      </a:solidFill>
-                      <a:prstDash val="solid"/>
-                      <a:round/>
-                      <a:headEnd type="none" w="med" len="med"/>
-                      <a:tailEnd type="none" w="med" len="med"/>
-                    </a:lnL>
-                    <a:lnR w="9525" cap="flat" cmpd="sng" algn="ctr">
-                      <a:solidFill>
-                        <a:srgbClr val="3A352C"/>
-                      </a:solidFill>
-                      <a:prstDash val="solid"/>
-                      <a:round/>
-                      <a:headEnd type="none" w="med" len="med"/>
-                      <a:tailEnd type="none" w="med" len="med"/>
-                    </a:lnR>
-                    <a:lnT w="9525" cap="flat" cmpd="sng" algn="ctr">
-                      <a:solidFill>
-                        <a:srgbClr val="3A352C"/>
-                      </a:solidFill>
-                      <a:prstDash val="solid"/>
-                      <a:round/>
-                      <a:headEnd type="none" w="med" len="med"/>
-                      <a:tailEnd type="none" w="med" len="med"/>
-                    </a:lnT>
-                    <a:lnB w="9525" cap="flat" cmpd="sng" algn="ctr">
-                      <a:solidFill>
-                        <a:srgbClr val="3A352C"/>
-                      </a:solidFill>
-                      <a:prstDash val="solid"/>
-                      <a:round/>
-                      <a:headEnd type="none" w="med" len="med"/>
-                      <a:tailEnd type="none" w="med" len="med"/>
-                    </a:lnB>
-                    <a:solidFill>
-                      <a:schemeClr val="bg1"/>
-                    </a:solidFill>
-                  </a:tcPr>
-                </a:tc>
-                <a:tc>
-                  <a:txBody>
-                    <a:bodyPr/>
-                    <a:lstStyle/>
-                    <a:p>
-                      <a:pPr indent="0" marL="0">
-                        <a:buNone/>
-                      </a:pPr>
-                      <a:r>
-                        <a:rPr lang="en-US" sz="1300" b="1" dirty="0">
-                          <a:solidFill>
-                            <a:schemeClr val="tx2"/>
-                          </a:solidFill>
-                        </a:rPr>
-                        <a:t>達成率</a:t>
-                      </a:r>
-                      <a:endParaRPr lang="en-US" sz="1300" dirty="0"/>
-                    </a:p>
-                  </a:txBody>
-                  <a:tcPr marL="101600" marR="101600" marT="50800" marB="50800" anchor="ctr">
-                    <a:lnL w="9525" cap="flat" cmpd="sng" algn="ctr">
-                      <a:solidFill>
-                        <a:srgbClr val="3A352C"/>
-                      </a:solidFill>
-                      <a:prstDash val="solid"/>
-                      <a:round/>
-                      <a:headEnd type="none" w="med" len="med"/>
-                      <a:tailEnd type="none" w="med" len="med"/>
-                    </a:lnL>
-                    <a:lnR w="9525" cap="flat" cmpd="sng" algn="ctr">
-                      <a:solidFill>
-                        <a:srgbClr val="3A352C"/>
-                      </a:solidFill>
-                      <a:prstDash val="solid"/>
-                      <a:round/>
-                      <a:headEnd type="none" w="med" len="med"/>
-                      <a:tailEnd type="none" w="med" len="med"/>
-                    </a:lnR>
-                    <a:lnT w="9525" cap="flat" cmpd="sng" algn="ctr">
-                      <a:solidFill>
-                        <a:srgbClr val="3A352C"/>
-                      </a:solidFill>
-                      <a:prstDash val="solid"/>
-                      <a:round/>
-                      <a:headEnd type="none" w="med" len="med"/>
-                      <a:tailEnd type="none" w="med" len="med"/>
-                    </a:lnT>
-                    <a:lnB w="9525" cap="flat" cmpd="sng" algn="ctr">
-                      <a:solidFill>
-                        <a:srgbClr val="3A352C"/>
-                      </a:solidFill>
-                      <a:prstDash val="solid"/>
-                      <a:round/>
-                      <a:headEnd type="none" w="med" len="med"/>
-                      <a:tailEnd type="none" w="med" len="med"/>
-                    </a:lnB>
-                    <a:solidFill>
-                      <a:schemeClr val="bg1"/>
-                    </a:solidFill>
-                  </a:tcPr>
-                </a:tc>
-                <a:tc>
-                  <a:txBody>
-                    <a:bodyPr/>
-                    <a:lstStyle/>
-                    <a:p>
-                      <a:pPr indent="0" marL="0">
-                        <a:buNone/>
-                      </a:pPr>
-                      <a:r>
-                        <a:rPr lang="en-US" sz="1300" b="1" dirty="0">
-                          <a:solidFill>
-                            <a:schemeClr val="tx2"/>
-                          </a:solidFill>
-                        </a:rPr>
-                        <a:t>輪數</a:t>
-                      </a:r>
-                      <a:endParaRPr lang="en-US" sz="1300" dirty="0"/>
-                    </a:p>
-                  </a:txBody>
-                  <a:tcPr marL="101600" marR="101600" marT="50800" marB="50800" anchor="ctr">
-                    <a:lnL w="9525" cap="flat" cmpd="sng" algn="ctr">
-                      <a:solidFill>
-                        <a:srgbClr val="3A352C"/>
-                      </a:solidFill>
-                      <a:prstDash val="solid"/>
-                      <a:round/>
-                      <a:headEnd type="none" w="med" len="med"/>
-                      <a:tailEnd type="none" w="med" len="med"/>
-                    </a:lnL>
-                    <a:lnR w="9525" cap="flat" cmpd="sng" algn="ctr">
-                      <a:solidFill>
-                        <a:srgbClr val="3A352C"/>
-                      </a:solidFill>
-                      <a:prstDash val="solid"/>
-                      <a:round/>
-                      <a:headEnd type="none" w="med" len="med"/>
-                      <a:tailEnd type="none" w="med" len="med"/>
-                    </a:lnR>
-                    <a:lnT w="9525" cap="flat" cmpd="sng" algn="ctr">
-                      <a:solidFill>
-                        <a:srgbClr val="3A352C"/>
-                      </a:solidFill>
-                      <a:prstDash val="solid"/>
-                      <a:round/>
-                      <a:headEnd type="none" w="med" len="med"/>
-                      <a:tailEnd type="none" w="med" len="med"/>
-                    </a:lnT>
-                    <a:lnB w="9525" cap="flat" cmpd="sng" algn="ctr">
-                      <a:solidFill>
-                        <a:srgbClr val="3A352C"/>
-                      </a:solidFill>
-                      <a:prstDash val="solid"/>
-                      <a:round/>
-                      <a:headEnd type="none" w="med" len="med"/>
-                      <a:tailEnd type="none" w="med" len="med"/>
-                    </a:lnB>
-                    <a:solidFill>
-                      <a:schemeClr val="bg1"/>
-                    </a:solidFill>
-                  </a:tcPr>
-                </a:tc>
-                <a:tc>
-                  <a:txBody>
-                    <a:bodyPr/>
-                    <a:lstStyle/>
-                    <a:p>
-                      <a:pPr indent="0" marL="0">
-                        <a:buNone/>
-                      </a:pPr>
-                      <a:r>
-                        <a:rPr lang="en-US" sz="1300" b="1" dirty="0">
-                          <a:solidFill>
-                            <a:schemeClr val="tx2"/>
-                          </a:solidFill>
-                        </a:rPr>
-                        <a:t>驗收組</a:t>
-                      </a:r>
-                      <a:endParaRPr lang="en-US" sz="1300" dirty="0"/>
-                    </a:p>
-                  </a:txBody>
-                  <a:tcPr marL="101600" marR="101600" marT="50800" marB="50800" anchor="ctr">
-                    <a:lnL w="9525" cap="flat" cmpd="sng" algn="ctr">
-                      <a:solidFill>
-                        <a:srgbClr val="3A352C"/>
-                      </a:solidFill>
-                      <a:prstDash val="solid"/>
-                      <a:round/>
-                      <a:headEnd type="none" w="med" len="med"/>
-                      <a:tailEnd type="none" w="med" len="med"/>
-                    </a:lnL>
-                    <a:lnR w="9525" cap="flat" cmpd="sng" algn="ctr">
-                      <a:solidFill>
-                        <a:srgbClr val="3A352C"/>
-                      </a:solidFill>
-                      <a:prstDash val="solid"/>
-                      <a:round/>
-                      <a:headEnd type="none" w="med" len="med"/>
-                      <a:tailEnd type="none" w="med" len="med"/>
-                    </a:lnR>
-                    <a:lnT w="9525" cap="flat" cmpd="sng" algn="ctr">
-                      <a:solidFill>
-                        <a:srgbClr val="3A352C"/>
-                      </a:solidFill>
-                      <a:prstDash val="solid"/>
-                      <a:round/>
-                      <a:headEnd type="none" w="med" len="med"/>
-                      <a:tailEnd type="none" w="med" len="med"/>
-                    </a:lnT>
-                    <a:lnB w="9525" cap="flat" cmpd="sng" algn="ctr">
-                      <a:solidFill>
-                        <a:srgbClr val="3A352C"/>
-                      </a:solidFill>
-                      <a:prstDash val="solid"/>
-                      <a:round/>
-                      <a:headEnd type="none" w="med" len="med"/>
-                      <a:tailEnd type="none" w="med" len="med"/>
-                    </a:lnB>
-                    <a:solidFill>
-                      <a:schemeClr val="bg1"/>
-                    </a:solidFill>
-                  </a:tcPr>
-                </a:tc>
-              </a:tr>
-              <a:tr h="566928">
-                <a:tc>
-                  <a:txBody>
-                    <a:bodyPr/>
-                    <a:lstStyle/>
-                    <a:p>
-                      <a:pPr indent="0" marL="0">
-                        <a:buNone/>
-                      </a:pPr>
-                      <a:r>
-                        <a:rPr lang="en-US" sz="1500" dirty="0">
-                          <a:solidFill>
-                            <a:schemeClr val="tx1"/>
-                          </a:solidFill>
-                        </a:rPr>
-                        <a:t>最長合法括號（困難）</a:t>
-                      </a:r>
-                      <a:endParaRPr lang="en-US" sz="1500" dirty="0"/>
-                    </a:p>
-                  </a:txBody>
-                  <a:tcPr marL="101600" marR="101600" marT="50800" marB="50800" anchor="ctr">
-                    <a:lnL w="9525" cap="flat" cmpd="sng" algn="ctr">
-                      <a:solidFill>
-                        <a:srgbClr val="3A352C"/>
-                      </a:solidFill>
-                      <a:prstDash val="solid"/>
-                      <a:round/>
-                      <a:headEnd type="none" w="med" len="med"/>
-                      <a:tailEnd type="none" w="med" len="med"/>
-                    </a:lnL>
-                    <a:lnR w="9525" cap="flat" cmpd="sng" algn="ctr">
-                      <a:solidFill>
-                        <a:srgbClr val="3A352C"/>
-                      </a:solidFill>
-                      <a:prstDash val="solid"/>
-                      <a:round/>
-                      <a:headEnd type="none" w="med" len="med"/>
-                      <a:tailEnd type="none" w="med" len="med"/>
-                    </a:lnR>
-                    <a:lnT w="9525" cap="flat" cmpd="sng" algn="ctr">
-                      <a:solidFill>
-                        <a:srgbClr val="3A352C"/>
-                      </a:solidFill>
-                      <a:prstDash val="solid"/>
-                      <a:round/>
-                      <a:headEnd type="none" w="med" len="med"/>
-                      <a:tailEnd type="none" w="med" len="med"/>
-                    </a:lnT>
-                    <a:lnB w="9525" cap="flat" cmpd="sng" algn="ctr">
-                      <a:solidFill>
-                        <a:srgbClr val="3A352C"/>
-                      </a:solidFill>
-                      <a:prstDash val="solid"/>
-                      <a:round/>
-                      <a:headEnd type="none" w="med" len="med"/>
-                      <a:tailEnd type="none" w="med" len="med"/>
-                    </a:lnB>
-                    <a:solidFill>
-                      <a:schemeClr val="bg2"/>
-                    </a:solidFill>
-                  </a:tcPr>
-                </a:tc>
-                <a:tc>
-                  <a:txBody>
-                    <a:bodyPr/>
-                    <a:lstStyle/>
-                    <a:p>
-                      <a:pPr algn="ctr" indent="0" marL="0">
-                        <a:buNone/>
-                      </a:pPr>
-                      <a:r>
-                        <a:rPr lang="en-US" sz="1500" dirty="0">
-                          <a:solidFill>
-                            <a:schemeClr val="tx1"/>
-                          </a:solidFill>
-                          <a:latin typeface="Consolas" pitchFamily="34" charset="0"/>
-                          <a:ea typeface="Consolas" pitchFamily="34" charset="-122"/>
-                          <a:cs typeface="Consolas" pitchFamily="34" charset="-120"/>
-                        </a:rPr>
-                        <a:t>0.278（3 道）</a:t>
-                      </a:r>
-                      <a:endParaRPr lang="en-US" sz="1500" dirty="0">
-                        <a:latin typeface="Consolas" charset="0"/>
-                        <a:ea typeface="Consolas" charset="0"/>
-                        <a:cs typeface="Consolas" charset="0"/>
-                      </a:endParaRPr>
-                    </a:p>
-                  </a:txBody>
-                  <a:tcPr marL="101600" marR="101600" marT="50800" marB="50800" anchor="ctr">
-                    <a:lnL w="9525" cap="flat" cmpd="sng" algn="ctr">
-                      <a:solidFill>
-                        <a:srgbClr val="3A352C"/>
-                      </a:solidFill>
-                      <a:prstDash val="solid"/>
-                      <a:round/>
-                      <a:headEnd type="none" w="med" len="med"/>
-                      <a:tailEnd type="none" w="med" len="med"/>
-                    </a:lnL>
-                    <a:lnR w="9525" cap="flat" cmpd="sng" algn="ctr">
-                      <a:solidFill>
-                        <a:srgbClr val="3A352C"/>
-                      </a:solidFill>
-                      <a:prstDash val="solid"/>
-                      <a:round/>
-                      <a:headEnd type="none" w="med" len="med"/>
-                      <a:tailEnd type="none" w="med" len="med"/>
-                    </a:lnR>
-                    <a:lnT w="9525" cap="flat" cmpd="sng" algn="ctr">
-                      <a:solidFill>
-                        <a:srgbClr val="3A352C"/>
-                      </a:solidFill>
-                      <a:prstDash val="solid"/>
-                      <a:round/>
-                      <a:headEnd type="none" w="med" len="med"/>
-                      <a:tailEnd type="none" w="med" len="med"/>
-                    </a:lnT>
-                    <a:lnB w="9525" cap="flat" cmpd="sng" algn="ctr">
-                      <a:solidFill>
-                        <a:srgbClr val="3A352C"/>
-                      </a:solidFill>
-                      <a:prstDash val="solid"/>
-                      <a:round/>
-                      <a:headEnd type="none" w="med" len="med"/>
-                      <a:tailEnd type="none" w="med" len="med"/>
-                    </a:lnB>
-                    <a:solidFill>
-                      <a:schemeClr val="bg2"/>
-                    </a:solidFill>
-                  </a:tcPr>
-                </a:tc>
-                <a:tc>
-                  <a:txBody>
-                    <a:bodyPr/>
-                    <a:lstStyle/>
-                    <a:p>
-                      <a:pPr algn="ctr" indent="0" marL="0">
-                        <a:buNone/>
-                      </a:pPr>
-                      <a:r>
-                        <a:rPr lang="en-US" sz="1500" dirty="0">
-                          <a:solidFill>
-                            <a:schemeClr val="tx1"/>
-                          </a:solidFill>
-                          <a:latin typeface="Consolas" pitchFamily="34" charset="0"/>
-                          <a:ea typeface="Consolas" pitchFamily="34" charset="-122"/>
-                          <a:cs typeface="Consolas" pitchFamily="34" charset="-120"/>
-                        </a:rPr>
-                        <a:t>0.676（54 道）</a:t>
-                      </a:r>
-                      <a:endParaRPr lang="en-US" sz="1500" dirty="0">
-                        <a:latin typeface="Consolas" charset="0"/>
-                        <a:ea typeface="Consolas" charset="0"/>
-                        <a:cs typeface="Consolas" charset="0"/>
-                      </a:endParaRPr>
-                    </a:p>
-                  </a:txBody>
-                  <a:tcPr marL="101600" marR="101600" marT="50800" marB="50800" anchor="ctr">
-                    <a:lnL w="9525" cap="flat" cmpd="sng" algn="ctr">
-                      <a:solidFill>
-                        <a:srgbClr val="3A352C"/>
-                      </a:solidFill>
-                      <a:prstDash val="solid"/>
-                      <a:round/>
-                      <a:headEnd type="none" w="med" len="med"/>
-                      <a:tailEnd type="none" w="med" len="med"/>
-                    </a:lnL>
-                    <a:lnR w="9525" cap="flat" cmpd="sng" algn="ctr">
-                      <a:solidFill>
-                        <a:srgbClr val="3A352C"/>
-                      </a:solidFill>
-                      <a:prstDash val="solid"/>
-                      <a:round/>
-                      <a:headEnd type="none" w="med" len="med"/>
-                      <a:tailEnd type="none" w="med" len="med"/>
-                    </a:lnR>
-                    <a:lnT w="9525" cap="flat" cmpd="sng" algn="ctr">
-                      <a:solidFill>
-                        <a:srgbClr val="3A352C"/>
-                      </a:solidFill>
-                      <a:prstDash val="solid"/>
-                      <a:round/>
-                      <a:headEnd type="none" w="med" len="med"/>
-                      <a:tailEnd type="none" w="med" len="med"/>
-                    </a:lnT>
-                    <a:lnB w="9525" cap="flat" cmpd="sng" algn="ctr">
-                      <a:solidFill>
-                        <a:srgbClr val="3A352C"/>
-                      </a:solidFill>
-                      <a:prstDash val="solid"/>
-                      <a:round/>
-                      <a:headEnd type="none" w="med" len="med"/>
-                      <a:tailEnd type="none" w="med" len="med"/>
-                    </a:lnB>
-                    <a:solidFill>
-                      <a:schemeClr val="bg2"/>
-                    </a:solidFill>
-                  </a:tcPr>
-                </a:tc>
-                <a:tc>
-                  <a:txBody>
-                    <a:bodyPr/>
-                    <a:lstStyle/>
-                    <a:p>
-                      <a:pPr algn="ctr" indent="0" marL="0">
-                        <a:buNone/>
-                      </a:pPr>
-                      <a:r>
-                        <a:rPr lang="en-US" sz="1500" dirty="0">
-                          <a:solidFill>
-                            <a:schemeClr val="tx1"/>
-                          </a:solidFill>
-                          <a:latin typeface="Consolas" pitchFamily="34" charset="0"/>
-                          <a:ea typeface="Consolas" pitchFamily="34" charset="-122"/>
-                          <a:cs typeface="Consolas" pitchFamily="34" charset="-120"/>
-                        </a:rPr>
-                        <a:t>0.68</a:t>
-                      </a:r>
-                      <a:endParaRPr lang="en-US" sz="1500" dirty="0">
-                        <a:latin typeface="Consolas" charset="0"/>
-                        <a:ea typeface="Consolas" charset="0"/>
-                        <a:cs typeface="Consolas" charset="0"/>
-                      </a:endParaRPr>
-                    </a:p>
-                  </a:txBody>
-                  <a:tcPr marL="101600" marR="101600" marT="50800" marB="50800" anchor="ctr">
-                    <a:lnL w="9525" cap="flat" cmpd="sng" algn="ctr">
-                      <a:solidFill>
-                        <a:srgbClr val="3A352C"/>
-                      </a:solidFill>
-                      <a:prstDash val="solid"/>
-                      <a:round/>
-                      <a:headEnd type="none" w="med" len="med"/>
-                      <a:tailEnd type="none" w="med" len="med"/>
-                    </a:lnL>
-                    <a:lnR w="9525" cap="flat" cmpd="sng" algn="ctr">
-                      <a:solidFill>
-                        <a:srgbClr val="3A352C"/>
-                      </a:solidFill>
-                      <a:prstDash val="solid"/>
-                      <a:round/>
-                      <a:headEnd type="none" w="med" len="med"/>
-                      <a:tailEnd type="none" w="med" len="med"/>
-                    </a:lnR>
-                    <a:lnT w="9525" cap="flat" cmpd="sng" algn="ctr">
-                      <a:solidFill>
-                        <a:srgbClr val="3A352C"/>
-                      </a:solidFill>
-                      <a:prstDash val="solid"/>
-                      <a:round/>
-                      <a:headEnd type="none" w="med" len="med"/>
-                      <a:tailEnd type="none" w="med" len="med"/>
-                    </a:lnT>
-                    <a:lnB w="9525" cap="flat" cmpd="sng" algn="ctr">
-                      <a:solidFill>
-                        <a:srgbClr val="3A352C"/>
-                      </a:solidFill>
-                      <a:prstDash val="solid"/>
-                      <a:round/>
-                      <a:headEnd type="none" w="med" len="med"/>
-                      <a:tailEnd type="none" w="med" len="med"/>
-                    </a:lnB>
-                    <a:solidFill>
-                      <a:schemeClr val="bg2"/>
-                    </a:solidFill>
-                  </a:tcPr>
-                </a:tc>
-                <a:tc>
-                  <a:txBody>
-                    <a:bodyPr/>
-                    <a:lstStyle/>
-                    <a:p>
-                      <a:pPr algn="ctr" indent="0" marL="0">
-                        <a:buNone/>
-                      </a:pPr>
-                      <a:r>
-                        <a:rPr lang="en-US" sz="1500" dirty="0">
-                          <a:solidFill>
-                            <a:schemeClr val="tx1"/>
-                          </a:solidFill>
-                          <a:latin typeface="Consolas" pitchFamily="34" charset="0"/>
-                          <a:ea typeface="Consolas" pitchFamily="34" charset="-122"/>
-                          <a:cs typeface="Consolas" pitchFamily="34" charset="-120"/>
-                        </a:rPr>
-                        <a:t>5</a:t>
-                      </a:r>
-                      <a:endParaRPr lang="en-US" sz="1500" dirty="0">
-                        <a:latin typeface="Consolas" charset="0"/>
-                        <a:ea typeface="Consolas" charset="0"/>
-                        <a:cs typeface="Consolas" charset="0"/>
-                      </a:endParaRPr>
-                    </a:p>
-                  </a:txBody>
-                  <a:tcPr marL="101600" marR="101600" marT="50800" marB="50800" anchor="ctr">
-                    <a:lnL w="9525" cap="flat" cmpd="sng" algn="ctr">
-                      <a:solidFill>
-                        <a:srgbClr val="3A352C"/>
-                      </a:solidFill>
-                      <a:prstDash val="solid"/>
-                      <a:round/>
-                      <a:headEnd type="none" w="med" len="med"/>
-                      <a:tailEnd type="none" w="med" len="med"/>
-                    </a:lnL>
-                    <a:lnR w="9525" cap="flat" cmpd="sng" algn="ctr">
-                      <a:solidFill>
-                        <a:srgbClr val="3A352C"/>
-                      </a:solidFill>
-                      <a:prstDash val="solid"/>
-                      <a:round/>
-                      <a:headEnd type="none" w="med" len="med"/>
-                      <a:tailEnd type="none" w="med" len="med"/>
-                    </a:lnR>
-                    <a:lnT w="9525" cap="flat" cmpd="sng" algn="ctr">
-                      <a:solidFill>
-                        <a:srgbClr val="3A352C"/>
-                      </a:solidFill>
-                      <a:prstDash val="solid"/>
-                      <a:round/>
-                      <a:headEnd type="none" w="med" len="med"/>
-                      <a:tailEnd type="none" w="med" len="med"/>
-                    </a:lnT>
-                    <a:lnB w="9525" cap="flat" cmpd="sng" algn="ctr">
-                      <a:solidFill>
-                        <a:srgbClr val="3A352C"/>
-                      </a:solidFill>
-                      <a:prstDash val="solid"/>
-                      <a:round/>
-                      <a:headEnd type="none" w="med" len="med"/>
-                      <a:tailEnd type="none" w="med" len="med"/>
-                    </a:lnB>
-                    <a:solidFill>
-                      <a:schemeClr val="bg2"/>
-                    </a:solidFill>
-                  </a:tcPr>
-                </a:tc>
-                <a:tc>
-                  <a:txBody>
-                    <a:bodyPr/>
-                    <a:lstStyle/>
-                    <a:p>
-                      <a:pPr indent="0" marL="0">
-                        <a:buNone/>
-                      </a:pPr>
-                      <a:r>
-                        <a:rPr lang="en-US" sz="1500" dirty="0">
-                          <a:solidFill>
-                            <a:schemeClr val="accent3"/>
-                          </a:solidFill>
-                        </a:rPr>
-                        <a:t>0.537，無漏網</a:t>
-                      </a:r>
-                      <a:endParaRPr lang="en-US" sz="1500" dirty="0"/>
-                    </a:p>
-                  </a:txBody>
-                  <a:tcPr marL="101600" marR="101600" marT="50800" marB="50800" anchor="ctr">
-                    <a:lnL w="9525" cap="flat" cmpd="sng" algn="ctr">
-                      <a:solidFill>
-                        <a:srgbClr val="3A352C"/>
-                      </a:solidFill>
-                      <a:prstDash val="solid"/>
-                      <a:round/>
-                      <a:headEnd type="none" w="med" len="med"/>
-                      <a:tailEnd type="none" w="med" len="med"/>
-                    </a:lnL>
-                    <a:lnR w="9525" cap="flat" cmpd="sng" algn="ctr">
-                      <a:solidFill>
-                        <a:srgbClr val="3A352C"/>
-                      </a:solidFill>
-                      <a:prstDash val="solid"/>
-                      <a:round/>
-                      <a:headEnd type="none" w="med" len="med"/>
-                      <a:tailEnd type="none" w="med" len="med"/>
-                    </a:lnR>
-                    <a:lnT w="9525" cap="flat" cmpd="sng" algn="ctr">
-                      <a:solidFill>
-                        <a:srgbClr val="3A352C"/>
-                      </a:solidFill>
-                      <a:prstDash val="solid"/>
-                      <a:round/>
-                      <a:headEnd type="none" w="med" len="med"/>
-                      <a:tailEnd type="none" w="med" len="med"/>
-                    </a:lnT>
-                    <a:lnB w="9525" cap="flat" cmpd="sng" algn="ctr">
-                      <a:solidFill>
-                        <a:srgbClr val="3A352C"/>
-                      </a:solidFill>
-                      <a:prstDash val="solid"/>
-                      <a:round/>
-                      <a:headEnd type="none" w="med" len="med"/>
-                      <a:tailEnd type="none" w="med" len="med"/>
-                    </a:lnB>
-                    <a:solidFill>
-                      <a:schemeClr val="bg2"/>
-                    </a:solidFill>
-                  </a:tcPr>
-                </a:tc>
-              </a:tr>
-              <a:tr h="566928">
-                <a:tc>
-                  <a:txBody>
-                    <a:bodyPr/>
-                    <a:lstStyle/>
-                    <a:p>
-                      <a:pPr indent="0" marL="0">
-                        <a:buNone/>
-                      </a:pPr>
-                      <a:r>
-                        <a:rPr lang="en-US" sz="1500" dirty="0">
-                          <a:solidFill>
-                            <a:schemeClr val="tx1"/>
-                          </a:solidFill>
-                        </a:rPr>
-                        <a:t>買賣股票（簡單）</a:t>
-                      </a:r>
-                      <a:endParaRPr lang="en-US" sz="1500" dirty="0"/>
-                    </a:p>
-                  </a:txBody>
-                  <a:tcPr marL="101600" marR="101600" marT="50800" marB="50800" anchor="ctr">
-                    <a:lnL w="9525" cap="flat" cmpd="sng" algn="ctr">
-                      <a:solidFill>
-                        <a:srgbClr val="3A352C"/>
-                      </a:solidFill>
-                      <a:prstDash val="solid"/>
-                      <a:round/>
-                      <a:headEnd type="none" w="med" len="med"/>
-                      <a:tailEnd type="none" w="med" len="med"/>
-                    </a:lnL>
-                    <a:lnR w="9525" cap="flat" cmpd="sng" algn="ctr">
-                      <a:solidFill>
-                        <a:srgbClr val="3A352C"/>
-                      </a:solidFill>
-                      <a:prstDash val="solid"/>
-                      <a:round/>
-                      <a:headEnd type="none" w="med" len="med"/>
-                      <a:tailEnd type="none" w="med" len="med"/>
-                    </a:lnR>
-                    <a:lnT w="9525" cap="flat" cmpd="sng" algn="ctr">
-                      <a:solidFill>
-                        <a:srgbClr val="3A352C"/>
-                      </a:solidFill>
-                      <a:prstDash val="solid"/>
-                      <a:round/>
-                      <a:headEnd type="none" w="med" len="med"/>
-                      <a:tailEnd type="none" w="med" len="med"/>
-                    </a:lnT>
-                    <a:lnB w="9525" cap="flat" cmpd="sng" algn="ctr">
-                      <a:solidFill>
-                        <a:srgbClr val="3A352C"/>
-                      </a:solidFill>
-                      <a:prstDash val="solid"/>
-                      <a:round/>
-                      <a:headEnd type="none" w="med" len="med"/>
-                      <a:tailEnd type="none" w="med" len="med"/>
-                    </a:lnB>
-                    <a:solidFill>
-                      <a:schemeClr val="bg2"/>
-                    </a:solidFill>
-                  </a:tcPr>
-                </a:tc>
-                <a:tc>
-                  <a:txBody>
-                    <a:bodyPr/>
-                    <a:lstStyle/>
-                    <a:p>
-                      <a:pPr algn="ctr" indent="0" marL="0">
-                        <a:buNone/>
-                      </a:pPr>
-                      <a:r>
-                        <a:rPr lang="en-US" sz="1500" dirty="0">
-                          <a:solidFill>
-                            <a:schemeClr val="tx1"/>
-                          </a:solidFill>
-                          <a:latin typeface="Consolas" pitchFamily="34" charset="0"/>
-                          <a:ea typeface="Consolas" pitchFamily="34" charset="-122"/>
-                          <a:cs typeface="Consolas" pitchFamily="34" charset="-120"/>
-                        </a:rPr>
-                        <a:t>0.500（2 道）</a:t>
-                      </a:r>
-                      <a:endParaRPr lang="en-US" sz="1500" dirty="0">
-                        <a:latin typeface="Consolas" charset="0"/>
-                        <a:ea typeface="Consolas" charset="0"/>
-                        <a:cs typeface="Consolas" charset="0"/>
-                      </a:endParaRPr>
-                    </a:p>
-                  </a:txBody>
-                  <a:tcPr marL="101600" marR="101600" marT="50800" marB="50800" anchor="ctr">
-                    <a:lnL w="9525" cap="flat" cmpd="sng" algn="ctr">
-                      <a:solidFill>
-                        <a:srgbClr val="3A352C"/>
-                      </a:solidFill>
-                      <a:prstDash val="solid"/>
-                      <a:round/>
-                      <a:headEnd type="none" w="med" len="med"/>
-                      <a:tailEnd type="none" w="med" len="med"/>
-                    </a:lnL>
-                    <a:lnR w="9525" cap="flat" cmpd="sng" algn="ctr">
-                      <a:solidFill>
-                        <a:srgbClr val="3A352C"/>
-                      </a:solidFill>
-                      <a:prstDash val="solid"/>
-                      <a:round/>
-                      <a:headEnd type="none" w="med" len="med"/>
-                      <a:tailEnd type="none" w="med" len="med"/>
-                    </a:lnR>
-                    <a:lnT w="9525" cap="flat" cmpd="sng" algn="ctr">
-                      <a:solidFill>
-                        <a:srgbClr val="3A352C"/>
-                      </a:solidFill>
-                      <a:prstDash val="solid"/>
-                      <a:round/>
-                      <a:headEnd type="none" w="med" len="med"/>
-                      <a:tailEnd type="none" w="med" len="med"/>
-                    </a:lnT>
-                    <a:lnB w="9525" cap="flat" cmpd="sng" algn="ctr">
-                      <a:solidFill>
-                        <a:srgbClr val="3A352C"/>
-                      </a:solidFill>
-                      <a:prstDash val="solid"/>
-                      <a:round/>
-                      <a:headEnd type="none" w="med" len="med"/>
-                      <a:tailEnd type="none" w="med" len="med"/>
-                    </a:lnB>
-                    <a:solidFill>
-                      <a:schemeClr val="bg2"/>
-                    </a:solidFill>
-                  </a:tcPr>
-                </a:tc>
-                <a:tc>
-                  <a:txBody>
-                    <a:bodyPr/>
-                    <a:lstStyle/>
-                    <a:p>
-                      <a:pPr algn="ctr" indent="0" marL="0">
-                        <a:buNone/>
-                      </a:pPr>
-                      <a:r>
-                        <a:rPr lang="en-US" sz="1500" dirty="0">
-                          <a:solidFill>
-                            <a:schemeClr val="tx1"/>
-                          </a:solidFill>
-                          <a:latin typeface="Consolas" pitchFamily="34" charset="0"/>
-                          <a:ea typeface="Consolas" pitchFamily="34" charset="-122"/>
-                          <a:cs typeface="Consolas" pitchFamily="34" charset="-120"/>
-                        </a:rPr>
-                        <a:t>0.583（4 道）</a:t>
-                      </a:r>
-                      <a:endParaRPr lang="en-US" sz="1500" dirty="0">
-                        <a:latin typeface="Consolas" charset="0"/>
-                        <a:ea typeface="Consolas" charset="0"/>
-                        <a:cs typeface="Consolas" charset="0"/>
-                      </a:endParaRPr>
-                    </a:p>
-                  </a:txBody>
-                  <a:tcPr marL="101600" marR="101600" marT="50800" marB="50800" anchor="ctr">
-                    <a:lnL w="9525" cap="flat" cmpd="sng" algn="ctr">
-                      <a:solidFill>
-                        <a:srgbClr val="3A352C"/>
-                      </a:solidFill>
-                      <a:prstDash val="solid"/>
-                      <a:round/>
-                      <a:headEnd type="none" w="med" len="med"/>
-                      <a:tailEnd type="none" w="med" len="med"/>
-                    </a:lnL>
-                    <a:lnR w="9525" cap="flat" cmpd="sng" algn="ctr">
-                      <a:solidFill>
-                        <a:srgbClr val="3A352C"/>
-                      </a:solidFill>
-                      <a:prstDash val="solid"/>
-                      <a:round/>
-                      <a:headEnd type="none" w="med" len="med"/>
-                      <a:tailEnd type="none" w="med" len="med"/>
-                    </a:lnR>
-                    <a:lnT w="9525" cap="flat" cmpd="sng" algn="ctr">
-                      <a:solidFill>
-                        <a:srgbClr val="3A352C"/>
-                      </a:solidFill>
-                      <a:prstDash val="solid"/>
-                      <a:round/>
-                      <a:headEnd type="none" w="med" len="med"/>
-                      <a:tailEnd type="none" w="med" len="med"/>
-                    </a:lnT>
-                    <a:lnB w="9525" cap="flat" cmpd="sng" algn="ctr">
-                      <a:solidFill>
-                        <a:srgbClr val="3A352C"/>
-                      </a:solidFill>
-                      <a:prstDash val="solid"/>
-                      <a:round/>
-                      <a:headEnd type="none" w="med" len="med"/>
-                      <a:tailEnd type="none" w="med" len="med"/>
-                    </a:lnB>
-                    <a:solidFill>
-                      <a:schemeClr val="bg2"/>
-                    </a:solidFill>
-                  </a:tcPr>
-                </a:tc>
-                <a:tc>
-                  <a:txBody>
-                    <a:bodyPr/>
-                    <a:lstStyle/>
-                    <a:p>
-                      <a:pPr algn="ctr" indent="0" marL="0">
-                        <a:buNone/>
-                      </a:pPr>
-                      <a:r>
-                        <a:rPr lang="en-US" sz="1500" dirty="0">
-                          <a:solidFill>
-                            <a:schemeClr val="tx1"/>
-                          </a:solidFill>
-                          <a:latin typeface="Consolas" pitchFamily="34" charset="0"/>
-                          <a:ea typeface="Consolas" pitchFamily="34" charset="-122"/>
-                          <a:cs typeface="Consolas" pitchFamily="34" charset="-120"/>
-                        </a:rPr>
-                        <a:t>0.70</a:t>
-                      </a:r>
-                      <a:endParaRPr lang="en-US" sz="1500" dirty="0">
-                        <a:latin typeface="Consolas" charset="0"/>
-                        <a:ea typeface="Consolas" charset="0"/>
-                        <a:cs typeface="Consolas" charset="0"/>
-                      </a:endParaRPr>
-                    </a:p>
-                  </a:txBody>
-                  <a:tcPr marL="101600" marR="101600" marT="50800" marB="50800" anchor="ctr">
-                    <a:lnL w="9525" cap="flat" cmpd="sng" algn="ctr">
-                      <a:solidFill>
-                        <a:srgbClr val="3A352C"/>
-                      </a:solidFill>
-                      <a:prstDash val="solid"/>
-                      <a:round/>
-                      <a:headEnd type="none" w="med" len="med"/>
-                      <a:tailEnd type="none" w="med" len="med"/>
-                    </a:lnL>
-                    <a:lnR w="9525" cap="flat" cmpd="sng" algn="ctr">
-                      <a:solidFill>
-                        <a:srgbClr val="3A352C"/>
-                      </a:solidFill>
-                      <a:prstDash val="solid"/>
-                      <a:round/>
-                      <a:headEnd type="none" w="med" len="med"/>
-                      <a:tailEnd type="none" w="med" len="med"/>
-                    </a:lnR>
-                    <a:lnT w="9525" cap="flat" cmpd="sng" algn="ctr">
-                      <a:solidFill>
-                        <a:srgbClr val="3A352C"/>
-                      </a:solidFill>
-                      <a:prstDash val="solid"/>
-                      <a:round/>
-                      <a:headEnd type="none" w="med" len="med"/>
-                      <a:tailEnd type="none" w="med" len="med"/>
-                    </a:lnT>
-                    <a:lnB w="9525" cap="flat" cmpd="sng" algn="ctr">
-                      <a:solidFill>
-                        <a:srgbClr val="3A352C"/>
-                      </a:solidFill>
-                      <a:prstDash val="solid"/>
-                      <a:round/>
-                      <a:headEnd type="none" w="med" len="med"/>
-                      <a:tailEnd type="none" w="med" len="med"/>
-                    </a:lnB>
-                    <a:solidFill>
-                      <a:schemeClr val="bg2"/>
-                    </a:solidFill>
-                  </a:tcPr>
-                </a:tc>
-                <a:tc>
-                  <a:txBody>
-                    <a:bodyPr/>
-                    <a:lstStyle/>
-                    <a:p>
-                      <a:pPr algn="ctr" indent="0" marL="0">
-                        <a:buNone/>
-                      </a:pPr>
-                      <a:r>
-                        <a:rPr lang="en-US" sz="1500" dirty="0">
-                          <a:solidFill>
-                            <a:schemeClr val="tx1"/>
-                          </a:solidFill>
-                          <a:latin typeface="Consolas" pitchFamily="34" charset="0"/>
-                          <a:ea typeface="Consolas" pitchFamily="34" charset="-122"/>
-                          <a:cs typeface="Consolas" pitchFamily="34" charset="-120"/>
-                        </a:rPr>
-                        <a:t>3（停滯）</a:t>
-                      </a:r>
-                      <a:endParaRPr lang="en-US" sz="1500" dirty="0">
-                        <a:latin typeface="Consolas" charset="0"/>
-                        <a:ea typeface="Consolas" charset="0"/>
-                        <a:cs typeface="Consolas" charset="0"/>
-                      </a:endParaRPr>
-                    </a:p>
-                  </a:txBody>
-                  <a:tcPr marL="101600" marR="101600" marT="50800" marB="50800" anchor="ctr">
-                    <a:lnL w="9525" cap="flat" cmpd="sng" algn="ctr">
-                      <a:solidFill>
-                        <a:srgbClr val="3A352C"/>
-                      </a:solidFill>
-                      <a:prstDash val="solid"/>
-                      <a:round/>
-                      <a:headEnd type="none" w="med" len="med"/>
-                      <a:tailEnd type="none" w="med" len="med"/>
-                    </a:lnL>
-                    <a:lnR w="9525" cap="flat" cmpd="sng" algn="ctr">
-                      <a:solidFill>
-                        <a:srgbClr val="3A352C"/>
-                      </a:solidFill>
-                      <a:prstDash val="solid"/>
-                      <a:round/>
-                      <a:headEnd type="none" w="med" len="med"/>
-                      <a:tailEnd type="none" w="med" len="med"/>
-                    </a:lnR>
-                    <a:lnT w="9525" cap="flat" cmpd="sng" algn="ctr">
-                      <a:solidFill>
-                        <a:srgbClr val="3A352C"/>
-                      </a:solidFill>
-                      <a:prstDash val="solid"/>
-                      <a:round/>
-                      <a:headEnd type="none" w="med" len="med"/>
-                      <a:tailEnd type="none" w="med" len="med"/>
-                    </a:lnT>
-                    <a:lnB w="9525" cap="flat" cmpd="sng" algn="ctr">
-                      <a:solidFill>
-                        <a:srgbClr val="3A352C"/>
-                      </a:solidFill>
-                      <a:prstDash val="solid"/>
-                      <a:round/>
-                      <a:headEnd type="none" w="med" len="med"/>
-                      <a:tailEnd type="none" w="med" len="med"/>
-                    </a:lnB>
-                    <a:solidFill>
-                      <a:schemeClr val="bg2"/>
-                    </a:solidFill>
-                  </a:tcPr>
-                </a:tc>
-                <a:tc>
-                  <a:txBody>
-                    <a:bodyPr/>
-                    <a:lstStyle/>
-                    <a:p>
-                      <a:pPr indent="0" marL="0">
-                        <a:buNone/>
-                      </a:pPr>
-                      <a:r>
-                        <a:rPr lang="en-US" sz="1500" dirty="0">
-                          <a:solidFill>
-                            <a:schemeClr val="accent2"/>
-                          </a:solidFill>
-                        </a:rPr>
-                        <a:t>0.417，漏 1 種</a:t>
-                      </a:r>
-                      <a:endParaRPr lang="en-US" sz="1500" dirty="0"/>
-                    </a:p>
-                  </a:txBody>
-                  <a:tcPr marL="101600" marR="101600" marT="50800" marB="50800" anchor="ctr">
-                    <a:lnL w="9525" cap="flat" cmpd="sng" algn="ctr">
-                      <a:solidFill>
-                        <a:srgbClr val="3A352C"/>
-                      </a:solidFill>
-                      <a:prstDash val="solid"/>
-                      <a:round/>
-                      <a:headEnd type="none" w="med" len="med"/>
-                      <a:tailEnd type="none" w="med" len="med"/>
-                    </a:lnL>
-                    <a:lnR w="9525" cap="flat" cmpd="sng" algn="ctr">
-                      <a:solidFill>
-                        <a:srgbClr val="3A352C"/>
-                      </a:solidFill>
-                      <a:prstDash val="solid"/>
-                      <a:round/>
-                      <a:headEnd type="none" w="med" len="med"/>
-                      <a:tailEnd type="none" w="med" len="med"/>
-                    </a:lnR>
-                    <a:lnT w="9525" cap="flat" cmpd="sng" algn="ctr">
-                      <a:solidFill>
-                        <a:srgbClr val="3A352C"/>
-                      </a:solidFill>
-                      <a:prstDash val="solid"/>
-                      <a:round/>
-                      <a:headEnd type="none" w="med" len="med"/>
-                      <a:tailEnd type="none" w="med" len="med"/>
-                    </a:lnT>
-                    <a:lnB w="9525" cap="flat" cmpd="sng" algn="ctr">
-                      <a:solidFill>
-                        <a:srgbClr val="3A352C"/>
-                      </a:solidFill>
-                      <a:prstDash val="solid"/>
-                      <a:round/>
-                      <a:headEnd type="none" w="med" len="med"/>
-                      <a:tailEnd type="none" w="med" len="med"/>
-                    </a:lnB>
-                    <a:solidFill>
-                      <a:schemeClr val="bg2"/>
-                    </a:solidFill>
-                  </a:tcPr>
-                </a:tc>
-              </a:tr>
-              <a:tr h="566928">
-                <a:tc>
-                  <a:txBody>
-                    <a:bodyPr/>
-                    <a:lstStyle/>
-                    <a:p>
-                      <a:pPr indent="0" marL="0">
-                        <a:buNone/>
-                      </a:pPr>
-                      <a:r>
-                        <a:rPr lang="en-US" sz="1500" dirty="0">
-                          <a:solidFill>
-                            <a:schemeClr val="tx2"/>
-                          </a:solidFill>
-                        </a:rPr>
-                        <a:t>最長不重複子字串（中等）</a:t>
-                      </a:r>
-                      <a:endParaRPr lang="en-US" sz="1500" dirty="0"/>
-                    </a:p>
-                  </a:txBody>
-                  <a:tcPr marL="101600" marR="101600" marT="50800" marB="50800" anchor="ctr">
-                    <a:lnL w="9525" cap="flat" cmpd="sng" algn="ctr">
-                      <a:solidFill>
-                        <a:srgbClr val="3A352C"/>
-                      </a:solidFill>
-                      <a:prstDash val="solid"/>
-                      <a:round/>
-                      <a:headEnd type="none" w="med" len="med"/>
-                      <a:tailEnd type="none" w="med" len="med"/>
-                    </a:lnL>
-                    <a:lnR w="9525" cap="flat" cmpd="sng" algn="ctr">
-                      <a:solidFill>
-                        <a:srgbClr val="3A352C"/>
-                      </a:solidFill>
-                      <a:prstDash val="solid"/>
-                      <a:round/>
-                      <a:headEnd type="none" w="med" len="med"/>
-                      <a:tailEnd type="none" w="med" len="med"/>
-                    </a:lnR>
-                    <a:lnT w="9525" cap="flat" cmpd="sng" algn="ctr">
-                      <a:solidFill>
-                        <a:srgbClr val="3A352C"/>
-                      </a:solidFill>
-                      <a:prstDash val="solid"/>
-                      <a:round/>
-                      <a:headEnd type="none" w="med" len="med"/>
-                      <a:tailEnd type="none" w="med" len="med"/>
-                    </a:lnT>
-                    <a:lnB w="9525" cap="flat" cmpd="sng" algn="ctr">
-                      <a:solidFill>
-                        <a:srgbClr val="3A352C"/>
-                      </a:solidFill>
-                      <a:prstDash val="solid"/>
-                      <a:round/>
-                      <a:headEnd type="none" w="med" len="med"/>
-                      <a:tailEnd type="none" w="med" len="med"/>
-                    </a:lnB>
-                    <a:solidFill>
-                      <a:schemeClr val="bg2"/>
-                    </a:solidFill>
-                  </a:tcPr>
-                </a:tc>
-                <a:tc>
-                  <a:txBody>
-                    <a:bodyPr/>
-                    <a:lstStyle/>
-                    <a:p>
-                      <a:pPr algn="ctr" indent="0" marL="0">
-                        <a:buNone/>
-                      </a:pPr>
-                      <a:r>
-                        <a:rPr lang="en-US" sz="1500" dirty="0">
-                          <a:solidFill>
-                            <a:schemeClr val="tx2"/>
-                          </a:solidFill>
-                          <a:latin typeface="Consolas" pitchFamily="34" charset="0"/>
-                          <a:ea typeface="Consolas" pitchFamily="34" charset="-122"/>
-                          <a:cs typeface="Consolas" pitchFamily="34" charset="-120"/>
-                        </a:rPr>
-                        <a:t>人工 4 輪：0.882</a:t>
-                      </a:r>
-                      <a:endParaRPr lang="en-US" sz="1500" dirty="0">
-                        <a:latin typeface="Consolas" charset="0"/>
-                        <a:ea typeface="Consolas" charset="0"/>
-                        <a:cs typeface="Consolas" charset="0"/>
-                      </a:endParaRPr>
-                    </a:p>
-                  </a:txBody>
-                  <a:tcPr marL="101600" marR="101600" marT="50800" marB="50800" anchor="ctr">
-                    <a:lnL w="9525" cap="flat" cmpd="sng" algn="ctr">
-                      <a:solidFill>
-                        <a:srgbClr val="3A352C"/>
-                      </a:solidFill>
-                      <a:prstDash val="solid"/>
-                      <a:round/>
-                      <a:headEnd type="none" w="med" len="med"/>
-                      <a:tailEnd type="none" w="med" len="med"/>
-                    </a:lnL>
-                    <a:lnR w="9525" cap="flat" cmpd="sng" algn="ctr">
-                      <a:solidFill>
-                        <a:srgbClr val="3A352C"/>
-                      </a:solidFill>
-                      <a:prstDash val="solid"/>
-                      <a:round/>
-                      <a:headEnd type="none" w="med" len="med"/>
-                      <a:tailEnd type="none" w="med" len="med"/>
-                    </a:lnR>
-                    <a:lnT w="9525" cap="flat" cmpd="sng" algn="ctr">
-                      <a:solidFill>
-                        <a:srgbClr val="3A352C"/>
-                      </a:solidFill>
-                      <a:prstDash val="solid"/>
-                      <a:round/>
-                      <a:headEnd type="none" w="med" len="med"/>
-                      <a:tailEnd type="none" w="med" len="med"/>
-                    </a:lnT>
-                    <a:lnB w="9525" cap="flat" cmpd="sng" algn="ctr">
-                      <a:solidFill>
-                        <a:srgbClr val="3A352C"/>
-                      </a:solidFill>
-                      <a:prstDash val="solid"/>
-                      <a:round/>
-                      <a:headEnd type="none" w="med" len="med"/>
-                      <a:tailEnd type="none" w="med" len="med"/>
-                    </a:lnB>
-                    <a:solidFill>
-                      <a:schemeClr val="bg2"/>
-                    </a:solidFill>
-                  </a:tcPr>
-                </a:tc>
-                <a:tc>
-                  <a:txBody>
-                    <a:bodyPr/>
-                    <a:lstStyle/>
-                    <a:p>
-                      <a:pPr algn="ctr" indent="0" marL="0">
-                        <a:buNone/>
-                      </a:pPr>
-                      <a:r>
-                        <a:rPr lang="en-US" sz="1500" dirty="0">
-                          <a:solidFill>
-                            <a:schemeClr val="tx1"/>
-                          </a:solidFill>
-                          <a:latin typeface="Consolas" pitchFamily="34" charset="0"/>
-                          <a:ea typeface="Consolas" pitchFamily="34" charset="-122"/>
-                          <a:cs typeface="Consolas" pitchFamily="34" charset="-120"/>
-                        </a:rPr>
-                        <a:t>—</a:t>
-                      </a:r>
-                      <a:endParaRPr lang="en-US" sz="1500" dirty="0">
-                        <a:latin typeface="Consolas" charset="0"/>
-                        <a:ea typeface="Consolas" charset="0"/>
-                        <a:cs typeface="Consolas" charset="0"/>
-                      </a:endParaRPr>
-                    </a:p>
-                  </a:txBody>
-                  <a:tcPr marL="101600" marR="101600" marT="50800" marB="50800" anchor="ctr">
-                    <a:lnL w="9525" cap="flat" cmpd="sng" algn="ctr">
-                      <a:solidFill>
-                        <a:srgbClr val="3A352C"/>
-                      </a:solidFill>
-                      <a:prstDash val="solid"/>
-                      <a:round/>
-                      <a:headEnd type="none" w="med" len="med"/>
-                      <a:tailEnd type="none" w="med" len="med"/>
-                    </a:lnL>
-                    <a:lnR w="9525" cap="flat" cmpd="sng" algn="ctr">
-                      <a:solidFill>
-                        <a:srgbClr val="3A352C"/>
-                      </a:solidFill>
-                      <a:prstDash val="solid"/>
-                      <a:round/>
-                      <a:headEnd type="none" w="med" len="med"/>
-                      <a:tailEnd type="none" w="med" len="med"/>
-                    </a:lnR>
-                    <a:lnT w="9525" cap="flat" cmpd="sng" algn="ctr">
-                      <a:solidFill>
-                        <a:srgbClr val="3A352C"/>
-                      </a:solidFill>
-                      <a:prstDash val="solid"/>
-                      <a:round/>
-                      <a:headEnd type="none" w="med" len="med"/>
-                      <a:tailEnd type="none" w="med" len="med"/>
-                    </a:lnT>
-                    <a:lnB w="9525" cap="flat" cmpd="sng" algn="ctr">
-                      <a:solidFill>
-                        <a:srgbClr val="3A352C"/>
-                      </a:solidFill>
-                      <a:prstDash val="solid"/>
-                      <a:round/>
-                      <a:headEnd type="none" w="med" len="med"/>
-                      <a:tailEnd type="none" w="med" len="med"/>
-                    </a:lnB>
-                    <a:solidFill>
-                      <a:schemeClr val="bg2"/>
-                    </a:solidFill>
-                  </a:tcPr>
-                </a:tc>
-                <a:tc>
-                  <a:txBody>
-                    <a:bodyPr/>
-                    <a:lstStyle/>
-                    <a:p>
-                      <a:pPr algn="ctr" indent="0" marL="0">
-                        <a:buNone/>
-                      </a:pPr>
-                      <a:r>
-                        <a:rPr lang="en-US" sz="1500" dirty="0">
-                          <a:solidFill>
-                            <a:schemeClr val="tx1"/>
-                          </a:solidFill>
-                          <a:latin typeface="Consolas" pitchFamily="34" charset="0"/>
-                          <a:ea typeface="Consolas" pitchFamily="34" charset="-122"/>
-                          <a:cs typeface="Consolas" pitchFamily="34" charset="-120"/>
-                        </a:rPr>
-                        <a:t>—</a:t>
-                      </a:r>
-                      <a:endParaRPr lang="en-US" sz="1500" dirty="0">
-                        <a:latin typeface="Consolas" charset="0"/>
-                        <a:ea typeface="Consolas" charset="0"/>
-                        <a:cs typeface="Consolas" charset="0"/>
-                      </a:endParaRPr>
-                    </a:p>
-                  </a:txBody>
-                  <a:tcPr marL="101600" marR="101600" marT="50800" marB="50800" anchor="ctr">
-                    <a:lnL w="9525" cap="flat" cmpd="sng" algn="ctr">
-                      <a:solidFill>
-                        <a:srgbClr val="3A352C"/>
-                      </a:solidFill>
-                      <a:prstDash val="solid"/>
-                      <a:round/>
-                      <a:headEnd type="none" w="med" len="med"/>
-                      <a:tailEnd type="none" w="med" len="med"/>
-                    </a:lnL>
-                    <a:lnR w="9525" cap="flat" cmpd="sng" algn="ctr">
-                      <a:solidFill>
-                        <a:srgbClr val="3A352C"/>
-                      </a:solidFill>
-                      <a:prstDash val="solid"/>
-                      <a:round/>
-                      <a:headEnd type="none" w="med" len="med"/>
-                      <a:tailEnd type="none" w="med" len="med"/>
-                    </a:lnR>
-                    <a:lnT w="9525" cap="flat" cmpd="sng" algn="ctr">
-                      <a:solidFill>
-                        <a:srgbClr val="3A352C"/>
-                      </a:solidFill>
-                      <a:prstDash val="solid"/>
-                      <a:round/>
-                      <a:headEnd type="none" w="med" len="med"/>
-                      <a:tailEnd type="none" w="med" len="med"/>
-                    </a:lnT>
-                    <a:lnB w="9525" cap="flat" cmpd="sng" algn="ctr">
-                      <a:solidFill>
-                        <a:srgbClr val="3A352C"/>
-                      </a:solidFill>
-                      <a:prstDash val="solid"/>
-                      <a:round/>
-                      <a:headEnd type="none" w="med" len="med"/>
-                      <a:tailEnd type="none" w="med" len="med"/>
-                    </a:lnB>
-                    <a:solidFill>
-                      <a:schemeClr val="bg2"/>
-                    </a:solidFill>
-                  </a:tcPr>
-                </a:tc>
-                <a:tc>
-                  <a:txBody>
-                    <a:bodyPr/>
-                    <a:lstStyle/>
-                    <a:p>
-                      <a:pPr algn="ctr" indent="0" marL="0">
-                        <a:buNone/>
-                      </a:pPr>
-                      <a:r>
-                        <a:rPr lang="en-US" sz="1500" dirty="0">
-                          <a:solidFill>
-                            <a:schemeClr val="tx1"/>
-                          </a:solidFill>
-                          <a:latin typeface="Consolas" pitchFamily="34" charset="0"/>
-                          <a:ea typeface="Consolas" pitchFamily="34" charset="-122"/>
-                          <a:cs typeface="Consolas" pitchFamily="34" charset="-120"/>
-                        </a:rPr>
-                        <a:t>—</a:t>
-                      </a:r>
-                      <a:endParaRPr lang="en-US" sz="1500" dirty="0">
-                        <a:latin typeface="Consolas" charset="0"/>
-                        <a:ea typeface="Consolas" charset="0"/>
-                        <a:cs typeface="Consolas" charset="0"/>
-                      </a:endParaRPr>
-                    </a:p>
-                  </a:txBody>
-                  <a:tcPr marL="101600" marR="101600" marT="50800" marB="50800" anchor="ctr">
-                    <a:lnL w="9525" cap="flat" cmpd="sng" algn="ctr">
-                      <a:solidFill>
-                        <a:srgbClr val="3A352C"/>
-                      </a:solidFill>
-                      <a:prstDash val="solid"/>
-                      <a:round/>
-                      <a:headEnd type="none" w="med" len="med"/>
-                      <a:tailEnd type="none" w="med" len="med"/>
-                    </a:lnL>
-                    <a:lnR w="9525" cap="flat" cmpd="sng" algn="ctr">
-                      <a:solidFill>
-                        <a:srgbClr val="3A352C"/>
-                      </a:solidFill>
-                      <a:prstDash val="solid"/>
-                      <a:round/>
-                      <a:headEnd type="none" w="med" len="med"/>
-                      <a:tailEnd type="none" w="med" len="med"/>
-                    </a:lnR>
-                    <a:lnT w="9525" cap="flat" cmpd="sng" algn="ctr">
-                      <a:solidFill>
-                        <a:srgbClr val="3A352C"/>
-                      </a:solidFill>
-                      <a:prstDash val="solid"/>
-                      <a:round/>
-                      <a:headEnd type="none" w="med" len="med"/>
-                      <a:tailEnd type="none" w="med" len="med"/>
-                    </a:lnT>
-                    <a:lnB w="9525" cap="flat" cmpd="sng" algn="ctr">
-                      <a:solidFill>
-                        <a:srgbClr val="3A352C"/>
-                      </a:solidFill>
-                      <a:prstDash val="solid"/>
-                      <a:round/>
-                      <a:headEnd type="none" w="med" len="med"/>
-                      <a:tailEnd type="none" w="med" len="med"/>
-                    </a:lnB>
-                    <a:solidFill>
-                      <a:schemeClr val="bg2"/>
-                    </a:solidFill>
-                  </a:tcPr>
-                </a:tc>
-                <a:tc>
-                  <a:txBody>
-                    <a:bodyPr/>
-                    <a:lstStyle/>
-                    <a:p>
-                      <a:pPr indent="0" marL="0">
-                        <a:buNone/>
-                      </a:pPr>
-                      <a:r>
-                        <a:rPr lang="en-US" sz="1500" dirty="0">
-                          <a:solidFill>
-                            <a:schemeClr val="tx2"/>
-                          </a:solidFill>
-                          <a:latin typeface="Consolas" pitchFamily="34" charset="0"/>
-                          <a:ea typeface="Consolas" pitchFamily="34" charset="-122"/>
-                          <a:cs typeface="Consolas" pitchFamily="34" charset="-120"/>
-                        </a:rPr>
-                        <a:t>0.471</a:t>
-                      </a:r>
-                      <a:endParaRPr lang="en-US" sz="1500" dirty="0">
-                        <a:latin typeface="Consolas" charset="0"/>
-                        <a:ea typeface="Consolas" charset="0"/>
-                        <a:cs typeface="Consolas" charset="0"/>
-                      </a:endParaRPr>
-                    </a:p>
-                  </a:txBody>
-                  <a:tcPr marL="101600" marR="101600" marT="50800" marB="50800" anchor="ctr">
-                    <a:lnL w="9525" cap="flat" cmpd="sng" algn="ctr">
-                      <a:solidFill>
-                        <a:srgbClr val="3A352C"/>
-                      </a:solidFill>
-                      <a:prstDash val="solid"/>
-                      <a:round/>
-                      <a:headEnd type="none" w="med" len="med"/>
-                      <a:tailEnd type="none" w="med" len="med"/>
-                    </a:lnL>
-                    <a:lnR w="9525" cap="flat" cmpd="sng" algn="ctr">
-                      <a:solidFill>
-                        <a:srgbClr val="3A352C"/>
-                      </a:solidFill>
-                      <a:prstDash val="solid"/>
-                      <a:round/>
-                      <a:headEnd type="none" w="med" len="med"/>
-                      <a:tailEnd type="none" w="med" len="med"/>
-                    </a:lnR>
-                    <a:lnT w="9525" cap="flat" cmpd="sng" algn="ctr">
-                      <a:solidFill>
-                        <a:srgbClr val="3A352C"/>
-                      </a:solidFill>
-                      <a:prstDash val="solid"/>
-                      <a:round/>
-                      <a:headEnd type="none" w="med" len="med"/>
-                      <a:tailEnd type="none" w="med" len="med"/>
-                    </a:lnT>
-                    <a:lnB w="9525" cap="flat" cmpd="sng" algn="ctr">
-                      <a:solidFill>
-                        <a:srgbClr val="3A352C"/>
-                      </a:solidFill>
-                      <a:prstDash val="solid"/>
-                      <a:round/>
-                      <a:headEnd type="none" w="med" len="med"/>
-                      <a:tailEnd type="none" w="med" len="med"/>
-                    </a:lnB>
-                    <a:solidFill>
-                      <a:schemeClr val="bg2"/>
-                    </a:solidFill>
-                  </a:tcPr>
-                </a:tc>
-              </a:tr>
-            </a:tbl>
-          </a:graphicData>
-        </a:graphic>
-      </p:graphicFrame>
-      <p:sp>
-        <p:nvSpPr>
-          <p:cNvPr id="6" name="card-177"/>
+      <p:sp>
+        <p:nvSpPr>
+          <p:cNvPr id="5" name="card-176"/>
           <p:cNvSpPr/>
           <p:nvPr/>
         </p:nvSpPr>
         <p:spPr>
           <a:xfrm>
-            <a:off x="548640" y="4206240"/>
-            <a:ext cx="3520440" cy="1508760"/>
+            <a:off x="548640" y="1645920"/>
+            <a:ext cx="5486400" cy="2103120"/>
           </a:xfrm>
           <a:prstGeom prst="roundRect">
             <a:avLst>
-              <a:gd name="adj" fmla="val 4848"/>
+              <a:gd name="adj" fmla="val 3478"/>
             </a:avLst>
           </a:prstGeom>
           <a:solidFill>
@@ -7145,14 +5280,64 @@
       </p:sp>
       <p:sp>
         <p:nvSpPr>
+          <p:cNvPr id="6" name="text-177"/>
+          <p:cNvSpPr txBox="1"/>
+          <p:nvPr/>
+        </p:nvSpPr>
+        <p:spPr>
+          <a:xfrm>
+            <a:off x="822960" y="1783080"/>
+            <a:ext cx="4937760" cy="365760"/>
+          </a:xfrm>
+          <a:prstGeom prst="rect">
+            <a:avLst/>
+          </a:prstGeom>
+          <a:noFill/>
+          <a:ln/>
+        </p:spPr>
+        <p:txBody>
+          <a:bodyPr wrap="square" lIns="0" tIns="0" rIns="0" bIns="0" rtlCol="0" anchor="t"/>
+          <a:lstStyle/>
+          <a:p>
+            <a:pPr indent="0" marL="0">
+              <a:buNone/>
+            </a:pPr>
+            <a:r>
+              <a:rPr lang="en-US" sz="1400" b="1" dirty="0">
+                <a:solidFill>
+                  <a:schemeClr val="accent1"/>
+                </a:solidFill>
+              </a:rPr>
+              <a:t>論文觀點　</a:t>
+            </a:r>
+            <a:pPr indent="0" marL="0">
+              <a:buNone/>
+            </a:pPr>
+            <a:r>
+              <a:rPr lang="en-US" sz="1400" dirty="0">
+                <a:solidFill>
+                  <a:schemeClr val="accent1"/>
+                </a:solidFill>
+                <a:latin typeface="Consolas" pitchFamily="34" charset="0"/>
+                <a:ea typeface="Consolas" pitchFamily="34" charset="-122"/>
+                <a:cs typeface="Consolas" pitchFamily="34" charset="-120"/>
+              </a:rPr>
+              <a:t>[1]</a:t>
+            </a:r>
+            <a:endParaRPr lang="en-US" sz="1400" dirty="0"/>
+          </a:p>
+        </p:txBody>
+      </p:sp>
+      <p:sp>
+        <p:nvSpPr>
           <p:cNvPr id="7" name="text-178"/>
           <p:cNvSpPr txBox="1"/>
           <p:nvPr/>
         </p:nvSpPr>
         <p:spPr>
           <a:xfrm>
-            <a:off x="822960" y="4343400"/>
-            <a:ext cx="3017520" cy="411480"/>
+            <a:off x="822960" y="2194560"/>
+            <a:ext cx="4937760" cy="1005840"/>
           </a:xfrm>
           <a:prstGeom prst="rect">
             <a:avLst/>
@@ -7168,14 +5353,14 @@
               <a:buNone/>
             </a:pPr>
             <a:r>
-              <a:rPr lang="en-US" sz="1700" b="1" dirty="0">
-                <a:solidFill>
-                  <a:schemeClr val="accent3"/>
-                </a:solidFill>
-              </a:rPr>
-              <a:t>流程能跑完</a:t>
-            </a:r>
-            <a:endParaRPr lang="en-US" sz="1700" dirty="0"/>
+              <a:rPr lang="en-US" sz="1600" dirty="0">
+                <a:solidFill>
+                  <a:schemeClr val="tx1"/>
+                </a:solidFill>
+              </a:rPr>
+              <a:t>只靠 LLM 自己產生的測資不夠多樣；把測資拿去跑已知的正確解與錯誤解，再把執行結果回饋給 LLM 一輪輪修正，可以提高測資的鑑別力</a:t>
+            </a:r>
+            <a:endParaRPr lang="en-US" sz="1600" dirty="0"/>
           </a:p>
         </p:txBody>
       </p:sp>
@@ -7187,8 +5372,8 @@
         </p:nvSpPr>
         <p:spPr>
           <a:xfrm>
-            <a:off x="822960" y="4773168"/>
-            <a:ext cx="3017520" cy="868680"/>
+            <a:off x="822960" y="3246120"/>
+            <a:ext cx="4937760" cy="365760"/>
           </a:xfrm>
           <a:prstGeom prst="rect">
             <a:avLst/>
@@ -7204,14 +5389,14 @@
               <a:buNone/>
             </a:pPr>
             <a:r>
-              <a:rPr lang="en-US" sz="1300" dirty="0">
+              <a:rPr lang="en-US" sz="1200" dirty="0">
                 <a:solidFill>
                   <a:schemeClr val="tx2"/>
                 </a:solidFill>
               </a:rPr>
-              <a:t>兩題都從頭跑到結束，沒有人工介入；TNR 都比起點高</a:t>
-            </a:r>
-            <a:endParaRPr lang="en-US" sz="1300" dirty="0"/>
+              <a:t>Cai et al., CodeContests-O, 2026</a:t>
+            </a:r>
+            <a:endParaRPr lang="en-US" sz="1200" dirty="0"/>
           </a:p>
         </p:txBody>
       </p:sp>
@@ -7223,12 +5408,12 @@
         </p:nvSpPr>
         <p:spPr>
           <a:xfrm>
-            <a:off x="4297680" y="4206240"/>
-            <a:ext cx="3520440" cy="1508760"/>
+            <a:off x="548640" y="3931920"/>
+            <a:ext cx="5486400" cy="1645920"/>
           </a:xfrm>
           <a:prstGeom prst="roundRect">
             <a:avLst>
-              <a:gd name="adj" fmla="val 4848"/>
+              <a:gd name="adj" fmla="val 4444"/>
             </a:avLst>
           </a:prstGeom>
           <a:solidFill>
@@ -7250,8 +5435,8 @@
         </p:nvSpPr>
         <p:spPr>
           <a:xfrm>
-            <a:off x="4572000" y="4343400"/>
-            <a:ext cx="3017520" cy="411480"/>
+            <a:off x="822960" y="4069080"/>
+            <a:ext cx="4937760" cy="365760"/>
           </a:xfrm>
           <a:prstGeom prst="rect">
             <a:avLst/>
@@ -7267,14 +5452,28 @@
               <a:buNone/>
             </a:pPr>
             <a:r>
-              <a:rPr lang="en-US" sz="1700" b="1" dirty="0">
-                <a:solidFill>
-                  <a:schemeClr val="accent2"/>
-                </a:solidFill>
-              </a:rPr>
-              <a:t>都沒到 0.85</a:t>
-            </a:r>
-            <a:endParaRPr lang="en-US" sz="1700" dirty="0"/>
+              <a:rPr lang="en-US" sz="1400" b="1" dirty="0">
+                <a:solidFill>
+                  <a:schemeClr val="accent1"/>
+                </a:solidFill>
+              </a:rPr>
+              <a:t>論文觀點　</a:t>
+            </a:r>
+            <a:pPr indent="0" marL="0">
+              <a:buNone/>
+            </a:pPr>
+            <a:r>
+              <a:rPr lang="en-US" sz="1400" dirty="0">
+                <a:solidFill>
+                  <a:schemeClr val="accent1"/>
+                </a:solidFill>
+                <a:latin typeface="Consolas" pitchFamily="34" charset="0"/>
+                <a:ea typeface="Consolas" pitchFamily="34" charset="-122"/>
+                <a:cs typeface="Consolas" pitchFamily="34" charset="-120"/>
+              </a:rPr>
+              <a:t>[9]</a:t>
+            </a:r>
+            <a:endParaRPr lang="en-US" sz="1400" dirty="0"/>
           </a:p>
         </p:txBody>
       </p:sp>
@@ -7286,8 +5485,8 @@
         </p:nvSpPr>
         <p:spPr>
           <a:xfrm>
-            <a:off x="4572000" y="4773168"/>
-            <a:ext cx="3017520" cy="868680"/>
+            <a:off x="822960" y="4480560"/>
+            <a:ext cx="4937760" cy="548640"/>
           </a:xfrm>
           <a:prstGeom prst="rect">
             <a:avLst/>
@@ -7303,39 +5502,75 @@
               <a:buNone/>
             </a:pPr>
             <a:r>
-              <a:rPr lang="en-US" sz="1300" dirty="0">
+              <a:rPr lang="en-US" sz="1600" dirty="0">
+                <a:solidFill>
+                  <a:schemeClr val="tx1"/>
+                </a:solidFill>
+              </a:rPr>
+              <a:t>LLM 產出 → 驗證器評分 → 再決定怎麼處理</a:t>
+            </a:r>
+            <a:endParaRPr lang="en-US" sz="1600" dirty="0"/>
+          </a:p>
+        </p:txBody>
+      </p:sp>
+      <p:sp>
+        <p:nvSpPr>
+          <p:cNvPr id="12" name="text-183"/>
+          <p:cNvSpPr txBox="1"/>
+          <p:nvPr/>
+        </p:nvSpPr>
+        <p:spPr>
+          <a:xfrm>
+            <a:off x="822960" y="5074920"/>
+            <a:ext cx="4937760" cy="365760"/>
+          </a:xfrm>
+          <a:prstGeom prst="rect">
+            <a:avLst/>
+          </a:prstGeom>
+          <a:noFill/>
+          <a:ln/>
+        </p:spPr>
+        <p:txBody>
+          <a:bodyPr wrap="square" lIns="0" tIns="0" rIns="0" bIns="0" rtlCol="0" anchor="t"/>
+          <a:lstStyle/>
+          <a:p>
+            <a:pPr indent="0" marL="0">
+              <a:buNone/>
+            </a:pPr>
+            <a:r>
+              <a:rPr lang="en-US" sz="1200" dirty="0">
                 <a:solidFill>
                   <a:schemeClr val="tx2"/>
                 </a:solidFill>
               </a:rPr>
-              <a:t>兩題的達成率都低於 0.85，沒有收斂</a:t>
-            </a:r>
-            <a:endParaRPr lang="en-US" sz="1300" dirty="0"/>
-          </a:p>
-        </p:txBody>
-      </p:sp>
-      <p:sp>
-        <p:nvSpPr>
-          <p:cNvPr id="12" name="card-183"/>
+              <a:t>Wang et al., CHI 2024</a:t>
+            </a:r>
+            <a:endParaRPr lang="en-US" sz="1200" dirty="0"/>
+          </a:p>
+        </p:txBody>
+      </p:sp>
+      <p:sp>
+        <p:nvSpPr>
+          <p:cNvPr id="13" name="obs-184"/>
           <p:cNvSpPr/>
           <p:nvPr/>
         </p:nvSpPr>
         <p:spPr>
           <a:xfrm>
-            <a:off x="8046720" y="4206240"/>
-            <a:ext cx="3520440" cy="1508760"/>
+            <a:off x="6263640" y="1645920"/>
+            <a:ext cx="5376672" cy="3931920"/>
           </a:xfrm>
           <a:prstGeom prst="roundRect">
             <a:avLst>
-              <a:gd name="adj" fmla="val 4848"/>
+              <a:gd name="adj" fmla="val 1860"/>
             </a:avLst>
           </a:prstGeom>
           <a:solidFill>
             <a:schemeClr val="bg2"/>
           </a:solidFill>
-          <a:ln w="9525">
+          <a:ln w="15875">
             <a:solidFill>
-              <a:schemeClr val="accent6"/>
+              <a:schemeClr val="accent4"/>
             </a:solidFill>
             <a:prstDash val="solid"/>
           </a:ln>
@@ -7343,50 +5578,14 @@
       </p:sp>
       <p:sp>
         <p:nvSpPr>
-          <p:cNvPr id="13" name="text-184"/>
-          <p:cNvSpPr txBox="1"/>
-          <p:nvPr/>
-        </p:nvSpPr>
-        <p:spPr>
-          <a:xfrm>
-            <a:off x="8321040" y="4343400"/>
-            <a:ext cx="3017520" cy="411480"/>
-          </a:xfrm>
-          <a:prstGeom prst="rect">
-            <a:avLst/>
-          </a:prstGeom>
-          <a:noFill/>
-          <a:ln/>
-        </p:spPr>
-        <p:txBody>
-          <a:bodyPr wrap="square" lIns="0" tIns="0" rIns="0" bIns="0" rtlCol="0" anchor="t"/>
-          <a:lstStyle/>
-          <a:p>
-            <a:pPr indent="0" marL="0">
-              <a:buNone/>
-            </a:pPr>
-            <a:r>
-              <a:rPr lang="en-US" sz="1700" b="1" dirty="0">
-                <a:solidFill>
-                  <a:schemeClr val="accent1"/>
-                </a:solidFill>
-              </a:rPr>
-              <a:t>一種錯誤很難抓</a:t>
-            </a:r>
-            <a:endParaRPr lang="en-US" sz="1700" dirty="0"/>
-          </a:p>
-        </p:txBody>
-      </p:sp>
-      <p:sp>
-        <p:nvSpPr>
           <p:cNvPr id="14" name="text-185"/>
           <p:cNvSpPr txBox="1"/>
           <p:nvPr/>
         </p:nvSpPr>
         <p:spPr>
           <a:xfrm>
-            <a:off x="8321040" y="4773168"/>
-            <a:ext cx="3017520" cy="868680"/>
+            <a:off x="6537960" y="1783080"/>
+            <a:ext cx="4828032" cy="365760"/>
           </a:xfrm>
           <a:prstGeom prst="rect">
             <a:avLst/>
@@ -7402,14 +5601,25 @@
               <a:buNone/>
             </a:pPr>
             <a:r>
-              <a:rPr lang="en-US" sz="1300" dirty="0">
-                <a:solidFill>
-                  <a:schemeClr val="tx2"/>
-                </a:solidFill>
-              </a:rPr>
-              <a:t>「只從左往右掃一遍」：AI 連續兩輪說要抓它、實際抓到 0 道，第 5 輪才擋到</a:t>
-            </a:r>
-            <a:endParaRPr lang="en-US" sz="1300" dirty="0"/>
+              <a:rPr lang="en-US" sz="1400" b="1" dirty="0">
+                <a:solidFill>
+                  <a:schemeClr val="accent4"/>
+                </a:solidFill>
+              </a:rPr>
+              <a:t>本專題觀察　</a:t>
+            </a:r>
+            <a:pPr indent="0" marL="0">
+              <a:buNone/>
+            </a:pPr>
+            <a:r>
+              <a:rPr lang="en-US" sz="1400" b="1" dirty="0">
+                <a:solidFill>
+                  <a:schemeClr val="tx1"/>
+                </a:solidFill>
+              </a:rPr>
+              <a:t>全自動流程能跑完</a:t>
+            </a:r>
+            <a:endParaRPr lang="en-US" sz="1400" dirty="0"/>
           </a:p>
         </p:txBody>
       </p:sp>
@@ -7421,8 +5631,8 @@
         </p:nvSpPr>
         <p:spPr>
           <a:xfrm>
-            <a:off x="548640" y="5897880"/>
-            <a:ext cx="7315200" cy="320040"/>
+            <a:off x="6537960" y="2286000"/>
+            <a:ext cx="4873752" cy="3154680"/>
           </a:xfrm>
           <a:prstGeom prst="rect">
             <a:avLst/>
@@ -7434,18 +5644,137 @@
           <a:bodyPr wrap="square" lIns="0" tIns="0" rIns="0" bIns="0" rtlCol="0" anchor="t"/>
           <a:lstStyle/>
           <a:p>
-            <a:pPr indent="0" marL="0">
-              <a:buNone/>
-            </a:pPr>
-            <a:r>
-              <a:rPr lang="en-US" sz="1200" dirty="0">
-                <a:solidFill>
-                  <a:schemeClr val="accent5"/>
-                </a:solidFill>
-              </a:rPr>
-              <a:t>樣本：每題一次實驗，模型 gpt-oss-120b</a:t>
-            </a:r>
-            <a:endParaRPr lang="en-US" sz="1200" dirty="0"/>
+            <a:pPr marL="203200" indent="-203200">
+              <a:spcAft>
+                <a:spcPts val="1600"/>
+              </a:spcAft>
+              <a:buSzPct val="100000"/>
+              <a:buChar char="•"/>
+            </a:pPr>
+            <a:r>
+              <a:rPr lang="en-US" sz="1700" dirty="0">
+                <a:solidFill>
+                  <a:schemeClr val="tx1"/>
+                </a:solidFill>
+              </a:rPr>
+              <a:t>同一個迴圈，用 TPR／TNR 評測當驗證器，審核只看分數</a:t>
+            </a:r>
+            <a:endParaRPr lang="en-US" sz="1700" dirty="0"/>
+          </a:p>
+          <a:p>
+            <a:pPr marL="203200" indent="-203200">
+              <a:spcAft>
+                <a:spcPts val="1600"/>
+              </a:spcAft>
+              <a:buSzPct val="100000"/>
+              <a:buChar char="•"/>
+            </a:pPr>
+            <a:r>
+              <a:rPr lang="en-US" sz="1700" dirty="0">
+                <a:solidFill>
+                  <a:schemeClr val="tx1"/>
+                </a:solidFill>
+              </a:rPr>
+              <a:t>兩題都從頭跑到結束，</a:t>
+            </a:r>
+            <a:pPr indent="0" marL="0">
+              <a:spcAft>
+                <a:spcPts val="1600"/>
+              </a:spcAft>
+              <a:buNone/>
+            </a:pPr>
+            <a:r>
+              <a:rPr lang="en-US" sz="1700" b="1" dirty="0">
+                <a:solidFill>
+                  <a:srgbClr val="5CB87C"/>
+                </a:solidFill>
+              </a:rPr>
+              <a:t>測資都比起點進步</a:t>
+            </a:r>
+            <a:endParaRPr lang="en-US" sz="1700" dirty="0"/>
+          </a:p>
+          <a:p>
+            <a:pPr marL="203200" indent="-203200">
+              <a:spcAft>
+                <a:spcPts val="1600"/>
+              </a:spcAft>
+              <a:buSzPct val="100000"/>
+              <a:buChar char="•"/>
+            </a:pPr>
+            <a:r>
+              <a:rPr lang="en-US" sz="1700" dirty="0">
+                <a:solidFill>
+                  <a:schemeClr val="tx1"/>
+                </a:solidFill>
+              </a:rPr>
+              <a:t>困難題進步較多；簡單題較早停滯</a:t>
+            </a:r>
+            <a:endParaRPr lang="en-US" sz="1700" dirty="0"/>
+          </a:p>
+          <a:p>
+            <a:pPr marL="203200" indent="-203200">
+              <a:spcAft>
+                <a:spcPts val="1600"/>
+              </a:spcAft>
+              <a:buSzPct val="100000"/>
+              <a:buChar char="•"/>
+            </a:pPr>
+            <a:r>
+              <a:rPr lang="en-US" sz="1700" b="1" dirty="0">
+                <a:solidFill>
+                  <a:srgbClr val="D96870"/>
+                </a:solidFill>
+              </a:rPr>
+              <a:t>兩題都沒有達到 0.85</a:t>
+            </a:r>
+            <a:endParaRPr lang="en-US" sz="1700" dirty="0"/>
+          </a:p>
+        </p:txBody>
+      </p:sp>
+      <p:sp>
+        <p:nvSpPr>
+          <p:cNvPr id="16" name="text-187"/>
+          <p:cNvSpPr txBox="1"/>
+          <p:nvPr/>
+        </p:nvSpPr>
+        <p:spPr>
+          <a:xfrm>
+            <a:off x="548640" y="5715000"/>
+            <a:ext cx="11094415" cy="640080"/>
+          </a:xfrm>
+          <a:prstGeom prst="rect">
+            <a:avLst/>
+          </a:prstGeom>
+          <a:noFill/>
+          <a:ln/>
+        </p:spPr>
+        <p:txBody>
+          <a:bodyPr wrap="square" lIns="0" tIns="0" rIns="0" bIns="0" rtlCol="0" anchor="t"/>
+          <a:lstStyle/>
+          <a:p>
+            <a:pPr indent="0" marL="0">
+              <a:buNone/>
+            </a:pPr>
+            <a:r>
+              <a:rPr lang="en-US" sz="1500" b="1" dirty="0">
+                <a:solidFill>
+                  <a:schemeClr val="accent1"/>
+                </a:solidFill>
+              </a:rPr>
+              <a:t>意涵　</a:t>
+            </a:r>
+            <a:pPr indent="0" marL="0">
+              <a:buNone/>
+            </a:pPr>
+            <a:r>
+              <a:rPr lang="en-US" sz="1500" dirty="0">
+                <a:solidFill>
+                  <a:schemeClr val="tx2"/>
+                </a:solidFill>
+              </a:rPr>
+              <a:t>文獻的迴圈在小規模也跑得起來；但每題只有一次實驗、6 份錯誤程式，只能當可行性觀察，不能和文獻的數字直接比較</a:t>
+            </a:r>
+            <a:endParaRPr lang="en-US" sz="1500" dirty="0"/>
           </a:p>
         </p:txBody>
       </p:sp>
@@ -7595,42 +5924,26 @@
                   <a:schemeClr val="tx1"/>
                 </a:solidFill>
               </a:rPr>
-              <a:t>「平均抓錯率」和「每種錯誤都抓到」會打架</a:t>
+              <a:t>測資品質有兩個面向：覆蓋與暴露</a:t>
             </a:r>
             <a:endParaRPr lang="en-US" sz="3000" dirty="0"/>
           </a:p>
         </p:txBody>
       </p:sp>
-      <p:graphicFrame>
-        <p:nvGraphicFramePr>
-          <p:cNvPr id="5" name="chart-187" descr=""/>
-          <p:cNvGraphicFramePr/>
-          <p:nvPr/>
-        </p:nvGraphicFramePr>
-        <p:xfrm>
-          <a:off x="548640" y="1645920"/>
-          <a:ext cx="5852160" cy="3749040"/>
-        </p:xfrm>
-        <a:graphic xmlns:a="http://schemas.openxmlformats.org/drawingml/2006/main">
-          <a:graphicData uri="http://schemas.openxmlformats.org/drawingml/2006/chart">
-            <c:chart xmlns:c="http://schemas.openxmlformats.org/drawingml/2006/chart" r:id="rId1"/>
-          </a:graphicData>
-        </a:graphic>
-      </p:graphicFrame>
-      <p:sp>
-        <p:nvSpPr>
-          <p:cNvPr id="6" name="card-188"/>
+      <p:sp>
+        <p:nvSpPr>
+          <p:cNvPr id="5" name="card-188"/>
           <p:cNvSpPr/>
           <p:nvPr/>
         </p:nvSpPr>
         <p:spPr>
           <a:xfrm>
-            <a:off x="6766560" y="1645920"/>
-            <a:ext cx="4873752" cy="1600200"/>
+            <a:off x="548640" y="1645920"/>
+            <a:ext cx="5486400" cy="3931920"/>
           </a:xfrm>
           <a:prstGeom prst="roundRect">
             <a:avLst>
-              <a:gd name="adj" fmla="val 4571"/>
+              <a:gd name="adj" fmla="val 1860"/>
             </a:avLst>
           </a:prstGeom>
           <a:solidFill>
@@ -7646,14 +5959,14 @@
       </p:sp>
       <p:sp>
         <p:nvSpPr>
-          <p:cNvPr id="7" name="text-189"/>
+          <p:cNvPr id="6" name="text-189"/>
           <p:cNvSpPr txBox="1"/>
           <p:nvPr/>
         </p:nvSpPr>
         <p:spPr>
           <a:xfrm>
-            <a:off x="7040880" y="1755648"/>
-            <a:ext cx="4389120" cy="365760"/>
+            <a:off x="822960" y="1783080"/>
+            <a:ext cx="4937760" cy="365760"/>
           </a:xfrm>
           <a:prstGeom prst="rect">
             <a:avLst/>
@@ -7669,12 +5982,62 @@
               <a:buNone/>
             </a:pPr>
             <a:r>
-              <a:rPr lang="en-US" sz="1600" b="1" dirty="0">
+              <a:rPr lang="en-US" sz="1400" b="1" dirty="0">
                 <a:solidFill>
                   <a:schemeClr val="accent1"/>
                 </a:solidFill>
               </a:rPr>
-              <a:t>為什麼停在 4 道</a:t>
+              <a:t>論文觀點　</a:t>
+            </a:r>
+            <a:pPr indent="0" marL="0">
+              <a:buNone/>
+            </a:pPr>
+            <a:r>
+              <a:rPr lang="en-US" sz="1400" dirty="0">
+                <a:solidFill>
+                  <a:schemeClr val="accent1"/>
+                </a:solidFill>
+                <a:latin typeface="Consolas" pitchFamily="34" charset="0"/>
+                <a:ea typeface="Consolas" pitchFamily="34" charset="-122"/>
+                <a:cs typeface="Consolas" pitchFamily="34" charset="-120"/>
+              </a:rPr>
+              <a:t>[13]</a:t>
+            </a:r>
+            <a:endParaRPr lang="en-US" sz="1400" dirty="0"/>
+          </a:p>
+        </p:txBody>
+      </p:sp>
+      <p:sp>
+        <p:nvSpPr>
+          <p:cNvPr id="7" name="text-190"/>
+          <p:cNvSpPr txBox="1"/>
+          <p:nvPr/>
+        </p:nvSpPr>
+        <p:spPr>
+          <a:xfrm>
+            <a:off x="822960" y="2194560"/>
+            <a:ext cx="4937760" cy="411480"/>
+          </a:xfrm>
+          <a:prstGeom prst="rect">
+            <a:avLst/>
+          </a:prstGeom>
+          <a:noFill/>
+          <a:ln/>
+        </p:spPr>
+        <p:txBody>
+          <a:bodyPr wrap="square" lIns="0" tIns="0" rIns="0" bIns="0" rtlCol="0" anchor="t"/>
+          <a:lstStyle/>
+          <a:p>
+            <a:pPr indent="0" marL="0">
+              <a:buNone/>
+            </a:pPr>
+            <a:r>
+              <a:rPr lang="en-US" sz="1600" dirty="0">
+                <a:solidFill>
+                  <a:schemeClr val="tx1"/>
+                </a:solidFill>
+              </a:rPr>
+              <a:t>評估 LLM 產生的測資，要看兩個面向：</a:t>
             </a:r>
             <a:endParaRPr lang="en-US" sz="1600" dirty="0"/>
           </a:p>
@@ -7682,86 +6045,22 @@
       </p:sp>
       <p:sp>
         <p:nvSpPr>
-          <p:cNvPr id="8" name="text-190"/>
-          <p:cNvSpPr txBox="1"/>
-          <p:nvPr/>
-        </p:nvSpPr>
-        <p:spPr>
-          <a:xfrm>
-            <a:off x="7040880" y="2148840"/>
-            <a:ext cx="4389120" cy="1051560"/>
-          </a:xfrm>
-          <a:prstGeom prst="rect">
-            <a:avLst/>
-          </a:prstGeom>
-          <a:noFill/>
-          <a:ln/>
-        </p:spPr>
-        <p:txBody>
-          <a:bodyPr wrap="square" lIns="0" tIns="0" rIns="0" bIns="0" rtlCol="0" anchor="t"/>
-          <a:lstStyle/>
-          <a:p>
-            <a:pPr indent="0" marL="0">
-              <a:buNone/>
-            </a:pPr>
-            <a:r>
-              <a:rPr lang="en-US" sz="1300" dirty="0">
-                <a:solidFill>
-                  <a:schemeClr val="tx2"/>
-                </a:solidFill>
-              </a:rPr>
-              <a:t>自動審核只收能提高平均的測資。</a:t>
-            </a:r>
-            <a:endParaRPr lang="en-US" sz="1300" dirty="0"/>
-          </a:p>
-          <a:p>
-            <a:pPr indent="0" marL="0">
-              <a:buNone/>
-            </a:pPr>
-            <a:r>
-              <a:rPr lang="en-US" sz="1300" dirty="0">
-                <a:solidFill>
-                  <a:schemeClr val="tx2"/>
-                </a:solidFill>
-              </a:rPr>
-              <a:t>只抓到 1、2 種錯的測資，就算能補漏洞也會被拒絕，</a:t>
-            </a:r>
-            <a:endParaRPr lang="en-US" sz="1300" dirty="0"/>
-          </a:p>
-          <a:p>
-            <a:pPr indent="0" marL="0">
-              <a:buNone/>
-            </a:pPr>
-            <a:r>
-              <a:rPr lang="en-US" sz="1300" dirty="0">
-                <a:solidFill>
-                  <a:schemeClr val="tx2"/>
-                </a:solidFill>
-              </a:rPr>
-              <a:t>所以驗收組漏掉一種錯誤</a:t>
-            </a:r>
-            <a:endParaRPr lang="en-US" sz="1300" dirty="0"/>
-          </a:p>
-        </p:txBody>
-      </p:sp>
-      <p:sp>
-        <p:nvSpPr>
-          <p:cNvPr id="9" name="card-191"/>
+          <p:cNvPr id="8" name="dim-191"/>
           <p:cNvSpPr/>
           <p:nvPr/>
         </p:nvSpPr>
         <p:spPr>
           <a:xfrm>
-            <a:off x="6766560" y="3429000"/>
-            <a:ext cx="4873752" cy="1965960"/>
+            <a:off x="822960" y="2743200"/>
+            <a:ext cx="4937760" cy="914400"/>
           </a:xfrm>
           <a:prstGeom prst="roundRect">
             <a:avLst>
-              <a:gd name="adj" fmla="val 3721"/>
+              <a:gd name="adj" fmla="val 8000"/>
             </a:avLst>
           </a:prstGeom>
           <a:solidFill>
-            <a:schemeClr val="bg2"/>
+            <a:schemeClr val="bg1"/>
           </a:solidFill>
           <a:ln w="9525">
             <a:solidFill>
@@ -7773,14 +6072,185 @@
       </p:sp>
       <p:sp>
         <p:nvSpPr>
-          <p:cNvPr id="10" name="text-192"/>
+          <p:cNvPr id="9" name="text-192"/>
           <p:cNvSpPr txBox="1"/>
           <p:nvPr/>
         </p:nvSpPr>
         <p:spPr>
           <a:xfrm>
-            <a:off x="7040880" y="3538728"/>
-            <a:ext cx="4389120" cy="365760"/>
+            <a:off x="1005840" y="2834640"/>
+            <a:ext cx="1371600" cy="731520"/>
+          </a:xfrm>
+          <a:prstGeom prst="rect">
+            <a:avLst/>
+          </a:prstGeom>
+          <a:noFill/>
+          <a:ln/>
+        </p:spPr>
+        <p:txBody>
+          <a:bodyPr wrap="square" lIns="0" tIns="0" rIns="0" bIns="0" rtlCol="0" anchor="ctr"/>
+          <a:lstStyle/>
+          <a:p>
+            <a:pPr indent="0" marL="0">
+              <a:buNone/>
+            </a:pPr>
+            <a:r>
+              <a:rPr lang="en-US" sz="1700" b="1" dirty="0">
+                <a:solidFill>
+                  <a:schemeClr val="accent1"/>
+                </a:solidFill>
+              </a:rPr>
+              <a:t>錯誤覆蓋</a:t>
+            </a:r>
+            <a:endParaRPr lang="en-US" sz="1700" dirty="0"/>
+          </a:p>
+        </p:txBody>
+      </p:sp>
+      <p:sp>
+        <p:nvSpPr>
+          <p:cNvPr id="10" name="text-193"/>
+          <p:cNvSpPr txBox="1"/>
+          <p:nvPr/>
+        </p:nvSpPr>
+        <p:spPr>
+          <a:xfrm>
+            <a:off x="2423160" y="2834640"/>
+            <a:ext cx="3200400" cy="731520"/>
+          </a:xfrm>
+          <a:prstGeom prst="rect">
+            <a:avLst/>
+          </a:prstGeom>
+          <a:noFill/>
+          <a:ln/>
+        </p:spPr>
+        <p:txBody>
+          <a:bodyPr wrap="square" lIns="0" tIns="0" rIns="0" bIns="0" rtlCol="0" anchor="ctr"/>
+          <a:lstStyle/>
+          <a:p>
+            <a:pPr indent="0" marL="0">
+              <a:buNone/>
+            </a:pPr>
+            <a:r>
+              <a:rPr lang="en-US" sz="1400" dirty="0">
+                <a:solidFill>
+                  <a:schemeClr val="tx1"/>
+                </a:solidFill>
+              </a:rPr>
+              <a:t>一組測資能涵蓋多少種失敗方式</a:t>
+            </a:r>
+            <a:endParaRPr lang="en-US" sz="1400" dirty="0"/>
+          </a:p>
+        </p:txBody>
+      </p:sp>
+      <p:sp>
+        <p:nvSpPr>
+          <p:cNvPr id="11" name="dim-194"/>
+          <p:cNvSpPr/>
+          <p:nvPr/>
+        </p:nvSpPr>
+        <p:spPr>
+          <a:xfrm>
+            <a:off x="822960" y="3840480"/>
+            <a:ext cx="4937760" cy="914400"/>
+          </a:xfrm>
+          <a:prstGeom prst="roundRect">
+            <a:avLst>
+              <a:gd name="adj" fmla="val 8000"/>
+            </a:avLst>
+          </a:prstGeom>
+          <a:solidFill>
+            <a:schemeClr val="bg1"/>
+          </a:solidFill>
+          <a:ln w="9525">
+            <a:solidFill>
+              <a:schemeClr val="accent6"/>
+            </a:solidFill>
+            <a:prstDash val="solid"/>
+          </a:ln>
+        </p:spPr>
+      </p:sp>
+      <p:sp>
+        <p:nvSpPr>
+          <p:cNvPr id="12" name="text-195"/>
+          <p:cNvSpPr txBox="1"/>
+          <p:nvPr/>
+        </p:nvSpPr>
+        <p:spPr>
+          <a:xfrm>
+            <a:off x="1005840" y="3931920"/>
+            <a:ext cx="1371600" cy="731520"/>
+          </a:xfrm>
+          <a:prstGeom prst="rect">
+            <a:avLst/>
+          </a:prstGeom>
+          <a:noFill/>
+          <a:ln/>
+        </p:spPr>
+        <p:txBody>
+          <a:bodyPr wrap="square" lIns="0" tIns="0" rIns="0" bIns="0" rtlCol="0" anchor="ctr"/>
+          <a:lstStyle/>
+          <a:p>
+            <a:pPr indent="0" marL="0">
+              <a:buNone/>
+            </a:pPr>
+            <a:r>
+              <a:rPr lang="en-US" sz="1700" b="1" dirty="0">
+                <a:solidFill>
+                  <a:schemeClr val="accent1"/>
+                </a:solidFill>
+              </a:rPr>
+              <a:t>錯誤暴露</a:t>
+            </a:r>
+            <a:endParaRPr lang="en-US" sz="1700" dirty="0"/>
+          </a:p>
+        </p:txBody>
+      </p:sp>
+      <p:sp>
+        <p:nvSpPr>
+          <p:cNvPr id="13" name="text-196"/>
+          <p:cNvSpPr txBox="1"/>
+          <p:nvPr/>
+        </p:nvSpPr>
+        <p:spPr>
+          <a:xfrm>
+            <a:off x="2423160" y="3931920"/>
+            <a:ext cx="3200400" cy="731520"/>
+          </a:xfrm>
+          <a:prstGeom prst="rect">
+            <a:avLst/>
+          </a:prstGeom>
+          <a:noFill/>
+          <a:ln/>
+        </p:spPr>
+        <p:txBody>
+          <a:bodyPr wrap="square" lIns="0" tIns="0" rIns="0" bIns="0" rtlCol="0" anchor="ctr"/>
+          <a:lstStyle/>
+          <a:p>
+            <a:pPr indent="0" marL="0">
+              <a:buNone/>
+            </a:pPr>
+            <a:r>
+              <a:rPr lang="en-US" sz="1400" dirty="0">
+                <a:solidFill>
+                  <a:schemeClr val="tx1"/>
+                </a:solidFill>
+              </a:rPr>
+              <a:t>能不能針對某個錯誤寫法，產生讓它出錯的輸入</a:t>
+            </a:r>
+            <a:endParaRPr lang="en-US" sz="1400" dirty="0"/>
+          </a:p>
+        </p:txBody>
+      </p:sp>
+      <p:sp>
+        <p:nvSpPr>
+          <p:cNvPr id="14" name="text-197"/>
+          <p:cNvSpPr txBox="1"/>
+          <p:nvPr/>
+        </p:nvSpPr>
+        <p:spPr>
+          <a:xfrm>
+            <a:off x="822960" y="5074920"/>
+            <a:ext cx="4937760" cy="365760"/>
           </a:xfrm>
           <a:prstGeom prst="rect">
             <a:avLst/>
@@ -7796,27 +6266,101 @@
               <a:buNone/>
             </a:pPr>
             <a:r>
-              <a:rPr lang="en-US" sz="1600" b="1" dirty="0">
-                <a:solidFill>
-                  <a:schemeClr val="accent1"/>
-                </a:solidFill>
-              </a:rPr>
-              <a:t>實驗之外補 6 道後</a:t>
-            </a:r>
-            <a:endParaRPr lang="en-US" sz="1600" dirty="0"/>
-          </a:p>
-        </p:txBody>
-      </p:sp>
-      <p:sp>
-        <p:nvSpPr>
-          <p:cNvPr id="11" name="text-193"/>
+              <a:rPr lang="en-US" sz="1200" dirty="0">
+                <a:solidFill>
+                  <a:schemeClr val="tx2"/>
+                </a:solidFill>
+              </a:rPr>
+              <a:t>Yang et al., TestCase-Eval, ACL 2025</a:t>
+            </a:r>
+            <a:endParaRPr lang="en-US" sz="1200" dirty="0"/>
+          </a:p>
+        </p:txBody>
+      </p:sp>
+      <p:sp>
+        <p:nvSpPr>
+          <p:cNvPr id="15" name="obs-198"/>
+          <p:cNvSpPr/>
+          <p:nvPr/>
+        </p:nvSpPr>
+        <p:spPr>
+          <a:xfrm>
+            <a:off x="6263640" y="1645920"/>
+            <a:ext cx="5376672" cy="3931920"/>
+          </a:xfrm>
+          <a:prstGeom prst="roundRect">
+            <a:avLst>
+              <a:gd name="adj" fmla="val 1860"/>
+            </a:avLst>
+          </a:prstGeom>
+          <a:solidFill>
+            <a:schemeClr val="bg2"/>
+          </a:solidFill>
+          <a:ln w="15875">
+            <a:solidFill>
+              <a:schemeClr val="accent4"/>
+            </a:solidFill>
+            <a:prstDash val="solid"/>
+          </a:ln>
+        </p:spPr>
+      </p:sp>
+      <p:sp>
+        <p:nvSpPr>
+          <p:cNvPr id="16" name="text-199"/>
           <p:cNvSpPr txBox="1"/>
           <p:nvPr/>
         </p:nvSpPr>
         <p:spPr>
           <a:xfrm>
-            <a:off x="7040880" y="3931920"/>
-            <a:ext cx="4434840" cy="1417320"/>
+            <a:off x="6537960" y="1783080"/>
+            <a:ext cx="4828032" cy="365760"/>
+          </a:xfrm>
+          <a:prstGeom prst="rect">
+            <a:avLst/>
+          </a:prstGeom>
+          <a:noFill/>
+          <a:ln/>
+        </p:spPr>
+        <p:txBody>
+          <a:bodyPr wrap="square" lIns="0" tIns="0" rIns="0" bIns="0" rtlCol="0" anchor="t"/>
+          <a:lstStyle/>
+          <a:p>
+            <a:pPr indent="0" marL="0">
+              <a:buNone/>
+            </a:pPr>
+            <a:r>
+              <a:rPr lang="en-US" sz="1400" b="1" dirty="0">
+                <a:solidFill>
+                  <a:schemeClr val="accent4"/>
+                </a:solidFill>
+              </a:rPr>
+              <a:t>本專題觀察　</a:t>
+            </a:r>
+            <a:pPr indent="0" marL="0">
+              <a:buNone/>
+            </a:pPr>
+            <a:r>
+              <a:rPr lang="en-US" sz="1400" b="1" dirty="0">
+                <a:solidFill>
+                  <a:schemeClr val="tx1"/>
+                </a:solidFill>
+              </a:rPr>
+              <a:t>兩個面向會互相拉扯</a:t>
+            </a:r>
+            <a:endParaRPr lang="en-US" sz="1400" dirty="0"/>
+          </a:p>
+        </p:txBody>
+      </p:sp>
+      <p:sp>
+        <p:nvSpPr>
+          <p:cNvPr id="17" name="text-200"/>
+          <p:cNvSpPr txBox="1"/>
+          <p:nvPr/>
+        </p:nvSpPr>
+        <p:spPr>
+          <a:xfrm>
+            <a:off x="6537960" y="2286000"/>
+            <a:ext cx="4873752" cy="3154680"/>
           </a:xfrm>
           <a:prstGeom prst="rect">
             <a:avLst/>
@@ -7830,114 +6374,184 @@
           <a:p>
             <a:pPr marL="203200" indent="-203200">
               <a:spcAft>
-                <a:spcPts val="800"/>
+                <a:spcPts val="1600"/>
               </a:spcAft>
               <a:buSzPct val="100000"/>
               <a:buChar char="•"/>
             </a:pPr>
             <a:r>
-              <a:rPr lang="en-US" sz="1300" dirty="0">
+              <a:rPr lang="en-US" sz="1700" dirty="0">
                 <a:solidFill>
                   <a:schemeClr val="tx1"/>
                 </a:solidFill>
               </a:rPr>
-              <a:t>驗收組：漏 1 種 → </a:t>
+              <a:t>自動審核只追</a:t>
             </a:r>
             <a:pPr indent="0" marL="0">
               <a:spcAft>
-                <a:spcPts val="800"/>
+                <a:spcPts val="1600"/>
               </a:spcAft>
               <a:buNone/>
             </a:pPr>
             <a:r>
-              <a:rPr lang="en-US" sz="1300" b="1" dirty="0">
-                <a:solidFill>
-                  <a:srgbClr val="5CB87C"/>
-                </a:solidFill>
-              </a:rPr>
-              <a:t>無漏網</a:t>
-            </a:r>
-            <a:endParaRPr lang="en-US" sz="1300" dirty="0"/>
+              <a:rPr lang="en-US" sz="1700" b="1" dirty="0">
+                <a:solidFill>
+                  <a:schemeClr val="tx1"/>
+                </a:solidFill>
+              </a:rPr>
+              <a:t>平均 TNR</a:t>
+            </a:r>
+            <a:pPr indent="0" marL="0">
+              <a:spcAft>
+                <a:spcPts val="1600"/>
+              </a:spcAft>
+              <a:buNone/>
+            </a:pPr>
+            <a:r>
+              <a:rPr lang="en-US" sz="1700" dirty="0">
+                <a:solidFill>
+                  <a:schemeClr val="tx1"/>
+                </a:solidFill>
+              </a:rPr>
+              <a:t>，只收能提高平均的測資</a:t>
+            </a:r>
+            <a:endParaRPr lang="en-US" sz="1700" dirty="0"/>
           </a:p>
           <a:p>
             <a:pPr marL="203200" indent="-203200">
               <a:spcAft>
-                <a:spcPts val="800"/>
+                <a:spcPts val="1600"/>
               </a:spcAft>
               <a:buSzPct val="100000"/>
               <a:buChar char="•"/>
             </a:pPr>
             <a:r>
-              <a:rPr lang="en-US" sz="1300" dirty="0">
+              <a:rPr lang="en-US" sz="1700" dirty="0">
                 <a:solidFill>
                   <a:schemeClr val="tx1"/>
                 </a:solidFill>
               </a:rPr>
-              <a:t>調整組 TNR：0.583 → </a:t>
+              <a:t>結果：停在 4 道，</a:t>
             </a:r>
             <a:pPr indent="0" marL="0">
               <a:spcAft>
-                <a:spcPts val="800"/>
+                <a:spcPts val="1600"/>
               </a:spcAft>
               <a:buNone/>
             </a:pPr>
             <a:r>
-              <a:rPr lang="en-US" sz="1300" b="1" dirty="0">
+              <a:rPr lang="en-US" sz="1700" b="1" dirty="0">
                 <a:solidFill>
                   <a:srgbClr val="D96870"/>
                 </a:solidFill>
               </a:rPr>
-              <a:t>0.383（下降）</a:t>
-            </a:r>
-            <a:endParaRPr lang="en-US" sz="1300" dirty="0"/>
+              <a:t>驗收組漏掉一種錯誤</a:t>
+            </a:r>
+            <a:endParaRPr lang="en-US" sz="1700" dirty="0"/>
           </a:p>
           <a:p>
             <a:pPr marL="203200" indent="-203200">
               <a:spcAft>
-                <a:spcPts val="800"/>
+                <a:spcPts val="1600"/>
               </a:spcAft>
               <a:buSzPct val="100000"/>
               <a:buChar char="•"/>
             </a:pPr>
             <a:r>
-              <a:rPr lang="en-US" sz="1300" dirty="0">
+              <a:rPr lang="en-US" sz="1700" dirty="0">
                 <a:solidFill>
                   <a:schemeClr val="tx1"/>
                 </a:solidFill>
               </a:rPr>
-              <a:t>邊界案例（只有 1 天、價格相同）抓不到錯誤</a:t>
-            </a:r>
-            <a:endParaRPr lang="en-US" sz="1300" dirty="0"/>
+              <a:t>也就是</a:t>
+            </a:r>
+            <a:pPr indent="0" marL="0">
+              <a:spcAft>
+                <a:spcPts val="1600"/>
+              </a:spcAft>
+              <a:buNone/>
+            </a:pPr>
+            <a:r>
+              <a:rPr lang="en-US" sz="1700" b="1" dirty="0">
+                <a:solidFill>
+                  <a:srgbClr val="D96870"/>
+                </a:solidFill>
+              </a:rPr>
+              <a:t>覆蓋不足</a:t>
+            </a:r>
+            <a:endParaRPr lang="en-US" sz="1700" dirty="0"/>
           </a:p>
           <a:p>
             <a:pPr marL="203200" indent="-203200">
               <a:spcAft>
-                <a:spcPts val="800"/>
+                <a:spcPts val="1600"/>
               </a:spcAft>
               <a:buSzPct val="100000"/>
               <a:buChar char="•"/>
             </a:pPr>
             <a:r>
-              <a:rPr lang="en-US" sz="1300" dirty="0">
+              <a:rPr lang="en-US" sz="1700" dirty="0">
                 <a:solidFill>
                   <a:schemeClr val="tx1"/>
                 </a:solidFill>
               </a:rPr>
-              <a:t>會拉低平均，但正是學生最該看到的測試</a:t>
-            </a:r>
-            <a:endParaRPr lang="en-US" sz="1300" dirty="0"/>
-          </a:p>
-        </p:txBody>
-      </p:sp>
-      <p:sp>
-        <p:nvSpPr>
-          <p:cNvPr id="12" name="text-194"/>
+              <a:t>補上邊界案例後：</a:t>
+            </a:r>
+            <a:pPr indent="0" marL="0">
+              <a:spcAft>
+                <a:spcPts val="1600"/>
+              </a:spcAft>
+              <a:buNone/>
+            </a:pPr>
+            <a:r>
+              <a:rPr lang="en-US" sz="1700" b="1" dirty="0">
+                <a:solidFill>
+                  <a:srgbClr val="5CB87C"/>
+                </a:solidFill>
+              </a:rPr>
+              <a:t>覆蓋完整</a:t>
+            </a:r>
+            <a:pPr indent="0" marL="0">
+              <a:spcAft>
+                <a:spcPts val="1600"/>
+              </a:spcAft>
+              <a:buNone/>
+            </a:pPr>
+            <a:r>
+              <a:rPr lang="en-US" sz="1700" dirty="0">
+                <a:solidFill>
+                  <a:schemeClr val="tx1"/>
+                </a:solidFill>
+              </a:rPr>
+              <a:t>，但平均 TNR </a:t>
+            </a:r>
+            <a:pPr indent="0" marL="0">
+              <a:spcAft>
+                <a:spcPts val="1600"/>
+              </a:spcAft>
+              <a:buNone/>
+            </a:pPr>
+            <a:r>
+              <a:rPr lang="en-US" sz="1700" b="1" dirty="0">
+                <a:solidFill>
+                  <a:srgbClr val="D96870"/>
+                </a:solidFill>
+              </a:rPr>
+              <a:t>下降</a:t>
+            </a:r>
+            <a:endParaRPr lang="en-US" sz="1700" dirty="0"/>
+          </a:p>
+        </p:txBody>
+      </p:sp>
+      <p:sp>
+        <p:nvSpPr>
+          <p:cNvPr id="18" name="text-201"/>
           <p:cNvSpPr txBox="1"/>
           <p:nvPr/>
         </p:nvSpPr>
         <p:spPr>
           <a:xfrm>
-            <a:off x="548640" y="5577840"/>
+            <a:off x="548640" y="5715000"/>
             <a:ext cx="11094415" cy="640080"/>
           </a:xfrm>
           <a:prstGeom prst="rect">
@@ -7956,10 +6570,10 @@
             <a:r>
               <a:rPr lang="en-US" sz="1500" b="1" dirty="0">
                 <a:solidFill>
-                  <a:srgbClr val="DFA050"/>
-                </a:solidFill>
-              </a:rPr>
-              <a:t>分數高不等於覆蓋完整。</a:t>
+                  <a:schemeClr val="accent1"/>
+                </a:solidFill>
+              </a:rPr>
+              <a:t>意涵　</a:t>
             </a:r>
             <a:pPr indent="0" marL="0">
               <a:buNone/>
@@ -7967,10 +6581,10 @@
             <a:r>
               <a:rPr lang="en-US" sz="1500" dirty="0">
                 <a:solidFill>
-                  <a:schemeClr val="tx1"/>
-                </a:solidFill>
-              </a:rPr>
-              <a:t>只追平均，會把教學需要的測資擋在門外；下一步是改成「覆蓋優先」的審核</a:t>
+                  <a:schemeClr val="tx2"/>
+                </a:solidFill>
+              </a:rPr>
+              <a:t>分數高不等於覆蓋完整；審核要同時看兩個面向。下一步：改成「覆蓋優先」的審核</a:t>
             </a:r>
             <a:endParaRPr lang="en-US" sz="1500" dirty="0"/>
           </a:p>
@@ -8122,7 +6736,7 @@
                   <a:schemeClr val="tx1"/>
                 </a:solidFill>
               </a:rPr>
-              <a:t>看不到程式碼的 AI 提示＋虛擬碼</a:t>
+              <a:t>不直接給答案的提示：文獻的兩個提醒</a:t>
             </a:r>
             <a:endParaRPr lang="en-US" sz="3000" dirty="0"/>
           </a:p>
@@ -8130,18 +6744,18 @@
       </p:sp>
       <p:sp>
         <p:nvSpPr>
-          <p:cNvPr id="5" name="card-195"/>
+          <p:cNvPr id="5" name="card-202"/>
           <p:cNvSpPr/>
           <p:nvPr/>
         </p:nvSpPr>
         <p:spPr>
           <a:xfrm>
             <a:off x="548640" y="1645920"/>
-            <a:ext cx="3017520" cy="2057400"/>
+            <a:ext cx="5486400" cy="1874520"/>
           </a:xfrm>
           <a:prstGeom prst="roundRect">
             <a:avLst>
-              <a:gd name="adj" fmla="val 3556"/>
+              <a:gd name="adj" fmla="val 3902"/>
             </a:avLst>
           </a:prstGeom>
           <a:solidFill>
@@ -8157,14 +6771,14 @@
       </p:sp>
       <p:sp>
         <p:nvSpPr>
-          <p:cNvPr id="6" name="text-196"/>
+          <p:cNvPr id="6" name="text-203"/>
           <p:cNvSpPr txBox="1"/>
           <p:nvPr/>
         </p:nvSpPr>
         <p:spPr>
           <a:xfrm>
             <a:off x="822960" y="1783080"/>
-            <a:ext cx="2560320" cy="411480"/>
+            <a:ext cx="4937760" cy="365760"/>
           </a:xfrm>
           <a:prstGeom prst="rect">
             <a:avLst/>
@@ -8180,27 +6794,41 @@
               <a:buNone/>
             </a:pPr>
             <a:r>
-              <a:rPr lang="en-US" sz="1800" b="1" dirty="0">
-                <a:solidFill>
-                  <a:schemeClr val="accent2"/>
-                </a:solidFill>
-              </a:rPr>
-              <a:t>一般 AI 家教</a:t>
-            </a:r>
-            <a:endParaRPr lang="en-US" sz="1800" dirty="0"/>
-          </a:p>
-        </p:txBody>
-      </p:sp>
-      <p:sp>
-        <p:nvSpPr>
-          <p:cNvPr id="7" name="text-197"/>
+              <a:rPr lang="en-US" sz="1400" b="1" dirty="0">
+                <a:solidFill>
+                  <a:schemeClr val="accent1"/>
+                </a:solidFill>
+              </a:rPr>
+              <a:t>論文觀點　</a:t>
+            </a:r>
+            <a:pPr indent="0" marL="0">
+              <a:buNone/>
+            </a:pPr>
+            <a:r>
+              <a:rPr lang="en-US" sz="1400" dirty="0">
+                <a:solidFill>
+                  <a:schemeClr val="accent1"/>
+                </a:solidFill>
+                <a:latin typeface="Consolas" pitchFamily="34" charset="0"/>
+                <a:ea typeface="Consolas" pitchFamily="34" charset="-122"/>
+                <a:cs typeface="Consolas" pitchFamily="34" charset="-120"/>
+              </a:rPr>
+              <a:t>[12]</a:t>
+            </a:r>
+            <a:endParaRPr lang="en-US" sz="1400" dirty="0"/>
+          </a:p>
+        </p:txBody>
+      </p:sp>
+      <p:sp>
+        <p:nvSpPr>
+          <p:cNvPr id="7" name="text-204"/>
           <p:cNvSpPr txBox="1"/>
           <p:nvPr/>
         </p:nvSpPr>
         <p:spPr>
           <a:xfrm>
-            <a:off x="822960" y="2240280"/>
-            <a:ext cx="2514600" cy="1737360"/>
+            <a:off x="822960" y="2194560"/>
+            <a:ext cx="4937760" cy="777240"/>
           </a:xfrm>
           <a:prstGeom prst="rect">
             <a:avLst/>
@@ -8216,59 +6844,67 @@
               <a:buNone/>
             </a:pPr>
             <a:r>
-              <a:rPr lang="en-US" sz="1400" dirty="0">
+              <a:rPr lang="en-US" sz="1600" dirty="0">
+                <a:solidFill>
+                  <a:schemeClr val="tx1"/>
+                </a:solidFill>
+              </a:rPr>
+              <a:t>避免直接給答案；改用帶逐行說明的虛擬碼（700 名學生、12 週的課堂部署）</a:t>
+            </a:r>
+            <a:endParaRPr lang="en-US" sz="1600" dirty="0"/>
+          </a:p>
+        </p:txBody>
+      </p:sp>
+      <p:sp>
+        <p:nvSpPr>
+          <p:cNvPr id="8" name="text-205"/>
+          <p:cNvSpPr txBox="1"/>
+          <p:nvPr/>
+        </p:nvSpPr>
+        <p:spPr>
+          <a:xfrm>
+            <a:off x="822960" y="3017520"/>
+            <a:ext cx="4937760" cy="365760"/>
+          </a:xfrm>
+          <a:prstGeom prst="rect">
+            <a:avLst/>
+          </a:prstGeom>
+          <a:noFill/>
+          <a:ln/>
+        </p:spPr>
+        <p:txBody>
+          <a:bodyPr wrap="square" lIns="0" tIns="0" rIns="0" bIns="0" rtlCol="0" anchor="t"/>
+          <a:lstStyle/>
+          <a:p>
+            <a:pPr indent="0" marL="0">
+              <a:buNone/>
+            </a:pPr>
+            <a:r>
+              <a:rPr lang="en-US" sz="1200" dirty="0">
                 <a:solidFill>
                   <a:schemeClr val="tx2"/>
                 </a:solidFill>
               </a:rPr>
-              <a:t>收到學生的完整程式碼</a:t>
-            </a:r>
-            <a:endParaRPr lang="en-US" sz="1400" dirty="0"/>
-          </a:p>
-          <a:p>
-            <a:pPr indent="0" marL="0">
-              <a:buNone/>
-            </a:pPr>
-            <a:r>
-              <a:rPr lang="en-US" sz="1400" dirty="0">
-                <a:solidFill>
-                  <a:schemeClr val="tx2"/>
-                </a:solidFill>
-              </a:rPr>
-              <a:t>只能靠指令要它不要洩漏答案</a:t>
-            </a:r>
-            <a:endParaRPr lang="en-US" sz="1400" dirty="0"/>
-          </a:p>
-          <a:p>
-            <a:pPr indent="0" marL="0">
-              <a:buNone/>
-            </a:pPr>
-            <a:r>
-              <a:rPr lang="en-US" sz="1400" dirty="0">
-                <a:solidFill>
-                  <a:schemeClr val="tx2"/>
-                </a:solidFill>
-              </a:rPr>
-              <a:t>要看模型聽不聽話</a:t>
-            </a:r>
-            <a:endParaRPr lang="en-US" sz="1400" dirty="0"/>
-          </a:p>
-        </p:txBody>
-      </p:sp>
-      <p:sp>
-        <p:nvSpPr>
-          <p:cNvPr id="8" name="card-198"/>
+              <a:t>Kazemitabaar et al., CodeAid, 2024</a:t>
+            </a:r>
+            <a:endParaRPr lang="en-US" sz="1200" dirty="0"/>
+          </a:p>
+        </p:txBody>
+      </p:sp>
+      <p:sp>
+        <p:nvSpPr>
+          <p:cNvPr id="9" name="card-206"/>
           <p:cNvSpPr/>
           <p:nvPr/>
         </p:nvSpPr>
         <p:spPr>
           <a:xfrm>
-            <a:off x="3794760" y="1645920"/>
-            <a:ext cx="3017520" cy="2057400"/>
+            <a:off x="548640" y="3703320"/>
+            <a:ext cx="5486400" cy="1874520"/>
           </a:xfrm>
           <a:prstGeom prst="roundRect">
             <a:avLst>
-              <a:gd name="adj" fmla="val 3556"/>
+              <a:gd name="adj" fmla="val 3902"/>
             </a:avLst>
           </a:prstGeom>
           <a:solidFill>
@@ -8284,14 +6920,14 @@
       </p:sp>
       <p:sp>
         <p:nvSpPr>
-          <p:cNvPr id="9" name="text-199"/>
+          <p:cNvPr id="10" name="text-207"/>
           <p:cNvSpPr txBox="1"/>
           <p:nvPr/>
         </p:nvSpPr>
         <p:spPr>
           <a:xfrm>
-            <a:off x="4069080" y="1783080"/>
-            <a:ext cx="2560320" cy="411480"/>
+            <a:off x="822960" y="3840480"/>
+            <a:ext cx="4937760" cy="365760"/>
           </a:xfrm>
           <a:prstGeom prst="rect">
             <a:avLst/>
@@ -8307,275 +6943,77 @@
               <a:buNone/>
             </a:pPr>
             <a:r>
-              <a:rPr lang="en-US" sz="1800" b="1" dirty="0">
-                <a:solidFill>
-                  <a:schemeClr val="accent3"/>
-                </a:solidFill>
-              </a:rPr>
-              <a:t>本系統</a:t>
-            </a:r>
-            <a:endParaRPr lang="en-US" sz="1800" dirty="0"/>
-          </a:p>
-        </p:txBody>
-      </p:sp>
-      <p:sp>
-        <p:nvSpPr>
-          <p:cNvPr id="10" name="text-200"/>
-          <p:cNvSpPr txBox="1"/>
-          <p:nvPr/>
-        </p:nvSpPr>
-        <p:spPr>
-          <a:xfrm>
-            <a:off x="4069080" y="2240280"/>
-            <a:ext cx="2514600" cy="1737360"/>
-          </a:xfrm>
-          <a:prstGeom prst="rect">
-            <a:avLst/>
-          </a:prstGeom>
-          <a:noFill/>
-          <a:ln/>
-        </p:spPr>
-        <p:txBody>
-          <a:bodyPr wrap="square" lIns="0" tIns="0" rIns="0" bIns="0" rtlCol="0" anchor="t"/>
-          <a:lstStyle/>
-          <a:p>
+              <a:rPr lang="en-US" sz="1400" b="1" dirty="0">
+                <a:solidFill>
+                  <a:schemeClr val="accent1"/>
+                </a:solidFill>
+              </a:rPr>
+              <a:t>論文觀點　</a:t>
+            </a:r>
             <a:pPr indent="0" marL="0">
               <a:buNone/>
             </a:pPr>
             <a:r>
               <a:rPr lang="en-US" sz="1400" dirty="0">
                 <a:solidFill>
-                  <a:schemeClr val="tx2"/>
-                </a:solidFill>
-              </a:rPr>
-              <a:t>沒有「學生程式碼」這個輸入</a:t>
-            </a:r>
-            <a:endParaRPr lang="en-US" sz="1400" dirty="0"/>
-          </a:p>
-          <a:p>
-            <a:pPr indent="0" marL="0">
-              <a:buNone/>
-            </a:pPr>
-            <a:r>
-              <a:rPr lang="en-US" sz="1400" dirty="0">
-                <a:solidFill>
-                  <a:schemeClr val="tx2"/>
-                </a:solidFill>
-              </a:rPr>
-              <a:t>只收到題目、哪道測資錯了</a:t>
-            </a:r>
-            <a:endParaRPr lang="en-US" sz="1400" dirty="0"/>
-          </a:p>
-          <a:p>
-            <a:pPr indent="0" marL="0">
-              <a:buNone/>
-            </a:pPr>
-            <a:r>
-              <a:rPr lang="en-US" sz="1400" dirty="0">
-                <a:solidFill>
-                  <a:schemeClr val="tx2"/>
-                </a:solidFill>
-              </a:rPr>
-              <a:t>答錯、出錯或超時時</a:t>
-            </a:r>
-            <a:endParaRPr lang="en-US" sz="1400" dirty="0"/>
-          </a:p>
-          <a:p>
-            <a:pPr indent="0" marL="0">
-              <a:buNone/>
-            </a:pPr>
-            <a:r>
-              <a:rPr lang="en-US" sz="1400" dirty="0">
-                <a:solidFill>
-                  <a:schemeClr val="tx2"/>
-                </a:solidFill>
-              </a:rPr>
-              <a:t>再加上虛擬碼</a:t>
-            </a:r>
-            <a:endParaRPr lang="en-US" sz="1400" dirty="0"/>
-          </a:p>
-        </p:txBody>
-      </p:sp>
-      <p:sp>
-        <p:nvSpPr>
-          <p:cNvPr id="11" name="card-201"/>
-          <p:cNvSpPr/>
-          <p:nvPr/>
-        </p:nvSpPr>
-        <p:spPr>
-          <a:xfrm>
-            <a:off x="7178040" y="1645920"/>
-            <a:ext cx="4462272" cy="2057400"/>
-          </a:xfrm>
-          <a:prstGeom prst="roundRect">
-            <a:avLst>
-              <a:gd name="adj" fmla="val 3556"/>
-            </a:avLst>
-          </a:prstGeom>
-          <a:solidFill>
-            <a:schemeClr val="bg2"/>
-          </a:solidFill>
-          <a:ln w="9525">
-            <a:solidFill>
-              <a:schemeClr val="accent6"/>
-            </a:solidFill>
-            <a:prstDash val="solid"/>
-          </a:ln>
-        </p:spPr>
-      </p:sp>
-      <p:sp>
-        <p:nvSpPr>
-          <p:cNvPr id="12" name="text-202"/>
-          <p:cNvSpPr txBox="1"/>
-          <p:nvPr/>
-        </p:nvSpPr>
-        <p:spPr>
-          <a:xfrm>
-            <a:off x="7452360" y="1783080"/>
-            <a:ext cx="4023360" cy="365760"/>
-          </a:xfrm>
-          <a:prstGeom prst="rect">
-            <a:avLst/>
-          </a:prstGeom>
-          <a:noFill/>
-          <a:ln/>
-        </p:spPr>
-        <p:txBody>
-          <a:bodyPr wrap="square" lIns="0" tIns="0" rIns="0" bIns="0" rtlCol="0" anchor="t"/>
-          <a:lstStyle/>
-          <a:p>
-            <a:pPr indent="0" marL="0">
-              <a:buNone/>
-            </a:pPr>
-            <a:r>
-              <a:rPr lang="en-US" sz="1500" b="1" dirty="0">
-                <a:solidFill>
                   <a:schemeClr val="accent1"/>
-                </a:solidFill>
-              </a:rPr>
-              <a:t>虛擬碼：用文字一步步寫出解法</a:t>
-            </a:r>
-            <a:endParaRPr lang="en-US" sz="1500" dirty="0"/>
-          </a:p>
-        </p:txBody>
-      </p:sp>
-      <p:sp>
-        <p:nvSpPr>
-          <p:cNvPr id="13" name="text-203"/>
-          <p:cNvSpPr txBox="1"/>
-          <p:nvPr/>
-        </p:nvSpPr>
-        <p:spPr>
-          <a:xfrm>
-            <a:off x="7452360" y="2212848"/>
-            <a:ext cx="4069080" cy="1737360"/>
-          </a:xfrm>
-          <a:prstGeom prst="rect">
-            <a:avLst/>
-          </a:prstGeom>
-          <a:noFill/>
-          <a:ln/>
-        </p:spPr>
-        <p:txBody>
-          <a:bodyPr wrap="square" lIns="0" tIns="0" rIns="0" bIns="0" rtlCol="0" anchor="t"/>
-          <a:lstStyle/>
-          <a:p>
-            <a:pPr indent="0" marL="0">
-              <a:buNone/>
-            </a:pPr>
-            <a:r>
-              <a:rPr lang="en-US" sz="1300" dirty="0">
-                <a:solidFill>
-                  <a:schemeClr val="tx1"/>
                 </a:solidFill>
                 <a:latin typeface="Consolas" pitchFamily="34" charset="0"/>
                 <a:ea typeface="Consolas" pitchFamily="34" charset="-122"/>
                 <a:cs typeface="Consolas" pitchFamily="34" charset="-120"/>
               </a:rPr>
-              <a:t>1. 設 lowest 為第一天的價格。</a:t>
-            </a:r>
-            <a:endParaRPr lang="en-US" sz="1300" dirty="0"/>
-          </a:p>
-          <a:p>
-            <a:pPr indent="0" marL="0">
-              <a:buNone/>
-            </a:pPr>
-            <a:r>
-              <a:rPr lang="en-US" sz="1300" dirty="0">
+              <a:t>[11]</a:t>
+            </a:r>
+            <a:endParaRPr lang="en-US" sz="1400" dirty="0"/>
+          </a:p>
+        </p:txBody>
+      </p:sp>
+      <p:sp>
+        <p:nvSpPr>
+          <p:cNvPr id="11" name="text-208"/>
+          <p:cNvSpPr txBox="1"/>
+          <p:nvPr/>
+        </p:nvSpPr>
+        <p:spPr>
+          <a:xfrm>
+            <a:off x="822960" y="4251960"/>
+            <a:ext cx="4937760" cy="777240"/>
+          </a:xfrm>
+          <a:prstGeom prst="rect">
+            <a:avLst/>
+          </a:prstGeom>
+          <a:noFill/>
+          <a:ln/>
+        </p:spPr>
+        <p:txBody>
+          <a:bodyPr wrap="square" lIns="0" tIns="0" rIns="0" bIns="0" rtlCol="0" anchor="t"/>
+          <a:lstStyle/>
+          <a:p>
+            <a:pPr indent="0" marL="0">
+              <a:buNone/>
+            </a:pPr>
+            <a:r>
+              <a:rPr lang="en-US" sz="1600" dirty="0">
                 <a:solidFill>
                   <a:schemeClr val="tx1"/>
                 </a:solidFill>
-                <a:latin typeface="Consolas" pitchFamily="34" charset="0"/>
-                <a:ea typeface="Consolas" pitchFamily="34" charset="-122"/>
-                <a:cs typeface="Consolas" pitchFamily="34" charset="-120"/>
-              </a:rPr>
-              <a:t>2. 設 best 為 0。</a:t>
-            </a:r>
-            <a:endParaRPr lang="en-US" sz="1300" dirty="0"/>
-          </a:p>
-          <a:p>
-            <a:pPr indent="0" marL="0">
-              <a:buNone/>
-            </a:pPr>
-            <a:r>
-              <a:rPr lang="en-US" sz="1300" dirty="0">
-                <a:solidFill>
-                  <a:schemeClr val="tx1"/>
-                </a:solidFill>
-                <a:latin typeface="Consolas" pitchFamily="34" charset="0"/>
-                <a:ea typeface="Consolas" pitchFamily="34" charset="-122"/>
-                <a:cs typeface="Consolas" pitchFamily="34" charset="-120"/>
-              </a:rPr>
-              <a:t>3. 對於每一天的價格 p：</a:t>
-            </a:r>
-            <a:endParaRPr lang="en-US" sz="1300" dirty="0"/>
-          </a:p>
-          <a:p>
-            <a:pPr indent="0" marL="0">
-              <a:buNone/>
-            </a:pPr>
-            <a:r>
-              <a:rPr lang="en-US" sz="1300" dirty="0">
-                <a:solidFill>
-                  <a:schemeClr val="tx1"/>
-                </a:solidFill>
-                <a:latin typeface="Consolas" pitchFamily="34" charset="0"/>
-                <a:ea typeface="Consolas" pitchFamily="34" charset="-122"/>
-                <a:cs typeface="Consolas" pitchFamily="34" charset="-120"/>
-              </a:rPr>
-              <a:t>4.   若 p 小於 lowest，更新 lowest。</a:t>
-            </a:r>
-            <a:endParaRPr lang="en-US" sz="1300" dirty="0"/>
-          </a:p>
-          <a:p>
-            <a:pPr indent="0" marL="0">
-              <a:buNone/>
-            </a:pPr>
-            <a:r>
-              <a:rPr lang="en-US" sz="1300" dirty="0">
-                <a:solidFill>
-                  <a:schemeClr val="tx1"/>
-                </a:solidFill>
-                <a:latin typeface="Consolas" pitchFamily="34" charset="0"/>
-                <a:ea typeface="Consolas" pitchFamily="34" charset="-122"/>
-                <a:cs typeface="Consolas" pitchFamily="34" charset="-120"/>
-              </a:rPr>
-              <a:t>5.   計算 profit = p - lowest。……</a:t>
-            </a:r>
-            <a:endParaRPr lang="en-US" sz="1300" dirty="0"/>
-          </a:p>
-        </p:txBody>
-      </p:sp>
-      <p:sp>
-        <p:nvSpPr>
-          <p:cNvPr id="14" name="text-204"/>
+              </a:rPr>
+              <a:t>只有高層次的文字提示，可能沒有幫助甚至誤導；更具體的提示較能幫到新手</a:t>
+            </a:r>
+            <a:endParaRPr lang="en-US" sz="1600" dirty="0"/>
+          </a:p>
+        </p:txBody>
+      </p:sp>
+      <p:sp>
+        <p:nvSpPr>
+          <p:cNvPr id="12" name="text-209"/>
           <p:cNvSpPr txBox="1"/>
           <p:nvPr/>
         </p:nvSpPr>
         <p:spPr>
           <a:xfrm>
-            <a:off x="548640" y="3931920"/>
-            <a:ext cx="2743200" cy="365760"/>
+            <a:off x="822960" y="5074920"/>
+            <a:ext cx="4937760" cy="365760"/>
           </a:xfrm>
           <a:prstGeom prst="rect">
             <a:avLst/>
@@ -8591,31 +7029,31 @@
               <a:buNone/>
             </a:pPr>
             <a:r>
-              <a:rPr lang="en-US" sz="1600" b="1" dirty="0">
-                <a:solidFill>
-                  <a:schemeClr val="accent4"/>
-                </a:solidFill>
-              </a:rPr>
-              <a:t>往返檢查</a:t>
-            </a:r>
-            <a:endParaRPr lang="en-US" sz="1600" dirty="0"/>
-          </a:p>
-        </p:txBody>
-      </p:sp>
-      <p:sp>
-        <p:nvSpPr>
-          <p:cNvPr id="15" name="rt-205"/>
+              <a:rPr lang="en-US" sz="1200" dirty="0">
+                <a:solidFill>
+                  <a:schemeClr val="tx2"/>
+                </a:solidFill>
+              </a:rPr>
+              <a:t>Xiao et al., 2024</a:t>
+            </a:r>
+            <a:endParaRPr lang="en-US" sz="1200" dirty="0"/>
+          </a:p>
+        </p:txBody>
+      </p:sp>
+      <p:sp>
+        <p:nvSpPr>
+          <p:cNvPr id="13" name="obs-210"/>
           <p:cNvSpPr/>
           <p:nvPr/>
         </p:nvSpPr>
         <p:spPr>
           <a:xfrm>
-            <a:off x="548640" y="4343400"/>
-            <a:ext cx="2331720" cy="640080"/>
+            <a:off x="6263640" y="1645920"/>
+            <a:ext cx="5376672" cy="3931920"/>
           </a:xfrm>
           <a:prstGeom prst="roundRect">
             <a:avLst>
-              <a:gd name="adj" fmla="val 11429"/>
+              <a:gd name="adj" fmla="val 1860"/>
             </a:avLst>
           </a:prstGeom>
           <a:solidFill>
@@ -8631,35 +7069,46 @@
       </p:sp>
       <p:sp>
         <p:nvSpPr>
-          <p:cNvPr id="16" name="text-206"/>
+          <p:cNvPr id="14" name="text-211"/>
           <p:cNvSpPr txBox="1"/>
           <p:nvPr/>
         </p:nvSpPr>
         <p:spPr>
           <a:xfrm>
-            <a:off x="621792" y="4343400"/>
-            <a:ext cx="2185416" cy="640080"/>
-          </a:xfrm>
-          <a:prstGeom prst="rect">
-            <a:avLst/>
-          </a:prstGeom>
-          <a:noFill/>
-          <a:ln/>
-        </p:spPr>
-        <p:txBody>
-          <a:bodyPr wrap="square" lIns="0" tIns="0" rIns="0" bIns="0" rtlCol="0" anchor="ctr"/>
-          <a:lstStyle/>
-          <a:p>
-            <a:pPr algn="ctr" indent="0" marL="0">
-              <a:buNone/>
-            </a:pPr>
-            <a:r>
-              <a:rPr lang="en-US" sz="1400" dirty="0">
+            <a:off x="6537960" y="1783080"/>
+            <a:ext cx="4828032" cy="365760"/>
+          </a:xfrm>
+          <a:prstGeom prst="rect">
+            <a:avLst/>
+          </a:prstGeom>
+          <a:noFill/>
+          <a:ln/>
+        </p:spPr>
+        <p:txBody>
+          <a:bodyPr wrap="square" lIns="0" tIns="0" rIns="0" bIns="0" rtlCol="0" anchor="t"/>
+          <a:lstStyle/>
+          <a:p>
+            <a:pPr indent="0" marL="0">
+              <a:buNone/>
+            </a:pPr>
+            <a:r>
+              <a:rPr lang="en-US" sz="1400" b="1" dirty="0">
+                <a:solidFill>
+                  <a:schemeClr val="accent4"/>
+                </a:solidFill>
+              </a:rPr>
+              <a:t>本專題觀察　</a:t>
+            </a:r>
+            <a:pPr indent="0" marL="0">
+              <a:buNone/>
+            </a:pPr>
+            <a:r>
+              <a:rPr lang="en-US" sz="1400" b="1" dirty="0">
                 <a:solidFill>
                   <a:schemeClr val="tx1"/>
                 </a:solidFill>
               </a:rPr>
-              <a:t>AI 甲寫虛擬碼</a:t>
+              <a:t>本專題的對應做法</a:t>
             </a:r>
             <a:endParaRPr lang="en-US" sz="1400" dirty="0"/>
           </a:p>
@@ -8667,224 +7116,132 @@
       </p:sp>
       <p:sp>
         <p:nvSpPr>
-          <p:cNvPr id="17" name="arrow-207"/>
-          <p:cNvSpPr/>
-          <p:nvPr/>
-        </p:nvSpPr>
-        <p:spPr>
-          <a:xfrm>
-            <a:off x="2907792" y="4663440"/>
-            <a:ext cx="356616" cy="0"/>
-          </a:xfrm>
-          <a:prstGeom prst="line">
-            <a:avLst/>
-          </a:prstGeom>
-          <a:noFill/>
-          <a:ln w="19050">
-            <a:solidFill>
-              <a:schemeClr val="accent4"/>
-            </a:solidFill>
-            <a:prstDash val="solid"/>
-            <a:tailEnd type="triangle"/>
-          </a:ln>
-        </p:spPr>
-      </p:sp>
-      <p:sp>
-        <p:nvSpPr>
-          <p:cNvPr id="18" name="rt-208"/>
-          <p:cNvSpPr/>
-          <p:nvPr/>
-        </p:nvSpPr>
-        <p:spPr>
-          <a:xfrm>
-            <a:off x="3291840" y="4343400"/>
-            <a:ext cx="2331720" cy="640080"/>
-          </a:xfrm>
-          <a:prstGeom prst="roundRect">
-            <a:avLst>
-              <a:gd name="adj" fmla="val 11429"/>
-            </a:avLst>
-          </a:prstGeom>
-          <a:solidFill>
-            <a:schemeClr val="bg2"/>
-          </a:solidFill>
-          <a:ln w="15875">
-            <a:solidFill>
-              <a:schemeClr val="accent4"/>
-            </a:solidFill>
-            <a:prstDash val="solid"/>
-          </a:ln>
-        </p:spPr>
-      </p:sp>
-      <p:sp>
-        <p:nvSpPr>
-          <p:cNvPr id="19" name="text-209"/>
+          <p:cNvPr id="15" name="text-212"/>
           <p:cNvSpPr txBox="1"/>
           <p:nvPr/>
         </p:nvSpPr>
         <p:spPr>
           <a:xfrm>
-            <a:off x="3364992" y="4343400"/>
-            <a:ext cx="2185416" cy="640080"/>
-          </a:xfrm>
-          <a:prstGeom prst="rect">
-            <a:avLst/>
-          </a:prstGeom>
-          <a:noFill/>
-          <a:ln/>
-        </p:spPr>
-        <p:txBody>
-          <a:bodyPr wrap="square" lIns="0" tIns="0" rIns="0" bIns="0" rtlCol="0" anchor="ctr"/>
-          <a:lstStyle/>
-          <a:p>
-            <a:pPr algn="ctr" indent="0" marL="0">
-              <a:buNone/>
-            </a:pPr>
-            <a:r>
-              <a:rPr lang="en-US" sz="1400" dirty="0">
+            <a:off x="6537960" y="2286000"/>
+            <a:ext cx="4873752" cy="3154680"/>
+          </a:xfrm>
+          <a:prstGeom prst="rect">
+            <a:avLst/>
+          </a:prstGeom>
+          <a:noFill/>
+          <a:ln/>
+        </p:spPr>
+        <p:txBody>
+          <a:bodyPr wrap="square" lIns="0" tIns="0" rIns="0" bIns="0" rtlCol="0" anchor="t"/>
+          <a:lstStyle/>
+          <a:p>
+            <a:pPr marL="203200" indent="-203200">
+              <a:spcAft>
+                <a:spcPts val="1600"/>
+              </a:spcAft>
+              <a:buSzPct val="100000"/>
+              <a:buChar char="•"/>
+            </a:pPr>
+            <a:r>
+              <a:rPr lang="en-US" sz="1700" b="1" dirty="0">
                 <a:solidFill>
                   <a:schemeClr val="tx1"/>
                 </a:solidFill>
               </a:rPr>
-              <a:t>AI 乙只看虛擬碼寫程式</a:t>
-            </a:r>
-            <a:endParaRPr lang="en-US" sz="1400" dirty="0"/>
-          </a:p>
-        </p:txBody>
-      </p:sp>
-      <p:sp>
-        <p:nvSpPr>
-          <p:cNvPr id="20" name="arrow-210"/>
-          <p:cNvSpPr/>
-          <p:nvPr/>
-        </p:nvSpPr>
-        <p:spPr>
-          <a:xfrm>
-            <a:off x="5650992" y="4663440"/>
-            <a:ext cx="356616" cy="0"/>
-          </a:xfrm>
-          <a:prstGeom prst="line">
-            <a:avLst/>
-          </a:prstGeom>
-          <a:noFill/>
-          <a:ln w="19050">
-            <a:solidFill>
-              <a:schemeClr val="accent4"/>
-            </a:solidFill>
-            <a:prstDash val="solid"/>
-            <a:tailEnd type="triangle"/>
-          </a:ln>
-        </p:spPr>
-      </p:sp>
-      <p:sp>
-        <p:nvSpPr>
-          <p:cNvPr id="21" name="rt-211"/>
-          <p:cNvSpPr/>
-          <p:nvPr/>
-        </p:nvSpPr>
-        <p:spPr>
-          <a:xfrm>
-            <a:off x="6035040" y="4343400"/>
-            <a:ext cx="2331720" cy="640080"/>
-          </a:xfrm>
-          <a:prstGeom prst="roundRect">
-            <a:avLst>
-              <a:gd name="adj" fmla="val 11429"/>
-            </a:avLst>
-          </a:prstGeom>
-          <a:solidFill>
-            <a:schemeClr val="bg2"/>
-          </a:solidFill>
-          <a:ln w="15875">
-            <a:solidFill>
-              <a:schemeClr val="accent4"/>
-            </a:solidFill>
-            <a:prstDash val="solid"/>
-          </a:ln>
-        </p:spPr>
-      </p:sp>
-      <p:sp>
-        <p:nvSpPr>
-          <p:cNvPr id="22" name="text-212"/>
+              <a:t>看不到程式碼：</a:t>
+            </a:r>
+            <a:pPr indent="0" marL="0">
+              <a:spcAft>
+                <a:spcPts val="1600"/>
+              </a:spcAft>
+              <a:buNone/>
+            </a:pPr>
+            <a:r>
+              <a:rPr lang="en-US" sz="1700" dirty="0">
+                <a:solidFill>
+                  <a:schemeClr val="tx1"/>
+                </a:solidFill>
+              </a:rPr>
+              <a:t>AI 結構上拿不到學生的程式，想代寫也辦不到</a:t>
+            </a:r>
+            <a:endParaRPr lang="en-US" sz="1700" dirty="0"/>
+          </a:p>
+          <a:p>
+            <a:pPr marL="203200" indent="-203200">
+              <a:spcAft>
+                <a:spcPts val="1600"/>
+              </a:spcAft>
+              <a:buSzPct val="100000"/>
+              <a:buChar char="•"/>
+            </a:pPr>
+            <a:r>
+              <a:rPr lang="en-US" sz="1700" b="1" dirty="0">
+                <a:solidFill>
+                  <a:schemeClr val="tx1"/>
+                </a:solidFill>
+              </a:rPr>
+              <a:t>虛擬碼當中間層：</a:t>
+            </a:r>
+            <a:pPr indent="0" marL="0">
+              <a:spcAft>
+                <a:spcPts val="1600"/>
+              </a:spcAft>
+              <a:buNone/>
+            </a:pPr>
+            <a:r>
+              <a:rPr lang="en-US" sz="1700" dirty="0">
+                <a:solidFill>
+                  <a:schemeClr val="tx1"/>
+                </a:solidFill>
+              </a:rPr>
+              <a:t>比文字提示具體，但不是能直接貼上的答案；先通過往返檢查才使用</a:t>
+            </a:r>
+            <a:endParaRPr lang="en-US" sz="1700" dirty="0"/>
+          </a:p>
+          <a:p>
+            <a:pPr marL="203200" indent="-203200">
+              <a:spcAft>
+                <a:spcPts val="1600"/>
+              </a:spcAft>
+              <a:buSzPct val="100000"/>
+              <a:buChar char="•"/>
+            </a:pPr>
+            <a:r>
+              <a:rPr lang="en-US" sz="1700" b="1" dirty="0">
+                <a:solidFill>
+                  <a:schemeClr val="tx1"/>
+                </a:solidFill>
+              </a:rPr>
+              <a:t>檢查關：</a:t>
+            </a:r>
+            <a:pPr indent="0" marL="0">
+              <a:spcAft>
+                <a:spcPts val="1600"/>
+              </a:spcAft>
+              <a:buNone/>
+            </a:pPr>
+            <a:r>
+              <a:rPr lang="en-US" sz="1700" dirty="0">
+                <a:solidFill>
+                  <a:schemeClr val="tx1"/>
+                </a:solidFill>
+              </a:rPr>
+              <a:t>擋下夾帶程式碼或照抄虛擬碼的提示</a:t>
+            </a:r>
+            <a:endParaRPr lang="en-US" sz="1700" dirty="0"/>
+          </a:p>
+        </p:txBody>
+      </p:sp>
+      <p:sp>
+        <p:nvSpPr>
+          <p:cNvPr id="16" name="text-213"/>
           <p:cNvSpPr txBox="1"/>
           <p:nvPr/>
         </p:nvSpPr>
         <p:spPr>
           <a:xfrm>
-            <a:off x="6108192" y="4343400"/>
-            <a:ext cx="2185416" cy="640080"/>
-          </a:xfrm>
-          <a:prstGeom prst="rect">
-            <a:avLst/>
-          </a:prstGeom>
-          <a:noFill/>
-          <a:ln/>
-        </p:spPr>
-        <p:txBody>
-          <a:bodyPr wrap="square" lIns="0" tIns="0" rIns="0" bIns="0" rtlCol="0" anchor="ctr"/>
-          <a:lstStyle/>
-          <a:p>
-            <a:pPr algn="ctr" indent="0" marL="0">
-              <a:buNone/>
-            </a:pPr>
-            <a:r>
-              <a:rPr lang="en-US" sz="1400" dirty="0">
-                <a:solidFill>
-                  <a:schemeClr val="tx1"/>
-                </a:solidFill>
-              </a:rPr>
-              <a:t>和正解行為一致才過關</a:t>
-            </a:r>
-            <a:endParaRPr lang="en-US" sz="1400" dirty="0"/>
-          </a:p>
-        </p:txBody>
-      </p:sp>
-      <p:sp>
-        <p:nvSpPr>
-          <p:cNvPr id="23" name="text-213"/>
-          <p:cNvSpPr txBox="1"/>
-          <p:nvPr/>
-        </p:nvSpPr>
-        <p:spPr>
-          <a:xfrm>
-            <a:off x="8915400" y="4343400"/>
-            <a:ext cx="2724912" cy="640080"/>
-          </a:xfrm>
-          <a:prstGeom prst="rect">
-            <a:avLst/>
-          </a:prstGeom>
-          <a:noFill/>
-          <a:ln/>
-        </p:spPr>
-        <p:txBody>
-          <a:bodyPr wrap="square" lIns="0" tIns="0" rIns="0" bIns="0" rtlCol="0" anchor="ctr"/>
-          <a:lstStyle/>
-          <a:p>
-            <a:pPr indent="0" marL="0">
-              <a:buNone/>
-            </a:pPr>
-            <a:r>
-              <a:rPr lang="en-US" sz="1400" b="1" dirty="0">
-                <a:solidFill>
-                  <a:schemeClr val="accent3"/>
-                </a:solidFill>
-              </a:rPr>
-              <a:t>三題各重複 3 次，都一次通過</a:t>
-            </a:r>
-            <a:endParaRPr lang="en-US" sz="1400" dirty="0"/>
-          </a:p>
-        </p:txBody>
-      </p:sp>
-      <p:sp>
-        <p:nvSpPr>
-          <p:cNvPr id="24" name="text-214"/>
-          <p:cNvSpPr txBox="1"/>
-          <p:nvPr/>
-        </p:nvSpPr>
-        <p:spPr>
-          <a:xfrm>
-            <a:off x="548640" y="5257800"/>
-            <a:ext cx="11094415" cy="777240"/>
+            <a:off x="548640" y="5715000"/>
+            <a:ext cx="11094415" cy="640080"/>
           </a:xfrm>
           <a:prstGeom prst="rect">
             <a:avLst/>
@@ -8900,28 +7257,25 @@
               <a:buNone/>
             </a:pPr>
             <a:r>
-              <a:rPr lang="en-US" sz="1400" dirty="0">
+              <a:rPr lang="en-US" sz="1500" b="1" dirty="0">
+                <a:solidFill>
+                  <a:schemeClr val="accent1"/>
+                </a:solidFill>
+              </a:rPr>
+              <a:t>意涵　</a:t>
+            </a:r>
+            <a:pPr indent="0" marL="0">
+              <a:buNone/>
+            </a:pPr>
+            <a:r>
+              <a:rPr lang="en-US" sz="1500" dirty="0">
                 <a:solidFill>
                   <a:schemeClr val="tx2"/>
                 </a:solidFill>
               </a:rPr>
-              <a:t>檢查關：夾帶程式碼或整段照抄虛擬碼 → 換成預設提示；題目頁可展開虛擬碼，所有人都看得到</a:t>
-            </a:r>
-            <a:endParaRPr lang="en-US" sz="1400" dirty="0"/>
-          </a:p>
-          <a:p>
-            <a:pPr indent="0" marL="0">
-              <a:buNone/>
-            </a:pPr>
-            <a:r>
-              <a:rPr lang="en-US" sz="1400" dirty="0">
-                <a:solidFill>
-                  <a:schemeClr val="tx2"/>
-                </a:solidFill>
-              </a:rPr>
-              <a:t>觀察：6 種錯誤各試 1 次都通過自動檢查；提示方向對不對，機器判斷不了</a:t>
-            </a:r>
-            <a:endParaRPr lang="en-US" sz="1400" dirty="0"/>
+              <a:t>在「太抽象沒用」與「太具體變答案」之間取中間層；提示方向好不好，機器判斷不了，仍需要人看</a:t>
+            </a:r>
+            <a:endParaRPr lang="en-US" sz="1500" dirty="0"/>
           </a:p>
         </p:txBody>
       </p:sp>
@@ -9071,7 +7425,7 @@
                   <a:schemeClr val="tx1"/>
                 </a:solidFill>
               </a:rPr>
-              <a:t>現場操作：從錯解到提示</a:t>
+              <a:t>Demo：對照文獻的設計原則來看</a:t>
             </a:r>
             <a:endParaRPr lang="en-US" sz="3000" dirty="0"/>
           </a:p>
@@ -9079,57 +7433,18 @@
       </p:sp>
       <p:sp>
         <p:nvSpPr>
-          <p:cNvPr id="5" name="text-215"/>
-          <p:cNvSpPr txBox="1"/>
-          <p:nvPr/>
-        </p:nvSpPr>
-        <p:spPr>
-          <a:xfrm>
-            <a:off x="548640" y="1691640"/>
-            <a:ext cx="640080" cy="822960"/>
-          </a:xfrm>
-          <a:prstGeom prst="rect">
-            <a:avLst/>
-          </a:prstGeom>
-          <a:noFill/>
-          <a:ln/>
-        </p:spPr>
-        <p:txBody>
-          <a:bodyPr wrap="square" lIns="0" tIns="0" rIns="0" bIns="0" rtlCol="0" anchor="ctr"/>
-          <a:lstStyle/>
-          <a:p>
-            <a:pPr indent="0" marL="0">
-              <a:buNone/>
-            </a:pPr>
-            <a:r>
-              <a:rPr lang="en-US" sz="3400" b="1" dirty="0">
-                <a:solidFill>
-                  <a:schemeClr val="accent1"/>
-                </a:solidFill>
-                <a:latin typeface="Consolas" pitchFamily="34" charset="0"/>
-                <a:ea typeface="Consolas" pitchFamily="34" charset="-122"/>
-                <a:cs typeface="Consolas" pitchFamily="34" charset="-120"/>
-              </a:rPr>
-              <a:t>1</a:t>
-            </a:r>
-            <a:endParaRPr lang="en-US" sz="3400" dirty="0"/>
-          </a:p>
-        </p:txBody>
-      </p:sp>
-      <p:sp>
-        <p:nvSpPr>
-          <p:cNvPr id="6" name="card-216"/>
+          <p:cNvPr id="5" name="card-214"/>
           <p:cNvSpPr/>
           <p:nvPr/>
         </p:nvSpPr>
         <p:spPr>
           <a:xfrm>
-            <a:off x="1325880" y="1691640"/>
-            <a:ext cx="10314432" cy="822960"/>
+            <a:off x="548640" y="1645920"/>
+            <a:ext cx="3520440" cy="2377440"/>
           </a:xfrm>
           <a:prstGeom prst="roundRect">
             <a:avLst>
-              <a:gd name="adj" fmla="val 8889"/>
+              <a:gd name="adj" fmla="val 3077"/>
             </a:avLst>
           </a:prstGeom>
           <a:solidFill>
@@ -9145,77 +7460,41 @@
       </p:sp>
       <p:sp>
         <p:nvSpPr>
-          <p:cNvPr id="7" name="text-217"/>
+          <p:cNvPr id="6" name="text-215"/>
           <p:cNvSpPr txBox="1"/>
           <p:nvPr/>
         </p:nvSpPr>
         <p:spPr>
           <a:xfrm>
-            <a:off x="1600200" y="1691640"/>
-            <a:ext cx="9875520" cy="822960"/>
-          </a:xfrm>
-          <a:prstGeom prst="rect">
-            <a:avLst/>
-          </a:prstGeom>
-          <a:noFill/>
-          <a:ln/>
-        </p:spPr>
-        <p:txBody>
-          <a:bodyPr wrap="square" lIns="0" tIns="0" rIns="0" bIns="0" rtlCol="0" anchor="ctr"/>
-          <a:lstStyle/>
-          <a:p>
-            <a:pPr indent="0" marL="0">
-              <a:buNone/>
-            </a:pPr>
-            <a:r>
-              <a:rPr lang="en-US" sz="1700" b="1" dirty="0">
-                <a:solidFill>
-                  <a:schemeClr val="tx1"/>
-                </a:solidFill>
-              </a:rPr>
-              <a:t>打開「最長合法括號」題目頁</a:t>
-            </a:r>
-            <a:pPr indent="0" marL="0">
-              <a:buNone/>
-            </a:pPr>
-            <a:r>
-              <a:rPr lang="en-US" sz="1700" dirty="0">
-                <a:solidFill>
-                  <a:schemeClr val="tx2"/>
-                </a:solidFill>
-              </a:rPr>
-              <a:t>　展開虛擬碼</a:t>
-            </a:r>
-            <a:endParaRPr lang="en-US" sz="1700" dirty="0"/>
-          </a:p>
-        </p:txBody>
-      </p:sp>
-      <p:sp>
-        <p:nvSpPr>
-          <p:cNvPr id="8" name="text-218"/>
-          <p:cNvSpPr txBox="1"/>
-          <p:nvPr/>
-        </p:nvSpPr>
-        <p:spPr>
-          <a:xfrm>
-            <a:off x="548640" y="2697480"/>
-            <a:ext cx="640080" cy="822960"/>
-          </a:xfrm>
-          <a:prstGeom prst="rect">
-            <a:avLst/>
-          </a:prstGeom>
-          <a:noFill/>
-          <a:ln/>
-        </p:spPr>
-        <p:txBody>
-          <a:bodyPr wrap="square" lIns="0" tIns="0" rIns="0" bIns="0" rtlCol="0" anchor="ctr"/>
-          <a:lstStyle/>
-          <a:p>
-            <a:pPr indent="0" marL="0">
-              <a:buNone/>
-            </a:pPr>
-            <a:r>
-              <a:rPr lang="en-US" sz="3400" b="1" dirty="0">
+            <a:off x="822960" y="1783080"/>
+            <a:ext cx="3017520" cy="365760"/>
+          </a:xfrm>
+          <a:prstGeom prst="rect">
+            <a:avLst/>
+          </a:prstGeom>
+          <a:noFill/>
+          <a:ln/>
+        </p:spPr>
+        <p:txBody>
+          <a:bodyPr wrap="square" lIns="0" tIns="0" rIns="0" bIns="0" rtlCol="0" anchor="t"/>
+          <a:lstStyle/>
+          <a:p>
+            <a:pPr indent="0" marL="0">
+              <a:buNone/>
+            </a:pPr>
+            <a:r>
+              <a:rPr lang="en-US" sz="1300" b="1" dirty="0">
+                <a:solidFill>
+                  <a:schemeClr val="accent1"/>
+                </a:solidFill>
+              </a:rPr>
+              <a:t>設計原則　</a:t>
+            </a:r>
+            <a:pPr indent="0" marL="0">
+              <a:buNone/>
+            </a:pPr>
+            <a:r>
+              <a:rPr lang="en-US" sz="1300" dirty="0">
                 <a:solidFill>
                   <a:schemeClr val="accent1"/>
                 </a:solidFill>
@@ -9223,26 +7502,112 @@
                 <a:ea typeface="Consolas" pitchFamily="34" charset="-122"/>
                 <a:cs typeface="Consolas" pitchFamily="34" charset="-120"/>
               </a:rPr>
-              <a:t>2</a:t>
-            </a:r>
-            <a:endParaRPr lang="en-US" sz="3400" dirty="0"/>
-          </a:p>
-        </p:txBody>
-      </p:sp>
-      <p:sp>
-        <p:nvSpPr>
-          <p:cNvPr id="9" name="card-219"/>
+              <a:t>[12]</a:t>
+            </a:r>
+            <a:endParaRPr lang="en-US" sz="1300" dirty="0"/>
+          </a:p>
+        </p:txBody>
+      </p:sp>
+      <p:sp>
+        <p:nvSpPr>
+          <p:cNvPr id="7" name="text-216"/>
+          <p:cNvSpPr txBox="1"/>
+          <p:nvPr/>
+        </p:nvSpPr>
+        <p:spPr>
+          <a:xfrm>
+            <a:off x="822960" y="2194560"/>
+            <a:ext cx="3017520" cy="457200"/>
+          </a:xfrm>
+          <a:prstGeom prst="rect">
+            <a:avLst/>
+          </a:prstGeom>
+          <a:noFill/>
+          <a:ln/>
+        </p:spPr>
+        <p:txBody>
+          <a:bodyPr wrap="square" lIns="0" tIns="0" rIns="0" bIns="0" rtlCol="0" anchor="t"/>
+          <a:lstStyle/>
+          <a:p>
+            <a:pPr indent="0" marL="0">
+              <a:buNone/>
+            </a:pPr>
+            <a:r>
+              <a:rPr lang="en-US" sz="2000" b="1" dirty="0">
+                <a:solidFill>
+                  <a:schemeClr val="tx1"/>
+                </a:solidFill>
+              </a:rPr>
+              <a:t>不給完整答案</a:t>
+            </a:r>
+            <a:endParaRPr lang="en-US" sz="2000" dirty="0"/>
+          </a:p>
+        </p:txBody>
+      </p:sp>
+      <p:sp>
+        <p:nvSpPr>
+          <p:cNvPr id="8" name="text-217"/>
+          <p:cNvSpPr txBox="1"/>
+          <p:nvPr/>
+        </p:nvSpPr>
+        <p:spPr>
+          <a:xfrm>
+            <a:off x="822960" y="2788920"/>
+            <a:ext cx="3017520" cy="1097280"/>
+          </a:xfrm>
+          <a:prstGeom prst="rect">
+            <a:avLst/>
+          </a:prstGeom>
+          <a:noFill/>
+          <a:ln/>
+        </p:spPr>
+        <p:txBody>
+          <a:bodyPr wrap="square" lIns="0" tIns="0" rIns="0" bIns="0" rtlCol="0" anchor="t"/>
+          <a:lstStyle/>
+          <a:p>
+            <a:pPr indent="0" marL="0">
+              <a:buNone/>
+            </a:pPr>
+            <a:r>
+              <a:rPr lang="en-US" sz="1500" b="1" dirty="0">
+                <a:solidFill>
+                  <a:schemeClr val="accent4"/>
+                </a:solidFill>
+              </a:rPr>
+              <a:t>Demo 時看：</a:t>
+            </a:r>
+            <a:endParaRPr lang="en-US" sz="1500" dirty="0"/>
+          </a:p>
+          <a:p>
+            <a:pPr indent="0" marL="0">
+              <a:buNone/>
+            </a:pPr>
+            <a:r>
+              <a:rPr lang="en-US" sz="1500" dirty="0">
+                <a:solidFill>
+                  <a:schemeClr val="tx2"/>
+                </a:solidFill>
+              </a:rPr>
+              <a:t>提示裡沒有可以直接貼上的程式</a:t>
+            </a:r>
+            <a:endParaRPr lang="en-US" sz="1500" dirty="0"/>
+          </a:p>
+        </p:txBody>
+      </p:sp>
+      <p:sp>
+        <p:nvSpPr>
+          <p:cNvPr id="9" name="card-218"/>
           <p:cNvSpPr/>
           <p:nvPr/>
         </p:nvSpPr>
         <p:spPr>
           <a:xfrm>
-            <a:off x="1325880" y="2697480"/>
-            <a:ext cx="10314432" cy="822960"/>
+            <a:off x="4297680" y="1645920"/>
+            <a:ext cx="3520440" cy="2377440"/>
           </a:xfrm>
           <a:prstGeom prst="roundRect">
             <a:avLst>
-              <a:gd name="adj" fmla="val 8889"/>
+              <a:gd name="adj" fmla="val 3077"/>
             </a:avLst>
           </a:prstGeom>
           <a:solidFill>
@@ -9258,77 +7623,41 @@
       </p:sp>
       <p:sp>
         <p:nvSpPr>
-          <p:cNvPr id="10" name="text-220"/>
+          <p:cNvPr id="10" name="text-219"/>
           <p:cNvSpPr txBox="1"/>
           <p:nvPr/>
         </p:nvSpPr>
         <p:spPr>
           <a:xfrm>
-            <a:off x="1600200" y="2697480"/>
-            <a:ext cx="9875520" cy="822960"/>
-          </a:xfrm>
-          <a:prstGeom prst="rect">
-            <a:avLst/>
-          </a:prstGeom>
-          <a:noFill/>
-          <a:ln/>
-        </p:spPr>
-        <p:txBody>
-          <a:bodyPr wrap="square" lIns="0" tIns="0" rIns="0" bIns="0" rtlCol="0" anchor="ctr"/>
-          <a:lstStyle/>
-          <a:p>
-            <a:pPr indent="0" marL="0">
-              <a:buNone/>
-            </a:pPr>
-            <a:r>
-              <a:rPr lang="en-US" sz="1700" b="1" dirty="0">
-                <a:solidFill>
-                  <a:schemeClr val="tx1"/>
-                </a:solidFill>
-              </a:rPr>
-              <a:t>交一份常見錯解</a:t>
-            </a:r>
-            <a:pPr indent="0" marL="0">
-              <a:buNone/>
-            </a:pPr>
-            <a:r>
-              <a:rPr lang="en-US" sz="1700" dirty="0">
-                <a:solidFill>
-                  <a:schemeClr val="tx2"/>
-                </a:solidFill>
-              </a:rPr>
-              <a:t>　例：只認相鄰的 ()，看第一道失敗的測資</a:t>
-            </a:r>
-            <a:endParaRPr lang="en-US" sz="1700" dirty="0"/>
-          </a:p>
-        </p:txBody>
-      </p:sp>
-      <p:sp>
-        <p:nvSpPr>
-          <p:cNvPr id="11" name="text-221"/>
-          <p:cNvSpPr txBox="1"/>
-          <p:nvPr/>
-        </p:nvSpPr>
-        <p:spPr>
-          <a:xfrm>
-            <a:off x="548640" y="3703320"/>
-            <a:ext cx="640080" cy="822960"/>
-          </a:xfrm>
-          <a:prstGeom prst="rect">
-            <a:avLst/>
-          </a:prstGeom>
-          <a:noFill/>
-          <a:ln/>
-        </p:spPr>
-        <p:txBody>
-          <a:bodyPr wrap="square" lIns="0" tIns="0" rIns="0" bIns="0" rtlCol="0" anchor="ctr"/>
-          <a:lstStyle/>
-          <a:p>
-            <a:pPr indent="0" marL="0">
-              <a:buNone/>
-            </a:pPr>
-            <a:r>
-              <a:rPr lang="en-US" sz="3400" b="1" dirty="0">
+            <a:off x="4572000" y="1783080"/>
+            <a:ext cx="3017520" cy="365760"/>
+          </a:xfrm>
+          <a:prstGeom prst="rect">
+            <a:avLst/>
+          </a:prstGeom>
+          <a:noFill/>
+          <a:ln/>
+        </p:spPr>
+        <p:txBody>
+          <a:bodyPr wrap="square" lIns="0" tIns="0" rIns="0" bIns="0" rtlCol="0" anchor="t"/>
+          <a:lstStyle/>
+          <a:p>
+            <a:pPr indent="0" marL="0">
+              <a:buNone/>
+            </a:pPr>
+            <a:r>
+              <a:rPr lang="en-US" sz="1300" b="1" dirty="0">
+                <a:solidFill>
+                  <a:schemeClr val="accent1"/>
+                </a:solidFill>
+              </a:rPr>
+              <a:t>設計原則　</a:t>
+            </a:r>
+            <a:pPr indent="0" marL="0">
+              <a:buNone/>
+            </a:pPr>
+            <a:r>
+              <a:rPr lang="en-US" sz="1300" dirty="0">
                 <a:solidFill>
                   <a:schemeClr val="accent1"/>
                 </a:solidFill>
@@ -9336,26 +7665,112 @@
                 <a:ea typeface="Consolas" pitchFamily="34" charset="-122"/>
                 <a:cs typeface="Consolas" pitchFamily="34" charset="-120"/>
               </a:rPr>
-              <a:t>3</a:t>
-            </a:r>
-            <a:endParaRPr lang="en-US" sz="3400" dirty="0"/>
-          </a:p>
-        </p:txBody>
-      </p:sp>
-      <p:sp>
-        <p:nvSpPr>
-          <p:cNvPr id="12" name="card-222"/>
+              <a:t>[11]</a:t>
+            </a:r>
+            <a:endParaRPr lang="en-US" sz="1300" dirty="0"/>
+          </a:p>
+        </p:txBody>
+      </p:sp>
+      <p:sp>
+        <p:nvSpPr>
+          <p:cNvPr id="11" name="text-220"/>
+          <p:cNvSpPr txBox="1"/>
+          <p:nvPr/>
+        </p:nvSpPr>
+        <p:spPr>
+          <a:xfrm>
+            <a:off x="4572000" y="2194560"/>
+            <a:ext cx="3017520" cy="457200"/>
+          </a:xfrm>
+          <a:prstGeom prst="rect">
+            <a:avLst/>
+          </a:prstGeom>
+          <a:noFill/>
+          <a:ln/>
+        </p:spPr>
+        <p:txBody>
+          <a:bodyPr wrap="square" lIns="0" tIns="0" rIns="0" bIns="0" rtlCol="0" anchor="t"/>
+          <a:lstStyle/>
+          <a:p>
+            <a:pPr indent="0" marL="0">
+              <a:buNone/>
+            </a:pPr>
+            <a:r>
+              <a:rPr lang="en-US" sz="2000" b="1" dirty="0">
+                <a:solidFill>
+                  <a:schemeClr val="tx1"/>
+                </a:solidFill>
+              </a:rPr>
+              <a:t>比文字提示更具體</a:t>
+            </a:r>
+            <a:endParaRPr lang="en-US" sz="2000" dirty="0"/>
+          </a:p>
+        </p:txBody>
+      </p:sp>
+      <p:sp>
+        <p:nvSpPr>
+          <p:cNvPr id="12" name="text-221"/>
+          <p:cNvSpPr txBox="1"/>
+          <p:nvPr/>
+        </p:nvSpPr>
+        <p:spPr>
+          <a:xfrm>
+            <a:off x="4572000" y="2788920"/>
+            <a:ext cx="3017520" cy="1097280"/>
+          </a:xfrm>
+          <a:prstGeom prst="rect">
+            <a:avLst/>
+          </a:prstGeom>
+          <a:noFill/>
+          <a:ln/>
+        </p:spPr>
+        <p:txBody>
+          <a:bodyPr wrap="square" lIns="0" tIns="0" rIns="0" bIns="0" rtlCol="0" anchor="t"/>
+          <a:lstStyle/>
+          <a:p>
+            <a:pPr indent="0" marL="0">
+              <a:buNone/>
+            </a:pPr>
+            <a:r>
+              <a:rPr lang="en-US" sz="1500" b="1" dirty="0">
+                <a:solidFill>
+                  <a:schemeClr val="accent4"/>
+                </a:solidFill>
+              </a:rPr>
+              <a:t>Demo 時看：</a:t>
+            </a:r>
+            <a:endParaRPr lang="en-US" sz="1500" dirty="0"/>
+          </a:p>
+          <a:p>
+            <a:pPr indent="0" marL="0">
+              <a:buNone/>
+            </a:pPr>
+            <a:r>
+              <a:rPr lang="en-US" sz="1500" dirty="0">
+                <a:solidFill>
+                  <a:schemeClr val="tx2"/>
+                </a:solidFill>
+              </a:rPr>
+              <a:t>提示會指到虛擬碼的步驟</a:t>
+            </a:r>
+            <a:endParaRPr lang="en-US" sz="1500" dirty="0"/>
+          </a:p>
+        </p:txBody>
+      </p:sp>
+      <p:sp>
+        <p:nvSpPr>
+          <p:cNvPr id="13" name="card-222"/>
           <p:cNvSpPr/>
           <p:nvPr/>
         </p:nvSpPr>
         <p:spPr>
           <a:xfrm>
-            <a:off x="1325880" y="3703320"/>
-            <a:ext cx="10314432" cy="822960"/>
+            <a:off x="8046720" y="1645920"/>
+            <a:ext cx="3520440" cy="2377440"/>
           </a:xfrm>
           <a:prstGeom prst="roundRect">
             <a:avLst>
-              <a:gd name="adj" fmla="val 8889"/>
+              <a:gd name="adj" fmla="val 3077"/>
             </a:avLst>
           </a:prstGeom>
           <a:solidFill>
@@ -9371,77 +7786,41 @@
       </p:sp>
       <p:sp>
         <p:nvSpPr>
-          <p:cNvPr id="13" name="text-223"/>
+          <p:cNvPr id="14" name="text-223"/>
           <p:cNvSpPr txBox="1"/>
           <p:nvPr/>
         </p:nvSpPr>
         <p:spPr>
           <a:xfrm>
-            <a:off x="1600200" y="3703320"/>
-            <a:ext cx="9875520" cy="822960"/>
-          </a:xfrm>
-          <a:prstGeom prst="rect">
-            <a:avLst/>
-          </a:prstGeom>
-          <a:noFill/>
-          <a:ln/>
-        </p:spPr>
-        <p:txBody>
-          <a:bodyPr wrap="square" lIns="0" tIns="0" rIns="0" bIns="0" rtlCol="0" anchor="ctr"/>
-          <a:lstStyle/>
-          <a:p>
-            <a:pPr indent="0" marL="0">
-              <a:buNone/>
-            </a:pPr>
-            <a:r>
-              <a:rPr lang="en-US" sz="1700" b="1" dirty="0">
-                <a:solidFill>
-                  <a:schemeClr val="tx1"/>
-                </a:solidFill>
-              </a:rPr>
-              <a:t>AI 給提示</a:t>
-            </a:r>
-            <a:pPr indent="0" marL="0">
-              <a:buNone/>
-            </a:pPr>
-            <a:r>
-              <a:rPr lang="en-US" sz="1700" dirty="0">
-                <a:solidFill>
-                  <a:schemeClr val="tx2"/>
-                </a:solidFill>
-              </a:rPr>
-              <a:t>　沒有程式碼、用問句引導，可能提到虛擬碼的步驟編號</a:t>
-            </a:r>
-            <a:endParaRPr lang="en-US" sz="1700" dirty="0"/>
-          </a:p>
-        </p:txBody>
-      </p:sp>
-      <p:sp>
-        <p:nvSpPr>
-          <p:cNvPr id="14" name="text-224"/>
-          <p:cNvSpPr txBox="1"/>
-          <p:nvPr/>
-        </p:nvSpPr>
-        <p:spPr>
-          <a:xfrm>
-            <a:off x="548640" y="4709160"/>
-            <a:ext cx="640080" cy="822960"/>
-          </a:xfrm>
-          <a:prstGeom prst="rect">
-            <a:avLst/>
-          </a:prstGeom>
-          <a:noFill/>
-          <a:ln/>
-        </p:spPr>
-        <p:txBody>
-          <a:bodyPr wrap="square" lIns="0" tIns="0" rIns="0" bIns="0" rtlCol="0" anchor="ctr"/>
-          <a:lstStyle/>
-          <a:p>
-            <a:pPr indent="0" marL="0">
-              <a:buNone/>
-            </a:pPr>
-            <a:r>
-              <a:rPr lang="en-US" sz="3400" b="1" dirty="0">
+            <a:off x="8321040" y="1783080"/>
+            <a:ext cx="3017520" cy="365760"/>
+          </a:xfrm>
+          <a:prstGeom prst="rect">
+            <a:avLst/>
+          </a:prstGeom>
+          <a:noFill/>
+          <a:ln/>
+        </p:spPr>
+        <p:txBody>
+          <a:bodyPr wrap="square" lIns="0" tIns="0" rIns="0" bIns="0" rtlCol="0" anchor="t"/>
+          <a:lstStyle/>
+          <a:p>
+            <a:pPr indent="0" marL="0">
+              <a:buNone/>
+            </a:pPr>
+            <a:r>
+              <a:rPr lang="en-US" sz="1300" b="1" dirty="0">
+                <a:solidFill>
+                  <a:schemeClr val="accent1"/>
+                </a:solidFill>
+              </a:rPr>
+              <a:t>設計原則　</a:t>
+            </a:r>
+            <a:pPr indent="0" marL="0">
+              <a:buNone/>
+            </a:pPr>
+            <a:r>
+              <a:rPr lang="en-US" sz="1300" dirty="0">
                 <a:solidFill>
                   <a:schemeClr val="accent1"/>
                 </a:solidFill>
@@ -9449,34 +7828,156 @@
                 <a:ea typeface="Consolas" pitchFamily="34" charset="-122"/>
                 <a:cs typeface="Consolas" pitchFamily="34" charset="-120"/>
               </a:rPr>
-              <a:t>4</a:t>
-            </a:r>
-            <a:endParaRPr lang="en-US" sz="3400" dirty="0"/>
-          </a:p>
-        </p:txBody>
-      </p:sp>
-      <p:sp>
-        <p:nvSpPr>
-          <p:cNvPr id="15" name="card-225"/>
+              <a:t>[12]</a:t>
+            </a:r>
+            <a:endParaRPr lang="en-US" sz="1300" dirty="0"/>
+          </a:p>
+        </p:txBody>
+      </p:sp>
+      <p:sp>
+        <p:nvSpPr>
+          <p:cNvPr id="15" name="text-224"/>
+          <p:cNvSpPr txBox="1"/>
+          <p:nvPr/>
+        </p:nvSpPr>
+        <p:spPr>
+          <a:xfrm>
+            <a:off x="8321040" y="2194560"/>
+            <a:ext cx="3017520" cy="457200"/>
+          </a:xfrm>
+          <a:prstGeom prst="rect">
+            <a:avLst/>
+          </a:prstGeom>
+          <a:noFill/>
+          <a:ln/>
+        </p:spPr>
+        <p:txBody>
+          <a:bodyPr wrap="square" lIns="0" tIns="0" rIns="0" bIns="0" rtlCol="0" anchor="t"/>
+          <a:lstStyle/>
+          <a:p>
+            <a:pPr indent="0" marL="0">
+              <a:buNone/>
+            </a:pPr>
+            <a:r>
+              <a:rPr lang="en-US" sz="2000" b="1" dirty="0">
+                <a:solidFill>
+                  <a:schemeClr val="tx1"/>
+                </a:solidFill>
+              </a:rPr>
+              <a:t>讓學生自己判斷</a:t>
+            </a:r>
+            <a:endParaRPr lang="en-US" sz="2000" dirty="0"/>
+          </a:p>
+        </p:txBody>
+      </p:sp>
+      <p:sp>
+        <p:nvSpPr>
+          <p:cNvPr id="16" name="text-225"/>
+          <p:cNvSpPr txBox="1"/>
+          <p:nvPr/>
+        </p:nvSpPr>
+        <p:spPr>
+          <a:xfrm>
+            <a:off x="8321040" y="2788920"/>
+            <a:ext cx="3017520" cy="1097280"/>
+          </a:xfrm>
+          <a:prstGeom prst="rect">
+            <a:avLst/>
+          </a:prstGeom>
+          <a:noFill/>
+          <a:ln/>
+        </p:spPr>
+        <p:txBody>
+          <a:bodyPr wrap="square" lIns="0" tIns="0" rIns="0" bIns="0" rtlCol="0" anchor="t"/>
+          <a:lstStyle/>
+          <a:p>
+            <a:pPr indent="0" marL="0">
+              <a:buNone/>
+            </a:pPr>
+            <a:r>
+              <a:rPr lang="en-US" sz="1500" b="1" dirty="0">
+                <a:solidFill>
+                  <a:schemeClr val="accent4"/>
+                </a:solidFill>
+              </a:rPr>
+              <a:t>Demo 時看：</a:t>
+            </a:r>
+            <a:endParaRPr lang="en-US" sz="1500" dirty="0"/>
+          </a:p>
+          <a:p>
+            <a:pPr indent="0" marL="0">
+              <a:buNone/>
+            </a:pPr>
+            <a:r>
+              <a:rPr lang="en-US" sz="1500" dirty="0">
+                <a:solidFill>
+                  <a:schemeClr val="tx2"/>
+                </a:solidFill>
+              </a:rPr>
+              <a:t>輸入、預期、實際結果都攤開</a:t>
+            </a:r>
+            <a:endParaRPr lang="en-US" sz="1500" dirty="0"/>
+          </a:p>
+        </p:txBody>
+      </p:sp>
+      <p:sp>
+        <p:nvSpPr>
+          <p:cNvPr id="17" name="text-226"/>
+          <p:cNvSpPr txBox="1"/>
+          <p:nvPr/>
+        </p:nvSpPr>
+        <p:spPr>
+          <a:xfrm>
+            <a:off x="548640" y="4297680"/>
+            <a:ext cx="1828800" cy="365760"/>
+          </a:xfrm>
+          <a:prstGeom prst="rect">
+            <a:avLst/>
+          </a:prstGeom>
+          <a:noFill/>
+          <a:ln/>
+        </p:spPr>
+        <p:txBody>
+          <a:bodyPr wrap="square" lIns="0" tIns="0" rIns="0" bIns="0" rtlCol="0" anchor="t"/>
+          <a:lstStyle/>
+          <a:p>
+            <a:pPr indent="0" marL="0">
+              <a:buNone/>
+            </a:pPr>
+            <a:r>
+              <a:rPr lang="en-US" sz="1600" b="1" dirty="0">
+                <a:solidFill>
+                  <a:schemeClr val="accent1"/>
+                </a:solidFill>
+              </a:rPr>
+              <a:t>操作</a:t>
+            </a:r>
+            <a:endParaRPr lang="en-US" sz="1600" dirty="0"/>
+          </a:p>
+        </p:txBody>
+      </p:sp>
+      <p:sp>
+        <p:nvSpPr>
+          <p:cNvPr id="18" name="demo-227"/>
           <p:cNvSpPr/>
           <p:nvPr/>
         </p:nvSpPr>
         <p:spPr>
           <a:xfrm>
-            <a:off x="1325880" y="4709160"/>
-            <a:ext cx="10314432" cy="822960"/>
+            <a:off x="548640" y="4709160"/>
+            <a:ext cx="3291840" cy="685800"/>
           </a:xfrm>
           <a:prstGeom prst="roundRect">
             <a:avLst>
-              <a:gd name="adj" fmla="val 8889"/>
+              <a:gd name="adj" fmla="val 10667"/>
             </a:avLst>
           </a:prstGeom>
           <a:solidFill>
             <a:schemeClr val="bg2"/>
           </a:solidFill>
-          <a:ln w="9525">
+          <a:ln w="15875">
             <a:solidFill>
-              <a:schemeClr val="accent6"/>
+              <a:schemeClr val="accent1"/>
             </a:solidFill>
             <a:prstDash val="solid"/>
           </a:ln>
@@ -9484,14 +7985,14 @@
       </p:sp>
       <p:sp>
         <p:nvSpPr>
-          <p:cNvPr id="16" name="text-226"/>
+          <p:cNvPr id="19" name="text-228"/>
           <p:cNvSpPr txBox="1"/>
           <p:nvPr/>
         </p:nvSpPr>
         <p:spPr>
           <a:xfrm>
-            <a:off x="1600200" y="4709160"/>
-            <a:ext cx="9875520" cy="822960"/>
+            <a:off x="731520" y="4709160"/>
+            <a:ext cx="3017520" cy="685800"/>
           </a:xfrm>
           <a:prstGeom prst="rect">
             <a:avLst/>
@@ -9507,37 +8008,200 @@
               <a:buNone/>
             </a:pPr>
             <a:r>
-              <a:rPr lang="en-US" sz="1700" b="1" dirty="0">
+              <a:rPr lang="en-US" sz="1500" dirty="0">
                 <a:solidFill>
                   <a:schemeClr val="tx1"/>
                 </a:solidFill>
               </a:rPr>
-              <a:t>（有時間）終端機看流程</a:t>
-            </a:r>
-            <a:pPr indent="0" marL="0">
-              <a:buNone/>
-            </a:pPr>
-            <a:r>
-              <a:rPr lang="en-US" sz="1700" dirty="0">
-                <a:solidFill>
-                  <a:schemeClr val="tx2"/>
-                </a:solidFill>
-              </a:rPr>
-              <a:t>　pipeline --plan：每一輪的測資數與 TNR</a:t>
-            </a:r>
-            <a:endParaRPr lang="en-US" sz="1700" dirty="0"/>
-          </a:p>
-        </p:txBody>
-      </p:sp>
-      <p:sp>
-        <p:nvSpPr>
-          <p:cNvPr id="17" name="text-227"/>
+              <a:t>1　打開題目頁、展開虛擬碼</a:t>
+            </a:r>
+            <a:endParaRPr lang="en-US" sz="1500" dirty="0"/>
+          </a:p>
+        </p:txBody>
+      </p:sp>
+      <p:sp>
+        <p:nvSpPr>
+          <p:cNvPr id="20" name="arrow-229"/>
+          <p:cNvSpPr/>
+          <p:nvPr/>
+        </p:nvSpPr>
+        <p:spPr>
+          <a:xfrm>
+            <a:off x="3867912" y="5052060"/>
+            <a:ext cx="402336" cy="0"/>
+          </a:xfrm>
+          <a:prstGeom prst="line">
+            <a:avLst/>
+          </a:prstGeom>
+          <a:noFill/>
+          <a:ln w="19050">
+            <a:solidFill>
+              <a:schemeClr val="accent1"/>
+            </a:solidFill>
+            <a:prstDash val="solid"/>
+            <a:tailEnd type="triangle"/>
+          </a:ln>
+        </p:spPr>
+      </p:sp>
+      <p:sp>
+        <p:nvSpPr>
+          <p:cNvPr id="21" name="demo-230"/>
+          <p:cNvSpPr/>
+          <p:nvPr/>
+        </p:nvSpPr>
+        <p:spPr>
+          <a:xfrm>
+            <a:off x="4297680" y="4709160"/>
+            <a:ext cx="3291840" cy="685800"/>
+          </a:xfrm>
+          <a:prstGeom prst="roundRect">
+            <a:avLst>
+              <a:gd name="adj" fmla="val 10667"/>
+            </a:avLst>
+          </a:prstGeom>
+          <a:solidFill>
+            <a:schemeClr val="bg2"/>
+          </a:solidFill>
+          <a:ln w="15875">
+            <a:solidFill>
+              <a:schemeClr val="accent1"/>
+            </a:solidFill>
+            <a:prstDash val="solid"/>
+          </a:ln>
+        </p:spPr>
+      </p:sp>
+      <p:sp>
+        <p:nvSpPr>
+          <p:cNvPr id="22" name="text-231"/>
           <p:cNvSpPr txBox="1"/>
           <p:nvPr/>
         </p:nvSpPr>
         <p:spPr>
           <a:xfrm>
-            <a:off x="548640" y="5806440"/>
+            <a:off x="4480560" y="4709160"/>
+            <a:ext cx="3017520" cy="685800"/>
+          </a:xfrm>
+          <a:prstGeom prst="rect">
+            <a:avLst/>
+          </a:prstGeom>
+          <a:noFill/>
+          <a:ln/>
+        </p:spPr>
+        <p:txBody>
+          <a:bodyPr wrap="square" lIns="0" tIns="0" rIns="0" bIns="0" rtlCol="0" anchor="ctr"/>
+          <a:lstStyle/>
+          <a:p>
+            <a:pPr indent="0" marL="0">
+              <a:buNone/>
+            </a:pPr>
+            <a:r>
+              <a:rPr lang="en-US" sz="1500" dirty="0">
+                <a:solidFill>
+                  <a:schemeClr val="tx1"/>
+                </a:solidFill>
+              </a:rPr>
+              <a:t>2　交一份常見錯解</a:t>
+            </a:r>
+            <a:endParaRPr lang="en-US" sz="1500" dirty="0"/>
+          </a:p>
+        </p:txBody>
+      </p:sp>
+      <p:sp>
+        <p:nvSpPr>
+          <p:cNvPr id="23" name="arrow-232"/>
+          <p:cNvSpPr/>
+          <p:nvPr/>
+        </p:nvSpPr>
+        <p:spPr>
+          <a:xfrm>
+            <a:off x="7616952" y="5052060"/>
+            <a:ext cx="402336" cy="0"/>
+          </a:xfrm>
+          <a:prstGeom prst="line">
+            <a:avLst/>
+          </a:prstGeom>
+          <a:noFill/>
+          <a:ln w="19050">
+            <a:solidFill>
+              <a:schemeClr val="accent1"/>
+            </a:solidFill>
+            <a:prstDash val="solid"/>
+            <a:tailEnd type="triangle"/>
+          </a:ln>
+        </p:spPr>
+      </p:sp>
+      <p:sp>
+        <p:nvSpPr>
+          <p:cNvPr id="24" name="demo-233"/>
+          <p:cNvSpPr/>
+          <p:nvPr/>
+        </p:nvSpPr>
+        <p:spPr>
+          <a:xfrm>
+            <a:off x="8046720" y="4709160"/>
+            <a:ext cx="3291840" cy="685800"/>
+          </a:xfrm>
+          <a:prstGeom prst="roundRect">
+            <a:avLst>
+              <a:gd name="adj" fmla="val 10667"/>
+            </a:avLst>
+          </a:prstGeom>
+          <a:solidFill>
+            <a:schemeClr val="bg2"/>
+          </a:solidFill>
+          <a:ln w="15875">
+            <a:solidFill>
+              <a:schemeClr val="accent1"/>
+            </a:solidFill>
+            <a:prstDash val="solid"/>
+          </a:ln>
+        </p:spPr>
+      </p:sp>
+      <p:sp>
+        <p:nvSpPr>
+          <p:cNvPr id="25" name="text-234"/>
+          <p:cNvSpPr txBox="1"/>
+          <p:nvPr/>
+        </p:nvSpPr>
+        <p:spPr>
+          <a:xfrm>
+            <a:off x="8229600" y="4709160"/>
+            <a:ext cx="3017520" cy="685800"/>
+          </a:xfrm>
+          <a:prstGeom prst="rect">
+            <a:avLst/>
+          </a:prstGeom>
+          <a:noFill/>
+          <a:ln/>
+        </p:spPr>
+        <p:txBody>
+          <a:bodyPr wrap="square" lIns="0" tIns="0" rIns="0" bIns="0" rtlCol="0" anchor="ctr"/>
+          <a:lstStyle/>
+          <a:p>
+            <a:pPr indent="0" marL="0">
+              <a:buNone/>
+            </a:pPr>
+            <a:r>
+              <a:rPr lang="en-US" sz="1500" dirty="0">
+                <a:solidFill>
+                  <a:schemeClr val="tx1"/>
+                </a:solidFill>
+              </a:rPr>
+              <a:t>3　看系統怎麼判、AI 怎麼提示</a:t>
+            </a:r>
+            <a:endParaRPr lang="en-US" sz="1500" dirty="0"/>
+          </a:p>
+        </p:txBody>
+      </p:sp>
+      <p:sp>
+        <p:nvSpPr>
+          <p:cNvPr id="26" name="text-235"/>
+          <p:cNvSpPr txBox="1"/>
+          <p:nvPr/>
+        </p:nvSpPr>
+        <p:spPr>
+          <a:xfrm>
+            <a:off x="548640" y="5669280"/>
             <a:ext cx="11094415" cy="365760"/>
           </a:xfrm>
           <a:prstGeom prst="rect">
@@ -9719,7 +8383,7 @@
       </p:sp>
       <p:sp>
         <p:nvSpPr>
-          <p:cNvPr id="5" name="card-228"/>
+          <p:cNvPr id="5" name="card-236"/>
           <p:cNvSpPr/>
           <p:nvPr/>
         </p:nvSpPr>
@@ -9746,7 +8410,7 @@
       </p:sp>
       <p:sp>
         <p:nvSpPr>
-          <p:cNvPr id="6" name="text-229"/>
+          <p:cNvPr id="6" name="text-237"/>
           <p:cNvSpPr txBox="1"/>
           <p:nvPr/>
         </p:nvSpPr>
@@ -9782,7 +8446,7 @@
       </p:sp>
       <p:sp>
         <p:nvSpPr>
-          <p:cNvPr id="7" name="text-230"/>
+          <p:cNvPr id="7" name="text-238"/>
           <p:cNvSpPr txBox="1"/>
           <p:nvPr/>
         </p:nvSpPr>
@@ -9818,7 +8482,7 @@
       </p:sp>
       <p:sp>
         <p:nvSpPr>
-          <p:cNvPr id="8" name="card-231"/>
+          <p:cNvPr id="8" name="card-239"/>
           <p:cNvSpPr/>
           <p:nvPr/>
         </p:nvSpPr>
@@ -9845,7 +8509,7 @@
       </p:sp>
       <p:sp>
         <p:nvSpPr>
-          <p:cNvPr id="9" name="text-232"/>
+          <p:cNvPr id="9" name="text-240"/>
           <p:cNvSpPr txBox="1"/>
           <p:nvPr/>
         </p:nvSpPr>
@@ -9881,7 +8545,7 @@
       </p:sp>
       <p:sp>
         <p:nvSpPr>
-          <p:cNvPr id="10" name="text-233"/>
+          <p:cNvPr id="10" name="text-241"/>
           <p:cNvSpPr txBox="1"/>
           <p:nvPr/>
         </p:nvSpPr>
@@ -9917,7 +8581,7 @@
       </p:sp>
       <p:sp>
         <p:nvSpPr>
-          <p:cNvPr id="11" name="card-234"/>
+          <p:cNvPr id="11" name="card-242"/>
           <p:cNvSpPr/>
           <p:nvPr/>
         </p:nvSpPr>
@@ -9944,7 +8608,7 @@
       </p:sp>
       <p:sp>
         <p:nvSpPr>
-          <p:cNvPr id="12" name="text-235"/>
+          <p:cNvPr id="12" name="text-243"/>
           <p:cNvSpPr txBox="1"/>
           <p:nvPr/>
         </p:nvSpPr>
@@ -9980,7 +8644,7 @@
       </p:sp>
       <p:sp>
         <p:nvSpPr>
-          <p:cNvPr id="13" name="text-236"/>
+          <p:cNvPr id="13" name="text-244"/>
           <p:cNvSpPr txBox="1"/>
           <p:nvPr/>
         </p:nvSpPr>
@@ -10016,7 +8680,7 @@
       </p:sp>
       <p:sp>
         <p:nvSpPr>
-          <p:cNvPr id="14" name="card-237"/>
+          <p:cNvPr id="14" name="card-245"/>
           <p:cNvSpPr/>
           <p:nvPr/>
         </p:nvSpPr>
@@ -10043,7 +8707,7 @@
       </p:sp>
       <p:sp>
         <p:nvSpPr>
-          <p:cNvPr id="15" name="text-238"/>
+          <p:cNvPr id="15" name="text-246"/>
           <p:cNvSpPr txBox="1"/>
           <p:nvPr/>
         </p:nvSpPr>
@@ -10079,7 +8743,7 @@
       </p:sp>
       <p:sp>
         <p:nvSpPr>
-          <p:cNvPr id="16" name="text-239"/>
+          <p:cNvPr id="16" name="text-247"/>
           <p:cNvSpPr txBox="1"/>
           <p:nvPr/>
         </p:nvSpPr>
@@ -10115,7 +8779,7 @@
       </p:sp>
       <p:sp>
         <p:nvSpPr>
-          <p:cNvPr id="17" name="card-240"/>
+          <p:cNvPr id="17" name="card-248"/>
           <p:cNvSpPr/>
           <p:nvPr/>
         </p:nvSpPr>
@@ -10142,7 +8806,7 @@
       </p:sp>
       <p:sp>
         <p:nvSpPr>
-          <p:cNvPr id="18" name="text-241"/>
+          <p:cNvPr id="18" name="text-249"/>
           <p:cNvSpPr txBox="1"/>
           <p:nvPr/>
         </p:nvSpPr>
@@ -10178,7 +8842,7 @@
       </p:sp>
       <p:sp>
         <p:nvSpPr>
-          <p:cNvPr id="19" name="text-242"/>
+          <p:cNvPr id="19" name="text-250"/>
           <p:cNvSpPr txBox="1"/>
           <p:nvPr/>
         </p:nvSpPr>
@@ -10214,7 +8878,7 @@
       </p:sp>
       <p:sp>
         <p:nvSpPr>
-          <p:cNvPr id="20" name="card-243"/>
+          <p:cNvPr id="20" name="card-251"/>
           <p:cNvSpPr/>
           <p:nvPr/>
         </p:nvSpPr>
@@ -10241,7 +8905,7 @@
       </p:sp>
       <p:sp>
         <p:nvSpPr>
-          <p:cNvPr id="21" name="text-244"/>
+          <p:cNvPr id="21" name="text-252"/>
           <p:cNvSpPr txBox="1"/>
           <p:nvPr/>
         </p:nvSpPr>
@@ -10277,7 +8941,7 @@
       </p:sp>
       <p:sp>
         <p:nvSpPr>
-          <p:cNvPr id="22" name="text-245"/>
+          <p:cNvPr id="22" name="text-253"/>
           <p:cNvSpPr txBox="1"/>
           <p:nvPr/>
         </p:nvSpPr>
@@ -10479,7 +9143,7 @@
       </p:sp>
       <p:sp>
         <p:nvSpPr>
-          <p:cNvPr id="5" name="card-246"/>
+          <p:cNvPr id="5" name="card-254"/>
           <p:cNvSpPr/>
           <p:nvPr/>
         </p:nvSpPr>
@@ -10506,7 +9170,7 @@
       </p:sp>
       <p:sp>
         <p:nvSpPr>
-          <p:cNvPr id="6" name="text-247"/>
+          <p:cNvPr id="6" name="text-255"/>
           <p:cNvSpPr txBox="1"/>
           <p:nvPr/>
         </p:nvSpPr>
@@ -10542,7 +9206,7 @@
       </p:sp>
       <p:sp>
         <p:nvSpPr>
-          <p:cNvPr id="7" name="text-248"/>
+          <p:cNvPr id="7" name="text-256"/>
           <p:cNvSpPr txBox="1"/>
           <p:nvPr/>
         </p:nvSpPr>
@@ -10578,7 +9242,7 @@
       </p:sp>
       <p:sp>
         <p:nvSpPr>
-          <p:cNvPr id="8" name="card-249"/>
+          <p:cNvPr id="8" name="card-257"/>
           <p:cNvSpPr/>
           <p:nvPr/>
         </p:nvSpPr>
@@ -10605,7 +9269,7 @@
       </p:sp>
       <p:sp>
         <p:nvSpPr>
-          <p:cNvPr id="9" name="text-250"/>
+          <p:cNvPr id="9" name="text-258"/>
           <p:cNvSpPr txBox="1"/>
           <p:nvPr/>
         </p:nvSpPr>
@@ -10641,7 +9305,7 @@
       </p:sp>
       <p:sp>
         <p:nvSpPr>
-          <p:cNvPr id="10" name="text-251"/>
+          <p:cNvPr id="10" name="text-259"/>
           <p:cNvSpPr txBox="1"/>
           <p:nvPr/>
         </p:nvSpPr>
@@ -10691,7 +9355,7 @@
       </p:sp>
       <p:sp>
         <p:nvSpPr>
-          <p:cNvPr id="11" name="text-252"/>
+          <p:cNvPr id="11" name="text-260"/>
           <p:cNvSpPr txBox="1"/>
           <p:nvPr/>
         </p:nvSpPr>
@@ -10741,7 +9405,7 @@
       </p:sp>
       <p:sp>
         <p:nvSpPr>
-          <p:cNvPr id="12" name="text-253"/>
+          <p:cNvPr id="12" name="text-261"/>
           <p:cNvSpPr txBox="1"/>
           <p:nvPr/>
         </p:nvSpPr>
@@ -10921,6 +9585,533 @@
                   <a:schemeClr val="tx1"/>
                 </a:solidFill>
               </a:rPr>
+              <a:t>參考文獻</a:t>
+            </a:r>
+            <a:endParaRPr lang="en-US" sz="3000" dirty="0"/>
+          </a:p>
+        </p:txBody>
+      </p:sp>
+      <p:sp>
+        <p:nvSpPr>
+          <p:cNvPr id="5" name="text-262"/>
+          <p:cNvSpPr txBox="1"/>
+          <p:nvPr/>
+        </p:nvSpPr>
+        <p:spPr>
+          <a:xfrm>
+            <a:off x="548640" y="1645920"/>
+            <a:ext cx="731520" cy="731520"/>
+          </a:xfrm>
+          <a:prstGeom prst="rect">
+            <a:avLst/>
+          </a:prstGeom>
+          <a:noFill/>
+          <a:ln/>
+        </p:spPr>
+        <p:txBody>
+          <a:bodyPr wrap="square" lIns="0" tIns="0" rIns="0" bIns="0" rtlCol="0" anchor="t"/>
+          <a:lstStyle/>
+          <a:p>
+            <a:pPr indent="0" marL="0">
+              <a:buNone/>
+            </a:pPr>
+            <a:r>
+              <a:rPr lang="en-US" sz="1500" b="1" dirty="0">
+                <a:solidFill>
+                  <a:schemeClr val="accent1"/>
+                </a:solidFill>
+                <a:latin typeface="Consolas" pitchFamily="34" charset="0"/>
+                <a:ea typeface="Consolas" pitchFamily="34" charset="-122"/>
+                <a:cs typeface="Consolas" pitchFamily="34" charset="-120"/>
+              </a:rPr>
+              <a:t>[1]</a:t>
+            </a:r>
+            <a:endParaRPr lang="en-US" sz="1500" dirty="0"/>
+          </a:p>
+        </p:txBody>
+      </p:sp>
+      <p:sp>
+        <p:nvSpPr>
+          <p:cNvPr id="6" name="text-263"/>
+          <p:cNvSpPr txBox="1"/>
+          <p:nvPr/>
+        </p:nvSpPr>
+        <p:spPr>
+          <a:xfrm>
+            <a:off x="1371600" y="1645920"/>
+            <a:ext cx="10271455" cy="777240"/>
+          </a:xfrm>
+          <a:prstGeom prst="rect">
+            <a:avLst/>
+          </a:prstGeom>
+          <a:noFill/>
+          <a:ln/>
+        </p:spPr>
+        <p:txBody>
+          <a:bodyPr wrap="square" lIns="0" tIns="0" rIns="0" bIns="0" rtlCol="0" anchor="t"/>
+          <a:lstStyle/>
+          <a:p>
+            <a:pPr indent="0" marL="0">
+              <a:buNone/>
+            </a:pPr>
+            <a:r>
+              <a:rPr lang="en-US" sz="1400" dirty="0">
+                <a:solidFill>
+                  <a:schemeClr val="tx1"/>
+                </a:solidFill>
+              </a:rPr>
+              <a:t>J. Cai et al., "CodeContests-O: Powering LLMs via Feedback-Driven Iterative Test Case Generation," arXiv:2601.13682, 2026.</a:t>
+            </a:r>
+            <a:endParaRPr lang="en-US" sz="1400" dirty="0"/>
+          </a:p>
+        </p:txBody>
+      </p:sp>
+      <p:sp>
+        <p:nvSpPr>
+          <p:cNvPr id="7" name="text-264"/>
+          <p:cNvSpPr txBox="1"/>
+          <p:nvPr/>
+        </p:nvSpPr>
+        <p:spPr>
+          <a:xfrm>
+            <a:off x="548640" y="2514600"/>
+            <a:ext cx="731520" cy="731520"/>
+          </a:xfrm>
+          <a:prstGeom prst="rect">
+            <a:avLst/>
+          </a:prstGeom>
+          <a:noFill/>
+          <a:ln/>
+        </p:spPr>
+        <p:txBody>
+          <a:bodyPr wrap="square" lIns="0" tIns="0" rIns="0" bIns="0" rtlCol="0" anchor="t"/>
+          <a:lstStyle/>
+          <a:p>
+            <a:pPr indent="0" marL="0">
+              <a:buNone/>
+            </a:pPr>
+            <a:r>
+              <a:rPr lang="en-US" sz="1500" b="1" dirty="0">
+                <a:solidFill>
+                  <a:schemeClr val="accent1"/>
+                </a:solidFill>
+                <a:latin typeface="Consolas" pitchFamily="34" charset="0"/>
+                <a:ea typeface="Consolas" pitchFamily="34" charset="-122"/>
+                <a:cs typeface="Consolas" pitchFamily="34" charset="-120"/>
+              </a:rPr>
+              <a:t>[9]</a:t>
+            </a:r>
+            <a:endParaRPr lang="en-US" sz="1500" dirty="0"/>
+          </a:p>
+        </p:txBody>
+      </p:sp>
+      <p:sp>
+        <p:nvSpPr>
+          <p:cNvPr id="8" name="text-265"/>
+          <p:cNvSpPr txBox="1"/>
+          <p:nvPr/>
+        </p:nvSpPr>
+        <p:spPr>
+          <a:xfrm>
+            <a:off x="1371600" y="2514600"/>
+            <a:ext cx="10271455" cy="777240"/>
+          </a:xfrm>
+          <a:prstGeom prst="rect">
+            <a:avLst/>
+          </a:prstGeom>
+          <a:noFill/>
+          <a:ln/>
+        </p:spPr>
+        <p:txBody>
+          <a:bodyPr wrap="square" lIns="0" tIns="0" rIns="0" bIns="0" rtlCol="0" anchor="t"/>
+          <a:lstStyle/>
+          <a:p>
+            <a:pPr indent="0" marL="0">
+              <a:buNone/>
+            </a:pPr>
+            <a:r>
+              <a:rPr lang="en-US" sz="1400" dirty="0">
+                <a:solidFill>
+                  <a:schemeClr val="tx1"/>
+                </a:solidFill>
+              </a:rPr>
+              <a:t>X. Wang et al., "Human-LLM Collaborative Annotation Through Effective Verification of LLM Labels," in Proc. CHI '24, 2024.</a:t>
+            </a:r>
+            <a:endParaRPr lang="en-US" sz="1400" dirty="0"/>
+          </a:p>
+        </p:txBody>
+      </p:sp>
+      <p:sp>
+        <p:nvSpPr>
+          <p:cNvPr id="9" name="text-266"/>
+          <p:cNvSpPr txBox="1"/>
+          <p:nvPr/>
+        </p:nvSpPr>
+        <p:spPr>
+          <a:xfrm>
+            <a:off x="548640" y="3383280"/>
+            <a:ext cx="731520" cy="731520"/>
+          </a:xfrm>
+          <a:prstGeom prst="rect">
+            <a:avLst/>
+          </a:prstGeom>
+          <a:noFill/>
+          <a:ln/>
+        </p:spPr>
+        <p:txBody>
+          <a:bodyPr wrap="square" lIns="0" tIns="0" rIns="0" bIns="0" rtlCol="0" anchor="t"/>
+          <a:lstStyle/>
+          <a:p>
+            <a:pPr indent="0" marL="0">
+              <a:buNone/>
+            </a:pPr>
+            <a:r>
+              <a:rPr lang="en-US" sz="1500" b="1" dirty="0">
+                <a:solidFill>
+                  <a:schemeClr val="accent1"/>
+                </a:solidFill>
+                <a:latin typeface="Consolas" pitchFamily="34" charset="0"/>
+                <a:ea typeface="Consolas" pitchFamily="34" charset="-122"/>
+                <a:cs typeface="Consolas" pitchFamily="34" charset="-120"/>
+              </a:rPr>
+              <a:t>[11]</a:t>
+            </a:r>
+            <a:endParaRPr lang="en-US" sz="1500" dirty="0"/>
+          </a:p>
+        </p:txBody>
+      </p:sp>
+      <p:sp>
+        <p:nvSpPr>
+          <p:cNvPr id="10" name="text-267"/>
+          <p:cNvSpPr txBox="1"/>
+          <p:nvPr/>
+        </p:nvSpPr>
+        <p:spPr>
+          <a:xfrm>
+            <a:off x="1371600" y="3383280"/>
+            <a:ext cx="10271455" cy="777240"/>
+          </a:xfrm>
+          <a:prstGeom prst="rect">
+            <a:avLst/>
+          </a:prstGeom>
+          <a:noFill/>
+          <a:ln/>
+        </p:spPr>
+        <p:txBody>
+          <a:bodyPr wrap="square" lIns="0" tIns="0" rIns="0" bIns="0" rtlCol="0" anchor="t"/>
+          <a:lstStyle/>
+          <a:p>
+            <a:pPr indent="0" marL="0">
+              <a:buNone/>
+            </a:pPr>
+            <a:r>
+              <a:rPr lang="en-US" sz="1400" dirty="0">
+                <a:solidFill>
+                  <a:schemeClr val="tx1"/>
+                </a:solidFill>
+              </a:rPr>
+              <a:t>R. Xiao, X. Hou, and J. Stamper, "Exploring How Multiple Levels of GPT-Generated Programming Hints Support or Disappoint Novices," arXiv:2404.02213, 2024.</a:t>
+            </a:r>
+            <a:endParaRPr lang="en-US" sz="1400" dirty="0"/>
+          </a:p>
+        </p:txBody>
+      </p:sp>
+      <p:sp>
+        <p:nvSpPr>
+          <p:cNvPr id="11" name="text-268"/>
+          <p:cNvSpPr txBox="1"/>
+          <p:nvPr/>
+        </p:nvSpPr>
+        <p:spPr>
+          <a:xfrm>
+            <a:off x="548640" y="4251960"/>
+            <a:ext cx="731520" cy="731520"/>
+          </a:xfrm>
+          <a:prstGeom prst="rect">
+            <a:avLst/>
+          </a:prstGeom>
+          <a:noFill/>
+          <a:ln/>
+        </p:spPr>
+        <p:txBody>
+          <a:bodyPr wrap="square" lIns="0" tIns="0" rIns="0" bIns="0" rtlCol="0" anchor="t"/>
+          <a:lstStyle/>
+          <a:p>
+            <a:pPr indent="0" marL="0">
+              <a:buNone/>
+            </a:pPr>
+            <a:r>
+              <a:rPr lang="en-US" sz="1500" b="1" dirty="0">
+                <a:solidFill>
+                  <a:schemeClr val="accent1"/>
+                </a:solidFill>
+                <a:latin typeface="Consolas" pitchFamily="34" charset="0"/>
+                <a:ea typeface="Consolas" pitchFamily="34" charset="-122"/>
+                <a:cs typeface="Consolas" pitchFamily="34" charset="-120"/>
+              </a:rPr>
+              <a:t>[12]</a:t>
+            </a:r>
+            <a:endParaRPr lang="en-US" sz="1500" dirty="0"/>
+          </a:p>
+        </p:txBody>
+      </p:sp>
+      <p:sp>
+        <p:nvSpPr>
+          <p:cNvPr id="12" name="text-269"/>
+          <p:cNvSpPr txBox="1"/>
+          <p:nvPr/>
+        </p:nvSpPr>
+        <p:spPr>
+          <a:xfrm>
+            <a:off x="1371600" y="4251960"/>
+            <a:ext cx="10271455" cy="777240"/>
+          </a:xfrm>
+          <a:prstGeom prst="rect">
+            <a:avLst/>
+          </a:prstGeom>
+          <a:noFill/>
+          <a:ln/>
+        </p:spPr>
+        <p:txBody>
+          <a:bodyPr wrap="square" lIns="0" tIns="0" rIns="0" bIns="0" rtlCol="0" anchor="t"/>
+          <a:lstStyle/>
+          <a:p>
+            <a:pPr indent="0" marL="0">
+              <a:buNone/>
+            </a:pPr>
+            <a:r>
+              <a:rPr lang="en-US" sz="1400" dirty="0">
+                <a:solidFill>
+                  <a:schemeClr val="tx1"/>
+                </a:solidFill>
+              </a:rPr>
+              <a:t>M. Kazemitabaar et al., "CodeAid: Evaluating a Classroom Deployment of an LLM-based Programming Assistant that Balances Student and Educator Needs," arXiv:2401.11314, 2024.</a:t>
+            </a:r>
+            <a:endParaRPr lang="en-US" sz="1400" dirty="0"/>
+          </a:p>
+        </p:txBody>
+      </p:sp>
+      <p:sp>
+        <p:nvSpPr>
+          <p:cNvPr id="13" name="text-270"/>
+          <p:cNvSpPr txBox="1"/>
+          <p:nvPr/>
+        </p:nvSpPr>
+        <p:spPr>
+          <a:xfrm>
+            <a:off x="548640" y="5120640"/>
+            <a:ext cx="731520" cy="731520"/>
+          </a:xfrm>
+          <a:prstGeom prst="rect">
+            <a:avLst/>
+          </a:prstGeom>
+          <a:noFill/>
+          <a:ln/>
+        </p:spPr>
+        <p:txBody>
+          <a:bodyPr wrap="square" lIns="0" tIns="0" rIns="0" bIns="0" rtlCol="0" anchor="t"/>
+          <a:lstStyle/>
+          <a:p>
+            <a:pPr indent="0" marL="0">
+              <a:buNone/>
+            </a:pPr>
+            <a:r>
+              <a:rPr lang="en-US" sz="1500" b="1" dirty="0">
+                <a:solidFill>
+                  <a:schemeClr val="accent1"/>
+                </a:solidFill>
+                <a:latin typeface="Consolas" pitchFamily="34" charset="0"/>
+                <a:ea typeface="Consolas" pitchFamily="34" charset="-122"/>
+                <a:cs typeface="Consolas" pitchFamily="34" charset="-120"/>
+              </a:rPr>
+              <a:t>[13]</a:t>
+            </a:r>
+            <a:endParaRPr lang="en-US" sz="1500" dirty="0"/>
+          </a:p>
+        </p:txBody>
+      </p:sp>
+      <p:sp>
+        <p:nvSpPr>
+          <p:cNvPr id="14" name="text-271"/>
+          <p:cNvSpPr txBox="1"/>
+          <p:nvPr/>
+        </p:nvSpPr>
+        <p:spPr>
+          <a:xfrm>
+            <a:off x="1371600" y="5120640"/>
+            <a:ext cx="10271455" cy="777240"/>
+          </a:xfrm>
+          <a:prstGeom prst="rect">
+            <a:avLst/>
+          </a:prstGeom>
+          <a:noFill/>
+          <a:ln/>
+        </p:spPr>
+        <p:txBody>
+          <a:bodyPr wrap="square" lIns="0" tIns="0" rIns="0" bIns="0" rtlCol="0" anchor="t"/>
+          <a:lstStyle/>
+          <a:p>
+            <a:pPr indent="0" marL="0">
+              <a:buNone/>
+            </a:pPr>
+            <a:r>
+              <a:rPr lang="en-US" sz="1400" dirty="0">
+                <a:solidFill>
+                  <a:schemeClr val="tx1"/>
+                </a:solidFill>
+              </a:rPr>
+              <a:t>Z. Yang, Z. Kuang, X. Xia, and Y. Zhao, "Can LLMs Generate High-Quality Test Cases for Algorithm Problems? TestCase-Eval: A Systematic Evaluation of Fault Coverage and Exposure," in Proc. ACL, 2025.</a:t>
+            </a:r>
+            <a:endParaRPr lang="en-US" sz="1400" dirty="0"/>
+          </a:p>
+        </p:txBody>
+      </p:sp>
+      <p:sp>
+        <p:nvSpPr>
+          <p:cNvPr id="25" name="Slide Number Placeholder 0"/>
+          <p:cNvSpPr>
+            <a:spLocks noGrp="1"/>
+          </p:cNvSpPr>
+          <p:nvPr>
+            <p:ph type="sldNum" sz="quarter" idx="4294967295"/>
+          </p:nvPr>
+        </p:nvSpPr>
+        <p:spPr>
+          <a:xfrm>
+            <a:off x="10911535" y="6327648"/>
+            <a:ext cx="731520" cy="320040"/>
+          </a:xfrm>
+          <a:prstGeom prst="rect">
+            <a:avLst/>
+          </a:prstGeom>
+          <a:extLst>
+            <a:ext uri="{C572A759-6A51-4108-AA02-DFA0A04FC94B}">
+              <ma14:wrappingTextBoxFlag xmlns:ma14="http://schemas.microsoft.com/office/mac/drawingml/2011/main" val="0"/>
+            </a:ext>
+          </a:extLst>
+        </p:spPr>
+        <p:txBody>
+          <a:bodyPr/>
+          <a:lstStyle>
+            <a:lvl1pPr>
+              <a:defRPr sz="1200">
+                <a:solidFill>
+                  <a:srgbClr val="6B6459"/>
+                </a:solidFill>
+                <a:latin typeface="Consolas"/>
+                <a:ea typeface="Consolas"/>
+                <a:cs typeface="Consolas"/>
+              </a:defRPr>
+            </a:lvl1pPr>
+          </a:lstStyle>
+          <a:p>
+            <a:pPr algn="r"/>
+            <a:fld id="{F7021451-1387-4CA6-816F-3879F97B5CBC}" type="slidenum">
+              <a:rPr b="0" lang="en-US"/>
+              <a:t>18</a:t>
+            </a:fld>
+            <a:endParaRPr lang="en-US"/>
+          </a:p>
+        </p:txBody>
+      </p:sp>
+    </p:spTree>
+  </p:cSld>
+  <p:clrMapOvr>
+    <a:masterClrMapping/>
+  </p:clrMapOvr>
+</p:sld>
+</file>
+
+<file path=ppt/slides/slide19.xml><?xml version="1.0" encoding="utf-8"?>
+<p:sld xmlns:a="http://schemas.openxmlformats.org/drawingml/2006/main" xmlns:r="http://schemas.openxmlformats.org/officeDocument/2006/relationships" xmlns:p="http://schemas.openxmlformats.org/presentationml/2006/main">
+  <p:cSld name="Slide 19">
+    <p:spTree>
+      <p:nvGrpSpPr>
+        <p:cNvPr id="1" name=""/>
+        <p:cNvGrpSpPr/>
+        <p:nvPr/>
+      </p:nvGrpSpPr>
+      <p:grpSpPr>
+        <a:xfrm>
+          <a:off x="0" y="0"/>
+          <a:ext cx="0" cy="0"/>
+          <a:chOff x="0" y="0"/>
+          <a:chExt cx="0" cy="0"/>
+        </a:xfrm>
+      </p:grpSpPr>
+      <p:sp>
+        <p:nvSpPr>
+          <p:cNvPr id="2" name="Text 0"/>
+          <p:cNvSpPr/>
+          <p:nvPr>
+            <p:ph idx="100" type="body" hasCustomPrompt="1"/>
+          </p:nvPr>
+        </p:nvSpPr>
+        <p:spPr>
+          <a:xfrm>
+            <a:off x="548640" y="347472"/>
+            <a:ext cx="7315200" cy="329184"/>
+          </a:xfrm>
+          <a:prstGeom prst="rect">
+            <a:avLst/>
+          </a:prstGeom>
+          <a:noFill/>
+          <a:ln/>
+        </p:spPr>
+        <p:txBody>
+          <a:bodyPr wrap="square" lIns="0" tIns="0" rIns="0" bIns="0" rtlCol="0" anchor="ctr"/>
+          <a:lstStyle/>
+          <a:p>
+            <a:pPr indent="0" marL="0">
+              <a:buNone/>
+            </a:pPr>
+            <a:r>
+              <a:rPr lang="en-US" sz="1300" spc="200" kern="0" dirty="0">
+                <a:solidFill>
+                  <a:schemeClr val="accent1"/>
+                </a:solidFill>
+                <a:latin typeface="Consolas" pitchFamily="34" charset="0"/>
+                <a:ea typeface="Consolas" pitchFamily="34" charset="-122"/>
+                <a:cs typeface="Consolas" pitchFamily="34" charset="-120"/>
+              </a:rPr>
+              <a:t>附錄</a:t>
+            </a:r>
+            <a:endParaRPr lang="en-US" sz="1300" dirty="0"/>
+          </a:p>
+        </p:txBody>
+      </p:sp>
+      <p:sp>
+        <p:nvSpPr>
+          <p:cNvPr id="3" name="Text 0"/>
+          <p:cNvSpPr/>
+          <p:nvPr>
+            <p:ph idx="101" type="title" hasCustomPrompt="1"/>
+          </p:nvPr>
+        </p:nvSpPr>
+        <p:spPr>
+          <a:xfrm>
+            <a:off x="548640" y="676656"/>
+            <a:ext cx="11094415" cy="731520"/>
+          </a:xfrm>
+          <a:prstGeom prst="rect">
+            <a:avLst/>
+          </a:prstGeom>
+          <a:noFill/>
+          <a:ln/>
+        </p:spPr>
+        <p:txBody>
+          <a:bodyPr wrap="square" lIns="0" tIns="0" rIns="0" bIns="0" rtlCol="0" anchor="t"/>
+          <a:lstStyle/>
+          <a:p>
+            <a:pPr algn="l" indent="0" marL="0">
+              <a:buNone/>
+            </a:pPr>
+            <a:r>
+              <a:rPr lang="en-US" sz="3000" b="1" dirty="0">
+                <a:solidFill>
+                  <a:schemeClr val="tx1"/>
+                </a:solidFill>
+              </a:rPr>
               <a:t>名詞總表</a:t>
             </a:r>
             <a:endParaRPr lang="en-US" sz="3000" dirty="0"/>
@@ -10929,7 +10120,7 @@
       </p:sp>
       <p:graphicFrame>
         <p:nvGraphicFramePr>
-          <p:cNvPr id="19" name="table-254"/>
+          <p:cNvPr id="20" name="table-272"/>
           <p:cNvGraphicFramePr>
             <a:graphicFrameLocks noGrp="1"/>
           </p:cNvGraphicFramePr>
@@ -12487,804 +11678,6 @@
             <a:pPr algn="r"/>
             <a:fld id="{F7021451-1387-4CA6-816F-3879F97B5CBC}" type="slidenum">
               <a:rPr b="0" lang="en-US"/>
-              <a:t>18</a:t>
-            </a:fld>
-            <a:endParaRPr lang="en-US"/>
-          </a:p>
-        </p:txBody>
-      </p:sp>
-    </p:spTree>
-  </p:cSld>
-  <p:clrMapOvr>
-    <a:masterClrMapping/>
-  </p:clrMapOvr>
-</p:sld>
-</file>
-
-<file path=ppt/slides/slide19.xml><?xml version="1.0" encoding="utf-8"?>
-<p:sld xmlns:a="http://schemas.openxmlformats.org/drawingml/2006/main" xmlns:r="http://schemas.openxmlformats.org/officeDocument/2006/relationships" xmlns:p="http://schemas.openxmlformats.org/presentationml/2006/main">
-  <p:cSld name="Slide 19">
-    <p:spTree>
-      <p:nvGrpSpPr>
-        <p:cNvPr id="1" name=""/>
-        <p:cNvGrpSpPr/>
-        <p:nvPr/>
-      </p:nvGrpSpPr>
-      <p:grpSpPr>
-        <a:xfrm>
-          <a:off x="0" y="0"/>
-          <a:ext cx="0" cy="0"/>
-          <a:chOff x="0" y="0"/>
-          <a:chExt cx="0" cy="0"/>
-        </a:xfrm>
-      </p:grpSpPr>
-      <p:sp>
-        <p:nvSpPr>
-          <p:cNvPr id="2" name="Text 0"/>
-          <p:cNvSpPr/>
-          <p:nvPr>
-            <p:ph idx="100" type="body" hasCustomPrompt="1"/>
-          </p:nvPr>
-        </p:nvSpPr>
-        <p:spPr>
-          <a:xfrm>
-            <a:off x="548640" y="347472"/>
-            <a:ext cx="7315200" cy="329184"/>
-          </a:xfrm>
-          <a:prstGeom prst="rect">
-            <a:avLst/>
-          </a:prstGeom>
-          <a:noFill/>
-          <a:ln/>
-        </p:spPr>
-        <p:txBody>
-          <a:bodyPr wrap="square" lIns="0" tIns="0" rIns="0" bIns="0" rtlCol="0" anchor="ctr"/>
-          <a:lstStyle/>
-          <a:p>
-            <a:pPr indent="0" marL="0">
-              <a:buNone/>
-            </a:pPr>
-            <a:r>
-              <a:rPr lang="en-US" sz="1300" spc="200" kern="0" dirty="0">
-                <a:solidFill>
-                  <a:schemeClr val="accent1"/>
-                </a:solidFill>
-                <a:latin typeface="Consolas" pitchFamily="34" charset="0"/>
-                <a:ea typeface="Consolas" pitchFamily="34" charset="-122"/>
-                <a:cs typeface="Consolas" pitchFamily="34" charset="-120"/>
-              </a:rPr>
-              <a:t>備用 A</a:t>
-            </a:r>
-            <a:endParaRPr lang="en-US" sz="1300" dirty="0"/>
-          </a:p>
-        </p:txBody>
-      </p:sp>
-      <p:sp>
-        <p:nvSpPr>
-          <p:cNvPr id="3" name="Text 0"/>
-          <p:cNvSpPr/>
-          <p:nvPr>
-            <p:ph idx="101" type="title" hasCustomPrompt="1"/>
-          </p:nvPr>
-        </p:nvSpPr>
-        <p:spPr>
-          <a:xfrm>
-            <a:off x="548640" y="676656"/>
-            <a:ext cx="11094415" cy="731520"/>
-          </a:xfrm>
-          <a:prstGeom prst="rect">
-            <a:avLst/>
-          </a:prstGeom>
-          <a:noFill/>
-          <a:ln/>
-        </p:spPr>
-        <p:txBody>
-          <a:bodyPr wrap="square" lIns="0" tIns="0" rIns="0" bIns="0" rtlCol="0" anchor="t"/>
-          <a:lstStyle/>
-          <a:p>
-            <a:pPr algn="l" indent="0" marL="0">
-              <a:buNone/>
-            </a:pPr>
-            <a:r>
-              <a:rPr lang="en-US" sz="3000" b="1" dirty="0">
-                <a:solidFill>
-                  <a:schemeClr val="tx1"/>
-                </a:solidFill>
-              </a:rPr>
-              <a:t>題目適不適用這套方法：四關判斷</a:t>
-            </a:r>
-            <a:endParaRPr lang="en-US" sz="3000" dirty="0"/>
-          </a:p>
-        </p:txBody>
-      </p:sp>
-      <p:sp>
-        <p:nvSpPr>
-          <p:cNvPr id="5" name="card-255"/>
-          <p:cNvSpPr/>
-          <p:nvPr/>
-        </p:nvSpPr>
-        <p:spPr>
-          <a:xfrm>
-            <a:off x="548640" y="1691640"/>
-            <a:ext cx="2606040" cy="1874520"/>
-          </a:xfrm>
-          <a:prstGeom prst="roundRect">
-            <a:avLst>
-              <a:gd name="adj" fmla="val 3902"/>
-            </a:avLst>
-          </a:prstGeom>
-          <a:solidFill>
-            <a:schemeClr val="bg2"/>
-          </a:solidFill>
-          <a:ln w="9525">
-            <a:solidFill>
-              <a:schemeClr val="accent6"/>
-            </a:solidFill>
-            <a:prstDash val="solid"/>
-          </a:ln>
-        </p:spPr>
-      </p:sp>
-      <p:sp>
-        <p:nvSpPr>
-          <p:cNvPr id="6" name="text-256"/>
-          <p:cNvSpPr txBox="1"/>
-          <p:nvPr/>
-        </p:nvSpPr>
-        <p:spPr>
-          <a:xfrm>
-            <a:off x="777240" y="1828800"/>
-            <a:ext cx="2194560" cy="365760"/>
-          </a:xfrm>
-          <a:prstGeom prst="rect">
-            <a:avLst/>
-          </a:prstGeom>
-          <a:noFill/>
-          <a:ln/>
-        </p:spPr>
-        <p:txBody>
-          <a:bodyPr wrap="square" lIns="0" tIns="0" rIns="0" bIns="0" rtlCol="0" anchor="t"/>
-          <a:lstStyle/>
-          <a:p>
-            <a:pPr indent="0" marL="0">
-              <a:buNone/>
-            </a:pPr>
-            <a:r>
-              <a:rPr lang="en-US" sz="1500" b="1" dirty="0">
-                <a:solidFill>
-                  <a:schemeClr val="accent4"/>
-                </a:solidFill>
-                <a:latin typeface="Consolas" pitchFamily="34" charset="0"/>
-                <a:ea typeface="Consolas" pitchFamily="34" charset="-122"/>
-                <a:cs typeface="Consolas" pitchFamily="34" charset="-120"/>
-              </a:rPr>
-              <a:t>第一關</a:t>
-            </a:r>
-            <a:endParaRPr lang="en-US" sz="1500" dirty="0"/>
-          </a:p>
-        </p:txBody>
-      </p:sp>
-      <p:sp>
-        <p:nvSpPr>
-          <p:cNvPr id="7" name="text-257"/>
-          <p:cNvSpPr txBox="1"/>
-          <p:nvPr/>
-        </p:nvSpPr>
-        <p:spPr>
-          <a:xfrm>
-            <a:off x="777240" y="2212848"/>
-            <a:ext cx="2194560" cy="411480"/>
-          </a:xfrm>
-          <a:prstGeom prst="rect">
-            <a:avLst/>
-          </a:prstGeom>
-          <a:noFill/>
-          <a:ln/>
-        </p:spPr>
-        <p:txBody>
-          <a:bodyPr wrap="square" lIns="0" tIns="0" rIns="0" bIns="0" rtlCol="0" anchor="t"/>
-          <a:lstStyle/>
-          <a:p>
-            <a:pPr indent="0" marL="0">
-              <a:buNone/>
-            </a:pPr>
-            <a:r>
-              <a:rPr lang="en-US" sz="1700" b="1" dirty="0">
-                <a:solidFill>
-                  <a:schemeClr val="tx1"/>
-                </a:solidFill>
-              </a:rPr>
-              <a:t>只讀題目篩選</a:t>
-            </a:r>
-            <a:endParaRPr lang="en-US" sz="1700" dirty="0"/>
-          </a:p>
-        </p:txBody>
-      </p:sp>
-      <p:sp>
-        <p:nvSpPr>
-          <p:cNvPr id="8" name="text-258"/>
-          <p:cNvSpPr txBox="1"/>
-          <p:nvPr/>
-        </p:nvSpPr>
-        <p:spPr>
-          <a:xfrm>
-            <a:off x="777240" y="2670048"/>
-            <a:ext cx="2194560" cy="822960"/>
-          </a:xfrm>
-          <a:prstGeom prst="rect">
-            <a:avLst/>
-          </a:prstGeom>
-          <a:noFill/>
-          <a:ln/>
-        </p:spPr>
-        <p:txBody>
-          <a:bodyPr wrap="square" lIns="0" tIns="0" rIns="0" bIns="0" rtlCol="0" anchor="t"/>
-          <a:lstStyle/>
-          <a:p>
-            <a:pPr indent="0" marL="0">
-              <a:buNone/>
-            </a:pPr>
-            <a:r>
-              <a:rPr lang="en-US" sz="1300" dirty="0">
-                <a:solidFill>
-                  <a:schemeClr val="tx2"/>
-                </a:solidFill>
-              </a:rPr>
-              <a:t>平台能不能跑、答案是否唯一</a:t>
-            </a:r>
-            <a:endParaRPr lang="en-US" sz="1300" dirty="0"/>
-          </a:p>
-        </p:txBody>
-      </p:sp>
-      <p:sp>
-        <p:nvSpPr>
-          <p:cNvPr id="9" name="card-259"/>
-          <p:cNvSpPr/>
-          <p:nvPr/>
-        </p:nvSpPr>
-        <p:spPr>
-          <a:xfrm>
-            <a:off x="3383280" y="1691640"/>
-            <a:ext cx="2606040" cy="1874520"/>
-          </a:xfrm>
-          <a:prstGeom prst="roundRect">
-            <a:avLst>
-              <a:gd name="adj" fmla="val 3902"/>
-            </a:avLst>
-          </a:prstGeom>
-          <a:solidFill>
-            <a:schemeClr val="bg2"/>
-          </a:solidFill>
-          <a:ln w="9525">
-            <a:solidFill>
-              <a:schemeClr val="accent6"/>
-            </a:solidFill>
-            <a:prstDash val="solid"/>
-          </a:ln>
-        </p:spPr>
-      </p:sp>
-      <p:sp>
-        <p:nvSpPr>
-          <p:cNvPr id="10" name="text-260"/>
-          <p:cNvSpPr txBox="1"/>
-          <p:nvPr/>
-        </p:nvSpPr>
-        <p:spPr>
-          <a:xfrm>
-            <a:off x="3611880" y="1828800"/>
-            <a:ext cx="2194560" cy="365760"/>
-          </a:xfrm>
-          <a:prstGeom prst="rect">
-            <a:avLst/>
-          </a:prstGeom>
-          <a:noFill/>
-          <a:ln/>
-        </p:spPr>
-        <p:txBody>
-          <a:bodyPr wrap="square" lIns="0" tIns="0" rIns="0" bIns="0" rtlCol="0" anchor="t"/>
-          <a:lstStyle/>
-          <a:p>
-            <a:pPr indent="0" marL="0">
-              <a:buNone/>
-            </a:pPr>
-            <a:r>
-              <a:rPr lang="en-US" sz="1500" b="1" dirty="0">
-                <a:solidFill>
-                  <a:schemeClr val="accent4"/>
-                </a:solidFill>
-                <a:latin typeface="Consolas" pitchFamily="34" charset="0"/>
-                <a:ea typeface="Consolas" pitchFamily="34" charset="-122"/>
-                <a:cs typeface="Consolas" pitchFamily="34" charset="-120"/>
-              </a:rPr>
-              <a:t>第二關</a:t>
-            </a:r>
-            <a:endParaRPr lang="en-US" sz="1500" dirty="0"/>
-          </a:p>
-        </p:txBody>
-      </p:sp>
-      <p:sp>
-        <p:nvSpPr>
-          <p:cNvPr id="11" name="text-261"/>
-          <p:cNvSpPr txBox="1"/>
-          <p:nvPr/>
-        </p:nvSpPr>
-        <p:spPr>
-          <a:xfrm>
-            <a:off x="3611880" y="2212848"/>
-            <a:ext cx="2194560" cy="411480"/>
-          </a:xfrm>
-          <a:prstGeom prst="rect">
-            <a:avLst/>
-          </a:prstGeom>
-          <a:noFill/>
-          <a:ln/>
-        </p:spPr>
-        <p:txBody>
-          <a:bodyPr wrap="square" lIns="0" tIns="0" rIns="0" bIns="0" rtlCol="0" anchor="t"/>
-          <a:lstStyle/>
-          <a:p>
-            <a:pPr indent="0" marL="0">
-              <a:buNone/>
-            </a:pPr>
-            <a:r>
-              <a:rPr lang="en-US" sz="1700" b="1" dirty="0">
-                <a:solidFill>
-                  <a:schemeClr val="tx1"/>
-                </a:solidFill>
-              </a:rPr>
-              <a:t>寫程式驗證樣本</a:t>
-            </a:r>
-            <a:endParaRPr lang="en-US" sz="1700" dirty="0"/>
-          </a:p>
-        </p:txBody>
-      </p:sp>
-      <p:sp>
-        <p:nvSpPr>
-          <p:cNvPr id="12" name="text-262"/>
-          <p:cNvSpPr txBox="1"/>
-          <p:nvPr/>
-        </p:nvSpPr>
-        <p:spPr>
-          <a:xfrm>
-            <a:off x="3611880" y="2670048"/>
-            <a:ext cx="2194560" cy="822960"/>
-          </a:xfrm>
-          <a:prstGeom prst="rect">
-            <a:avLst/>
-          </a:prstGeom>
-          <a:noFill/>
-          <a:ln/>
-        </p:spPr>
-        <p:txBody>
-          <a:bodyPr wrap="square" lIns="0" tIns="0" rIns="0" bIns="0" rtlCol="0" anchor="t"/>
-          <a:lstStyle/>
-          <a:p>
-            <a:pPr indent="0" marL="0">
-              <a:buNone/>
-            </a:pPr>
-            <a:r>
-              <a:rPr lang="en-US" sz="1300" dirty="0">
-                <a:solidFill>
-                  <a:schemeClr val="tx2"/>
-                </a:solidFill>
-              </a:rPr>
-              <a:t>正解一致、錯解真的會錯且不重複</a:t>
-            </a:r>
-            <a:endParaRPr lang="en-US" sz="1300" dirty="0"/>
-          </a:p>
-        </p:txBody>
-      </p:sp>
-      <p:sp>
-        <p:nvSpPr>
-          <p:cNvPr id="13" name="card-263"/>
-          <p:cNvSpPr/>
-          <p:nvPr/>
-        </p:nvSpPr>
-        <p:spPr>
-          <a:xfrm>
-            <a:off x="6217920" y="1691640"/>
-            <a:ext cx="2606040" cy="1874520"/>
-          </a:xfrm>
-          <a:prstGeom prst="roundRect">
-            <a:avLst>
-              <a:gd name="adj" fmla="val 3902"/>
-            </a:avLst>
-          </a:prstGeom>
-          <a:solidFill>
-            <a:schemeClr val="bg2"/>
-          </a:solidFill>
-          <a:ln w="9525">
-            <a:solidFill>
-              <a:schemeClr val="accent6"/>
-            </a:solidFill>
-            <a:prstDash val="solid"/>
-          </a:ln>
-        </p:spPr>
-      </p:sp>
-      <p:sp>
-        <p:nvSpPr>
-          <p:cNvPr id="14" name="text-264"/>
-          <p:cNvSpPr txBox="1"/>
-          <p:nvPr/>
-        </p:nvSpPr>
-        <p:spPr>
-          <a:xfrm>
-            <a:off x="6446520" y="1828800"/>
-            <a:ext cx="2194560" cy="365760"/>
-          </a:xfrm>
-          <a:prstGeom prst="rect">
-            <a:avLst/>
-          </a:prstGeom>
-          <a:noFill/>
-          <a:ln/>
-        </p:spPr>
-        <p:txBody>
-          <a:bodyPr wrap="square" lIns="0" tIns="0" rIns="0" bIns="0" rtlCol="0" anchor="t"/>
-          <a:lstStyle/>
-          <a:p>
-            <a:pPr indent="0" marL="0">
-              <a:buNone/>
-            </a:pPr>
-            <a:r>
-              <a:rPr lang="en-US" sz="1500" b="1" dirty="0">
-                <a:solidFill>
-                  <a:schemeClr val="accent4"/>
-                </a:solidFill>
-                <a:latin typeface="Consolas" pitchFamily="34" charset="0"/>
-                <a:ea typeface="Consolas" pitchFamily="34" charset="-122"/>
-                <a:cs typeface="Consolas" pitchFamily="34" charset="-120"/>
-              </a:rPr>
-              <a:t>第三關</a:t>
-            </a:r>
-            <a:endParaRPr lang="en-US" sz="1500" dirty="0"/>
-          </a:p>
-        </p:txBody>
-      </p:sp>
-      <p:sp>
-        <p:nvSpPr>
-          <p:cNvPr id="15" name="text-265"/>
-          <p:cNvSpPr txBox="1"/>
-          <p:nvPr/>
-        </p:nvSpPr>
-        <p:spPr>
-          <a:xfrm>
-            <a:off x="6446520" y="2212848"/>
-            <a:ext cx="2194560" cy="411480"/>
-          </a:xfrm>
-          <a:prstGeom prst="rect">
-            <a:avLst/>
-          </a:prstGeom>
-          <a:noFill/>
-          <a:ln/>
-        </p:spPr>
-        <p:txBody>
-          <a:bodyPr wrap="square" lIns="0" tIns="0" rIns="0" bIns="0" rtlCol="0" anchor="t"/>
-          <a:lstStyle/>
-          <a:p>
-            <a:pPr indent="0" marL="0">
-              <a:buNone/>
-            </a:pPr>
-            <a:r>
-              <a:rPr lang="en-US" sz="1700" b="1" dirty="0">
-                <a:solidFill>
-                  <a:schemeClr val="tx1"/>
-                </a:solidFill>
-              </a:rPr>
-              <a:t>估上限</a:t>
-            </a:r>
-            <a:endParaRPr lang="en-US" sz="1700" dirty="0"/>
-          </a:p>
-        </p:txBody>
-      </p:sp>
-      <p:sp>
-        <p:nvSpPr>
-          <p:cNvPr id="16" name="text-266"/>
-          <p:cNvSpPr txBox="1"/>
-          <p:nvPr/>
-        </p:nvSpPr>
-        <p:spPr>
-          <a:xfrm>
-            <a:off x="6446520" y="2670048"/>
-            <a:ext cx="2194560" cy="822960"/>
-          </a:xfrm>
-          <a:prstGeom prst="rect">
-            <a:avLst/>
-          </a:prstGeom>
-          <a:noFill/>
-          <a:ln/>
-        </p:spPr>
-        <p:txBody>
-          <a:bodyPr wrap="square" lIns="0" tIns="0" rIns="0" bIns="0" rtlCol="0" anchor="t"/>
-          <a:lstStyle/>
-          <a:p>
-            <a:pPr indent="0" marL="0">
-              <a:buNone/>
-            </a:pPr>
-            <a:r>
-              <a:rPr lang="en-US" sz="1300" dirty="0">
-                <a:solidFill>
-                  <a:schemeClr val="tx2"/>
-                </a:solidFill>
-              </a:rPr>
-              <a:t>窮舉小輸入＋隨機搜尋</a:t>
-            </a:r>
-            <a:endParaRPr lang="en-US" sz="1300" dirty="0"/>
-          </a:p>
-        </p:txBody>
-      </p:sp>
-      <p:sp>
-        <p:nvSpPr>
-          <p:cNvPr id="17" name="card-267"/>
-          <p:cNvSpPr/>
-          <p:nvPr/>
-        </p:nvSpPr>
-        <p:spPr>
-          <a:xfrm>
-            <a:off x="9052560" y="1691640"/>
-            <a:ext cx="2606040" cy="1874520"/>
-          </a:xfrm>
-          <a:prstGeom prst="roundRect">
-            <a:avLst>
-              <a:gd name="adj" fmla="val 3902"/>
-            </a:avLst>
-          </a:prstGeom>
-          <a:solidFill>
-            <a:schemeClr val="bg2"/>
-          </a:solidFill>
-          <a:ln w="9525">
-            <a:solidFill>
-              <a:schemeClr val="accent6"/>
-            </a:solidFill>
-            <a:prstDash val="solid"/>
-          </a:ln>
-        </p:spPr>
-      </p:sp>
-      <p:sp>
-        <p:nvSpPr>
-          <p:cNvPr id="18" name="text-268"/>
-          <p:cNvSpPr txBox="1"/>
-          <p:nvPr/>
-        </p:nvSpPr>
-        <p:spPr>
-          <a:xfrm>
-            <a:off x="9281160" y="1828800"/>
-            <a:ext cx="2194560" cy="365760"/>
-          </a:xfrm>
-          <a:prstGeom prst="rect">
-            <a:avLst/>
-          </a:prstGeom>
-          <a:noFill/>
-          <a:ln/>
-        </p:spPr>
-        <p:txBody>
-          <a:bodyPr wrap="square" lIns="0" tIns="0" rIns="0" bIns="0" rtlCol="0" anchor="t"/>
-          <a:lstStyle/>
-          <a:p>
-            <a:pPr indent="0" marL="0">
-              <a:buNone/>
-            </a:pPr>
-            <a:r>
-              <a:rPr lang="en-US" sz="1500" b="1" dirty="0">
-                <a:solidFill>
-                  <a:schemeClr val="accent4"/>
-                </a:solidFill>
-                <a:latin typeface="Consolas" pitchFamily="34" charset="0"/>
-                <a:ea typeface="Consolas" pitchFamily="34" charset="-122"/>
-                <a:cs typeface="Consolas" pitchFamily="34" charset="-120"/>
-              </a:rPr>
-              <a:t>第四關</a:t>
-            </a:r>
-            <a:endParaRPr lang="en-US" sz="1500" dirty="0"/>
-          </a:p>
-        </p:txBody>
-      </p:sp>
-      <p:sp>
-        <p:nvSpPr>
-          <p:cNvPr id="19" name="text-269"/>
-          <p:cNvSpPr txBox="1"/>
-          <p:nvPr/>
-        </p:nvSpPr>
-        <p:spPr>
-          <a:xfrm>
-            <a:off x="9281160" y="2212848"/>
-            <a:ext cx="2194560" cy="411480"/>
-          </a:xfrm>
-          <a:prstGeom prst="rect">
-            <a:avLst/>
-          </a:prstGeom>
-          <a:noFill/>
-          <a:ln/>
-        </p:spPr>
-        <p:txBody>
-          <a:bodyPr wrap="square" lIns="0" tIns="0" rIns="0" bIns="0" rtlCol="0" anchor="t"/>
-          <a:lstStyle/>
-          <a:p>
-            <a:pPr indent="0" marL="0">
-              <a:buNone/>
-            </a:pPr>
-            <a:r>
-              <a:rPr lang="en-US" sz="1700" b="1" dirty="0">
-                <a:solidFill>
-                  <a:schemeClr val="tx1"/>
-                </a:solidFill>
-              </a:rPr>
-              <a:t>值不值得做實驗</a:t>
-            </a:r>
-            <a:endParaRPr lang="en-US" sz="1700" dirty="0"/>
-          </a:p>
-        </p:txBody>
-      </p:sp>
-      <p:sp>
-        <p:nvSpPr>
-          <p:cNvPr id="20" name="text-270"/>
-          <p:cNvSpPr txBox="1"/>
-          <p:nvPr/>
-        </p:nvSpPr>
-        <p:spPr>
-          <a:xfrm>
-            <a:off x="9281160" y="2670048"/>
-            <a:ext cx="2194560" cy="822960"/>
-          </a:xfrm>
-          <a:prstGeom prst="rect">
-            <a:avLst/>
-          </a:prstGeom>
-          <a:noFill/>
-          <a:ln/>
-        </p:spPr>
-        <p:txBody>
-          <a:bodyPr wrap="square" lIns="0" tIns="0" rIns="0" bIns="0" rtlCol="0" anchor="t"/>
-          <a:lstStyle/>
-          <a:p>
-            <a:pPr indent="0" marL="0">
-              <a:buNone/>
-            </a:pPr>
-            <a:r>
-              <a:rPr lang="en-US" sz="1300" dirty="0">
-                <a:solidFill>
-                  <a:schemeClr val="tx2"/>
-                </a:solidFill>
-              </a:rPr>
-              <a:t>起點不能太高、符合實驗設計</a:t>
-            </a:r>
-            <a:endParaRPr lang="en-US" sz="1300" dirty="0"/>
-          </a:p>
-        </p:txBody>
-      </p:sp>
-      <p:sp>
-        <p:nvSpPr>
-          <p:cNvPr id="21" name="text-271"/>
-          <p:cNvSpPr txBox="1"/>
-          <p:nvPr/>
-        </p:nvSpPr>
-        <p:spPr>
-          <a:xfrm>
-            <a:off x="548640" y="3886200"/>
-            <a:ext cx="11094415" cy="2194560"/>
-          </a:xfrm>
-          <a:prstGeom prst="rect">
-            <a:avLst/>
-          </a:prstGeom>
-          <a:noFill/>
-          <a:ln/>
-        </p:spPr>
-        <p:txBody>
-          <a:bodyPr wrap="square" lIns="0" tIns="0" rIns="0" bIns="0" rtlCol="0" anchor="t"/>
-          <a:lstStyle/>
-          <a:p>
-            <a:pPr marL="203200" indent="-203200">
-              <a:spcAft>
-                <a:spcPts val="800"/>
-              </a:spcAft>
-              <a:buSzPct val="100000"/>
-              <a:buChar char="•"/>
-            </a:pPr>
-            <a:r>
-              <a:rPr lang="en-US" sz="1600" dirty="0">
-                <a:solidFill>
-                  <a:schemeClr val="tx1"/>
-                </a:solidFill>
-              </a:rPr>
-              <a:t>實際評過 6 題</a:t>
-            </a:r>
-            <a:endParaRPr lang="en-US" sz="1600" dirty="0"/>
-          </a:p>
-          <a:p>
-            <a:pPr marL="203200" indent="-203200">
-              <a:spcAft>
-                <a:spcPts val="800"/>
-              </a:spcAft>
-              <a:buSzPct val="100000"/>
-              <a:buChar char="•"/>
-            </a:pPr>
-            <a:r>
-              <a:rPr lang="en-US" sz="1600" dirty="0">
-                <a:solidFill>
-                  <a:schemeClr val="tx1"/>
-                </a:solidFill>
-              </a:rPr>
-              <a:t>積水題（LC42）方法能用，但起點已經 0.83，不適合當實驗題</a:t>
-            </a:r>
-            <a:endParaRPr lang="en-US" sz="1600" dirty="0"/>
-          </a:p>
-          <a:p>
-            <a:pPr marL="203200" indent="-203200">
-              <a:spcAft>
-                <a:spcPts val="800"/>
-              </a:spcAft>
-              <a:buSzPct val="100000"/>
-              <a:buChar char="•"/>
-            </a:pPr>
-            <a:r>
-              <a:rPr lang="en-US" sz="1600" dirty="0">
-                <a:solidFill>
-                  <a:schemeClr val="tx1"/>
-                </a:solidFill>
-              </a:rPr>
-              <a:t>兩陣列中位數難在效率，這套方法只能檢查答案對不對</a:t>
-            </a:r>
-            <a:endParaRPr lang="en-US" sz="1600" dirty="0"/>
-          </a:p>
-          <a:p>
-            <a:pPr marL="203200" indent="-203200">
-              <a:spcAft>
-                <a:spcPts val="800"/>
-              </a:spcAft>
-              <a:buSzPct val="100000"/>
-              <a:buChar char="•"/>
-            </a:pPr>
-            <a:r>
-              <a:rPr lang="en-US" sz="1600" dirty="0">
-                <a:solidFill>
-                  <a:schemeClr val="tx1"/>
-                </a:solidFill>
-              </a:rPr>
-              <a:t>LC42 的錯誤樣本裡有兩份行為完全一樣，被第二關抓出來</a:t>
-            </a:r>
-            <a:endParaRPr lang="en-US" sz="1600" dirty="0"/>
-          </a:p>
-        </p:txBody>
-      </p:sp>
-      <p:sp>
-        <p:nvSpPr>
-          <p:cNvPr id="25" name="Slide Number Placeholder 0"/>
-          <p:cNvSpPr>
-            <a:spLocks noGrp="1"/>
-          </p:cNvSpPr>
-          <p:nvPr>
-            <p:ph type="sldNum" sz="quarter" idx="4294967295"/>
-          </p:nvPr>
-        </p:nvSpPr>
-        <p:spPr>
-          <a:xfrm>
-            <a:off x="10911535" y="6327648"/>
-            <a:ext cx="731520" cy="320040"/>
-          </a:xfrm>
-          <a:prstGeom prst="rect">
-            <a:avLst/>
-          </a:prstGeom>
-          <a:extLst>
-            <a:ext uri="{C572A759-6A51-4108-AA02-DFA0A04FC94B}">
-              <ma14:wrappingTextBoxFlag xmlns:ma14="http://schemas.microsoft.com/office/mac/drawingml/2011/main" val="0"/>
-            </a:ext>
-          </a:extLst>
-        </p:spPr>
-        <p:txBody>
-          <a:bodyPr/>
-          <a:lstStyle>
-            <a:lvl1pPr>
-              <a:defRPr sz="1200">
-                <a:solidFill>
-                  <a:srgbClr val="6B6459"/>
-                </a:solidFill>
-                <a:latin typeface="Consolas"/>
-                <a:ea typeface="Consolas"/>
-                <a:cs typeface="Consolas"/>
-              </a:defRPr>
-            </a:lvl1pPr>
-          </a:lstStyle>
-          <a:p>
-            <a:pPr algn="r"/>
-            <a:fld id="{F7021451-1387-4CA6-816F-3879F97B5CBC}" type="slidenum">
-              <a:rPr b="0" lang="en-US"/>
               <a:t>19</a:t>
             </a:fld>
             <a:endParaRPr lang="en-US"/>
@@ -13867,7 +12260,7 @@
                 <a:ea typeface="Consolas" pitchFamily="34" charset="-122"/>
                 <a:cs typeface="Consolas" pitchFamily="34" charset="-120"/>
               </a:rPr>
-              <a:t>備用 B</a:t>
+              <a:t>備用 A</a:t>
             </a:r>
             <a:endParaRPr lang="en-US" sz="1300" dirty="0"/>
           </a:p>
@@ -13905,7 +12298,7 @@
                   <a:schemeClr val="tx1"/>
                 </a:solidFill>
               </a:rPr>
-              <a:t>給 AI 的指示 v1 → v2、看分數再改</a:t>
+              <a:t>題目適不適用這套方法：四關判斷</a:t>
             </a:r>
             <a:endParaRPr lang="en-US" sz="3000" dirty="0"/>
           </a:p>
@@ -13913,18 +12306,18 @@
       </p:sp>
       <p:sp>
         <p:nvSpPr>
-          <p:cNvPr id="5" name="card-272"/>
+          <p:cNvPr id="5" name="card-273"/>
           <p:cNvSpPr/>
           <p:nvPr/>
         </p:nvSpPr>
         <p:spPr>
           <a:xfrm>
             <a:off x="548640" y="1691640"/>
-            <a:ext cx="5394960" cy="1965960"/>
+            <a:ext cx="2606040" cy="1874520"/>
           </a:xfrm>
           <a:prstGeom prst="roundRect">
             <a:avLst>
-              <a:gd name="adj" fmla="val 3721"/>
+              <a:gd name="adj" fmla="val 3902"/>
             </a:avLst>
           </a:prstGeom>
           <a:solidFill>
@@ -13940,14 +12333,14 @@
       </p:sp>
       <p:sp>
         <p:nvSpPr>
-          <p:cNvPr id="6" name="text-273"/>
+          <p:cNvPr id="6" name="text-274"/>
           <p:cNvSpPr txBox="1"/>
           <p:nvPr/>
         </p:nvSpPr>
         <p:spPr>
           <a:xfrm>
-            <a:off x="822960" y="1828800"/>
-            <a:ext cx="4846320" cy="411480"/>
+            <a:off x="777240" y="1828800"/>
+            <a:ext cx="2194560" cy="365760"/>
           </a:xfrm>
           <a:prstGeom prst="rect">
             <a:avLst/>
@@ -13963,27 +12356,30 @@
               <a:buNone/>
             </a:pPr>
             <a:r>
-              <a:rPr lang="en-US" sz="1800" b="1" dirty="0">
-                <a:solidFill>
-                  <a:schemeClr val="accent1"/>
-                </a:solidFill>
-              </a:rPr>
-              <a:t>指示 v1 → v2</a:t>
-            </a:r>
-            <a:endParaRPr lang="en-US" sz="1800" dirty="0"/>
-          </a:p>
-        </p:txBody>
-      </p:sp>
-      <p:sp>
-        <p:nvSpPr>
-          <p:cNvPr id="7" name="text-274"/>
+              <a:rPr lang="en-US" sz="1500" b="1" dirty="0">
+                <a:solidFill>
+                  <a:schemeClr val="accent4"/>
+                </a:solidFill>
+                <a:latin typeface="Consolas" pitchFamily="34" charset="0"/>
+                <a:ea typeface="Consolas" pitchFamily="34" charset="-122"/>
+                <a:cs typeface="Consolas" pitchFamily="34" charset="-120"/>
+              </a:rPr>
+              <a:t>第一關</a:t>
+            </a:r>
+            <a:endParaRPr lang="en-US" sz="1500" dirty="0"/>
+          </a:p>
+        </p:txBody>
+      </p:sp>
+      <p:sp>
+        <p:nvSpPr>
+          <p:cNvPr id="7" name="text-275"/>
           <p:cNvSpPr txBox="1"/>
           <p:nvPr/>
         </p:nvSpPr>
         <p:spPr>
           <a:xfrm>
-            <a:off x="822960" y="2286000"/>
-            <a:ext cx="4846320" cy="1463040"/>
+            <a:off x="777240" y="2212848"/>
+            <a:ext cx="2194560" cy="411480"/>
           </a:xfrm>
           <a:prstGeom prst="rect">
             <a:avLst/>
@@ -13999,45 +12395,67 @@
               <a:buNone/>
             </a:pPr>
             <a:r>
-              <a:rPr lang="en-US" sz="1500" dirty="0">
+              <a:rPr lang="en-US" sz="1700" b="1" dirty="0">
+                <a:solidFill>
+                  <a:schemeClr val="tx1"/>
+                </a:solidFill>
+              </a:rPr>
+              <a:t>只讀題目篩選</a:t>
+            </a:r>
+            <a:endParaRPr lang="en-US" sz="1700" dirty="0"/>
+          </a:p>
+        </p:txBody>
+      </p:sp>
+      <p:sp>
+        <p:nvSpPr>
+          <p:cNvPr id="8" name="text-276"/>
+          <p:cNvSpPr txBox="1"/>
+          <p:nvPr/>
+        </p:nvSpPr>
+        <p:spPr>
+          <a:xfrm>
+            <a:off x="777240" y="2670048"/>
+            <a:ext cx="2194560" cy="822960"/>
+          </a:xfrm>
+          <a:prstGeom prst="rect">
+            <a:avLst/>
+          </a:prstGeom>
+          <a:noFill/>
+          <a:ln/>
+        </p:spPr>
+        <p:txBody>
+          <a:bodyPr wrap="square" lIns="0" tIns="0" rIns="0" bIns="0" rtlCol="0" anchor="t"/>
+          <a:lstStyle/>
+          <a:p>
+            <a:pPr indent="0" marL="0">
+              <a:buNone/>
+            </a:pPr>
+            <a:r>
+              <a:rPr lang="en-US" sz="1300" dirty="0">
                 <a:solidFill>
                   <a:schemeClr val="tx2"/>
                 </a:solidFill>
               </a:rPr>
-              <a:t>v1：AI 提的測資大多一道只擋一種錯</a:t>
-            </a:r>
-            <a:endParaRPr lang="en-US" sz="1500" dirty="0"/>
-          </a:p>
-          <a:p>
-            <a:pPr indent="0" marL="0">
-              <a:buNone/>
-            </a:pPr>
-            <a:r>
-              <a:rPr lang="en-US" sz="1500" dirty="0">
-                <a:solidFill>
-                  <a:schemeClr val="tx2"/>
-                </a:solidFill>
-              </a:rPr>
-              <a:t>v2：要求一道擋越多種越好，並告訴它目前每道擋幾種</a:t>
-            </a:r>
-            <a:endParaRPr lang="en-US" sz="1500" dirty="0"/>
-          </a:p>
-        </p:txBody>
-      </p:sp>
-      <p:sp>
-        <p:nvSpPr>
-          <p:cNvPr id="8" name="card-275"/>
+              <a:t>平台能不能跑、答案是否唯一</a:t>
+            </a:r>
+            <a:endParaRPr lang="en-US" sz="1300" dirty="0"/>
+          </a:p>
+        </p:txBody>
+      </p:sp>
+      <p:sp>
+        <p:nvSpPr>
+          <p:cNvPr id="9" name="card-277"/>
           <p:cNvSpPr/>
           <p:nvPr/>
         </p:nvSpPr>
         <p:spPr>
           <a:xfrm>
-            <a:off x="6245352" y="1691640"/>
-            <a:ext cx="5394960" cy="1965960"/>
+            <a:off x="3383280" y="1691640"/>
+            <a:ext cx="2606040" cy="1874520"/>
           </a:xfrm>
           <a:prstGeom prst="roundRect">
             <a:avLst>
-              <a:gd name="adj" fmla="val 3721"/>
+              <a:gd name="adj" fmla="val 3902"/>
             </a:avLst>
           </a:prstGeom>
           <a:solidFill>
@@ -14053,14 +12471,14 @@
       </p:sp>
       <p:sp>
         <p:nvSpPr>
-          <p:cNvPr id="9" name="text-276"/>
+          <p:cNvPr id="10" name="text-278"/>
           <p:cNvSpPr txBox="1"/>
           <p:nvPr/>
         </p:nvSpPr>
         <p:spPr>
           <a:xfrm>
-            <a:off x="6519672" y="1828800"/>
-            <a:ext cx="4846320" cy="411480"/>
+            <a:off x="3611880" y="1828800"/>
+            <a:ext cx="2194560" cy="365760"/>
           </a:xfrm>
           <a:prstGeom prst="rect">
             <a:avLst/>
@@ -14076,66 +12494,30 @@
               <a:buNone/>
             </a:pPr>
             <a:r>
-              <a:rPr lang="en-US" sz="1800" b="1" dirty="0">
-                <a:solidFill>
-                  <a:schemeClr val="accent1"/>
-                </a:solidFill>
-              </a:rPr>
-              <a:t>看分數再改（3 次觀察）</a:t>
-            </a:r>
-            <a:endParaRPr lang="en-US" sz="1800" dirty="0"/>
-          </a:p>
-        </p:txBody>
-      </p:sp>
-      <p:sp>
-        <p:nvSpPr>
-          <p:cNvPr id="10" name="text-277"/>
-          <p:cNvSpPr txBox="1"/>
-          <p:nvPr/>
-        </p:nvSpPr>
-        <p:spPr>
-          <a:xfrm>
-            <a:off x="6519672" y="2148840"/>
-            <a:ext cx="2377440" cy="868680"/>
-          </a:xfrm>
-          <a:prstGeom prst="rect">
-            <a:avLst/>
-          </a:prstGeom>
-          <a:noFill/>
-          <a:ln/>
-        </p:spPr>
-        <p:txBody>
-          <a:bodyPr wrap="square" lIns="0" tIns="0" rIns="0" bIns="0" rtlCol="0" anchor="b"/>
-          <a:lstStyle/>
-          <a:p>
-            <a:pPr indent="0" marL="0">
-              <a:buNone/>
-            </a:pPr>
-            <a:r>
-              <a:rPr lang="en-US" sz="3000" b="1" dirty="0">
-                <a:solidFill>
-                  <a:schemeClr val="accent3"/>
+              <a:rPr lang="en-US" sz="1500" b="1" dirty="0">
+                <a:solidFill>
+                  <a:schemeClr val="accent4"/>
                 </a:solidFill>
                 <a:latin typeface="Consolas" pitchFamily="34" charset="0"/>
                 <a:ea typeface="Consolas" pitchFamily="34" charset="-122"/>
                 <a:cs typeface="Consolas" pitchFamily="34" charset="-120"/>
               </a:rPr>
-              <a:t>23/98</a:t>
-            </a:r>
-            <a:endParaRPr lang="en-US" sz="3000" dirty="0"/>
-          </a:p>
-        </p:txBody>
-      </p:sp>
-      <p:sp>
-        <p:nvSpPr>
-          <p:cNvPr id="11" name="text-278"/>
+              <a:t>第二關</a:t>
+            </a:r>
+            <a:endParaRPr lang="en-US" sz="1500" dirty="0"/>
+          </a:p>
+        </p:txBody>
+      </p:sp>
+      <p:sp>
+        <p:nvSpPr>
+          <p:cNvPr id="11" name="text-279"/>
           <p:cNvSpPr txBox="1"/>
           <p:nvPr/>
         </p:nvSpPr>
         <p:spPr>
           <a:xfrm>
-            <a:off x="6519672" y="3063240"/>
-            <a:ext cx="2377440" cy="548640"/>
+            <a:off x="3611880" y="2212848"/>
+            <a:ext cx="2194560" cy="411480"/>
           </a:xfrm>
           <a:prstGeom prst="rect">
             <a:avLst/>
@@ -14151,66 +12533,129 @@
               <a:buNone/>
             </a:pPr>
             <a:r>
-              <a:rPr lang="en-US" sz="1400" dirty="0">
+              <a:rPr lang="en-US" sz="1700" b="1" dirty="0">
+                <a:solidFill>
+                  <a:schemeClr val="tx1"/>
+                </a:solidFill>
+              </a:rPr>
+              <a:t>寫程式驗證樣本</a:t>
+            </a:r>
+            <a:endParaRPr lang="en-US" sz="1700" dirty="0"/>
+          </a:p>
+        </p:txBody>
+      </p:sp>
+      <p:sp>
+        <p:nvSpPr>
+          <p:cNvPr id="12" name="text-280"/>
+          <p:cNvSpPr txBox="1"/>
+          <p:nvPr/>
+        </p:nvSpPr>
+        <p:spPr>
+          <a:xfrm>
+            <a:off x="3611880" y="2670048"/>
+            <a:ext cx="2194560" cy="822960"/>
+          </a:xfrm>
+          <a:prstGeom prst="rect">
+            <a:avLst/>
+          </a:prstGeom>
+          <a:noFill/>
+          <a:ln/>
+        </p:spPr>
+        <p:txBody>
+          <a:bodyPr wrap="square" lIns="0" tIns="0" rIns="0" bIns="0" rtlCol="0" anchor="t"/>
+          <a:lstStyle/>
+          <a:p>
+            <a:pPr indent="0" marL="0">
+              <a:buNone/>
+            </a:pPr>
+            <a:r>
+              <a:rPr lang="en-US" sz="1300" dirty="0">
                 <a:solidFill>
                   <a:schemeClr val="tx2"/>
                 </a:solidFill>
               </a:rPr>
-              <a:t>看分數再改</a:t>
-            </a:r>
-            <a:endParaRPr lang="en-US" sz="1400" dirty="0"/>
-          </a:p>
-        </p:txBody>
-      </p:sp>
-      <p:sp>
-        <p:nvSpPr>
-          <p:cNvPr id="12" name="text-279"/>
+              <a:t>正解一致、錯解真的會錯且不重複</a:t>
+            </a:r>
+            <a:endParaRPr lang="en-US" sz="1300" dirty="0"/>
+          </a:p>
+        </p:txBody>
+      </p:sp>
+      <p:sp>
+        <p:nvSpPr>
+          <p:cNvPr id="13" name="card-281"/>
+          <p:cNvSpPr/>
+          <p:nvPr/>
+        </p:nvSpPr>
+        <p:spPr>
+          <a:xfrm>
+            <a:off x="6217920" y="1691640"/>
+            <a:ext cx="2606040" cy="1874520"/>
+          </a:xfrm>
+          <a:prstGeom prst="roundRect">
+            <a:avLst>
+              <a:gd name="adj" fmla="val 3902"/>
+            </a:avLst>
+          </a:prstGeom>
+          <a:solidFill>
+            <a:schemeClr val="bg2"/>
+          </a:solidFill>
+          <a:ln w="9525">
+            <a:solidFill>
+              <a:schemeClr val="accent6"/>
+            </a:solidFill>
+            <a:prstDash val="solid"/>
+          </a:ln>
+        </p:spPr>
+      </p:sp>
+      <p:sp>
+        <p:nvSpPr>
+          <p:cNvPr id="14" name="text-282"/>
           <p:cNvSpPr txBox="1"/>
           <p:nvPr/>
         </p:nvSpPr>
         <p:spPr>
           <a:xfrm>
-            <a:off x="9052560" y="2148840"/>
-            <a:ext cx="2286000" cy="868680"/>
-          </a:xfrm>
-          <a:prstGeom prst="rect">
-            <a:avLst/>
-          </a:prstGeom>
-          <a:noFill/>
-          <a:ln/>
-        </p:spPr>
-        <p:txBody>
-          <a:bodyPr wrap="square" lIns="0" tIns="0" rIns="0" bIns="0" rtlCol="0" anchor="b"/>
-          <a:lstStyle/>
-          <a:p>
-            <a:pPr indent="0" marL="0">
-              <a:buNone/>
-            </a:pPr>
-            <a:r>
-              <a:rPr lang="en-US" sz="3000" b="1" dirty="0">
-                <a:solidFill>
-                  <a:schemeClr val="accent2"/>
+            <a:off x="6446520" y="1828800"/>
+            <a:ext cx="2194560" cy="365760"/>
+          </a:xfrm>
+          <a:prstGeom prst="rect">
+            <a:avLst/>
+          </a:prstGeom>
+          <a:noFill/>
+          <a:ln/>
+        </p:spPr>
+        <p:txBody>
+          <a:bodyPr wrap="square" lIns="0" tIns="0" rIns="0" bIns="0" rtlCol="0" anchor="t"/>
+          <a:lstStyle/>
+          <a:p>
+            <a:pPr indent="0" marL="0">
+              <a:buNone/>
+            </a:pPr>
+            <a:r>
+              <a:rPr lang="en-US" sz="1500" b="1" dirty="0">
+                <a:solidFill>
+                  <a:schemeClr val="accent4"/>
                 </a:solidFill>
                 <a:latin typeface="Consolas" pitchFamily="34" charset="0"/>
                 <a:ea typeface="Consolas" pitchFamily="34" charset="-122"/>
                 <a:cs typeface="Consolas" pitchFamily="34" charset="-120"/>
               </a:rPr>
-              <a:t>0/93</a:t>
-            </a:r>
-            <a:endParaRPr lang="en-US" sz="3000" dirty="0"/>
-          </a:p>
-        </p:txBody>
-      </p:sp>
-      <p:sp>
-        <p:nvSpPr>
-          <p:cNvPr id="13" name="text-280"/>
+              <a:t>第三關</a:t>
+            </a:r>
+            <a:endParaRPr lang="en-US" sz="1500" dirty="0"/>
+          </a:p>
+        </p:txBody>
+      </p:sp>
+      <p:sp>
+        <p:nvSpPr>
+          <p:cNvPr id="15" name="text-283"/>
           <p:cNvSpPr txBox="1"/>
           <p:nvPr/>
         </p:nvSpPr>
         <p:spPr>
           <a:xfrm>
-            <a:off x="9052560" y="3063240"/>
-            <a:ext cx="2286000" cy="548640"/>
+            <a:off x="6446520" y="2212848"/>
+            <a:ext cx="2194560" cy="411480"/>
           </a:xfrm>
           <a:prstGeom prst="rect">
             <a:avLst/>
@@ -14226,27 +12671,90 @@
               <a:buNone/>
             </a:pPr>
             <a:r>
-              <a:rPr lang="en-US" sz="1400" dirty="0">
+              <a:rPr lang="en-US" sz="1700" b="1" dirty="0">
+                <a:solidFill>
+                  <a:schemeClr val="tx1"/>
+                </a:solidFill>
+              </a:rPr>
+              <a:t>估上限</a:t>
+            </a:r>
+            <a:endParaRPr lang="en-US" sz="1700" dirty="0"/>
+          </a:p>
+        </p:txBody>
+      </p:sp>
+      <p:sp>
+        <p:nvSpPr>
+          <p:cNvPr id="16" name="text-284"/>
+          <p:cNvSpPr txBox="1"/>
+          <p:nvPr/>
+        </p:nvSpPr>
+        <p:spPr>
+          <a:xfrm>
+            <a:off x="6446520" y="2670048"/>
+            <a:ext cx="2194560" cy="822960"/>
+          </a:xfrm>
+          <a:prstGeom prst="rect">
+            <a:avLst/>
+          </a:prstGeom>
+          <a:noFill/>
+          <a:ln/>
+        </p:spPr>
+        <p:txBody>
+          <a:bodyPr wrap="square" lIns="0" tIns="0" rIns="0" bIns="0" rtlCol="0" anchor="t"/>
+          <a:lstStyle/>
+          <a:p>
+            <a:pPr indent="0" marL="0">
+              <a:buNone/>
+            </a:pPr>
+            <a:r>
+              <a:rPr lang="en-US" sz="1300" dirty="0">
                 <a:solidFill>
                   <a:schemeClr val="tx2"/>
                 </a:solidFill>
               </a:rPr>
-              <a:t>不看分數</a:t>
-            </a:r>
-            <a:endParaRPr lang="en-US" sz="1400" dirty="0"/>
-          </a:p>
-        </p:txBody>
-      </p:sp>
-      <p:sp>
-        <p:nvSpPr>
-          <p:cNvPr id="14" name="text-281"/>
+              <a:t>窮舉小輸入＋隨機搜尋</a:t>
+            </a:r>
+            <a:endParaRPr lang="en-US" sz="1300" dirty="0"/>
+          </a:p>
+        </p:txBody>
+      </p:sp>
+      <p:sp>
+        <p:nvSpPr>
+          <p:cNvPr id="17" name="card-285"/>
+          <p:cNvSpPr/>
+          <p:nvPr/>
+        </p:nvSpPr>
+        <p:spPr>
+          <a:xfrm>
+            <a:off x="9052560" y="1691640"/>
+            <a:ext cx="2606040" cy="1874520"/>
+          </a:xfrm>
+          <a:prstGeom prst="roundRect">
+            <a:avLst>
+              <a:gd name="adj" fmla="val 3902"/>
+            </a:avLst>
+          </a:prstGeom>
+          <a:solidFill>
+            <a:schemeClr val="bg2"/>
+          </a:solidFill>
+          <a:ln w="9525">
+            <a:solidFill>
+              <a:schemeClr val="accent6"/>
+            </a:solidFill>
+            <a:prstDash val="solid"/>
+          </a:ln>
+        </p:spPr>
+      </p:sp>
+      <p:sp>
+        <p:nvSpPr>
+          <p:cNvPr id="18" name="text-286"/>
           <p:cNvSpPr txBox="1"/>
           <p:nvPr/>
         </p:nvSpPr>
         <p:spPr>
           <a:xfrm>
-            <a:off x="548640" y="3931920"/>
-            <a:ext cx="11094415" cy="411480"/>
+            <a:off x="9281160" y="1828800"/>
+            <a:ext cx="2194560" cy="365760"/>
           </a:xfrm>
           <a:prstGeom prst="rect">
             <a:avLst/>
@@ -14262,14 +12770,183 @@
               <a:buNone/>
             </a:pPr>
             <a:r>
-              <a:rPr lang="en-US" sz="1500" dirty="0">
+              <a:rPr lang="en-US" sz="1500" b="1" dirty="0">
+                <a:solidFill>
+                  <a:schemeClr val="accent4"/>
+                </a:solidFill>
+                <a:latin typeface="Consolas" pitchFamily="34" charset="0"/>
+                <a:ea typeface="Consolas" pitchFamily="34" charset="-122"/>
+                <a:cs typeface="Consolas" pitchFamily="34" charset="-120"/>
+              </a:rPr>
+              <a:t>第四關</a:t>
+            </a:r>
+            <a:endParaRPr lang="en-US" sz="1500" dirty="0"/>
+          </a:p>
+        </p:txBody>
+      </p:sp>
+      <p:sp>
+        <p:nvSpPr>
+          <p:cNvPr id="19" name="text-287"/>
+          <p:cNvSpPr txBox="1"/>
+          <p:nvPr/>
+        </p:nvSpPr>
+        <p:spPr>
+          <a:xfrm>
+            <a:off x="9281160" y="2212848"/>
+            <a:ext cx="2194560" cy="411480"/>
+          </a:xfrm>
+          <a:prstGeom prst="rect">
+            <a:avLst/>
+          </a:prstGeom>
+          <a:noFill/>
+          <a:ln/>
+        </p:spPr>
+        <p:txBody>
+          <a:bodyPr wrap="square" lIns="0" tIns="0" rIns="0" bIns="0" rtlCol="0" anchor="t"/>
+          <a:lstStyle/>
+          <a:p>
+            <a:pPr indent="0" marL="0">
+              <a:buNone/>
+            </a:pPr>
+            <a:r>
+              <a:rPr lang="en-US" sz="1700" b="1" dirty="0">
+                <a:solidFill>
+                  <a:schemeClr val="tx1"/>
+                </a:solidFill>
+              </a:rPr>
+              <a:t>值不值得做實驗</a:t>
+            </a:r>
+            <a:endParaRPr lang="en-US" sz="1700" dirty="0"/>
+          </a:p>
+        </p:txBody>
+      </p:sp>
+      <p:sp>
+        <p:nvSpPr>
+          <p:cNvPr id="20" name="text-288"/>
+          <p:cNvSpPr txBox="1"/>
+          <p:nvPr/>
+        </p:nvSpPr>
+        <p:spPr>
+          <a:xfrm>
+            <a:off x="9281160" y="2670048"/>
+            <a:ext cx="2194560" cy="822960"/>
+          </a:xfrm>
+          <a:prstGeom prst="rect">
+            <a:avLst/>
+          </a:prstGeom>
+          <a:noFill/>
+          <a:ln/>
+        </p:spPr>
+        <p:txBody>
+          <a:bodyPr wrap="square" lIns="0" tIns="0" rIns="0" bIns="0" rtlCol="0" anchor="t"/>
+          <a:lstStyle/>
+          <a:p>
+            <a:pPr indent="0" marL="0">
+              <a:buNone/>
+            </a:pPr>
+            <a:r>
+              <a:rPr lang="en-US" sz="1300" dirty="0">
                 <a:solidFill>
                   <a:schemeClr val="tx2"/>
                 </a:solidFill>
               </a:rPr>
-              <a:t>數字是擋到最難那種錯誤的測資數。只有 3 次觀察、結果起伏大，只當線索。</a:t>
-            </a:r>
-            <a:endParaRPr lang="en-US" sz="1500" dirty="0"/>
+              <a:t>起點不能太高、符合實驗設計</a:t>
+            </a:r>
+            <a:endParaRPr lang="en-US" sz="1300" dirty="0"/>
+          </a:p>
+        </p:txBody>
+      </p:sp>
+      <p:sp>
+        <p:nvSpPr>
+          <p:cNvPr id="21" name="text-289"/>
+          <p:cNvSpPr txBox="1"/>
+          <p:nvPr/>
+        </p:nvSpPr>
+        <p:spPr>
+          <a:xfrm>
+            <a:off x="548640" y="3886200"/>
+            <a:ext cx="11094415" cy="2194560"/>
+          </a:xfrm>
+          <a:prstGeom prst="rect">
+            <a:avLst/>
+          </a:prstGeom>
+          <a:noFill/>
+          <a:ln/>
+        </p:spPr>
+        <p:txBody>
+          <a:bodyPr wrap="square" lIns="0" tIns="0" rIns="0" bIns="0" rtlCol="0" anchor="t"/>
+          <a:lstStyle/>
+          <a:p>
+            <a:pPr marL="203200" indent="-203200">
+              <a:spcAft>
+                <a:spcPts val="800"/>
+              </a:spcAft>
+              <a:buSzPct val="100000"/>
+              <a:buChar char="•"/>
+            </a:pPr>
+            <a:r>
+              <a:rPr lang="en-US" sz="1600" dirty="0">
+                <a:solidFill>
+                  <a:schemeClr val="tx1"/>
+                </a:solidFill>
+              </a:rPr>
+              <a:t>實際評過 6 題</a:t>
+            </a:r>
+            <a:endParaRPr lang="en-US" sz="1600" dirty="0"/>
+          </a:p>
+          <a:p>
+            <a:pPr marL="203200" indent="-203200">
+              <a:spcAft>
+                <a:spcPts val="800"/>
+              </a:spcAft>
+              <a:buSzPct val="100000"/>
+              <a:buChar char="•"/>
+            </a:pPr>
+            <a:r>
+              <a:rPr lang="en-US" sz="1600" dirty="0">
+                <a:solidFill>
+                  <a:schemeClr val="tx1"/>
+                </a:solidFill>
+              </a:rPr>
+              <a:t>積水題（LC42）方法能用，但起點已經 0.83，不適合當實驗題</a:t>
+            </a:r>
+            <a:endParaRPr lang="en-US" sz="1600" dirty="0"/>
+          </a:p>
+          <a:p>
+            <a:pPr marL="203200" indent="-203200">
+              <a:spcAft>
+                <a:spcPts val="800"/>
+              </a:spcAft>
+              <a:buSzPct val="100000"/>
+              <a:buChar char="•"/>
+            </a:pPr>
+            <a:r>
+              <a:rPr lang="en-US" sz="1600" dirty="0">
+                <a:solidFill>
+                  <a:schemeClr val="tx1"/>
+                </a:solidFill>
+              </a:rPr>
+              <a:t>兩陣列中位數難在效率，這套方法只能檢查答案對不對</a:t>
+            </a:r>
+            <a:endParaRPr lang="en-US" sz="1600" dirty="0"/>
+          </a:p>
+          <a:p>
+            <a:pPr marL="203200" indent="-203200">
+              <a:spcAft>
+                <a:spcPts val="800"/>
+              </a:spcAft>
+              <a:buSzPct val="100000"/>
+              <a:buChar char="•"/>
+            </a:pPr>
+            <a:r>
+              <a:rPr lang="en-US" sz="1600" dirty="0">
+                <a:solidFill>
+                  <a:schemeClr val="tx1"/>
+                </a:solidFill>
+              </a:rPr>
+              <a:t>LC42 的錯誤樣本裡有兩份行為完全一樣，被第二關抓出來</a:t>
+            </a:r>
+            <a:endParaRPr lang="en-US" sz="1600" dirty="0"/>
           </a:p>
         </p:txBody>
       </p:sp>
@@ -14381,7 +13058,7 @@
                 <a:ea typeface="Consolas" pitchFamily="34" charset="-122"/>
                 <a:cs typeface="Consolas" pitchFamily="34" charset="-120"/>
               </a:rPr>
-              <a:t>備用 C</a:t>
+              <a:t>備用 B</a:t>
             </a:r>
             <a:endParaRPr lang="en-US" sz="1300" dirty="0"/>
           </a:p>
@@ -14419,7 +13096,7 @@
                   <a:schemeClr val="tx1"/>
                 </a:solidFill>
               </a:rPr>
-              <a:t>工程上遇到的問題</a:t>
+              <a:t>給 AI 的指示 v1 → v2、看分數再改</a:t>
             </a:r>
             <a:endParaRPr lang="en-US" sz="3000" dirty="0"/>
           </a:p>
@@ -14427,18 +13104,18 @@
       </p:sp>
       <p:sp>
         <p:nvSpPr>
-          <p:cNvPr id="5" name="card-282"/>
+          <p:cNvPr id="5" name="card-290"/>
           <p:cNvSpPr/>
           <p:nvPr/>
         </p:nvSpPr>
         <p:spPr>
           <a:xfrm>
             <a:off x="548640" y="1691640"/>
-            <a:ext cx="11094415" cy="1188720"/>
+            <a:ext cx="5394960" cy="1965960"/>
           </a:xfrm>
           <a:prstGeom prst="roundRect">
             <a:avLst>
-              <a:gd name="adj" fmla="val 6154"/>
+              <a:gd name="adj" fmla="val 3721"/>
             </a:avLst>
           </a:prstGeom>
           <a:solidFill>
@@ -14454,23 +13131,23 @@
       </p:sp>
       <p:sp>
         <p:nvSpPr>
-          <p:cNvPr id="6" name="text-283"/>
+          <p:cNvPr id="6" name="text-291"/>
           <p:cNvSpPr txBox="1"/>
           <p:nvPr/>
         </p:nvSpPr>
         <p:spPr>
           <a:xfrm>
-            <a:off x="868680" y="1828800"/>
-            <a:ext cx="3657600" cy="914400"/>
-          </a:xfrm>
-          <a:prstGeom prst="rect">
-            <a:avLst/>
-          </a:prstGeom>
-          <a:noFill/>
-          <a:ln/>
-        </p:spPr>
-        <p:txBody>
-          <a:bodyPr wrap="square" lIns="0" tIns="0" rIns="0" bIns="0" rtlCol="0" anchor="ctr"/>
+            <a:off x="822960" y="1828800"/>
+            <a:ext cx="4846320" cy="411480"/>
+          </a:xfrm>
+          <a:prstGeom prst="rect">
+            <a:avLst/>
+          </a:prstGeom>
+          <a:noFill/>
+          <a:ln/>
+        </p:spPr>
+        <p:txBody>
+          <a:bodyPr wrap="square" lIns="0" tIns="0" rIns="0" bIns="0" rtlCol="0" anchor="t"/>
           <a:lstStyle/>
           <a:p>
             <a:pPr indent="0" marL="0">
@@ -14482,7 +13159,7 @@
                   <a:schemeClr val="accent1"/>
                 </a:solidFill>
               </a:rPr>
-              <a:t>判題的輸入長度上限</a:t>
+              <a:t>指示 v1 → v2</a:t>
             </a:r>
             <a:endParaRPr lang="en-US" sz="1800" dirty="0"/>
           </a:p>
@@ -14490,23 +13167,23 @@
       </p:sp>
       <p:sp>
         <p:nvSpPr>
-          <p:cNvPr id="7" name="text-284"/>
+          <p:cNvPr id="7" name="text-292"/>
           <p:cNvSpPr txBox="1"/>
           <p:nvPr/>
         </p:nvSpPr>
         <p:spPr>
           <a:xfrm>
-            <a:off x="4572000" y="1828800"/>
-            <a:ext cx="6858000" cy="914400"/>
-          </a:xfrm>
-          <a:prstGeom prst="rect">
-            <a:avLst/>
-          </a:prstGeom>
-          <a:noFill/>
-          <a:ln/>
-        </p:spPr>
-        <p:txBody>
-          <a:bodyPr wrap="square" lIns="0" tIns="0" rIns="0" bIns="0" rtlCol="0" anchor="ctr"/>
+            <a:off x="822960" y="2286000"/>
+            <a:ext cx="4846320" cy="1463040"/>
+          </a:xfrm>
+          <a:prstGeom prst="rect">
+            <a:avLst/>
+          </a:prstGeom>
+          <a:noFill/>
+          <a:ln/>
+        </p:spPr>
+        <p:txBody>
+          <a:bodyPr wrap="square" lIns="0" tIns="0" rIns="0" bIns="0" rtlCol="0" anchor="t"/>
           <a:lstStyle/>
           <a:p>
             <a:pPr indent="0" marL="0">
@@ -14518,26 +13195,40 @@
                   <a:schemeClr val="tx2"/>
                 </a:solidFill>
               </a:rPr>
-              <a:t>原本把程式塞進命令列，Windows 超過約 3.2 萬字元就失敗；改從標準輸入傳，10 萬筆輸入也能判</a:t>
+              <a:t>v1：AI 提的測資大多一道只擋一種錯</a:t>
             </a:r>
             <a:endParaRPr lang="en-US" sz="1500" dirty="0"/>
           </a:p>
-        </p:txBody>
-      </p:sp>
-      <p:sp>
-        <p:nvSpPr>
-          <p:cNvPr id="8" name="card-285"/>
+          <a:p>
+            <a:pPr indent="0" marL="0">
+              <a:buNone/>
+            </a:pPr>
+            <a:r>
+              <a:rPr lang="en-US" sz="1500" dirty="0">
+                <a:solidFill>
+                  <a:schemeClr val="tx2"/>
+                </a:solidFill>
+              </a:rPr>
+              <a:t>v2：要求一道擋越多種越好，並告訴它目前每道擋幾種</a:t>
+            </a:r>
+            <a:endParaRPr lang="en-US" sz="1500" dirty="0"/>
+          </a:p>
+        </p:txBody>
+      </p:sp>
+      <p:sp>
+        <p:nvSpPr>
+          <p:cNvPr id="8" name="card-293"/>
           <p:cNvSpPr/>
           <p:nvPr/>
         </p:nvSpPr>
         <p:spPr>
           <a:xfrm>
-            <a:off x="548640" y="3063240"/>
-            <a:ext cx="11094415" cy="1188720"/>
+            <a:off x="6245352" y="1691640"/>
+            <a:ext cx="5394960" cy="1965960"/>
           </a:xfrm>
           <a:prstGeom prst="roundRect">
             <a:avLst>
-              <a:gd name="adj" fmla="val 6154"/>
+              <a:gd name="adj" fmla="val 3721"/>
             </a:avLst>
           </a:prstGeom>
           <a:solidFill>
@@ -14553,23 +13244,23 @@
       </p:sp>
       <p:sp>
         <p:nvSpPr>
-          <p:cNvPr id="9" name="text-286"/>
+          <p:cNvPr id="9" name="text-294"/>
           <p:cNvSpPr txBox="1"/>
           <p:nvPr/>
         </p:nvSpPr>
         <p:spPr>
           <a:xfrm>
-            <a:off x="868680" y="3200400"/>
-            <a:ext cx="3657600" cy="914400"/>
-          </a:xfrm>
-          <a:prstGeom prst="rect">
-            <a:avLst/>
-          </a:prstGeom>
-          <a:noFill/>
-          <a:ln/>
-        </p:spPr>
-        <p:txBody>
-          <a:bodyPr wrap="square" lIns="0" tIns="0" rIns="0" bIns="0" rtlCol="0" anchor="ctr"/>
+            <a:off x="6519672" y="1828800"/>
+            <a:ext cx="4846320" cy="411480"/>
+          </a:xfrm>
+          <a:prstGeom prst="rect">
+            <a:avLst/>
+          </a:prstGeom>
+          <a:noFill/>
+          <a:ln/>
+        </p:spPr>
+        <p:txBody>
+          <a:bodyPr wrap="square" lIns="0" tIns="0" rIns="0" bIns="0" rtlCol="0" anchor="t"/>
           <a:lstStyle/>
           <a:p>
             <a:pPr indent="0" marL="0">
@@ -14581,7 +13272,7 @@
                   <a:schemeClr val="accent1"/>
                 </a:solidFill>
               </a:rPr>
-              <a:t>AI 服務變動</a:t>
+              <a:t>看分數再改（3 次觀察）</a:t>
             </a:r>
             <a:endParaRPr lang="en-US" sz="1800" dirty="0"/>
           </a:p>
@@ -14589,23 +13280,173 @@
       </p:sp>
       <p:sp>
         <p:nvSpPr>
-          <p:cNvPr id="10" name="text-287"/>
+          <p:cNvPr id="10" name="text-295"/>
           <p:cNvSpPr txBox="1"/>
           <p:nvPr/>
         </p:nvSpPr>
         <p:spPr>
           <a:xfrm>
-            <a:off x="4572000" y="3200400"/>
-            <a:ext cx="6858000" cy="914400"/>
-          </a:xfrm>
-          <a:prstGeom prst="rect">
-            <a:avLst/>
-          </a:prstGeom>
-          <a:noFill/>
-          <a:ln/>
-        </p:spPr>
-        <p:txBody>
-          <a:bodyPr wrap="square" lIns="0" tIns="0" rIns="0" bIns="0" rtlCol="0" anchor="ctr"/>
+            <a:off x="6519672" y="2148840"/>
+            <a:ext cx="2377440" cy="868680"/>
+          </a:xfrm>
+          <a:prstGeom prst="rect">
+            <a:avLst/>
+          </a:prstGeom>
+          <a:noFill/>
+          <a:ln/>
+        </p:spPr>
+        <p:txBody>
+          <a:bodyPr wrap="square" lIns="0" tIns="0" rIns="0" bIns="0" rtlCol="0" anchor="b"/>
+          <a:lstStyle/>
+          <a:p>
+            <a:pPr indent="0" marL="0">
+              <a:buNone/>
+            </a:pPr>
+            <a:r>
+              <a:rPr lang="en-US" sz="3000" b="1" dirty="0">
+                <a:solidFill>
+                  <a:schemeClr val="accent3"/>
+                </a:solidFill>
+                <a:latin typeface="Consolas" pitchFamily="34" charset="0"/>
+                <a:ea typeface="Consolas" pitchFamily="34" charset="-122"/>
+                <a:cs typeface="Consolas" pitchFamily="34" charset="-120"/>
+              </a:rPr>
+              <a:t>23/98</a:t>
+            </a:r>
+            <a:endParaRPr lang="en-US" sz="3000" dirty="0"/>
+          </a:p>
+        </p:txBody>
+      </p:sp>
+      <p:sp>
+        <p:nvSpPr>
+          <p:cNvPr id="11" name="text-296"/>
+          <p:cNvSpPr txBox="1"/>
+          <p:nvPr/>
+        </p:nvSpPr>
+        <p:spPr>
+          <a:xfrm>
+            <a:off x="6519672" y="3063240"/>
+            <a:ext cx="2377440" cy="548640"/>
+          </a:xfrm>
+          <a:prstGeom prst="rect">
+            <a:avLst/>
+          </a:prstGeom>
+          <a:noFill/>
+          <a:ln/>
+        </p:spPr>
+        <p:txBody>
+          <a:bodyPr wrap="square" lIns="0" tIns="0" rIns="0" bIns="0" rtlCol="0" anchor="t"/>
+          <a:lstStyle/>
+          <a:p>
+            <a:pPr indent="0" marL="0">
+              <a:buNone/>
+            </a:pPr>
+            <a:r>
+              <a:rPr lang="en-US" sz="1400" dirty="0">
+                <a:solidFill>
+                  <a:schemeClr val="tx2"/>
+                </a:solidFill>
+              </a:rPr>
+              <a:t>看分數再改</a:t>
+            </a:r>
+            <a:endParaRPr lang="en-US" sz="1400" dirty="0"/>
+          </a:p>
+        </p:txBody>
+      </p:sp>
+      <p:sp>
+        <p:nvSpPr>
+          <p:cNvPr id="12" name="text-297"/>
+          <p:cNvSpPr txBox="1"/>
+          <p:nvPr/>
+        </p:nvSpPr>
+        <p:spPr>
+          <a:xfrm>
+            <a:off x="9052560" y="2148840"/>
+            <a:ext cx="2286000" cy="868680"/>
+          </a:xfrm>
+          <a:prstGeom prst="rect">
+            <a:avLst/>
+          </a:prstGeom>
+          <a:noFill/>
+          <a:ln/>
+        </p:spPr>
+        <p:txBody>
+          <a:bodyPr wrap="square" lIns="0" tIns="0" rIns="0" bIns="0" rtlCol="0" anchor="b"/>
+          <a:lstStyle/>
+          <a:p>
+            <a:pPr indent="0" marL="0">
+              <a:buNone/>
+            </a:pPr>
+            <a:r>
+              <a:rPr lang="en-US" sz="3000" b="1" dirty="0">
+                <a:solidFill>
+                  <a:schemeClr val="accent2"/>
+                </a:solidFill>
+                <a:latin typeface="Consolas" pitchFamily="34" charset="0"/>
+                <a:ea typeface="Consolas" pitchFamily="34" charset="-122"/>
+                <a:cs typeface="Consolas" pitchFamily="34" charset="-120"/>
+              </a:rPr>
+              <a:t>0/93</a:t>
+            </a:r>
+            <a:endParaRPr lang="en-US" sz="3000" dirty="0"/>
+          </a:p>
+        </p:txBody>
+      </p:sp>
+      <p:sp>
+        <p:nvSpPr>
+          <p:cNvPr id="13" name="text-298"/>
+          <p:cNvSpPr txBox="1"/>
+          <p:nvPr/>
+        </p:nvSpPr>
+        <p:spPr>
+          <a:xfrm>
+            <a:off x="9052560" y="3063240"/>
+            <a:ext cx="2286000" cy="548640"/>
+          </a:xfrm>
+          <a:prstGeom prst="rect">
+            <a:avLst/>
+          </a:prstGeom>
+          <a:noFill/>
+          <a:ln/>
+        </p:spPr>
+        <p:txBody>
+          <a:bodyPr wrap="square" lIns="0" tIns="0" rIns="0" bIns="0" rtlCol="0" anchor="t"/>
+          <a:lstStyle/>
+          <a:p>
+            <a:pPr indent="0" marL="0">
+              <a:buNone/>
+            </a:pPr>
+            <a:r>
+              <a:rPr lang="en-US" sz="1400" dirty="0">
+                <a:solidFill>
+                  <a:schemeClr val="tx2"/>
+                </a:solidFill>
+              </a:rPr>
+              <a:t>不看分數</a:t>
+            </a:r>
+            <a:endParaRPr lang="en-US" sz="1400" dirty="0"/>
+          </a:p>
+        </p:txBody>
+      </p:sp>
+      <p:sp>
+        <p:nvSpPr>
+          <p:cNvPr id="14" name="text-299"/>
+          <p:cNvSpPr txBox="1"/>
+          <p:nvPr/>
+        </p:nvSpPr>
+        <p:spPr>
+          <a:xfrm>
+            <a:off x="548640" y="3931920"/>
+            <a:ext cx="11094415" cy="411480"/>
+          </a:xfrm>
+          <a:prstGeom prst="rect">
+            <a:avLst/>
+          </a:prstGeom>
+          <a:noFill/>
+          <a:ln/>
+        </p:spPr>
+        <p:txBody>
+          <a:bodyPr wrap="square" lIns="0" tIns="0" rIns="0" bIns="0" rtlCol="0" anchor="t"/>
           <a:lstStyle/>
           <a:p>
             <a:pPr indent="0" marL="0">
@@ -14617,106 +13458,7 @@
                   <a:schemeClr val="tx2"/>
                 </a:solidFill>
               </a:rPr>
-              <a:t>Groq 下架 Llama、免費方案每分鐘 8000 tokens：改用 gpt-oss-120b、壓低推理量，額度用完自動等一分鐘重試</a:t>
-            </a:r>
-            <a:endParaRPr lang="en-US" sz="1500" dirty="0"/>
-          </a:p>
-        </p:txBody>
-      </p:sp>
-      <p:sp>
-        <p:nvSpPr>
-          <p:cNvPr id="11" name="card-288"/>
-          <p:cNvSpPr/>
-          <p:nvPr/>
-        </p:nvSpPr>
-        <p:spPr>
-          <a:xfrm>
-            <a:off x="548640" y="4434840"/>
-            <a:ext cx="11094415" cy="1188720"/>
-          </a:xfrm>
-          <a:prstGeom prst="roundRect">
-            <a:avLst>
-              <a:gd name="adj" fmla="val 6154"/>
-            </a:avLst>
-          </a:prstGeom>
-          <a:solidFill>
-            <a:schemeClr val="bg2"/>
-          </a:solidFill>
-          <a:ln w="9525">
-            <a:solidFill>
-              <a:schemeClr val="accent6"/>
-            </a:solidFill>
-            <a:prstDash val="solid"/>
-          </a:ln>
-        </p:spPr>
-      </p:sp>
-      <p:sp>
-        <p:nvSpPr>
-          <p:cNvPr id="12" name="text-289"/>
-          <p:cNvSpPr txBox="1"/>
-          <p:nvPr/>
-        </p:nvSpPr>
-        <p:spPr>
-          <a:xfrm>
-            <a:off x="868680" y="4572000"/>
-            <a:ext cx="3657600" cy="914400"/>
-          </a:xfrm>
-          <a:prstGeom prst="rect">
-            <a:avLst/>
-          </a:prstGeom>
-          <a:noFill/>
-          <a:ln/>
-        </p:spPr>
-        <p:txBody>
-          <a:bodyPr wrap="square" lIns="0" tIns="0" rIns="0" bIns="0" rtlCol="0" anchor="ctr"/>
-          <a:lstStyle/>
-          <a:p>
-            <a:pPr indent="0" marL="0">
-              <a:buNone/>
-            </a:pPr>
-            <a:r>
-              <a:rPr lang="en-US" sz="1800" b="1" dirty="0">
-                <a:solidFill>
-                  <a:schemeClr val="accent1"/>
-                </a:solidFill>
-              </a:rPr>
-              <a:t>自動測試</a:t>
-            </a:r>
-            <a:endParaRPr lang="en-US" sz="1800" dirty="0"/>
-          </a:p>
-        </p:txBody>
-      </p:sp>
-      <p:sp>
-        <p:nvSpPr>
-          <p:cNvPr id="13" name="text-290"/>
-          <p:cNvSpPr txBox="1"/>
-          <p:nvPr/>
-        </p:nvSpPr>
-        <p:spPr>
-          <a:xfrm>
-            <a:off x="4572000" y="4572000"/>
-            <a:ext cx="6858000" cy="914400"/>
-          </a:xfrm>
-          <a:prstGeom prst="rect">
-            <a:avLst/>
-          </a:prstGeom>
-          <a:noFill/>
-          <a:ln/>
-        </p:spPr>
-        <p:txBody>
-          <a:bodyPr wrap="square" lIns="0" tIns="0" rIns="0" bIns="0" rtlCol="0" anchor="ctr"/>
-          <a:lstStyle/>
-          <a:p>
-            <a:pPr indent="0" marL="0">
-              <a:buNone/>
-            </a:pPr>
-            <a:r>
-              <a:rPr lang="en-US" sz="1500" dirty="0">
-                <a:solidFill>
-                  <a:schemeClr val="tx2"/>
-                </a:solidFill>
-              </a:rPr>
-              <a:t>後端 123 個測試全部通過</a:t>
+              <a:t>數字是擋到最難那種錯誤的測資數。只有 3 次觀察、結果起伏大，只當線索。</a:t>
             </a:r>
             <a:endParaRPr lang="en-US" sz="1500" dirty="0"/>
           </a:p>
@@ -14830,7 +13572,7 @@
                 <a:ea typeface="Consolas" pitchFamily="34" charset="-122"/>
                 <a:cs typeface="Consolas" pitchFamily="34" charset="-120"/>
               </a:rPr>
-              <a:t>備用 D</a:t>
+              <a:t>備用 C</a:t>
             </a:r>
             <a:endParaRPr lang="en-US" sz="1300" dirty="0"/>
           </a:p>
@@ -14868,6 +13610,455 @@
                   <a:schemeClr val="tx1"/>
                 </a:solidFill>
               </a:rPr>
+              <a:t>工程上遇到的問題</a:t>
+            </a:r>
+            <a:endParaRPr lang="en-US" sz="3000" dirty="0"/>
+          </a:p>
+        </p:txBody>
+      </p:sp>
+      <p:sp>
+        <p:nvSpPr>
+          <p:cNvPr id="5" name="card-300"/>
+          <p:cNvSpPr/>
+          <p:nvPr/>
+        </p:nvSpPr>
+        <p:spPr>
+          <a:xfrm>
+            <a:off x="548640" y="1691640"/>
+            <a:ext cx="11094415" cy="1188720"/>
+          </a:xfrm>
+          <a:prstGeom prst="roundRect">
+            <a:avLst>
+              <a:gd name="adj" fmla="val 6154"/>
+            </a:avLst>
+          </a:prstGeom>
+          <a:solidFill>
+            <a:schemeClr val="bg2"/>
+          </a:solidFill>
+          <a:ln w="9525">
+            <a:solidFill>
+              <a:schemeClr val="accent6"/>
+            </a:solidFill>
+            <a:prstDash val="solid"/>
+          </a:ln>
+        </p:spPr>
+      </p:sp>
+      <p:sp>
+        <p:nvSpPr>
+          <p:cNvPr id="6" name="text-301"/>
+          <p:cNvSpPr txBox="1"/>
+          <p:nvPr/>
+        </p:nvSpPr>
+        <p:spPr>
+          <a:xfrm>
+            <a:off x="868680" y="1828800"/>
+            <a:ext cx="3657600" cy="914400"/>
+          </a:xfrm>
+          <a:prstGeom prst="rect">
+            <a:avLst/>
+          </a:prstGeom>
+          <a:noFill/>
+          <a:ln/>
+        </p:spPr>
+        <p:txBody>
+          <a:bodyPr wrap="square" lIns="0" tIns="0" rIns="0" bIns="0" rtlCol="0" anchor="ctr"/>
+          <a:lstStyle/>
+          <a:p>
+            <a:pPr indent="0" marL="0">
+              <a:buNone/>
+            </a:pPr>
+            <a:r>
+              <a:rPr lang="en-US" sz="1800" b="1" dirty="0">
+                <a:solidFill>
+                  <a:schemeClr val="accent1"/>
+                </a:solidFill>
+              </a:rPr>
+              <a:t>判題的輸入長度上限</a:t>
+            </a:r>
+            <a:endParaRPr lang="en-US" sz="1800" dirty="0"/>
+          </a:p>
+        </p:txBody>
+      </p:sp>
+      <p:sp>
+        <p:nvSpPr>
+          <p:cNvPr id="7" name="text-302"/>
+          <p:cNvSpPr txBox="1"/>
+          <p:nvPr/>
+        </p:nvSpPr>
+        <p:spPr>
+          <a:xfrm>
+            <a:off x="4572000" y="1828800"/>
+            <a:ext cx="6858000" cy="914400"/>
+          </a:xfrm>
+          <a:prstGeom prst="rect">
+            <a:avLst/>
+          </a:prstGeom>
+          <a:noFill/>
+          <a:ln/>
+        </p:spPr>
+        <p:txBody>
+          <a:bodyPr wrap="square" lIns="0" tIns="0" rIns="0" bIns="0" rtlCol="0" anchor="ctr"/>
+          <a:lstStyle/>
+          <a:p>
+            <a:pPr indent="0" marL="0">
+              <a:buNone/>
+            </a:pPr>
+            <a:r>
+              <a:rPr lang="en-US" sz="1500" dirty="0">
+                <a:solidFill>
+                  <a:schemeClr val="tx2"/>
+                </a:solidFill>
+              </a:rPr>
+              <a:t>原本把程式塞進命令列，Windows 超過約 3.2 萬字元就失敗；改從標準輸入傳，10 萬筆輸入也能判</a:t>
+            </a:r>
+            <a:endParaRPr lang="en-US" sz="1500" dirty="0"/>
+          </a:p>
+        </p:txBody>
+      </p:sp>
+      <p:sp>
+        <p:nvSpPr>
+          <p:cNvPr id="8" name="card-303"/>
+          <p:cNvSpPr/>
+          <p:nvPr/>
+        </p:nvSpPr>
+        <p:spPr>
+          <a:xfrm>
+            <a:off x="548640" y="3063240"/>
+            <a:ext cx="11094415" cy="1188720"/>
+          </a:xfrm>
+          <a:prstGeom prst="roundRect">
+            <a:avLst>
+              <a:gd name="adj" fmla="val 6154"/>
+            </a:avLst>
+          </a:prstGeom>
+          <a:solidFill>
+            <a:schemeClr val="bg2"/>
+          </a:solidFill>
+          <a:ln w="9525">
+            <a:solidFill>
+              <a:schemeClr val="accent6"/>
+            </a:solidFill>
+            <a:prstDash val="solid"/>
+          </a:ln>
+        </p:spPr>
+      </p:sp>
+      <p:sp>
+        <p:nvSpPr>
+          <p:cNvPr id="9" name="text-304"/>
+          <p:cNvSpPr txBox="1"/>
+          <p:nvPr/>
+        </p:nvSpPr>
+        <p:spPr>
+          <a:xfrm>
+            <a:off x="868680" y="3200400"/>
+            <a:ext cx="3657600" cy="914400"/>
+          </a:xfrm>
+          <a:prstGeom prst="rect">
+            <a:avLst/>
+          </a:prstGeom>
+          <a:noFill/>
+          <a:ln/>
+        </p:spPr>
+        <p:txBody>
+          <a:bodyPr wrap="square" lIns="0" tIns="0" rIns="0" bIns="0" rtlCol="0" anchor="ctr"/>
+          <a:lstStyle/>
+          <a:p>
+            <a:pPr indent="0" marL="0">
+              <a:buNone/>
+            </a:pPr>
+            <a:r>
+              <a:rPr lang="en-US" sz="1800" b="1" dirty="0">
+                <a:solidFill>
+                  <a:schemeClr val="accent1"/>
+                </a:solidFill>
+              </a:rPr>
+              <a:t>AI 服務變動</a:t>
+            </a:r>
+            <a:endParaRPr lang="en-US" sz="1800" dirty="0"/>
+          </a:p>
+        </p:txBody>
+      </p:sp>
+      <p:sp>
+        <p:nvSpPr>
+          <p:cNvPr id="10" name="text-305"/>
+          <p:cNvSpPr txBox="1"/>
+          <p:nvPr/>
+        </p:nvSpPr>
+        <p:spPr>
+          <a:xfrm>
+            <a:off x="4572000" y="3200400"/>
+            <a:ext cx="6858000" cy="914400"/>
+          </a:xfrm>
+          <a:prstGeom prst="rect">
+            <a:avLst/>
+          </a:prstGeom>
+          <a:noFill/>
+          <a:ln/>
+        </p:spPr>
+        <p:txBody>
+          <a:bodyPr wrap="square" lIns="0" tIns="0" rIns="0" bIns="0" rtlCol="0" anchor="ctr"/>
+          <a:lstStyle/>
+          <a:p>
+            <a:pPr indent="0" marL="0">
+              <a:buNone/>
+            </a:pPr>
+            <a:r>
+              <a:rPr lang="en-US" sz="1500" dirty="0">
+                <a:solidFill>
+                  <a:schemeClr val="tx2"/>
+                </a:solidFill>
+              </a:rPr>
+              <a:t>Groq 下架 Llama、免費方案每分鐘 8000 tokens：改用 gpt-oss-120b、壓低推理量，額度用完自動等一分鐘重試</a:t>
+            </a:r>
+            <a:endParaRPr lang="en-US" sz="1500" dirty="0"/>
+          </a:p>
+        </p:txBody>
+      </p:sp>
+      <p:sp>
+        <p:nvSpPr>
+          <p:cNvPr id="11" name="card-306"/>
+          <p:cNvSpPr/>
+          <p:nvPr/>
+        </p:nvSpPr>
+        <p:spPr>
+          <a:xfrm>
+            <a:off x="548640" y="4434840"/>
+            <a:ext cx="11094415" cy="1188720"/>
+          </a:xfrm>
+          <a:prstGeom prst="roundRect">
+            <a:avLst>
+              <a:gd name="adj" fmla="val 6154"/>
+            </a:avLst>
+          </a:prstGeom>
+          <a:solidFill>
+            <a:schemeClr val="bg2"/>
+          </a:solidFill>
+          <a:ln w="9525">
+            <a:solidFill>
+              <a:schemeClr val="accent6"/>
+            </a:solidFill>
+            <a:prstDash val="solid"/>
+          </a:ln>
+        </p:spPr>
+      </p:sp>
+      <p:sp>
+        <p:nvSpPr>
+          <p:cNvPr id="12" name="text-307"/>
+          <p:cNvSpPr txBox="1"/>
+          <p:nvPr/>
+        </p:nvSpPr>
+        <p:spPr>
+          <a:xfrm>
+            <a:off x="868680" y="4572000"/>
+            <a:ext cx="3657600" cy="914400"/>
+          </a:xfrm>
+          <a:prstGeom prst="rect">
+            <a:avLst/>
+          </a:prstGeom>
+          <a:noFill/>
+          <a:ln/>
+        </p:spPr>
+        <p:txBody>
+          <a:bodyPr wrap="square" lIns="0" tIns="0" rIns="0" bIns="0" rtlCol="0" anchor="ctr"/>
+          <a:lstStyle/>
+          <a:p>
+            <a:pPr indent="0" marL="0">
+              <a:buNone/>
+            </a:pPr>
+            <a:r>
+              <a:rPr lang="en-US" sz="1800" b="1" dirty="0">
+                <a:solidFill>
+                  <a:schemeClr val="accent1"/>
+                </a:solidFill>
+              </a:rPr>
+              <a:t>自動測試</a:t>
+            </a:r>
+            <a:endParaRPr lang="en-US" sz="1800" dirty="0"/>
+          </a:p>
+        </p:txBody>
+      </p:sp>
+      <p:sp>
+        <p:nvSpPr>
+          <p:cNvPr id="13" name="text-308"/>
+          <p:cNvSpPr txBox="1"/>
+          <p:nvPr/>
+        </p:nvSpPr>
+        <p:spPr>
+          <a:xfrm>
+            <a:off x="4572000" y="4572000"/>
+            <a:ext cx="6858000" cy="914400"/>
+          </a:xfrm>
+          <a:prstGeom prst="rect">
+            <a:avLst/>
+          </a:prstGeom>
+          <a:noFill/>
+          <a:ln/>
+        </p:spPr>
+        <p:txBody>
+          <a:bodyPr wrap="square" lIns="0" tIns="0" rIns="0" bIns="0" rtlCol="0" anchor="ctr"/>
+          <a:lstStyle/>
+          <a:p>
+            <a:pPr indent="0" marL="0">
+              <a:buNone/>
+            </a:pPr>
+            <a:r>
+              <a:rPr lang="en-US" sz="1500" dirty="0">
+                <a:solidFill>
+                  <a:schemeClr val="tx2"/>
+                </a:solidFill>
+              </a:rPr>
+              <a:t>後端 123 個測試全部通過</a:t>
+            </a:r>
+            <a:endParaRPr lang="en-US" sz="1500" dirty="0"/>
+          </a:p>
+        </p:txBody>
+      </p:sp>
+      <p:sp>
+        <p:nvSpPr>
+          <p:cNvPr id="25" name="Slide Number Placeholder 0"/>
+          <p:cNvSpPr>
+            <a:spLocks noGrp="1"/>
+          </p:cNvSpPr>
+          <p:nvPr>
+            <p:ph type="sldNum" sz="quarter" idx="4294967295"/>
+          </p:nvPr>
+        </p:nvSpPr>
+        <p:spPr>
+          <a:xfrm>
+            <a:off x="10911535" y="6327648"/>
+            <a:ext cx="731520" cy="320040"/>
+          </a:xfrm>
+          <a:prstGeom prst="rect">
+            <a:avLst/>
+          </a:prstGeom>
+          <a:extLst>
+            <a:ext uri="{C572A759-6A51-4108-AA02-DFA0A04FC94B}">
+              <ma14:wrappingTextBoxFlag xmlns:ma14="http://schemas.microsoft.com/office/mac/drawingml/2011/main" val="0"/>
+            </a:ext>
+          </a:extLst>
+        </p:spPr>
+        <p:txBody>
+          <a:bodyPr/>
+          <a:lstStyle>
+            <a:lvl1pPr>
+              <a:defRPr sz="1200">
+                <a:solidFill>
+                  <a:srgbClr val="6B6459"/>
+                </a:solidFill>
+                <a:latin typeface="Consolas"/>
+                <a:ea typeface="Consolas"/>
+                <a:cs typeface="Consolas"/>
+              </a:defRPr>
+            </a:lvl1pPr>
+          </a:lstStyle>
+          <a:p>
+            <a:pPr algn="r"/>
+            <a:fld id="{F7021451-1387-4CA6-816F-3879F97B5CBC}" type="slidenum">
+              <a:rPr b="0" lang="en-US"/>
+              <a:t>22</a:t>
+            </a:fld>
+            <a:endParaRPr lang="en-US"/>
+          </a:p>
+        </p:txBody>
+      </p:sp>
+    </p:spTree>
+  </p:cSld>
+  <p:clrMapOvr>
+    <a:masterClrMapping/>
+  </p:clrMapOvr>
+</p:sld>
+</file>
+
+<file path=ppt/slides/slide23.xml><?xml version="1.0" encoding="utf-8"?>
+<p:sld xmlns:a="http://schemas.openxmlformats.org/drawingml/2006/main" xmlns:r="http://schemas.openxmlformats.org/officeDocument/2006/relationships" xmlns:p="http://schemas.openxmlformats.org/presentationml/2006/main">
+  <p:cSld name="Slide 23">
+    <p:spTree>
+      <p:nvGrpSpPr>
+        <p:cNvPr id="1" name=""/>
+        <p:cNvGrpSpPr/>
+        <p:nvPr/>
+      </p:nvGrpSpPr>
+      <p:grpSpPr>
+        <a:xfrm>
+          <a:off x="0" y="0"/>
+          <a:ext cx="0" cy="0"/>
+          <a:chOff x="0" y="0"/>
+          <a:chExt cx="0" cy="0"/>
+        </a:xfrm>
+      </p:grpSpPr>
+      <p:sp>
+        <p:nvSpPr>
+          <p:cNvPr id="2" name="Text 0"/>
+          <p:cNvSpPr/>
+          <p:nvPr>
+            <p:ph idx="100" type="body" hasCustomPrompt="1"/>
+          </p:nvPr>
+        </p:nvSpPr>
+        <p:spPr>
+          <a:xfrm>
+            <a:off x="548640" y="347472"/>
+            <a:ext cx="7315200" cy="329184"/>
+          </a:xfrm>
+          <a:prstGeom prst="rect">
+            <a:avLst/>
+          </a:prstGeom>
+          <a:noFill/>
+          <a:ln/>
+        </p:spPr>
+        <p:txBody>
+          <a:bodyPr wrap="square" lIns="0" tIns="0" rIns="0" bIns="0" rtlCol="0" anchor="ctr"/>
+          <a:lstStyle/>
+          <a:p>
+            <a:pPr indent="0" marL="0">
+              <a:buNone/>
+            </a:pPr>
+            <a:r>
+              <a:rPr lang="en-US" sz="1300" spc="200" kern="0" dirty="0">
+                <a:solidFill>
+                  <a:schemeClr val="accent1"/>
+                </a:solidFill>
+                <a:latin typeface="Consolas" pitchFamily="34" charset="0"/>
+                <a:ea typeface="Consolas" pitchFamily="34" charset="-122"/>
+                <a:cs typeface="Consolas" pitchFamily="34" charset="-120"/>
+              </a:rPr>
+              <a:t>備用 D</a:t>
+            </a:r>
+            <a:endParaRPr lang="en-US" sz="1300" dirty="0"/>
+          </a:p>
+        </p:txBody>
+      </p:sp>
+      <p:sp>
+        <p:nvSpPr>
+          <p:cNvPr id="3" name="Text 0"/>
+          <p:cNvSpPr/>
+          <p:nvPr>
+            <p:ph idx="101" type="title" hasCustomPrompt="1"/>
+          </p:nvPr>
+        </p:nvSpPr>
+        <p:spPr>
+          <a:xfrm>
+            <a:off x="548640" y="676656"/>
+            <a:ext cx="11094415" cy="731520"/>
+          </a:xfrm>
+          <a:prstGeom prst="rect">
+            <a:avLst/>
+          </a:prstGeom>
+          <a:noFill/>
+          <a:ln/>
+        </p:spPr>
+        <p:txBody>
+          <a:bodyPr wrap="square" lIns="0" tIns="0" rIns="0" bIns="0" rtlCol="0" anchor="t"/>
+          <a:lstStyle/>
+          <a:p>
+            <a:pPr algn="l" indent="0" marL="0">
+              <a:buNone/>
+            </a:pPr>
+            <a:r>
+              <a:rPr lang="en-US" sz="3000" b="1" dirty="0">
+                <a:solidFill>
+                  <a:schemeClr val="tx1"/>
+                </a:solidFill>
+              </a:rPr>
               <a:t>實驗紀律</a:t>
             </a:r>
             <a:endParaRPr lang="en-US" sz="3000" dirty="0"/>
@@ -14876,7 +14067,7 @@
       </p:sp>
       <p:sp>
         <p:nvSpPr>
-          <p:cNvPr id="5" name="dot-291"/>
+          <p:cNvPr id="5" name="dot-309"/>
           <p:cNvSpPr/>
           <p:nvPr/>
         </p:nvSpPr>
@@ -14901,7 +14092,7 @@
       </p:sp>
       <p:sp>
         <p:nvSpPr>
-          <p:cNvPr id="6" name="text-292"/>
+          <p:cNvPr id="6" name="text-310"/>
           <p:cNvSpPr txBox="1"/>
           <p:nvPr/>
         </p:nvSpPr>
@@ -14937,7 +14128,7 @@
       </p:sp>
       <p:sp>
         <p:nvSpPr>
-          <p:cNvPr id="7" name="text-293"/>
+          <p:cNvPr id="7" name="text-311"/>
           <p:cNvSpPr txBox="1"/>
           <p:nvPr/>
         </p:nvSpPr>
@@ -14973,7 +14164,7 @@
       </p:sp>
       <p:sp>
         <p:nvSpPr>
-          <p:cNvPr id="8" name="dot-294"/>
+          <p:cNvPr id="8" name="dot-312"/>
           <p:cNvSpPr/>
           <p:nvPr/>
         </p:nvSpPr>
@@ -14998,7 +14189,7 @@
       </p:sp>
       <p:sp>
         <p:nvSpPr>
-          <p:cNvPr id="9" name="text-295"/>
+          <p:cNvPr id="9" name="text-313"/>
           <p:cNvSpPr txBox="1"/>
           <p:nvPr/>
         </p:nvSpPr>
@@ -15034,7 +14225,7 @@
       </p:sp>
       <p:sp>
         <p:nvSpPr>
-          <p:cNvPr id="10" name="text-296"/>
+          <p:cNvPr id="10" name="text-314"/>
           <p:cNvSpPr txBox="1"/>
           <p:nvPr/>
         </p:nvSpPr>
@@ -15070,7 +14261,7 @@
       </p:sp>
       <p:sp>
         <p:nvSpPr>
-          <p:cNvPr id="11" name="dot-297"/>
+          <p:cNvPr id="11" name="dot-315"/>
           <p:cNvSpPr/>
           <p:nvPr/>
         </p:nvSpPr>
@@ -15095,7 +14286,7 @@
       </p:sp>
       <p:sp>
         <p:nvSpPr>
-          <p:cNvPr id="12" name="text-298"/>
+          <p:cNvPr id="12" name="text-316"/>
           <p:cNvSpPr txBox="1"/>
           <p:nvPr/>
         </p:nvSpPr>
@@ -15131,7 +14322,7 @@
       </p:sp>
       <p:sp>
         <p:nvSpPr>
-          <p:cNvPr id="13" name="text-299"/>
+          <p:cNvPr id="13" name="text-317"/>
           <p:cNvSpPr txBox="1"/>
           <p:nvPr/>
         </p:nvSpPr>
@@ -15167,7 +14358,7 @@
       </p:sp>
       <p:sp>
         <p:nvSpPr>
-          <p:cNvPr id="14" name="dot-300"/>
+          <p:cNvPr id="14" name="dot-318"/>
           <p:cNvSpPr/>
           <p:nvPr/>
         </p:nvSpPr>
@@ -15192,7 +14383,7 @@
       </p:sp>
       <p:sp>
         <p:nvSpPr>
-          <p:cNvPr id="15" name="text-301"/>
+          <p:cNvPr id="15" name="text-319"/>
           <p:cNvSpPr txBox="1"/>
           <p:nvPr/>
         </p:nvSpPr>
@@ -15228,7 +14419,7 @@
       </p:sp>
       <p:sp>
         <p:nvSpPr>
-          <p:cNvPr id="16" name="text-302"/>
+          <p:cNvPr id="16" name="text-320"/>
           <p:cNvSpPr txBox="1"/>
           <p:nvPr/>
         </p:nvSpPr>
@@ -15264,7 +14455,7 @@
       </p:sp>
       <p:sp>
         <p:nvSpPr>
-          <p:cNvPr id="17" name="dot-303"/>
+          <p:cNvPr id="17" name="dot-321"/>
           <p:cNvSpPr/>
           <p:nvPr/>
         </p:nvSpPr>
@@ -15289,7 +14480,7 @@
       </p:sp>
       <p:sp>
         <p:nvSpPr>
-          <p:cNvPr id="18" name="text-304"/>
+          <p:cNvPr id="18" name="text-322"/>
           <p:cNvSpPr txBox="1"/>
           <p:nvPr/>
         </p:nvSpPr>
@@ -15325,7 +14516,7 @@
       </p:sp>
       <p:sp>
         <p:nvSpPr>
-          <p:cNvPr id="19" name="text-305"/>
+          <p:cNvPr id="19" name="text-323"/>
           <p:cNvSpPr txBox="1"/>
           <p:nvPr/>
         </p:nvSpPr>
@@ -15401,7 +14592,7 @@
             <a:pPr algn="r"/>
             <a:fld id="{F7021451-1387-4CA6-816F-3879F97B5CBC}" type="slidenum">
               <a:rPr b="0" lang="en-US"/>
-              <a:t>22</a:t>
+              <a:t>23</a:t>
             </a:fld>
             <a:endParaRPr lang="en-US"/>
           </a:p>

--- a/docs/superpowers/specs/capstone_proposal.pptx
+++ b/docs/superpowers/specs/capstone_proposal.pptx
@@ -129,7 +129,7 @@
   <p:extLst>
     <p:ext uri="{521415D9-36F7-43E2-AB2F-B90AF26B5E84}">
       <p14:sectionLst xmlns:p14="http://schemas.microsoft.com/office/powerpoint/2010/main">
-        <p14:section name="開場" id="{dcf9e5e5-311d-cd20-9212-b37b4d77a911}">
+        <p14:section name="開場" id="{626d334b-07b2-8131-8816-a36ab420512e}">
           <p14:sldIdLst>
             <p14:sldId id="256"/>
             <p14:sldId id="257"/>
@@ -137,7 +137,7 @@
             <p14:sldId id="259"/>
           </p14:sldIdLst>
         </p14:section>
-        <p14:section name="名詞" id="{f13b8f84-3733-3ffc-2b54-3ab0b44d52b9}">
+        <p14:section name="名詞" id="{762795c9-8cbd-146d-d029-8925e33c538b}">
           <p14:sldIdLst>
             <p14:sldId id="260"/>
             <p14:sldId id="261"/>
@@ -145,7 +145,7 @@
             <p14:sldId id="263"/>
           </p14:sldIdLst>
         </p14:section>
-        <p14:section name="發現與結果" id="{2b0db44c-e47a-1769-b3d8-03e5c58910e0}">
+        <p14:section name="發現與結果" id="{7be1c696-128c-3c58-4c7a-663cf7ee4db4}">
           <p14:sldIdLst>
             <p14:sldId id="264"/>
             <p14:sldId id="265"/>
@@ -154,19 +154,19 @@
             <p14:sldId id="268"/>
           </p14:sldIdLst>
         </p14:section>
-        <p14:section name="提示線與 Demo" id="{352abb38-ea3e-8b17-6893-79a20c11ae72}">
+        <p14:section name="提示線與 Demo" id="{67e21546-cdc3-75d7-4dd7-ea1cc3b7ce42}">
           <p14:sldIdLst>
             <p14:sldId id="269"/>
             <p14:sldId id="270"/>
           </p14:sldIdLst>
         </p14:section>
-        <p14:section name="結尾" id="{72aafb8a-e252-c19f-5d0b-ff8d09570c8a}">
+        <p14:section name="結尾" id="{557e0430-f0ee-13e8-bb33-a0c834c7be37}">
           <p14:sldIdLst>
             <p14:sldId id="271"/>
             <p14:sldId id="272"/>
           </p14:sldIdLst>
         </p14:section>
-        <p14:section name="附錄" id="{19723ba2-e516-b915-1cbd-9122505e3215}">
+        <p14:section name="附錄" id="{0284867c-5b67-5e52-84b4-41a8607becbe}">
           <p14:sldIdLst>
             <p14:sldId id="273"/>
             <p14:sldId id="274"/>
@@ -844,7 +844,7 @@
           <a:p>
             <a:r>
               <a:rPr lang="en-US" dirty="0"/>
-              <a:t>這一頁從文獻出發。Cai 等人提出 CodeContests-O：只靠 LLM 自己產生的測資不夠多樣，所以把測資拿去跑已知的正確解和錯誤解，再把執行結果回饋給 LLM 一輪一輪修正。他們在大規模資料上得到很高的 TPR 和 TNR。Wang 等人則提出驗證器把關的協作方式：LLM 產出、驗證器評分、再決定怎麼處理。本專題把這兩個想法放進同一個全自動流程：我們的 TPR、TNR 評測就是驗證器，自動審核只看分數。觀察到的是：在兩題上，流程都能從頭跑到尾，測資都比起點進步；但都沒有達到 0.85。和文獻不同的是，我們每題只有一次實驗、6 份錯誤程式，所以只當可行性的觀察。細節數字：困難題 0.278 到 0.676，簡單題 0.500 到 0.583。</a:t>
+              <a:t>這一頁用一個故事說明流程。每一輪，AI 先讀題目，提出一批候選測資，只給輸入、不給答案。機器把每一道拿去考那些寫錯的程式，看它擋下哪些。只有真的有用的會留下，沒用的丟掉並記錄原因。下一輪，AI 會看到上一輪的結果，針對還沒抓到的弱點再出題。過程中有一段插曲：有一種錯誤，只從左往右掃一遍，很狡猾。AI 連續兩輪都說要抓它，卻都沒抓到；直到它在回饋裡看見自己落空，才終於補上。這說明回饋不是裝飾，AI 要看見自己哪裡沒做到，才會修正方向，這也是 Cai 等人回饋驅動迭代的核心。兩題都在沒有人介入的情況下跑完。被問到數字時：最長合法括號 TNR 0.278 到 0.676，買賣股票 0.500 到 0.583，各一次實驗，都沒有達到 0.85。</a:t>
             </a:r>
             <a:endParaRPr lang="en-US" dirty="0"/>
           </a:p>
@@ -932,7 +932,7 @@
           <a:p>
             <a:r>
               <a:rPr lang="en-US" dirty="0"/>
-              <a:t>Yang 等人在 TestCase-Eval 裡，用兩個面向評估 LLM 產生的測資：錯誤覆蓋，是一組測資能涵蓋多少種失敗方式；錯誤暴露，是能不能針對某一個錯誤寫法，產生讓它出錯的輸入。我們在買賣股票這題觀察到，這兩個面向會互相拉扯。自動審核只收能提高平均 TNR 的測資，平均 TNR 比較接近每道測資能擋下多少錯，所以只抓到少數錯誤、但能補漏洞的測資被拒絕，結果停在 4 道，驗收組漏掉一種錯誤。實驗之外補了邊界案例後，覆蓋變完整，驗收組不再漏網，但平均 TNR 從 0.583 降到 0.383。意涵是：評估測資要同時看兩個面向，只追平均會犧牲覆蓋。下一步是覆蓋優先的審核。</a:t>
+              <a:t>用考卷來比喻。一種好考卷是題題都很難，每一題都能刷掉很多種錯誤，文獻叫錯誤暴露。另一種好考卷是每個觀念都考到，每一種錯誤至少被一題抓到，文獻叫錯誤覆蓋。我們的自動審核只喜歡很難的題。結果在買賣股票這題，它把一些看起來平凡、但能抓到特定錯誤的題目丟掉了，最後有一種錯誤從頭到尾沒被考到。當我們把這些平凡但必要的題目補回去，考卷變完整了，但平均難度反而下降。所以分數高，不代表考卷完整；這也呼應前面的發現：單一個平均分數，說不完測資的好壞。下一步，我們要讓審核同時看這兩種好。被問到數字時：補強前驗收組漏一種、平均 TNR 0.583；補強後驗收組無漏網、平均 TNR 0.383。</a:t>
             </a:r>
             <a:endParaRPr lang="en-US" dirty="0"/>
           </a:p>
@@ -1020,7 +1020,7 @@
           <a:p>
             <a:r>
               <a:rPr lang="en-US" dirty="0"/>
-              <a:t>提示線也從文獻出發。Kazemitabaar 等人的 CodeAid 在 700 名學生的課堂部署了 12 週，設計原則之一是避免直接給答案，改用帶逐行說明的虛擬碼。Xiao 等人則提醒：只有高層次的文字提示，可能沒有幫助，甚至會誤導；更具體的提示比較能幫到新手。這兩點之間有張力：太抽象沒用，太具體又變成給答案。我們的做法是：AI 結構上拿不到學生的程式碼；用通過往返檢查的虛擬碼，當作比文字提示具體、但又不是可以直接貼上的答案的中間層；檢查關會擋下夾帶程式碼或整段照抄虛擬碼的提示。觀察：6 種錯誤各試一次都通過自動檢查，但提示方向好不好，仍需要人判斷。</a:t>
+              <a:t>測資決定了系統知道學生錯在哪；這一頁看 AI 怎麼把它變成提示。這是平台實際產生的一次提示，題目是最長合法括號。學生交了一個常見的寫法：只認得相鄰的括號對。系統告訴他：輸入 (())() 應該是 6，你的程式回答 2。AI 的提示沒有給任何程式碼，用問句引導，而且指到具體的失敗輸入和虛擬碼的步驟，這符合 CodeAid 不直接給答案的原則。但也有不夠的地方：AI 看不到程式，它以為學生照虛擬碼用了 stack，其實這位學生根本沒用 stack，所以提示可能會帶錯方向，這也呼應 Xiao 等人提醒的，提示可能誤導。看不到程式碼，換來的是不洩漏答案；代價是有時會猜錯學生的思路。這是一次實際產生的結果，模型 gpt-oss-20b，不代表每次都一樣。</a:t>
             </a:r>
             <a:endParaRPr lang="en-US" dirty="0"/>
           </a:p>
@@ -1108,7 +1108,7 @@
           <a:p>
             <a:r>
               <a:rPr lang="en-US" dirty="0"/>
-              <a:t>Demo 時請大家對照三個設計原則來看。第一，不給完整答案，來自 CodeAid：看提示裡有沒有可以直接貼上的程式。第二，比高層次文字更具體，來自 Xiao 等人：看提示有沒有指到虛擬碼的步驟。第三，讓學生自己判斷，也是 CodeAid 的透明原則：看失敗測資的輸入、預期、實際結果是不是都攤開給學生。操作：打開最長合法括號題目頁、展開虛擬碼，交一份常見錯解，看系統怎麼判、AI 怎麼提示。事先錄好影片當備案。</a:t>
+              <a:t>Demo 我們跟著一位學生走一遍。他先讀題目、展開虛擬碼，寫出直覺的解法送出。系統告訴他哪一道測資沒過，輸入、預期、實際結果都攤開。接著他讀 AI 的問句提示，回頭對照虛擬碼的步驟，修改之後再送出。請大家留意兩件事：提示裡沒有可以直接貼上的程式；提示會指到具體的測資和步驟。事先錄好影片當備案。</a:t>
             </a:r>
             <a:endParaRPr lang="en-US" dirty="0"/>
           </a:p>
@@ -5207,7 +5207,7 @@
                 <a:ea typeface="Consolas" pitchFamily="34" charset="-122"/>
                 <a:cs typeface="Consolas" pitchFamily="34" charset="-120"/>
               </a:rPr>
-              <a:t>環境測試結果</a:t>
+              <a:t>成效展現 1／4</a:t>
             </a:r>
             <a:endParaRPr lang="en-US" sz="1300" dirty="0"/>
           </a:p>
@@ -5245,7 +5245,7 @@
                   <a:schemeClr val="tx1"/>
                 </a:solidFill>
               </a:rPr>
-              <a:t>回饋驅動迭代：文獻怎麼說，我們觀察到什麼</a:t>
+              <a:t>流程跑起來了：AI 一輪一輪自己補測資</a:t>
             </a:r>
             <a:endParaRPr lang="en-US" sz="3000" dirty="0"/>
           </a:p>
@@ -5260,11 +5260,11 @@
         <p:spPr>
           <a:xfrm>
             <a:off x="548640" y="1645920"/>
-            <a:ext cx="5486400" cy="2103120"/>
+            <a:ext cx="2578608" cy="2011680"/>
           </a:xfrm>
           <a:prstGeom prst="roundRect">
             <a:avLst>
-              <a:gd name="adj" fmla="val 3478"/>
+              <a:gd name="adj" fmla="val 3636"/>
             </a:avLst>
           </a:prstGeom>
           <a:solidFill>
@@ -5286,8 +5286,8 @@
         </p:nvSpPr>
         <p:spPr>
           <a:xfrm>
-            <a:off x="822960" y="1783080"/>
-            <a:ext cx="4937760" cy="365760"/>
+            <a:off x="777240" y="1783080"/>
+            <a:ext cx="548640" cy="502920"/>
           </a:xfrm>
           <a:prstGeom prst="rect">
             <a:avLst/>
@@ -5303,28 +5303,17 @@
               <a:buNone/>
             </a:pPr>
             <a:r>
-              <a:rPr lang="en-US" sz="1400" b="1" dirty="0">
-                <a:solidFill>
-                  <a:schemeClr val="accent1"/>
-                </a:solidFill>
-              </a:rPr>
-              <a:t>論文觀點　</a:t>
-            </a:r>
-            <a:pPr indent="0" marL="0">
-              <a:buNone/>
-            </a:pPr>
-            <a:r>
-              <a:rPr lang="en-US" sz="1400" dirty="0">
-                <a:solidFill>
-                  <a:schemeClr val="accent1"/>
+              <a:rPr lang="en-US" sz="2400" b="1" dirty="0">
+                <a:solidFill>
+                  <a:schemeClr val="accent4"/>
                 </a:solidFill>
                 <a:latin typeface="Consolas" pitchFamily="34" charset="0"/>
                 <a:ea typeface="Consolas" pitchFamily="34" charset="-122"/>
                 <a:cs typeface="Consolas" pitchFamily="34" charset="-120"/>
               </a:rPr>
-              <a:t>[1]</a:t>
-            </a:r>
-            <a:endParaRPr lang="en-US" sz="1400" dirty="0"/>
+              <a:t>1</a:t>
+            </a:r>
+            <a:endParaRPr lang="en-US" sz="2400" dirty="0"/>
           </a:p>
         </p:txBody>
       </p:sp>
@@ -5336,8 +5325,8 @@
         </p:nvSpPr>
         <p:spPr>
           <a:xfrm>
-            <a:off x="822960" y="2194560"/>
-            <a:ext cx="4937760" cy="1005840"/>
+            <a:off x="777240" y="2304288"/>
+            <a:ext cx="2167128" cy="457200"/>
           </a:xfrm>
           <a:prstGeom prst="rect">
             <a:avLst/>
@@ -5353,14 +5342,14 @@
               <a:buNone/>
             </a:pPr>
             <a:r>
-              <a:rPr lang="en-US" sz="1600" dirty="0">
+              <a:rPr lang="en-US" sz="1700" b="1" dirty="0">
                 <a:solidFill>
                   <a:schemeClr val="tx1"/>
                 </a:solidFill>
               </a:rPr>
-              <a:t>只靠 LLM 自己產生的測資不夠多樣；把測資拿去跑已知的正確解與錯誤解，再把執行結果回饋給 LLM 一輪輪修正，可以提高測資的鑑別力</a:t>
-            </a:r>
-            <a:endParaRPr lang="en-US" sz="1600" dirty="0"/>
+              <a:t>AI 出題</a:t>
+            </a:r>
+            <a:endParaRPr lang="en-US" sz="1700" dirty="0"/>
           </a:p>
         </p:txBody>
       </p:sp>
@@ -5372,8 +5361,8 @@
         </p:nvSpPr>
         <p:spPr>
           <a:xfrm>
-            <a:off x="822960" y="3246120"/>
-            <a:ext cx="4937760" cy="365760"/>
+            <a:off x="777240" y="2788920"/>
+            <a:ext cx="2167128" cy="777240"/>
           </a:xfrm>
           <a:prstGeom prst="rect">
             <a:avLst/>
@@ -5389,31 +5378,69 @@
               <a:buNone/>
             </a:pPr>
             <a:r>
-              <a:rPr lang="en-US" sz="1200" dirty="0">
+              <a:rPr lang="en-US" sz="1400" dirty="0">
                 <a:solidFill>
                   <a:schemeClr val="tx2"/>
                 </a:solidFill>
               </a:rPr>
-              <a:t>Cai et al., CodeContests-O, 2026</a:t>
-            </a:r>
-            <a:endParaRPr lang="en-US" sz="1200" dirty="0"/>
-          </a:p>
-        </p:txBody>
-      </p:sp>
-      <p:sp>
-        <p:nvSpPr>
-          <p:cNvPr id="9" name="card-180"/>
+              <a:t>讀題目，提出一批候選測資</a:t>
+            </a:r>
+            <a:endParaRPr lang="en-US" sz="1400" dirty="0"/>
+          </a:p>
+          <a:p>
+            <a:pPr indent="0" marL="0">
+              <a:buNone/>
+            </a:pPr>
+            <a:r>
+              <a:rPr lang="en-US" sz="1400" dirty="0">
+                <a:solidFill>
+                  <a:schemeClr val="tx2"/>
+                </a:solidFill>
+              </a:rPr>
+              <a:t>只給輸入，不給答案</a:t>
+            </a:r>
+            <a:endParaRPr lang="en-US" sz="1400" dirty="0"/>
+          </a:p>
+        </p:txBody>
+      </p:sp>
+      <p:sp>
+        <p:nvSpPr>
+          <p:cNvPr id="9" name="arrow-180"/>
           <p:cNvSpPr/>
           <p:nvPr/>
         </p:nvSpPr>
         <p:spPr>
           <a:xfrm>
-            <a:off x="548640" y="3931920"/>
-            <a:ext cx="5486400" cy="1645920"/>
+            <a:off x="3145536" y="2651760"/>
+            <a:ext cx="210312" cy="0"/>
+          </a:xfrm>
+          <a:prstGeom prst="line">
+            <a:avLst/>
+          </a:prstGeom>
+          <a:noFill/>
+          <a:ln w="19050">
+            <a:solidFill>
+              <a:schemeClr val="accent4"/>
+            </a:solidFill>
+            <a:prstDash val="solid"/>
+            <a:tailEnd type="triangle"/>
+          </a:ln>
+        </p:spPr>
+      </p:sp>
+      <p:sp>
+        <p:nvSpPr>
+          <p:cNvPr id="10" name="card-181"/>
+          <p:cNvSpPr/>
+          <p:nvPr/>
+        </p:nvSpPr>
+        <p:spPr>
+          <a:xfrm>
+            <a:off x="3374136" y="1645920"/>
+            <a:ext cx="2578608" cy="2011680"/>
           </a:xfrm>
           <a:prstGeom prst="roundRect">
             <a:avLst>
-              <a:gd name="adj" fmla="val 4444"/>
+              <a:gd name="adj" fmla="val 3636"/>
             </a:avLst>
           </a:prstGeom>
           <a:solidFill>
@@ -5429,14 +5456,14 @@
       </p:sp>
       <p:sp>
         <p:nvSpPr>
-          <p:cNvPr id="10" name="text-181"/>
+          <p:cNvPr id="11" name="text-182"/>
           <p:cNvSpPr txBox="1"/>
           <p:nvPr/>
         </p:nvSpPr>
         <p:spPr>
           <a:xfrm>
-            <a:off x="822960" y="4069080"/>
-            <a:ext cx="4937760" cy="365760"/>
+            <a:off x="3602736" y="1783080"/>
+            <a:ext cx="548640" cy="502920"/>
           </a:xfrm>
           <a:prstGeom prst="rect">
             <a:avLst/>
@@ -5452,64 +5479,17 @@
               <a:buNone/>
             </a:pPr>
             <a:r>
-              <a:rPr lang="en-US" sz="1400" b="1" dirty="0">
-                <a:solidFill>
-                  <a:schemeClr val="accent1"/>
-                </a:solidFill>
-              </a:rPr>
-              <a:t>論文觀點　</a:t>
-            </a:r>
-            <a:pPr indent="0" marL="0">
-              <a:buNone/>
-            </a:pPr>
-            <a:r>
-              <a:rPr lang="en-US" sz="1400" dirty="0">
-                <a:solidFill>
-                  <a:schemeClr val="accent1"/>
+              <a:rPr lang="en-US" sz="2400" b="1" dirty="0">
+                <a:solidFill>
+                  <a:schemeClr val="accent4"/>
                 </a:solidFill>
                 <a:latin typeface="Consolas" pitchFamily="34" charset="0"/>
                 <a:ea typeface="Consolas" pitchFamily="34" charset="-122"/>
                 <a:cs typeface="Consolas" pitchFamily="34" charset="-120"/>
               </a:rPr>
-              <a:t>[9]</a:t>
-            </a:r>
-            <a:endParaRPr lang="en-US" sz="1400" dirty="0"/>
-          </a:p>
-        </p:txBody>
-      </p:sp>
-      <p:sp>
-        <p:nvSpPr>
-          <p:cNvPr id="11" name="text-182"/>
-          <p:cNvSpPr txBox="1"/>
-          <p:nvPr/>
-        </p:nvSpPr>
-        <p:spPr>
-          <a:xfrm>
-            <a:off x="822960" y="4480560"/>
-            <a:ext cx="4937760" cy="548640"/>
-          </a:xfrm>
-          <a:prstGeom prst="rect">
-            <a:avLst/>
-          </a:prstGeom>
-          <a:noFill/>
-          <a:ln/>
-        </p:spPr>
-        <p:txBody>
-          <a:bodyPr wrap="square" lIns="0" tIns="0" rIns="0" bIns="0" rtlCol="0" anchor="t"/>
-          <a:lstStyle/>
-          <a:p>
-            <a:pPr indent="0" marL="0">
-              <a:buNone/>
-            </a:pPr>
-            <a:r>
-              <a:rPr lang="en-US" sz="1600" dirty="0">
-                <a:solidFill>
-                  <a:schemeClr val="tx1"/>
-                </a:solidFill>
-              </a:rPr>
-              <a:t>LLM 產出 → 驗證器評分 → 再決定怎麼處理</a:t>
-            </a:r>
-            <a:endParaRPr lang="en-US" sz="1600" dirty="0"/>
+              <a:t>2</a:t>
+            </a:r>
+            <a:endParaRPr lang="en-US" sz="2400" dirty="0"/>
           </a:p>
         </p:txBody>
       </p:sp>
@@ -5521,8 +5501,8 @@
         </p:nvSpPr>
         <p:spPr>
           <a:xfrm>
-            <a:off x="822960" y="5074920"/>
-            <a:ext cx="4937760" cy="365760"/>
+            <a:off x="3602736" y="2304288"/>
+            <a:ext cx="2167128" cy="457200"/>
           </a:xfrm>
           <a:prstGeom prst="rect">
             <a:avLst/>
@@ -5538,198 +5518,117 @@
               <a:buNone/>
             </a:pPr>
             <a:r>
-              <a:rPr lang="en-US" sz="1200" dirty="0">
+              <a:rPr lang="en-US" sz="1700" b="1" dirty="0">
+                <a:solidFill>
+                  <a:schemeClr val="tx1"/>
+                </a:solidFill>
+              </a:rPr>
+              <a:t>機器考試</a:t>
+            </a:r>
+            <a:endParaRPr lang="en-US" sz="1700" dirty="0"/>
+          </a:p>
+        </p:txBody>
+      </p:sp>
+      <p:sp>
+        <p:nvSpPr>
+          <p:cNvPr id="13" name="text-184"/>
+          <p:cNvSpPr txBox="1"/>
+          <p:nvPr/>
+        </p:nvSpPr>
+        <p:spPr>
+          <a:xfrm>
+            <a:off x="3602736" y="2788920"/>
+            <a:ext cx="2167128" cy="777240"/>
+          </a:xfrm>
+          <a:prstGeom prst="rect">
+            <a:avLst/>
+          </a:prstGeom>
+          <a:noFill/>
+          <a:ln/>
+        </p:spPr>
+        <p:txBody>
+          <a:bodyPr wrap="square" lIns="0" tIns="0" rIns="0" bIns="0" rtlCol="0" anchor="t"/>
+          <a:lstStyle/>
+          <a:p>
+            <a:pPr indent="0" marL="0">
+              <a:buNone/>
+            </a:pPr>
+            <a:r>
+              <a:rPr lang="en-US" sz="1400" dirty="0">
                 <a:solidFill>
                   <a:schemeClr val="tx2"/>
                 </a:solidFill>
               </a:rPr>
-              <a:t>Wang et al., CHI 2024</a:t>
-            </a:r>
-            <a:endParaRPr lang="en-US" sz="1200" dirty="0"/>
-          </a:p>
-        </p:txBody>
-      </p:sp>
-      <p:sp>
-        <p:nvSpPr>
-          <p:cNvPr id="13" name="obs-184"/>
+              <a:t>把每道測資拿去考</a:t>
+            </a:r>
+            <a:endParaRPr lang="en-US" sz="1400" dirty="0"/>
+          </a:p>
+          <a:p>
+            <a:pPr indent="0" marL="0">
+              <a:buNone/>
+            </a:pPr>
+            <a:r>
+              <a:rPr lang="en-US" sz="1400" dirty="0">
+                <a:solidFill>
+                  <a:schemeClr val="tx2"/>
+                </a:solidFill>
+              </a:rPr>
+              <a:t>寫錯的程式，看它擋下哪些</a:t>
+            </a:r>
+            <a:endParaRPr lang="en-US" sz="1400" dirty="0"/>
+          </a:p>
+        </p:txBody>
+      </p:sp>
+      <p:sp>
+        <p:nvSpPr>
+          <p:cNvPr id="14" name="arrow-185"/>
           <p:cNvSpPr/>
           <p:nvPr/>
         </p:nvSpPr>
         <p:spPr>
           <a:xfrm>
-            <a:off x="6263640" y="1645920"/>
-            <a:ext cx="5376672" cy="3931920"/>
-          </a:xfrm>
-          <a:prstGeom prst="roundRect">
-            <a:avLst>
-              <a:gd name="adj" fmla="val 1860"/>
-            </a:avLst>
-          </a:prstGeom>
-          <a:solidFill>
-            <a:schemeClr val="bg2"/>
-          </a:solidFill>
-          <a:ln w="15875">
+            <a:off x="5971032" y="2651760"/>
+            <a:ext cx="210312" cy="0"/>
+          </a:xfrm>
+          <a:prstGeom prst="line">
+            <a:avLst/>
+          </a:prstGeom>
+          <a:noFill/>
+          <a:ln w="19050">
             <a:solidFill>
               <a:schemeClr val="accent4"/>
             </a:solidFill>
             <a:prstDash val="solid"/>
+            <a:tailEnd type="triangle"/>
           </a:ln>
         </p:spPr>
       </p:sp>
       <p:sp>
         <p:nvSpPr>
-          <p:cNvPr id="14" name="text-185"/>
-          <p:cNvSpPr txBox="1"/>
-          <p:nvPr/>
-        </p:nvSpPr>
-        <p:spPr>
-          <a:xfrm>
-            <a:off x="6537960" y="1783080"/>
-            <a:ext cx="4828032" cy="365760"/>
-          </a:xfrm>
-          <a:prstGeom prst="rect">
-            <a:avLst/>
-          </a:prstGeom>
-          <a:noFill/>
-          <a:ln/>
-        </p:spPr>
-        <p:txBody>
-          <a:bodyPr wrap="square" lIns="0" tIns="0" rIns="0" bIns="0" rtlCol="0" anchor="t"/>
-          <a:lstStyle/>
-          <a:p>
-            <a:pPr indent="0" marL="0">
-              <a:buNone/>
-            </a:pPr>
-            <a:r>
-              <a:rPr lang="en-US" sz="1400" b="1" dirty="0">
-                <a:solidFill>
-                  <a:schemeClr val="accent4"/>
-                </a:solidFill>
-              </a:rPr>
-              <a:t>本專題觀察　</a:t>
-            </a:r>
-            <a:pPr indent="0" marL="0">
-              <a:buNone/>
-            </a:pPr>
-            <a:r>
-              <a:rPr lang="en-US" sz="1400" b="1" dirty="0">
-                <a:solidFill>
-                  <a:schemeClr val="tx1"/>
-                </a:solidFill>
-              </a:rPr>
-              <a:t>全自動流程能跑完</a:t>
-            </a:r>
-            <a:endParaRPr lang="en-US" sz="1400" dirty="0"/>
-          </a:p>
-        </p:txBody>
-      </p:sp>
-      <p:sp>
-        <p:nvSpPr>
-          <p:cNvPr id="15" name="text-186"/>
-          <p:cNvSpPr txBox="1"/>
-          <p:nvPr/>
-        </p:nvSpPr>
-        <p:spPr>
-          <a:xfrm>
-            <a:off x="6537960" y="2286000"/>
-            <a:ext cx="4873752" cy="3154680"/>
-          </a:xfrm>
-          <a:prstGeom prst="rect">
-            <a:avLst/>
-          </a:prstGeom>
-          <a:noFill/>
-          <a:ln/>
-        </p:spPr>
-        <p:txBody>
-          <a:bodyPr wrap="square" lIns="0" tIns="0" rIns="0" bIns="0" rtlCol="0" anchor="t"/>
-          <a:lstStyle/>
-          <a:p>
-            <a:pPr marL="203200" indent="-203200">
-              <a:spcAft>
-                <a:spcPts val="1600"/>
-              </a:spcAft>
-              <a:buSzPct val="100000"/>
-              <a:buChar char="•"/>
-            </a:pPr>
-            <a:r>
-              <a:rPr lang="en-US" sz="1700" dirty="0">
-                <a:solidFill>
-                  <a:schemeClr val="tx1"/>
-                </a:solidFill>
-              </a:rPr>
-              <a:t>同一個迴圈，用 TPR／TNR 評測當驗證器，審核只看分數</a:t>
-            </a:r>
-            <a:endParaRPr lang="en-US" sz="1700" dirty="0"/>
-          </a:p>
-          <a:p>
-            <a:pPr marL="203200" indent="-203200">
-              <a:spcAft>
-                <a:spcPts val="1600"/>
-              </a:spcAft>
-              <a:buSzPct val="100000"/>
-              <a:buChar char="•"/>
-            </a:pPr>
-            <a:r>
-              <a:rPr lang="en-US" sz="1700" dirty="0">
-                <a:solidFill>
-                  <a:schemeClr val="tx1"/>
-                </a:solidFill>
-              </a:rPr>
-              <a:t>兩題都從頭跑到結束，</a:t>
-            </a:r>
-            <a:pPr indent="0" marL="0">
-              <a:spcAft>
-                <a:spcPts val="1600"/>
-              </a:spcAft>
-              <a:buNone/>
-            </a:pPr>
-            <a:r>
-              <a:rPr lang="en-US" sz="1700" b="1" dirty="0">
-                <a:solidFill>
-                  <a:srgbClr val="5CB87C"/>
-                </a:solidFill>
-              </a:rPr>
-              <a:t>測資都比起點進步</a:t>
-            </a:r>
-            <a:endParaRPr lang="en-US" sz="1700" dirty="0"/>
-          </a:p>
-          <a:p>
-            <a:pPr marL="203200" indent="-203200">
-              <a:spcAft>
-                <a:spcPts val="1600"/>
-              </a:spcAft>
-              <a:buSzPct val="100000"/>
-              <a:buChar char="•"/>
-            </a:pPr>
-            <a:r>
-              <a:rPr lang="en-US" sz="1700" dirty="0">
-                <a:solidFill>
-                  <a:schemeClr val="tx1"/>
-                </a:solidFill>
-              </a:rPr>
-              <a:t>困難題進步較多；簡單題較早停滯</a:t>
-            </a:r>
-            <a:endParaRPr lang="en-US" sz="1700" dirty="0"/>
-          </a:p>
-          <a:p>
-            <a:pPr marL="203200" indent="-203200">
-              <a:spcAft>
-                <a:spcPts val="1600"/>
-              </a:spcAft>
-              <a:buSzPct val="100000"/>
-              <a:buChar char="•"/>
-            </a:pPr>
-            <a:r>
-              <a:rPr lang="en-US" sz="1700" b="1" dirty="0">
-                <a:solidFill>
-                  <a:srgbClr val="D96870"/>
-                </a:solidFill>
-              </a:rPr>
-              <a:t>兩題都沒有達到 0.85</a:t>
-            </a:r>
-            <a:endParaRPr lang="en-US" sz="1700" dirty="0"/>
-          </a:p>
-        </p:txBody>
+          <p:cNvPr id="15" name="card-186"/>
+          <p:cNvSpPr/>
+          <p:nvPr/>
+        </p:nvSpPr>
+        <p:spPr>
+          <a:xfrm>
+            <a:off x="6199632" y="1645920"/>
+            <a:ext cx="2578608" cy="2011680"/>
+          </a:xfrm>
+          <a:prstGeom prst="roundRect">
+            <a:avLst>
+              <a:gd name="adj" fmla="val 3636"/>
+            </a:avLst>
+          </a:prstGeom>
+          <a:solidFill>
+            <a:schemeClr val="bg2"/>
+          </a:solidFill>
+          <a:ln w="9525">
+            <a:solidFill>
+              <a:schemeClr val="accent6"/>
+            </a:solidFill>
+            <a:prstDash val="solid"/>
+          </a:ln>
+        </p:spPr>
       </p:sp>
       <p:sp>
         <p:nvSpPr>
@@ -5739,8 +5638,8 @@
         </p:nvSpPr>
         <p:spPr>
           <a:xfrm>
-            <a:off x="548640" y="5715000"/>
-            <a:ext cx="11094415" cy="640080"/>
+            <a:off x="6428232" y="1783080"/>
+            <a:ext cx="548640" cy="502920"/>
           </a:xfrm>
           <a:prstGeom prst="rect">
             <a:avLst/>
@@ -5756,12 +5655,412 @@
               <a:buNone/>
             </a:pPr>
             <a:r>
+              <a:rPr lang="en-US" sz="2400" b="1" dirty="0">
+                <a:solidFill>
+                  <a:schemeClr val="accent4"/>
+                </a:solidFill>
+                <a:latin typeface="Consolas" pitchFamily="34" charset="0"/>
+                <a:ea typeface="Consolas" pitchFamily="34" charset="-122"/>
+                <a:cs typeface="Consolas" pitchFamily="34" charset="-120"/>
+              </a:rPr>
+              <a:t>3</a:t>
+            </a:r>
+            <a:endParaRPr lang="en-US" sz="2400" dirty="0"/>
+          </a:p>
+        </p:txBody>
+      </p:sp>
+      <p:sp>
+        <p:nvSpPr>
+          <p:cNvPr id="17" name="text-188"/>
+          <p:cNvSpPr txBox="1"/>
+          <p:nvPr/>
+        </p:nvSpPr>
+        <p:spPr>
+          <a:xfrm>
+            <a:off x="6428232" y="2304288"/>
+            <a:ext cx="2167128" cy="457200"/>
+          </a:xfrm>
+          <a:prstGeom prst="rect">
+            <a:avLst/>
+          </a:prstGeom>
+          <a:noFill/>
+          <a:ln/>
+        </p:spPr>
+        <p:txBody>
+          <a:bodyPr wrap="square" lIns="0" tIns="0" rIns="0" bIns="0" rtlCol="0" anchor="t"/>
+          <a:lstStyle/>
+          <a:p>
+            <a:pPr indent="0" marL="0">
+              <a:buNone/>
+            </a:pPr>
+            <a:r>
+              <a:rPr lang="en-US" sz="1700" b="1" dirty="0">
+                <a:solidFill>
+                  <a:schemeClr val="tx1"/>
+                </a:solidFill>
+              </a:rPr>
+              <a:t>留下有用的</a:t>
+            </a:r>
+            <a:endParaRPr lang="en-US" sz="1700" dirty="0"/>
+          </a:p>
+        </p:txBody>
+      </p:sp>
+      <p:sp>
+        <p:nvSpPr>
+          <p:cNvPr id="18" name="text-189"/>
+          <p:cNvSpPr txBox="1"/>
+          <p:nvPr/>
+        </p:nvSpPr>
+        <p:spPr>
+          <a:xfrm>
+            <a:off x="6428232" y="2788920"/>
+            <a:ext cx="2167128" cy="777240"/>
+          </a:xfrm>
+          <a:prstGeom prst="rect">
+            <a:avLst/>
+          </a:prstGeom>
+          <a:noFill/>
+          <a:ln/>
+        </p:spPr>
+        <p:txBody>
+          <a:bodyPr wrap="square" lIns="0" tIns="0" rIns="0" bIns="0" rtlCol="0" anchor="t"/>
+          <a:lstStyle/>
+          <a:p>
+            <a:pPr indent="0" marL="0">
+              <a:buNone/>
+            </a:pPr>
+            <a:r>
+              <a:rPr lang="en-US" sz="1400" dirty="0">
+                <a:solidFill>
+                  <a:schemeClr val="tx2"/>
+                </a:solidFill>
+              </a:rPr>
+              <a:t>只保留真的有用的</a:t>
+            </a:r>
+            <a:endParaRPr lang="en-US" sz="1400" dirty="0"/>
+          </a:p>
+          <a:p>
+            <a:pPr indent="0" marL="0">
+              <a:buNone/>
+            </a:pPr>
+            <a:r>
+              <a:rPr lang="en-US" sz="1400" dirty="0">
+                <a:solidFill>
+                  <a:schemeClr val="tx2"/>
+                </a:solidFill>
+              </a:rPr>
+              <a:t>丟掉的也記錄原因</a:t>
+            </a:r>
+            <a:endParaRPr lang="en-US" sz="1400" dirty="0"/>
+          </a:p>
+        </p:txBody>
+      </p:sp>
+      <p:sp>
+        <p:nvSpPr>
+          <p:cNvPr id="19" name="arrow-190"/>
+          <p:cNvSpPr/>
+          <p:nvPr/>
+        </p:nvSpPr>
+        <p:spPr>
+          <a:xfrm>
+            <a:off x="8796528" y="2651760"/>
+            <a:ext cx="210312" cy="0"/>
+          </a:xfrm>
+          <a:prstGeom prst="line">
+            <a:avLst/>
+          </a:prstGeom>
+          <a:noFill/>
+          <a:ln w="19050">
+            <a:solidFill>
+              <a:schemeClr val="accent4"/>
+            </a:solidFill>
+            <a:prstDash val="solid"/>
+            <a:tailEnd type="triangle"/>
+          </a:ln>
+        </p:spPr>
+      </p:sp>
+      <p:sp>
+        <p:nvSpPr>
+          <p:cNvPr id="20" name="card-191"/>
+          <p:cNvSpPr/>
+          <p:nvPr/>
+        </p:nvSpPr>
+        <p:spPr>
+          <a:xfrm>
+            <a:off x="9025128" y="1645920"/>
+            <a:ext cx="2578608" cy="2011680"/>
+          </a:xfrm>
+          <a:prstGeom prst="roundRect">
+            <a:avLst>
+              <a:gd name="adj" fmla="val 3636"/>
+            </a:avLst>
+          </a:prstGeom>
+          <a:solidFill>
+            <a:schemeClr val="bg2"/>
+          </a:solidFill>
+          <a:ln w="9525">
+            <a:solidFill>
+              <a:schemeClr val="accent6"/>
+            </a:solidFill>
+            <a:prstDash val="solid"/>
+          </a:ln>
+        </p:spPr>
+      </p:sp>
+      <p:sp>
+        <p:nvSpPr>
+          <p:cNvPr id="21" name="text-192"/>
+          <p:cNvSpPr txBox="1"/>
+          <p:nvPr/>
+        </p:nvSpPr>
+        <p:spPr>
+          <a:xfrm>
+            <a:off x="9253728" y="1783080"/>
+            <a:ext cx="548640" cy="502920"/>
+          </a:xfrm>
+          <a:prstGeom prst="rect">
+            <a:avLst/>
+          </a:prstGeom>
+          <a:noFill/>
+          <a:ln/>
+        </p:spPr>
+        <p:txBody>
+          <a:bodyPr wrap="square" lIns="0" tIns="0" rIns="0" bIns="0" rtlCol="0" anchor="t"/>
+          <a:lstStyle/>
+          <a:p>
+            <a:pPr indent="0" marL="0">
+              <a:buNone/>
+            </a:pPr>
+            <a:r>
+              <a:rPr lang="en-US" sz="2400" b="1" dirty="0">
+                <a:solidFill>
+                  <a:schemeClr val="accent4"/>
+                </a:solidFill>
+                <a:latin typeface="Consolas" pitchFamily="34" charset="0"/>
+                <a:ea typeface="Consolas" pitchFamily="34" charset="-122"/>
+                <a:cs typeface="Consolas" pitchFamily="34" charset="-120"/>
+              </a:rPr>
+              <a:t>4</a:t>
+            </a:r>
+            <a:endParaRPr lang="en-US" sz="2400" dirty="0"/>
+          </a:p>
+        </p:txBody>
+      </p:sp>
+      <p:sp>
+        <p:nvSpPr>
+          <p:cNvPr id="22" name="text-193"/>
+          <p:cNvSpPr txBox="1"/>
+          <p:nvPr/>
+        </p:nvSpPr>
+        <p:spPr>
+          <a:xfrm>
+            <a:off x="9253728" y="2304288"/>
+            <a:ext cx="2167128" cy="457200"/>
+          </a:xfrm>
+          <a:prstGeom prst="rect">
+            <a:avLst/>
+          </a:prstGeom>
+          <a:noFill/>
+          <a:ln/>
+        </p:spPr>
+        <p:txBody>
+          <a:bodyPr wrap="square" lIns="0" tIns="0" rIns="0" bIns="0" rtlCol="0" anchor="t"/>
+          <a:lstStyle/>
+          <a:p>
+            <a:pPr indent="0" marL="0">
+              <a:buNone/>
+            </a:pPr>
+            <a:r>
+              <a:rPr lang="en-US" sz="1700" b="1" dirty="0">
+                <a:solidFill>
+                  <a:schemeClr val="tx1"/>
+                </a:solidFill>
+              </a:rPr>
+              <a:t>針對弱點再出題</a:t>
+            </a:r>
+            <a:endParaRPr lang="en-US" sz="1700" dirty="0"/>
+          </a:p>
+        </p:txBody>
+      </p:sp>
+      <p:sp>
+        <p:nvSpPr>
+          <p:cNvPr id="23" name="text-194"/>
+          <p:cNvSpPr txBox="1"/>
+          <p:nvPr/>
+        </p:nvSpPr>
+        <p:spPr>
+          <a:xfrm>
+            <a:off x="9253728" y="2788920"/>
+            <a:ext cx="2167128" cy="777240"/>
+          </a:xfrm>
+          <a:prstGeom prst="rect">
+            <a:avLst/>
+          </a:prstGeom>
+          <a:noFill/>
+          <a:ln/>
+        </p:spPr>
+        <p:txBody>
+          <a:bodyPr wrap="square" lIns="0" tIns="0" rIns="0" bIns="0" rtlCol="0" anchor="t"/>
+          <a:lstStyle/>
+          <a:p>
+            <a:pPr indent="0" marL="0">
+              <a:buNone/>
+            </a:pPr>
+            <a:r>
+              <a:rPr lang="en-US" sz="1400" dirty="0">
+                <a:solidFill>
+                  <a:schemeClr val="tx2"/>
+                </a:solidFill>
+              </a:rPr>
+              <a:t>AI 看見上一輪的結果</a:t>
+            </a:r>
+            <a:endParaRPr lang="en-US" sz="1400" dirty="0"/>
+          </a:p>
+          <a:p>
+            <a:pPr indent="0" marL="0">
+              <a:buNone/>
+            </a:pPr>
+            <a:r>
+              <a:rPr lang="en-US" sz="1400" dirty="0">
+                <a:solidFill>
+                  <a:schemeClr val="tx2"/>
+                </a:solidFill>
+              </a:rPr>
+              <a:t>補還沒抓到的錯誤</a:t>
+            </a:r>
+            <a:endParaRPr lang="en-US" sz="1400" dirty="0"/>
+          </a:p>
+        </p:txBody>
+      </p:sp>
+      <p:sp>
+        <p:nvSpPr>
+          <p:cNvPr id="24" name="card-195"/>
+          <p:cNvSpPr/>
+          <p:nvPr/>
+        </p:nvSpPr>
+        <p:spPr>
+          <a:xfrm>
+            <a:off x="548640" y="3886200"/>
+            <a:ext cx="11094415" cy="1417320"/>
+          </a:xfrm>
+          <a:prstGeom prst="roundRect">
+            <a:avLst>
+              <a:gd name="adj" fmla="val 5161"/>
+            </a:avLst>
+          </a:prstGeom>
+          <a:solidFill>
+            <a:schemeClr val="bg2"/>
+          </a:solidFill>
+          <a:ln w="9525">
+            <a:solidFill>
+              <a:schemeClr val="accent6"/>
+            </a:solidFill>
+            <a:prstDash val="solid"/>
+          </a:ln>
+        </p:spPr>
+      </p:sp>
+      <p:sp>
+        <p:nvSpPr>
+          <p:cNvPr id="25" name="text-196"/>
+          <p:cNvSpPr txBox="1"/>
+          <p:nvPr/>
+        </p:nvSpPr>
+        <p:spPr>
+          <a:xfrm>
+            <a:off x="868680" y="3995928"/>
+            <a:ext cx="4572000" cy="365760"/>
+          </a:xfrm>
+          <a:prstGeom prst="rect">
+            <a:avLst/>
+          </a:prstGeom>
+          <a:noFill/>
+          <a:ln/>
+        </p:spPr>
+        <p:txBody>
+          <a:bodyPr wrap="square" lIns="0" tIns="0" rIns="0" bIns="0" rtlCol="0" anchor="t"/>
+          <a:lstStyle/>
+          <a:p>
+            <a:pPr indent="0" marL="0">
+              <a:buNone/>
+            </a:pPr>
+            <a:r>
               <a:rPr lang="en-US" sz="1500" b="1" dirty="0">
                 <a:solidFill>
                   <a:schemeClr val="accent1"/>
                 </a:solidFill>
               </a:rPr>
-              <a:t>意涵　</a:t>
+              <a:t>過程中的一段插曲</a:t>
+            </a:r>
+            <a:endParaRPr lang="en-US" sz="1500" dirty="0"/>
+          </a:p>
+        </p:txBody>
+      </p:sp>
+      <p:sp>
+        <p:nvSpPr>
+          <p:cNvPr id="26" name="text-197"/>
+          <p:cNvSpPr txBox="1"/>
+          <p:nvPr/>
+        </p:nvSpPr>
+        <p:spPr>
+          <a:xfrm>
+            <a:off x="868680" y="4389120"/>
+            <a:ext cx="10454335" cy="822960"/>
+          </a:xfrm>
+          <a:prstGeom prst="rect">
+            <a:avLst/>
+          </a:prstGeom>
+          <a:noFill/>
+          <a:ln/>
+        </p:spPr>
+        <p:txBody>
+          <a:bodyPr wrap="square" lIns="0" tIns="0" rIns="0" bIns="0" rtlCol="0" anchor="t"/>
+          <a:lstStyle/>
+          <a:p>
+            <a:pPr indent="0" marL="0">
+              <a:buNone/>
+            </a:pPr>
+            <a:r>
+              <a:rPr lang="en-US" sz="1700" dirty="0">
+                <a:solidFill>
+                  <a:schemeClr val="tx1"/>
+                </a:solidFill>
+              </a:rPr>
+              <a:t>有一種錯誤（只從左往右掃一遍）很狡猾：AI 連續兩輪都說要抓它，卻都沒抓到；直到它在回饋裡看見自己落空，才終於補上。</a:t>
+            </a:r>
+            <a:endParaRPr lang="en-US" sz="1700" dirty="0"/>
+          </a:p>
+        </p:txBody>
+      </p:sp>
+      <p:sp>
+        <p:nvSpPr>
+          <p:cNvPr id="27" name="text-198"/>
+          <p:cNvSpPr txBox="1"/>
+          <p:nvPr/>
+        </p:nvSpPr>
+        <p:spPr>
+          <a:xfrm>
+            <a:off x="548640" y="5440680"/>
+            <a:ext cx="11094415" cy="457200"/>
+          </a:xfrm>
+          <a:prstGeom prst="rect">
+            <a:avLst/>
+          </a:prstGeom>
+          <a:noFill/>
+          <a:ln/>
+        </p:spPr>
+        <p:txBody>
+          <a:bodyPr wrap="square" lIns="0" tIns="0" rIns="0" bIns="0" rtlCol="0" anchor="t"/>
+          <a:lstStyle/>
+          <a:p>
+            <a:pPr indent="0" marL="0">
+              <a:buNone/>
+            </a:pPr>
+            <a:r>
+              <a:rPr lang="en-US" sz="1500" b="1" dirty="0">
+                <a:solidFill>
+                  <a:srgbClr val="DFA050"/>
+                </a:solidFill>
+              </a:rPr>
+              <a:t>回饋不是裝飾：</a:t>
             </a:r>
             <a:pPr indent="0" marL="0">
               <a:buNone/>
@@ -5769,12 +6068,48 @@
             <a:r>
               <a:rPr lang="en-US" sz="1500" dirty="0">
                 <a:solidFill>
-                  <a:schemeClr val="tx2"/>
-                </a:solidFill>
-              </a:rPr>
-              <a:t>文獻的迴圈在小規模也跑得起來；但每題只有一次實驗、6 份錯誤程式，只能當可行性觀察，不能和文獻的數字直接比較</a:t>
+                  <a:schemeClr val="tx1"/>
+                </a:solidFill>
+              </a:rPr>
+              <a:t>AI 要看見自己哪裡沒做到，才會修正方向。兩題都在沒有人介入的情況下，從題目一路跑到一組測資。</a:t>
             </a:r>
             <a:endParaRPr lang="en-US" sz="1500" dirty="0"/>
+          </a:p>
+        </p:txBody>
+      </p:sp>
+      <p:sp>
+        <p:nvSpPr>
+          <p:cNvPr id="28" name="text-199"/>
+          <p:cNvSpPr txBox="1"/>
+          <p:nvPr/>
+        </p:nvSpPr>
+        <p:spPr>
+          <a:xfrm>
+            <a:off x="548640" y="5943600"/>
+            <a:ext cx="11094415" cy="320040"/>
+          </a:xfrm>
+          <a:prstGeom prst="rect">
+            <a:avLst/>
+          </a:prstGeom>
+          <a:noFill/>
+          <a:ln/>
+        </p:spPr>
+        <p:txBody>
+          <a:bodyPr wrap="square" lIns="0" tIns="0" rIns="0" bIns="0" rtlCol="0" anchor="t"/>
+          <a:lstStyle/>
+          <a:p>
+            <a:pPr indent="0" marL="0">
+              <a:buNone/>
+            </a:pPr>
+            <a:r>
+              <a:rPr lang="en-US" sz="1200" dirty="0">
+                <a:solidFill>
+                  <a:schemeClr val="accent5"/>
+                </a:solidFill>
+              </a:rPr>
+              <a:t>對照文獻：回饋驅動迭代（Cai et al., CodeContests-O [1]）</a:t>
+            </a:r>
+            <a:endParaRPr lang="en-US" sz="1200" dirty="0"/>
           </a:p>
         </p:txBody>
       </p:sp>
@@ -5886,7 +6221,7 @@
                 <a:ea typeface="Consolas" pitchFamily="34" charset="-122"/>
                 <a:cs typeface="Consolas" pitchFamily="34" charset="-120"/>
               </a:rPr>
-              <a:t>發現三</a:t>
+              <a:t>成效展現 2／4</a:t>
             </a:r>
             <a:endParaRPr lang="en-US" sz="1300" dirty="0"/>
           </a:p>
@@ -5924,7 +6259,7 @@
                   <a:schemeClr val="tx1"/>
                 </a:solidFill>
               </a:rPr>
-              <a:t>測資品質有兩個面向：覆蓋與暴露</a:t>
+              <a:t>好測資有兩種「好」</a:t>
             </a:r>
             <a:endParaRPr lang="en-US" sz="3000" dirty="0"/>
           </a:p>
@@ -5932,18 +6267,18 @@
       </p:sp>
       <p:sp>
         <p:nvSpPr>
-          <p:cNvPr id="5" name="card-188"/>
+          <p:cNvPr id="5" name="card-200"/>
           <p:cNvSpPr/>
           <p:nvPr/>
         </p:nvSpPr>
         <p:spPr>
           <a:xfrm>
             <a:off x="548640" y="1645920"/>
-            <a:ext cx="5486400" cy="3931920"/>
+            <a:ext cx="2697480" cy="2286000"/>
           </a:xfrm>
           <a:prstGeom prst="roundRect">
             <a:avLst>
-              <a:gd name="adj" fmla="val 1860"/>
+              <a:gd name="adj" fmla="val 3200"/>
             </a:avLst>
           </a:prstGeom>
           <a:solidFill>
@@ -5959,14 +6294,14 @@
       </p:sp>
       <p:sp>
         <p:nvSpPr>
-          <p:cNvPr id="6" name="text-189"/>
+          <p:cNvPr id="6" name="text-201"/>
           <p:cNvSpPr txBox="1"/>
           <p:nvPr/>
         </p:nvSpPr>
         <p:spPr>
           <a:xfrm>
             <a:off x="822960" y="1783080"/>
-            <a:ext cx="4937760" cy="365760"/>
+            <a:ext cx="2194560" cy="365760"/>
           </a:xfrm>
           <a:prstGeom prst="rect">
             <a:avLst/>
@@ -5982,26 +6317,84 @@
               <a:buNone/>
             </a:pPr>
             <a:r>
-              <a:rPr lang="en-US" sz="1400" b="1" dirty="0">
+              <a:rPr lang="en-US" sz="1300" dirty="0">
+                <a:solidFill>
+                  <a:schemeClr val="tx2"/>
+                </a:solidFill>
+              </a:rPr>
+              <a:t>好考卷</a:t>
+            </a:r>
+            <a:endParaRPr lang="en-US" sz="1300" dirty="0"/>
+          </a:p>
+        </p:txBody>
+      </p:sp>
+      <p:sp>
+        <p:nvSpPr>
+          <p:cNvPr id="7" name="text-202"/>
+          <p:cNvSpPr txBox="1"/>
+          <p:nvPr/>
+        </p:nvSpPr>
+        <p:spPr>
+          <a:xfrm>
+            <a:off x="822960" y="2148840"/>
+            <a:ext cx="2286000" cy="502920"/>
+          </a:xfrm>
+          <a:prstGeom prst="rect">
+            <a:avLst/>
+          </a:prstGeom>
+          <a:noFill/>
+          <a:ln/>
+        </p:spPr>
+        <p:txBody>
+          <a:bodyPr wrap="square" lIns="0" tIns="0" rIns="0" bIns="0" rtlCol="0" anchor="t"/>
+          <a:lstStyle/>
+          <a:p>
+            <a:pPr indent="0" marL="0">
+              <a:buNone/>
+            </a:pPr>
+            <a:r>
+              <a:rPr lang="en-US" sz="1800" b="1" dirty="0">
                 <a:solidFill>
                   <a:schemeClr val="accent1"/>
                 </a:solidFill>
               </a:rPr>
-              <a:t>論文觀點　</a:t>
-            </a:r>
+              <a:t>「題題都很難」</a:t>
+            </a:r>
+            <a:endParaRPr lang="en-US" sz="1800" dirty="0"/>
+          </a:p>
+        </p:txBody>
+      </p:sp>
+      <p:sp>
+        <p:nvSpPr>
+          <p:cNvPr id="8" name="text-203"/>
+          <p:cNvSpPr txBox="1"/>
+          <p:nvPr/>
+        </p:nvSpPr>
+        <p:spPr>
+          <a:xfrm>
+            <a:off x="822960" y="2697480"/>
+            <a:ext cx="2240280" cy="731520"/>
+          </a:xfrm>
+          <a:prstGeom prst="rect">
+            <a:avLst/>
+          </a:prstGeom>
+          <a:noFill/>
+          <a:ln/>
+        </p:spPr>
+        <p:txBody>
+          <a:bodyPr wrap="square" lIns="0" tIns="0" rIns="0" bIns="0" rtlCol="0" anchor="t"/>
+          <a:lstStyle/>
+          <a:p>
             <a:pPr indent="0" marL="0">
               <a:buNone/>
             </a:pPr>
             <a:r>
               <a:rPr lang="en-US" sz="1400" dirty="0">
                 <a:solidFill>
-                  <a:schemeClr val="accent1"/>
-                </a:solidFill>
-                <a:latin typeface="Consolas" pitchFamily="34" charset="0"/>
-                <a:ea typeface="Consolas" pitchFamily="34" charset="-122"/>
-                <a:cs typeface="Consolas" pitchFamily="34" charset="-120"/>
-              </a:rPr>
-              <a:t>[13]</a:t>
+                  <a:schemeClr val="tx1"/>
+                </a:solidFill>
+              </a:rPr>
+              <a:t>每一題都能刷掉很多種錯誤</a:t>
             </a:r>
             <a:endParaRPr lang="en-US" sz="1400" dirty="0"/>
           </a:p>
@@ -6009,14 +6402,14 @@
       </p:sp>
       <p:sp>
         <p:nvSpPr>
-          <p:cNvPr id="7" name="text-190"/>
+          <p:cNvPr id="9" name="text-204"/>
           <p:cNvSpPr txBox="1"/>
           <p:nvPr/>
         </p:nvSpPr>
         <p:spPr>
           <a:xfrm>
-            <a:off x="822960" y="2194560"/>
-            <a:ext cx="4937760" cy="411480"/>
+            <a:off x="822960" y="3474720"/>
+            <a:ext cx="2240280" cy="365760"/>
           </a:xfrm>
           <a:prstGeom prst="rect">
             <a:avLst/>
@@ -6032,35 +6425,46 @@
               <a:buNone/>
             </a:pPr>
             <a:r>
-              <a:rPr lang="en-US" sz="1600" dirty="0">
-                <a:solidFill>
-                  <a:schemeClr val="tx1"/>
-                </a:solidFill>
-              </a:rPr>
-              <a:t>評估 LLM 產生的測資，要看兩個面向：</a:t>
-            </a:r>
-            <a:endParaRPr lang="en-US" sz="1600" dirty="0"/>
-          </a:p>
-        </p:txBody>
-      </p:sp>
-      <p:sp>
-        <p:nvSpPr>
-          <p:cNvPr id="8" name="dim-191"/>
+              <a:rPr lang="en-US" sz="1300" dirty="0">
+                <a:solidFill>
+                  <a:schemeClr val="tx2"/>
+                </a:solidFill>
+              </a:rPr>
+              <a:t>文獻稱：</a:t>
+            </a:r>
+            <a:pPr indent="0" marL="0">
+              <a:buNone/>
+            </a:pPr>
+            <a:r>
+              <a:rPr lang="en-US" sz="1300" b="1" dirty="0">
+                <a:solidFill>
+                  <a:srgbClr val="5AB8B2"/>
+                </a:solidFill>
+              </a:rPr>
+              <a:t>錯誤暴露</a:t>
+            </a:r>
+            <a:endParaRPr lang="en-US" sz="1300" dirty="0"/>
+          </a:p>
+        </p:txBody>
+      </p:sp>
+      <p:sp>
+        <p:nvSpPr>
+          <p:cNvPr id="10" name="card-205"/>
           <p:cNvSpPr/>
           <p:nvPr/>
         </p:nvSpPr>
         <p:spPr>
           <a:xfrm>
-            <a:off x="822960" y="2743200"/>
-            <a:ext cx="4937760" cy="914400"/>
+            <a:off x="3429000" y="1645920"/>
+            <a:ext cx="2697480" cy="2286000"/>
           </a:xfrm>
           <a:prstGeom prst="roundRect">
             <a:avLst>
-              <a:gd name="adj" fmla="val 8000"/>
+              <a:gd name="adj" fmla="val 3200"/>
             </a:avLst>
           </a:prstGeom>
           <a:solidFill>
-            <a:schemeClr val="bg1"/>
+            <a:schemeClr val="bg2"/>
           </a:solidFill>
           <a:ln w="9525">
             <a:solidFill>
@@ -6072,225 +6476,173 @@
       </p:sp>
       <p:sp>
         <p:nvSpPr>
-          <p:cNvPr id="9" name="text-192"/>
+          <p:cNvPr id="11" name="text-206"/>
           <p:cNvSpPr txBox="1"/>
           <p:nvPr/>
         </p:nvSpPr>
         <p:spPr>
           <a:xfrm>
-            <a:off x="1005840" y="2834640"/>
-            <a:ext cx="1371600" cy="731520"/>
-          </a:xfrm>
-          <a:prstGeom prst="rect">
-            <a:avLst/>
-          </a:prstGeom>
-          <a:noFill/>
-          <a:ln/>
-        </p:spPr>
-        <p:txBody>
-          <a:bodyPr wrap="square" lIns="0" tIns="0" rIns="0" bIns="0" rtlCol="0" anchor="ctr"/>
-          <a:lstStyle/>
-          <a:p>
-            <a:pPr indent="0" marL="0">
-              <a:buNone/>
-            </a:pPr>
-            <a:r>
-              <a:rPr lang="en-US" sz="1700" b="1" dirty="0">
+            <a:off x="3703320" y="1783080"/>
+            <a:ext cx="2194560" cy="365760"/>
+          </a:xfrm>
+          <a:prstGeom prst="rect">
+            <a:avLst/>
+          </a:prstGeom>
+          <a:noFill/>
+          <a:ln/>
+        </p:spPr>
+        <p:txBody>
+          <a:bodyPr wrap="square" lIns="0" tIns="0" rIns="0" bIns="0" rtlCol="0" anchor="t"/>
+          <a:lstStyle/>
+          <a:p>
+            <a:pPr indent="0" marL="0">
+              <a:buNone/>
+            </a:pPr>
+            <a:r>
+              <a:rPr lang="en-US" sz="1300" dirty="0">
+                <a:solidFill>
+                  <a:schemeClr val="tx2"/>
+                </a:solidFill>
+              </a:rPr>
+              <a:t>好考卷</a:t>
+            </a:r>
+            <a:endParaRPr lang="en-US" sz="1300" dirty="0"/>
+          </a:p>
+        </p:txBody>
+      </p:sp>
+      <p:sp>
+        <p:nvSpPr>
+          <p:cNvPr id="12" name="text-207"/>
+          <p:cNvSpPr txBox="1"/>
+          <p:nvPr/>
+        </p:nvSpPr>
+        <p:spPr>
+          <a:xfrm>
+            <a:off x="3703320" y="2148840"/>
+            <a:ext cx="2286000" cy="502920"/>
+          </a:xfrm>
+          <a:prstGeom prst="rect">
+            <a:avLst/>
+          </a:prstGeom>
+          <a:noFill/>
+          <a:ln/>
+        </p:spPr>
+        <p:txBody>
+          <a:bodyPr wrap="square" lIns="0" tIns="0" rIns="0" bIns="0" rtlCol="0" anchor="t"/>
+          <a:lstStyle/>
+          <a:p>
+            <a:pPr indent="0" marL="0">
+              <a:buNone/>
+            </a:pPr>
+            <a:r>
+              <a:rPr lang="en-US" sz="1800" b="1" dirty="0">
                 <a:solidFill>
                   <a:schemeClr val="accent1"/>
                 </a:solidFill>
               </a:rPr>
+              <a:t>「每個觀念都考到」</a:t>
+            </a:r>
+            <a:endParaRPr lang="en-US" sz="1800" dirty="0"/>
+          </a:p>
+        </p:txBody>
+      </p:sp>
+      <p:sp>
+        <p:nvSpPr>
+          <p:cNvPr id="13" name="text-208"/>
+          <p:cNvSpPr txBox="1"/>
+          <p:nvPr/>
+        </p:nvSpPr>
+        <p:spPr>
+          <a:xfrm>
+            <a:off x="3703320" y="2697480"/>
+            <a:ext cx="2240280" cy="731520"/>
+          </a:xfrm>
+          <a:prstGeom prst="rect">
+            <a:avLst/>
+          </a:prstGeom>
+          <a:noFill/>
+          <a:ln/>
+        </p:spPr>
+        <p:txBody>
+          <a:bodyPr wrap="square" lIns="0" tIns="0" rIns="0" bIns="0" rtlCol="0" anchor="t"/>
+          <a:lstStyle/>
+          <a:p>
+            <a:pPr indent="0" marL="0">
+              <a:buNone/>
+            </a:pPr>
+            <a:r>
+              <a:rPr lang="en-US" sz="1400" dirty="0">
+                <a:solidFill>
+                  <a:schemeClr val="tx1"/>
+                </a:solidFill>
+              </a:rPr>
+              <a:t>每種錯誤都被至少一題抓到</a:t>
+            </a:r>
+            <a:endParaRPr lang="en-US" sz="1400" dirty="0"/>
+          </a:p>
+        </p:txBody>
+      </p:sp>
+      <p:sp>
+        <p:nvSpPr>
+          <p:cNvPr id="14" name="text-209"/>
+          <p:cNvSpPr txBox="1"/>
+          <p:nvPr/>
+        </p:nvSpPr>
+        <p:spPr>
+          <a:xfrm>
+            <a:off x="3703320" y="3474720"/>
+            <a:ext cx="2240280" cy="365760"/>
+          </a:xfrm>
+          <a:prstGeom prst="rect">
+            <a:avLst/>
+          </a:prstGeom>
+          <a:noFill/>
+          <a:ln/>
+        </p:spPr>
+        <p:txBody>
+          <a:bodyPr wrap="square" lIns="0" tIns="0" rIns="0" bIns="0" rtlCol="0" anchor="t"/>
+          <a:lstStyle/>
+          <a:p>
+            <a:pPr indent="0" marL="0">
+              <a:buNone/>
+            </a:pPr>
+            <a:r>
+              <a:rPr lang="en-US" sz="1300" dirty="0">
+                <a:solidFill>
+                  <a:schemeClr val="tx2"/>
+                </a:solidFill>
+              </a:rPr>
+              <a:t>文獻稱：</a:t>
+            </a:r>
+            <a:pPr indent="0" marL="0">
+              <a:buNone/>
+            </a:pPr>
+            <a:r>
+              <a:rPr lang="en-US" sz="1300" b="1" dirty="0">
+                <a:solidFill>
+                  <a:srgbClr val="5AB8B2"/>
+                </a:solidFill>
+              </a:rPr>
               <a:t>錯誤覆蓋</a:t>
             </a:r>
-            <a:endParaRPr lang="en-US" sz="1700" dirty="0"/>
-          </a:p>
-        </p:txBody>
-      </p:sp>
-      <p:sp>
-        <p:nvSpPr>
-          <p:cNvPr id="10" name="text-193"/>
-          <p:cNvSpPr txBox="1"/>
-          <p:nvPr/>
-        </p:nvSpPr>
-        <p:spPr>
-          <a:xfrm>
-            <a:off x="2423160" y="2834640"/>
-            <a:ext cx="3200400" cy="731520"/>
-          </a:xfrm>
-          <a:prstGeom prst="rect">
-            <a:avLst/>
-          </a:prstGeom>
-          <a:noFill/>
-          <a:ln/>
-        </p:spPr>
-        <p:txBody>
-          <a:bodyPr wrap="square" lIns="0" tIns="0" rIns="0" bIns="0" rtlCol="0" anchor="ctr"/>
-          <a:lstStyle/>
-          <a:p>
-            <a:pPr indent="0" marL="0">
-              <a:buNone/>
-            </a:pPr>
-            <a:r>
-              <a:rPr lang="en-US" sz="1400" dirty="0">
-                <a:solidFill>
-                  <a:schemeClr val="tx1"/>
-                </a:solidFill>
-              </a:rPr>
-              <a:t>一組測資能涵蓋多少種失敗方式</a:t>
-            </a:r>
-            <a:endParaRPr lang="en-US" sz="1400" dirty="0"/>
-          </a:p>
-        </p:txBody>
-      </p:sp>
-      <p:sp>
-        <p:nvSpPr>
-          <p:cNvPr id="11" name="dim-194"/>
+            <a:endParaRPr lang="en-US" sz="1300" dirty="0"/>
+          </a:p>
+        </p:txBody>
+      </p:sp>
+      <p:sp>
+        <p:nvSpPr>
+          <p:cNvPr id="15" name="story-210"/>
           <p:cNvSpPr/>
           <p:nvPr/>
         </p:nvSpPr>
         <p:spPr>
           <a:xfrm>
-            <a:off x="822960" y="3840480"/>
-            <a:ext cx="4937760" cy="914400"/>
+            <a:off x="6355080" y="1645920"/>
+            <a:ext cx="5285232" cy="2286000"/>
           </a:xfrm>
           <a:prstGeom prst="roundRect">
             <a:avLst>
-              <a:gd name="adj" fmla="val 8000"/>
-            </a:avLst>
-          </a:prstGeom>
-          <a:solidFill>
-            <a:schemeClr val="bg1"/>
-          </a:solidFill>
-          <a:ln w="9525">
-            <a:solidFill>
-              <a:schemeClr val="accent6"/>
-            </a:solidFill>
-            <a:prstDash val="solid"/>
-          </a:ln>
-        </p:spPr>
-      </p:sp>
-      <p:sp>
-        <p:nvSpPr>
-          <p:cNvPr id="12" name="text-195"/>
-          <p:cNvSpPr txBox="1"/>
-          <p:nvPr/>
-        </p:nvSpPr>
-        <p:spPr>
-          <a:xfrm>
-            <a:off x="1005840" y="3931920"/>
-            <a:ext cx="1371600" cy="731520"/>
-          </a:xfrm>
-          <a:prstGeom prst="rect">
-            <a:avLst/>
-          </a:prstGeom>
-          <a:noFill/>
-          <a:ln/>
-        </p:spPr>
-        <p:txBody>
-          <a:bodyPr wrap="square" lIns="0" tIns="0" rIns="0" bIns="0" rtlCol="0" anchor="ctr"/>
-          <a:lstStyle/>
-          <a:p>
-            <a:pPr indent="0" marL="0">
-              <a:buNone/>
-            </a:pPr>
-            <a:r>
-              <a:rPr lang="en-US" sz="1700" b="1" dirty="0">
-                <a:solidFill>
-                  <a:schemeClr val="accent1"/>
-                </a:solidFill>
-              </a:rPr>
-              <a:t>錯誤暴露</a:t>
-            </a:r>
-            <a:endParaRPr lang="en-US" sz="1700" dirty="0"/>
-          </a:p>
-        </p:txBody>
-      </p:sp>
-      <p:sp>
-        <p:nvSpPr>
-          <p:cNvPr id="13" name="text-196"/>
-          <p:cNvSpPr txBox="1"/>
-          <p:nvPr/>
-        </p:nvSpPr>
-        <p:spPr>
-          <a:xfrm>
-            <a:off x="2423160" y="3931920"/>
-            <a:ext cx="3200400" cy="731520"/>
-          </a:xfrm>
-          <a:prstGeom prst="rect">
-            <a:avLst/>
-          </a:prstGeom>
-          <a:noFill/>
-          <a:ln/>
-        </p:spPr>
-        <p:txBody>
-          <a:bodyPr wrap="square" lIns="0" tIns="0" rIns="0" bIns="0" rtlCol="0" anchor="ctr"/>
-          <a:lstStyle/>
-          <a:p>
-            <a:pPr indent="0" marL="0">
-              <a:buNone/>
-            </a:pPr>
-            <a:r>
-              <a:rPr lang="en-US" sz="1400" dirty="0">
-                <a:solidFill>
-                  <a:schemeClr val="tx1"/>
-                </a:solidFill>
-              </a:rPr>
-              <a:t>能不能針對某個錯誤寫法，產生讓它出錯的輸入</a:t>
-            </a:r>
-            <a:endParaRPr lang="en-US" sz="1400" dirty="0"/>
-          </a:p>
-        </p:txBody>
-      </p:sp>
-      <p:sp>
-        <p:nvSpPr>
-          <p:cNvPr id="14" name="text-197"/>
-          <p:cNvSpPr txBox="1"/>
-          <p:nvPr/>
-        </p:nvSpPr>
-        <p:spPr>
-          <a:xfrm>
-            <a:off x="822960" y="5074920"/>
-            <a:ext cx="4937760" cy="365760"/>
-          </a:xfrm>
-          <a:prstGeom prst="rect">
-            <a:avLst/>
-          </a:prstGeom>
-          <a:noFill/>
-          <a:ln/>
-        </p:spPr>
-        <p:txBody>
-          <a:bodyPr wrap="square" lIns="0" tIns="0" rIns="0" bIns="0" rtlCol="0" anchor="t"/>
-          <a:lstStyle/>
-          <a:p>
-            <a:pPr indent="0" marL="0">
-              <a:buNone/>
-            </a:pPr>
-            <a:r>
-              <a:rPr lang="en-US" sz="1200" dirty="0">
-                <a:solidFill>
-                  <a:schemeClr val="tx2"/>
-                </a:solidFill>
-              </a:rPr>
-              <a:t>Yang et al., TestCase-Eval, ACL 2025</a:t>
-            </a:r>
-            <a:endParaRPr lang="en-US" sz="1200" dirty="0"/>
-          </a:p>
-        </p:txBody>
-      </p:sp>
-      <p:sp>
-        <p:nvSpPr>
-          <p:cNvPr id="15" name="obs-198"/>
-          <p:cNvSpPr/>
-          <p:nvPr/>
-        </p:nvSpPr>
-        <p:spPr>
-          <a:xfrm>
-            <a:off x="6263640" y="1645920"/>
-            <a:ext cx="5376672" cy="3931920"/>
-          </a:xfrm>
-          <a:prstGeom prst="roundRect">
-            <a:avLst>
-              <a:gd name="adj" fmla="val 1860"/>
+              <a:gd name="adj" fmla="val 3200"/>
             </a:avLst>
           </a:prstGeom>
           <a:solidFill>
@@ -6306,14 +6658,14 @@
       </p:sp>
       <p:sp>
         <p:nvSpPr>
-          <p:cNvPr id="16" name="text-199"/>
+          <p:cNvPr id="16" name="text-211"/>
           <p:cNvSpPr txBox="1"/>
           <p:nvPr/>
         </p:nvSpPr>
         <p:spPr>
           <a:xfrm>
-            <a:off x="6537960" y="1783080"/>
-            <a:ext cx="4828032" cy="365760"/>
+            <a:off x="6629400" y="1783080"/>
+            <a:ext cx="4572000" cy="365760"/>
           </a:xfrm>
           <a:prstGeom prst="rect">
             <a:avLst/>
@@ -6329,38 +6681,110 @@
               <a:buNone/>
             </a:pPr>
             <a:r>
-              <a:rPr lang="en-US" sz="1400" b="1" dirty="0">
+              <a:rPr lang="en-US" sz="1500" b="1" dirty="0">
                 <a:solidFill>
                   <a:schemeClr val="accent4"/>
                 </a:solidFill>
               </a:rPr>
-              <a:t>本專題觀察　</a:t>
-            </a:r>
-            <a:pPr indent="0" marL="0">
-              <a:buNone/>
-            </a:pPr>
-            <a:r>
-              <a:rPr lang="en-US" sz="1400" b="1" dirty="0">
+              <a:t>我們遇到的事</a:t>
+            </a:r>
+            <a:endParaRPr lang="en-US" sz="1500" dirty="0"/>
+          </a:p>
+        </p:txBody>
+      </p:sp>
+      <p:sp>
+        <p:nvSpPr>
+          <p:cNvPr id="17" name="text-212"/>
+          <p:cNvSpPr txBox="1"/>
+          <p:nvPr/>
+        </p:nvSpPr>
+        <p:spPr>
+          <a:xfrm>
+            <a:off x="6629400" y="2194560"/>
+            <a:ext cx="4800600" cy="1645920"/>
+          </a:xfrm>
+          <a:prstGeom prst="rect">
+            <a:avLst/>
+          </a:prstGeom>
+          <a:noFill/>
+          <a:ln/>
+        </p:spPr>
+        <p:txBody>
+          <a:bodyPr wrap="square" lIns="0" tIns="0" rIns="0" bIns="0" rtlCol="0" anchor="t"/>
+          <a:lstStyle/>
+          <a:p>
+            <a:pPr indent="0" marL="0">
+              <a:buNone/>
+            </a:pPr>
+            <a:r>
+              <a:rPr lang="en-US" sz="1600" dirty="0">
                 <a:solidFill>
                   <a:schemeClr val="tx1"/>
                 </a:solidFill>
               </a:rPr>
-              <a:t>兩個面向會互相拉扯</a:t>
-            </a:r>
-            <a:endParaRPr lang="en-US" sz="1400" dirty="0"/>
-          </a:p>
-        </p:txBody>
-      </p:sp>
-      <p:sp>
-        <p:nvSpPr>
-          <p:cNvPr id="17" name="text-200"/>
+              <a:t>自動審核只喜歡「很難的題」，把一些看起來平凡、但能抓到特定錯誤的題目丟掉了。</a:t>
+            </a:r>
+            <a:endParaRPr lang="en-US" sz="1600" dirty="0"/>
+          </a:p>
+          <a:p>
+            <a:pPr indent="0" marL="0">
+              <a:buNone/>
+            </a:pPr>
+            <a:endParaRPr lang="en-US" sz="1600" dirty="0"/>
+          </a:p>
+          <a:p>
+            <a:pPr indent="0" marL="0">
+              <a:buNone/>
+            </a:pPr>
+            <a:r>
+              <a:rPr lang="en-US" sz="1600" dirty="0">
+                <a:solidFill>
+                  <a:schemeClr val="tx1"/>
+                </a:solidFill>
+              </a:rPr>
+              <a:t>最後有一種錯誤，從頭到尾沒被考到。</a:t>
+            </a:r>
+            <a:endParaRPr lang="en-US" sz="1600" dirty="0"/>
+          </a:p>
+        </p:txBody>
+      </p:sp>
+      <p:sp>
+        <p:nvSpPr>
+          <p:cNvPr id="18" name="card-213"/>
+          <p:cNvSpPr/>
+          <p:nvPr/>
+        </p:nvSpPr>
+        <p:spPr>
+          <a:xfrm>
+            <a:off x="548640" y="4160520"/>
+            <a:ext cx="11094415" cy="1188720"/>
+          </a:xfrm>
+          <a:prstGeom prst="roundRect">
+            <a:avLst>
+              <a:gd name="adj" fmla="val 6154"/>
+            </a:avLst>
+          </a:prstGeom>
+          <a:solidFill>
+            <a:schemeClr val="bg2"/>
+          </a:solidFill>
+          <a:ln w="9525">
+            <a:solidFill>
+              <a:schemeClr val="accent6"/>
+            </a:solidFill>
+            <a:prstDash val="solid"/>
+          </a:ln>
+        </p:spPr>
+      </p:sp>
+      <p:sp>
+        <p:nvSpPr>
+          <p:cNvPr id="19" name="text-214"/>
           <p:cNvSpPr txBox="1"/>
           <p:nvPr/>
         </p:nvSpPr>
         <p:spPr>
           <a:xfrm>
-            <a:off x="6537960" y="2286000"/>
-            <a:ext cx="4873752" cy="3154680"/>
+            <a:off x="868680" y="4270248"/>
+            <a:ext cx="4572000" cy="365760"/>
           </a:xfrm>
           <a:prstGeom prst="rect">
             <a:avLst/>
@@ -6372,12 +6796,44 @@
           <a:bodyPr wrap="square" lIns="0" tIns="0" rIns="0" bIns="0" rtlCol="0" anchor="t"/>
           <a:lstStyle/>
           <a:p>
-            <a:pPr marL="203200" indent="-203200">
-              <a:spcAft>
-                <a:spcPts val="1600"/>
-              </a:spcAft>
-              <a:buSzPct val="100000"/>
-              <a:buChar char="•"/>
+            <a:pPr indent="0" marL="0">
+              <a:buNone/>
+            </a:pPr>
+            <a:r>
+              <a:rPr lang="en-US" sz="1500" b="1" dirty="0">
+                <a:solidFill>
+                  <a:schemeClr val="accent1"/>
+                </a:solidFill>
+              </a:rPr>
+              <a:t>補回去之後</a:t>
+            </a:r>
+            <a:endParaRPr lang="en-US" sz="1500" dirty="0"/>
+          </a:p>
+        </p:txBody>
+      </p:sp>
+      <p:sp>
+        <p:nvSpPr>
+          <p:cNvPr id="20" name="text-215"/>
+          <p:cNvSpPr txBox="1"/>
+          <p:nvPr/>
+        </p:nvSpPr>
+        <p:spPr>
+          <a:xfrm>
+            <a:off x="868680" y="4663440"/>
+            <a:ext cx="10454335" cy="548640"/>
+          </a:xfrm>
+          <a:prstGeom prst="rect">
+            <a:avLst/>
+          </a:prstGeom>
+          <a:noFill/>
+          <a:ln/>
+        </p:spPr>
+        <p:txBody>
+          <a:bodyPr wrap="square" lIns="0" tIns="0" rIns="0" bIns="0" rtlCol="0" anchor="t"/>
+          <a:lstStyle/>
+          <a:p>
+            <a:pPr indent="0" marL="0">
+              <a:buNone/>
             </a:pPr>
             <a:r>
               <a:rPr lang="en-US" sz="1700" dirty="0">
@@ -6385,26 +6841,42 @@
                   <a:schemeClr val="tx1"/>
                 </a:solidFill>
               </a:rPr>
-              <a:t>自動審核只追</a:t>
-            </a:r>
-            <a:pPr indent="0" marL="0">
-              <a:spcAft>
-                <a:spcPts val="1600"/>
-              </a:spcAft>
+              <a:t>把這些「平凡但必要」的題目補回去：</a:t>
+            </a:r>
+            <a:pPr indent="0" marL="0">
               <a:buNone/>
             </a:pPr>
             <a:r>
               <a:rPr lang="en-US" sz="1700" b="1" dirty="0">
                 <a:solidFill>
+                  <a:srgbClr val="5CB87C"/>
+                </a:solidFill>
+              </a:rPr>
+              <a:t>考卷變完整了</a:t>
+            </a:r>
+            <a:pPr indent="0" marL="0">
+              <a:buNone/>
+            </a:pPr>
+            <a:r>
+              <a:rPr lang="en-US" sz="1700" dirty="0">
+                <a:solidFill>
                   <a:schemeClr val="tx1"/>
                 </a:solidFill>
               </a:rPr>
-              <a:t>平均 TNR</a:t>
-            </a:r>
-            <a:pPr indent="0" marL="0">
-              <a:spcAft>
-                <a:spcPts val="1600"/>
-              </a:spcAft>
+              <a:t>，但</a:t>
+            </a:r>
+            <a:pPr indent="0" marL="0">
+              <a:buNone/>
+            </a:pPr>
+            <a:r>
+              <a:rPr lang="en-US" sz="1700" b="1" dirty="0">
+                <a:solidFill>
+                  <a:srgbClr val="D96870"/>
+                </a:solidFill>
+              </a:rPr>
+              <a:t>「平均難度」反而下降</a:t>
+            </a:r>
+            <a:pPr indent="0" marL="0">
               <a:buNone/>
             </a:pPr>
             <a:r>
@@ -6413,146 +6885,69 @@
                   <a:schemeClr val="tx1"/>
                 </a:solidFill>
               </a:rPr>
-              <a:t>，只收能提高平均的測資</a:t>
+              <a:t>。</a:t>
             </a:r>
             <a:endParaRPr lang="en-US" sz="1700" dirty="0"/>
           </a:p>
-          <a:p>
-            <a:pPr marL="203200" indent="-203200">
-              <a:spcAft>
-                <a:spcPts val="1600"/>
-              </a:spcAft>
-              <a:buSzPct val="100000"/>
-              <a:buChar char="•"/>
-            </a:pPr>
-            <a:r>
-              <a:rPr lang="en-US" sz="1700" dirty="0">
+        </p:txBody>
+      </p:sp>
+      <p:sp>
+        <p:nvSpPr>
+          <p:cNvPr id="21" name="text-216"/>
+          <p:cNvSpPr txBox="1"/>
+          <p:nvPr/>
+        </p:nvSpPr>
+        <p:spPr>
+          <a:xfrm>
+            <a:off x="548640" y="5468112"/>
+            <a:ext cx="11094415" cy="457200"/>
+          </a:xfrm>
+          <a:prstGeom prst="rect">
+            <a:avLst/>
+          </a:prstGeom>
+          <a:noFill/>
+          <a:ln/>
+        </p:spPr>
+        <p:txBody>
+          <a:bodyPr wrap="square" lIns="0" tIns="0" rIns="0" bIns="0" rtlCol="0" anchor="t"/>
+          <a:lstStyle/>
+          <a:p>
+            <a:pPr indent="0" marL="0">
+              <a:buNone/>
+            </a:pPr>
+            <a:r>
+              <a:rPr lang="en-US" sz="1500" b="1" dirty="0">
+                <a:solidFill>
+                  <a:srgbClr val="DFA050"/>
+                </a:solidFill>
+              </a:rPr>
+              <a:t>分數高，不代表考卷完整。</a:t>
+            </a:r>
+            <a:pPr indent="0" marL="0">
+              <a:buNone/>
+            </a:pPr>
+            <a:r>
+              <a:rPr lang="en-US" sz="1500" dirty="0">
                 <a:solidFill>
                   <a:schemeClr val="tx1"/>
                 </a:solidFill>
               </a:rPr>
-              <a:t>結果：停在 4 道，</a:t>
-            </a:r>
-            <a:pPr indent="0" marL="0">
-              <a:spcAft>
-                <a:spcPts val="1600"/>
-              </a:spcAft>
-              <a:buNone/>
-            </a:pPr>
-            <a:r>
-              <a:rPr lang="en-US" sz="1700" b="1" dirty="0">
-                <a:solidFill>
-                  <a:srgbClr val="D96870"/>
-                </a:solidFill>
-              </a:rPr>
-              <a:t>驗收組漏掉一種錯誤</a:t>
-            </a:r>
-            <a:endParaRPr lang="en-US" sz="1700" dirty="0"/>
-          </a:p>
-          <a:p>
-            <a:pPr marL="203200" indent="-203200">
-              <a:spcAft>
-                <a:spcPts val="1600"/>
-              </a:spcAft>
-              <a:buSzPct val="100000"/>
-              <a:buChar char="•"/>
-            </a:pPr>
-            <a:r>
-              <a:rPr lang="en-US" sz="1700" dirty="0">
-                <a:solidFill>
-                  <a:schemeClr val="tx1"/>
-                </a:solidFill>
-              </a:rPr>
-              <a:t>也就是</a:t>
-            </a:r>
-            <a:pPr indent="0" marL="0">
-              <a:spcAft>
-                <a:spcPts val="1600"/>
-              </a:spcAft>
-              <a:buNone/>
-            </a:pPr>
-            <a:r>
-              <a:rPr lang="en-US" sz="1700" b="1" dirty="0">
-                <a:solidFill>
-                  <a:srgbClr val="D96870"/>
-                </a:solidFill>
-              </a:rPr>
-              <a:t>覆蓋不足</a:t>
-            </a:r>
-            <a:endParaRPr lang="en-US" sz="1700" dirty="0"/>
-          </a:p>
-          <a:p>
-            <a:pPr marL="203200" indent="-203200">
-              <a:spcAft>
-                <a:spcPts val="1600"/>
-              </a:spcAft>
-              <a:buSzPct val="100000"/>
-              <a:buChar char="•"/>
-            </a:pPr>
-            <a:r>
-              <a:rPr lang="en-US" sz="1700" dirty="0">
-                <a:solidFill>
-                  <a:schemeClr val="tx1"/>
-                </a:solidFill>
-              </a:rPr>
-              <a:t>補上邊界案例後：</a:t>
-            </a:r>
-            <a:pPr indent="0" marL="0">
-              <a:spcAft>
-                <a:spcPts val="1600"/>
-              </a:spcAft>
-              <a:buNone/>
-            </a:pPr>
-            <a:r>
-              <a:rPr lang="en-US" sz="1700" b="1" dirty="0">
-                <a:solidFill>
-                  <a:srgbClr val="5CB87C"/>
-                </a:solidFill>
-              </a:rPr>
-              <a:t>覆蓋完整</a:t>
-            </a:r>
-            <a:pPr indent="0" marL="0">
-              <a:spcAft>
-                <a:spcPts val="1600"/>
-              </a:spcAft>
-              <a:buNone/>
-            </a:pPr>
-            <a:r>
-              <a:rPr lang="en-US" sz="1700" dirty="0">
-                <a:solidFill>
-                  <a:schemeClr val="tx1"/>
-                </a:solidFill>
-              </a:rPr>
-              <a:t>，但平均 TNR </a:t>
-            </a:r>
-            <a:pPr indent="0" marL="0">
-              <a:spcAft>
-                <a:spcPts val="1600"/>
-              </a:spcAft>
-              <a:buNone/>
-            </a:pPr>
-            <a:r>
-              <a:rPr lang="en-US" sz="1700" b="1" dirty="0">
-                <a:solidFill>
-                  <a:srgbClr val="D96870"/>
-                </a:solidFill>
-              </a:rPr>
-              <a:t>下降</a:t>
-            </a:r>
-            <a:endParaRPr lang="en-US" sz="1700" dirty="0"/>
-          </a:p>
-        </p:txBody>
-      </p:sp>
-      <p:sp>
-        <p:nvSpPr>
-          <p:cNvPr id="18" name="text-201"/>
+              <a:t>這也呼應前面的發現：一個平均分數，說不完測資的好壞；下一步讓審核同時看這兩種好。</a:t>
+            </a:r>
+            <a:endParaRPr lang="en-US" sz="1500" dirty="0"/>
+          </a:p>
+        </p:txBody>
+      </p:sp>
+      <p:sp>
+        <p:nvSpPr>
+          <p:cNvPr id="22" name="text-217"/>
           <p:cNvSpPr txBox="1"/>
           <p:nvPr/>
         </p:nvSpPr>
         <p:spPr>
           <a:xfrm>
-            <a:off x="548640" y="5715000"/>
-            <a:ext cx="11094415" cy="640080"/>
+            <a:off x="548640" y="5943600"/>
+            <a:ext cx="11094415" cy="320040"/>
           </a:xfrm>
           <a:prstGeom prst="rect">
             <a:avLst/>
@@ -6568,25 +6963,14 @@
               <a:buNone/>
             </a:pPr>
             <a:r>
-              <a:rPr lang="en-US" sz="1500" b="1" dirty="0">
-                <a:solidFill>
-                  <a:schemeClr val="accent1"/>
-                </a:solidFill>
-              </a:rPr>
-              <a:t>意涵　</a:t>
-            </a:r>
-            <a:pPr indent="0" marL="0">
-              <a:buNone/>
-            </a:pPr>
-            <a:r>
-              <a:rPr lang="en-US" sz="1500" dirty="0">
-                <a:solidFill>
-                  <a:schemeClr val="tx2"/>
-                </a:solidFill>
-              </a:rPr>
-              <a:t>分數高不等於覆蓋完整；審核要同時看兩個面向。下一步：改成「覆蓋優先」的審核</a:t>
-            </a:r>
-            <a:endParaRPr lang="en-US" sz="1500" dirty="0"/>
+              <a:rPr lang="en-US" sz="1200" dirty="0">
+                <a:solidFill>
+                  <a:schemeClr val="accent5"/>
+                </a:solidFill>
+              </a:rPr>
+              <a:t>對照文獻：錯誤覆蓋與錯誤暴露（Yang et al., TestCase-Eval [13]）</a:t>
+            </a:r>
+            <a:endParaRPr lang="en-US" sz="1200" dirty="0"/>
           </a:p>
         </p:txBody>
       </p:sp>
@@ -6698,7 +7082,7 @@
                 <a:ea typeface="Consolas" pitchFamily="34" charset="-122"/>
                 <a:cs typeface="Consolas" pitchFamily="34" charset="-120"/>
               </a:rPr>
-              <a:t>提示線</a:t>
+              <a:t>成效展現 3／4</a:t>
             </a:r>
             <a:endParaRPr lang="en-US" sz="1300" dirty="0"/>
           </a:p>
@@ -6736,7 +7120,7 @@
                   <a:schemeClr val="tx1"/>
                 </a:solidFill>
               </a:rPr>
-              <a:t>不直接給答案的提示：文獻的兩個提醒</a:t>
+              <a:t>學生卡住時，AI 怎麼說</a:t>
             </a:r>
             <a:endParaRPr lang="en-US" sz="3000" dirty="0"/>
           </a:p>
@@ -6744,18 +7128,54 @@
       </p:sp>
       <p:sp>
         <p:nvSpPr>
-          <p:cNvPr id="5" name="card-202"/>
+          <p:cNvPr id="5" name="text-218"/>
+          <p:cNvSpPr txBox="1"/>
+          <p:nvPr/>
+        </p:nvSpPr>
+        <p:spPr>
+          <a:xfrm>
+            <a:off x="548640" y="1508760"/>
+            <a:ext cx="11094415" cy="365760"/>
+          </a:xfrm>
+          <a:prstGeom prst="rect">
+            <a:avLst/>
+          </a:prstGeom>
+          <a:noFill/>
+          <a:ln/>
+        </p:spPr>
+        <p:txBody>
+          <a:bodyPr wrap="square" lIns="0" tIns="0" rIns="0" bIns="0" rtlCol="0" anchor="t"/>
+          <a:lstStyle/>
+          <a:p>
+            <a:pPr indent="0" marL="0">
+              <a:buNone/>
+            </a:pPr>
+            <a:r>
+              <a:rPr lang="en-US" sz="1500" dirty="0">
+                <a:solidFill>
+                  <a:schemeClr val="tx2"/>
+                </a:solidFill>
+              </a:rPr>
+              <a:t>測資讓系統知道學生錯在哪；接下來看 AI 怎麼把它變成提示</a:t>
+            </a:r>
+            <a:endParaRPr lang="en-US" sz="1500" dirty="0"/>
+          </a:p>
+        </p:txBody>
+      </p:sp>
+      <p:sp>
+        <p:nvSpPr>
+          <p:cNvPr id="6" name="card-219"/>
           <p:cNvSpPr/>
           <p:nvPr/>
         </p:nvSpPr>
         <p:spPr>
           <a:xfrm>
-            <a:off x="548640" y="1645920"/>
-            <a:ext cx="5486400" cy="1874520"/>
+            <a:off x="548640" y="2011680"/>
+            <a:ext cx="3291840" cy="2926080"/>
           </a:xfrm>
           <a:prstGeom prst="roundRect">
             <a:avLst>
-              <a:gd name="adj" fmla="val 3902"/>
+              <a:gd name="adj" fmla="val 2500"/>
             </a:avLst>
           </a:prstGeom>
           <a:solidFill>
@@ -6771,14 +7191,14 @@
       </p:sp>
       <p:sp>
         <p:nvSpPr>
-          <p:cNvPr id="6" name="text-203"/>
+          <p:cNvPr id="7" name="text-220"/>
           <p:cNvSpPr txBox="1"/>
           <p:nvPr/>
         </p:nvSpPr>
         <p:spPr>
           <a:xfrm>
-            <a:off x="822960" y="1783080"/>
-            <a:ext cx="4937760" cy="365760"/>
+            <a:off x="822960" y="2148840"/>
+            <a:ext cx="2743200" cy="365760"/>
           </a:xfrm>
           <a:prstGeom prst="rect">
             <a:avLst/>
@@ -6796,24 +7216,10 @@
             <a:r>
               <a:rPr lang="en-US" sz="1400" b="1" dirty="0">
                 <a:solidFill>
-                  <a:schemeClr val="accent1"/>
-                </a:solidFill>
-              </a:rPr>
-              <a:t>論文觀點　</a:t>
-            </a:r>
-            <a:pPr indent="0" marL="0">
-              <a:buNone/>
-            </a:pPr>
-            <a:r>
-              <a:rPr lang="en-US" sz="1400" dirty="0">
-                <a:solidFill>
-                  <a:schemeClr val="accent1"/>
-                </a:solidFill>
-                <a:latin typeface="Consolas" pitchFamily="34" charset="0"/>
-                <a:ea typeface="Consolas" pitchFamily="34" charset="-122"/>
-                <a:cs typeface="Consolas" pitchFamily="34" charset="-120"/>
-              </a:rPr>
-              <a:t>[12]</a:t>
+                  <a:schemeClr val="tx2"/>
+                </a:solidFill>
+              </a:rPr>
+              <a:t>學生交出</a:t>
             </a:r>
             <a:endParaRPr lang="en-US" sz="1400" dirty="0"/>
           </a:p>
@@ -6821,14 +7227,14 @@
       </p:sp>
       <p:sp>
         <p:nvSpPr>
-          <p:cNvPr id="7" name="text-204"/>
+          <p:cNvPr id="8" name="text-221"/>
           <p:cNvSpPr txBox="1"/>
           <p:nvPr/>
         </p:nvSpPr>
         <p:spPr>
           <a:xfrm>
-            <a:off x="822960" y="2194560"/>
-            <a:ext cx="4937760" cy="777240"/>
+            <a:off x="822960" y="2514600"/>
+            <a:ext cx="2788920" cy="731520"/>
           </a:xfrm>
           <a:prstGeom prst="rect">
             <a:avLst/>
@@ -6849,7 +7255,7 @@
                   <a:schemeClr val="tx1"/>
                 </a:solidFill>
               </a:rPr>
-              <a:t>避免直接給答案；改用帶逐行說明的虛擬碼（700 名學生、12 週的課堂部署）</a:t>
+              <a:t>一個常見的寫法：只認得相鄰的「()」</a:t>
             </a:r>
             <a:endParaRPr lang="en-US" sz="1600" dirty="0"/>
           </a:p>
@@ -6857,14 +7263,14 @@
       </p:sp>
       <p:sp>
         <p:nvSpPr>
-          <p:cNvPr id="8" name="text-205"/>
+          <p:cNvPr id="9" name="text-222"/>
           <p:cNvSpPr txBox="1"/>
           <p:nvPr/>
         </p:nvSpPr>
         <p:spPr>
           <a:xfrm>
-            <a:off x="822960" y="3017520"/>
-            <a:ext cx="4937760" cy="365760"/>
+            <a:off x="822960" y="3337560"/>
+            <a:ext cx="2743200" cy="365760"/>
           </a:xfrm>
           <a:prstGeom prst="rect">
             <a:avLst/>
@@ -6880,31 +7286,307 @@
               <a:buNone/>
             </a:pPr>
             <a:r>
-              <a:rPr lang="en-US" sz="1200" dirty="0">
+              <a:rPr lang="en-US" sz="1400" b="1" dirty="0">
                 <a:solidFill>
                   <a:schemeClr val="tx2"/>
                 </a:solidFill>
               </a:rPr>
-              <a:t>Kazemitabaar et al., CodeAid, 2024</a:t>
-            </a:r>
-            <a:endParaRPr lang="en-US" sz="1200" dirty="0"/>
-          </a:p>
-        </p:txBody>
-      </p:sp>
-      <p:sp>
-        <p:nvSpPr>
-          <p:cNvPr id="9" name="card-206"/>
+              <a:t>系統回應</a:t>
+            </a:r>
+            <a:endParaRPr lang="en-US" sz="1400" dirty="0"/>
+          </a:p>
+        </p:txBody>
+      </p:sp>
+      <p:sp>
+        <p:nvSpPr>
+          <p:cNvPr id="10" name="text-223"/>
+          <p:cNvSpPr txBox="1"/>
+          <p:nvPr/>
+        </p:nvSpPr>
+        <p:spPr>
+          <a:xfrm>
+            <a:off x="822960" y="3703320"/>
+            <a:ext cx="2788920" cy="731520"/>
+          </a:xfrm>
+          <a:prstGeom prst="rect">
+            <a:avLst/>
+          </a:prstGeom>
+          <a:noFill/>
+          <a:ln/>
+        </p:spPr>
+        <p:txBody>
+          <a:bodyPr wrap="square" lIns="0" tIns="0" rIns="0" bIns="0" rtlCol="0" anchor="t"/>
+          <a:lstStyle/>
+          <a:p>
+            <a:pPr indent="0" marL="0">
+              <a:buNone/>
+            </a:pPr>
+            <a:r>
+              <a:rPr lang="en-US" sz="1600" dirty="0">
+                <a:solidFill>
+                  <a:schemeClr val="tx1"/>
+                </a:solidFill>
+              </a:rPr>
+              <a:t>輸入 </a:t>
+            </a:r>
+            <a:pPr indent="0" marL="0">
+              <a:buNone/>
+            </a:pPr>
+            <a:r>
+              <a:rPr lang="en-US" sz="1600" b="1" dirty="0">
+                <a:solidFill>
+                  <a:srgbClr val="DFA050"/>
+                </a:solidFill>
+              </a:rPr>
+              <a:t>(())()</a:t>
+            </a:r>
+            <a:pPr indent="0" marL="0">
+              <a:buNone/>
+            </a:pPr>
+            <a:r>
+              <a:rPr lang="en-US" sz="1600" dirty="0">
+                <a:solidFill>
+                  <a:schemeClr val="tx1"/>
+                </a:solidFill>
+              </a:rPr>
+              <a:t> 應該是 </a:t>
+            </a:r>
+            <a:pPr indent="0" marL="0">
+              <a:buNone/>
+            </a:pPr>
+            <a:r>
+              <a:rPr lang="en-US" sz="1600" b="1" dirty="0">
+                <a:solidFill>
+                  <a:srgbClr val="5CB87C"/>
+                </a:solidFill>
+              </a:rPr>
+              <a:t>6</a:t>
+            </a:r>
+            <a:pPr indent="0" marL="0">
+              <a:buNone/>
+            </a:pPr>
+            <a:r>
+              <a:rPr lang="en-US" sz="1600" dirty="0">
+                <a:solidFill>
+                  <a:schemeClr val="tx1"/>
+                </a:solidFill>
+              </a:rPr>
+              <a:t>，你的程式回答 </a:t>
+            </a:r>
+            <a:pPr indent="0" marL="0">
+              <a:buNone/>
+            </a:pPr>
+            <a:r>
+              <a:rPr lang="en-US" sz="1600" b="1" dirty="0">
+                <a:solidFill>
+                  <a:srgbClr val="D96870"/>
+                </a:solidFill>
+              </a:rPr>
+              <a:t>2</a:t>
+            </a:r>
+            <a:endParaRPr lang="en-US" sz="1600" dirty="0"/>
+          </a:p>
+        </p:txBody>
+      </p:sp>
+      <p:sp>
+        <p:nvSpPr>
+          <p:cNvPr id="11" name="arrow-224"/>
           <p:cNvSpPr/>
           <p:nvPr/>
         </p:nvSpPr>
         <p:spPr>
           <a:xfrm>
-            <a:off x="548640" y="3703320"/>
-            <a:ext cx="5486400" cy="1874520"/>
+            <a:off x="3886200" y="3474720"/>
+            <a:ext cx="320040" cy="0"/>
+          </a:xfrm>
+          <a:prstGeom prst="line">
+            <a:avLst/>
+          </a:prstGeom>
+          <a:noFill/>
+          <a:ln w="19050">
+            <a:solidFill>
+              <a:schemeClr val="accent1"/>
+            </a:solidFill>
+            <a:prstDash val="solid"/>
+            <a:tailEnd type="triangle"/>
+          </a:ln>
+        </p:spPr>
+      </p:sp>
+      <p:sp>
+        <p:nvSpPr>
+          <p:cNvPr id="12" name="hint-225"/>
+          <p:cNvSpPr/>
+          <p:nvPr/>
+        </p:nvSpPr>
+        <p:spPr>
+          <a:xfrm>
+            <a:off x="4251960" y="2011680"/>
+            <a:ext cx="3886200" cy="2926080"/>
           </a:xfrm>
           <a:prstGeom prst="roundRect">
             <a:avLst>
-              <a:gd name="adj" fmla="val 3902"/>
+              <a:gd name="adj" fmla="val 2500"/>
+            </a:avLst>
+          </a:prstGeom>
+          <a:solidFill>
+            <a:schemeClr val="bg2"/>
+          </a:solidFill>
+          <a:ln w="15875">
+            <a:solidFill>
+              <a:schemeClr val="accent1"/>
+            </a:solidFill>
+            <a:prstDash val="solid"/>
+          </a:ln>
+        </p:spPr>
+      </p:sp>
+      <p:sp>
+        <p:nvSpPr>
+          <p:cNvPr id="13" name="text-226"/>
+          <p:cNvSpPr txBox="1"/>
+          <p:nvPr/>
+        </p:nvSpPr>
+        <p:spPr>
+          <a:xfrm>
+            <a:off x="4526280" y="2148840"/>
+            <a:ext cx="3474720" cy="365760"/>
+          </a:xfrm>
+          <a:prstGeom prst="rect">
+            <a:avLst/>
+          </a:prstGeom>
+          <a:noFill/>
+          <a:ln/>
+        </p:spPr>
+        <p:txBody>
+          <a:bodyPr wrap="square" lIns="0" tIns="0" rIns="0" bIns="0" rtlCol="0" anchor="t"/>
+          <a:lstStyle/>
+          <a:p>
+            <a:pPr indent="0" marL="0">
+              <a:buNone/>
+            </a:pPr>
+            <a:r>
+              <a:rPr lang="en-US" sz="1400" b="1" dirty="0">
+                <a:solidFill>
+                  <a:schemeClr val="accent1"/>
+                </a:solidFill>
+              </a:rPr>
+              <a:t>AI 的提示（實際產生，節錄）</a:t>
+            </a:r>
+            <a:endParaRPr lang="en-US" sz="1400" dirty="0"/>
+          </a:p>
+        </p:txBody>
+      </p:sp>
+      <p:sp>
+        <p:nvSpPr>
+          <p:cNvPr id="14" name="text-227"/>
+          <p:cNvSpPr txBox="1"/>
+          <p:nvPr/>
+        </p:nvSpPr>
+        <p:spPr>
+          <a:xfrm>
+            <a:off x="4526280" y="2560320"/>
+            <a:ext cx="3474720" cy="2286000"/>
+          </a:xfrm>
+          <a:prstGeom prst="rect">
+            <a:avLst/>
+          </a:prstGeom>
+          <a:noFill/>
+          <a:ln/>
+        </p:spPr>
+        <p:txBody>
+          <a:bodyPr wrap="square" lIns="0" tIns="0" rIns="0" bIns="0" rtlCol="0" anchor="t"/>
+          <a:lstStyle/>
+          <a:p>
+            <a:pPr indent="0" marL="0">
+              <a:buNone/>
+            </a:pPr>
+            <a:r>
+              <a:rPr lang="en-US" sz="1500" dirty="0">
+                <a:solidFill>
+                  <a:schemeClr val="tx1"/>
+                </a:solidFill>
+              </a:rPr>
+              <a:t>「想想第 5 步……</a:t>
+            </a:r>
+            <a:endParaRPr lang="en-US" sz="1500" dirty="0"/>
+          </a:p>
+          <a:p>
+            <a:pPr indent="0" marL="0">
+              <a:buNone/>
+            </a:pPr>
+            <a:r>
+              <a:rPr lang="en-US" sz="1500" dirty="0">
+                <a:solidFill>
+                  <a:schemeClr val="tx1"/>
+                </a:solidFill>
+              </a:rPr>
+              <a:t>如果一個 ')' 能匹配到多層前面的 '('，</a:t>
+            </a:r>
+            <a:endParaRPr lang="en-US" sz="1500" dirty="0"/>
+          </a:p>
+          <a:p>
+            <a:pPr indent="0" marL="0">
+              <a:buNone/>
+            </a:pPr>
+            <a:r>
+              <a:rPr lang="en-US" sz="1500" dirty="0">
+                <a:solidFill>
+                  <a:schemeClr val="tx1"/>
+                </a:solidFill>
+              </a:rPr>
+              <a:t>你認為應該怎麼處理 stack？」</a:t>
+            </a:r>
+            <a:endParaRPr lang="en-US" sz="1500" dirty="0"/>
+          </a:p>
+          <a:p>
+            <a:pPr indent="0" marL="0">
+              <a:buNone/>
+            </a:pPr>
+            <a:endParaRPr lang="en-US" sz="1500" dirty="0"/>
+          </a:p>
+          <a:p>
+            <a:pPr indent="0" marL="0">
+              <a:buNone/>
+            </a:pPr>
+            <a:r>
+              <a:rPr lang="en-US" sz="1500" dirty="0">
+                <a:solidFill>
+                  <a:schemeClr val="tx1"/>
+                </a:solidFill>
+              </a:rPr>
+              <a:t>「在輸入 "(())()" 時，在哪一步</a:t>
+            </a:r>
+            <a:endParaRPr lang="en-US" sz="1500" dirty="0"/>
+          </a:p>
+          <a:p>
+            <a:pPr indent="0" marL="0">
+              <a:buNone/>
+            </a:pPr>
+            <a:r>
+              <a:rPr lang="en-US" sz="1500" dirty="0">
+                <a:solidFill>
+                  <a:schemeClr val="tx1"/>
+                </a:solidFill>
+              </a:rPr>
+              <a:t>你可能忽略了一段已經合法的子串？」</a:t>
+            </a:r>
+            <a:endParaRPr lang="en-US" sz="1500" dirty="0"/>
+          </a:p>
+        </p:txBody>
+      </p:sp>
+      <p:sp>
+        <p:nvSpPr>
+          <p:cNvPr id="15" name="card-228"/>
+          <p:cNvSpPr/>
+          <p:nvPr/>
+        </p:nvSpPr>
+        <p:spPr>
+          <a:xfrm>
+            <a:off x="8366760" y="2011680"/>
+            <a:ext cx="3273552" cy="1371600"/>
+          </a:xfrm>
+          <a:prstGeom prst="roundRect">
+            <a:avLst>
+              <a:gd name="adj" fmla="val 5333"/>
             </a:avLst>
           </a:prstGeom>
           <a:solidFill>
@@ -6920,14 +7602,14 @@
       </p:sp>
       <p:sp>
         <p:nvSpPr>
-          <p:cNvPr id="10" name="text-207"/>
+          <p:cNvPr id="16" name="text-229"/>
           <p:cNvSpPr txBox="1"/>
           <p:nvPr/>
         </p:nvSpPr>
         <p:spPr>
           <a:xfrm>
-            <a:off x="822960" y="3840480"/>
-            <a:ext cx="4937760" cy="365760"/>
+            <a:off x="8595360" y="2121408"/>
+            <a:ext cx="2834640" cy="365760"/>
           </a:xfrm>
           <a:prstGeom prst="rect">
             <a:avLst/>
@@ -6943,41 +7625,27 @@
               <a:buNone/>
             </a:pPr>
             <a:r>
-              <a:rPr lang="en-US" sz="1400" b="1" dirty="0">
-                <a:solidFill>
-                  <a:schemeClr val="accent1"/>
-                </a:solidFill>
-              </a:rPr>
-              <a:t>論文觀點　</a:t>
-            </a:r>
-            <a:pPr indent="0" marL="0">
-              <a:buNone/>
-            </a:pPr>
-            <a:r>
-              <a:rPr lang="en-US" sz="1400" dirty="0">
-                <a:solidFill>
-                  <a:schemeClr val="accent1"/>
-                </a:solidFill>
-                <a:latin typeface="Consolas" pitchFamily="34" charset="0"/>
-                <a:ea typeface="Consolas" pitchFamily="34" charset="-122"/>
-                <a:cs typeface="Consolas" pitchFamily="34" charset="-120"/>
-              </a:rPr>
-              <a:t>[11]</a:t>
-            </a:r>
-            <a:endParaRPr lang="en-US" sz="1400" dirty="0"/>
-          </a:p>
-        </p:txBody>
-      </p:sp>
-      <p:sp>
-        <p:nvSpPr>
-          <p:cNvPr id="11" name="text-208"/>
+              <a:rPr lang="en-US" sz="1600" b="1" dirty="0">
+                <a:solidFill>
+                  <a:schemeClr val="accent3"/>
+                </a:solidFill>
+              </a:rPr>
+              <a:t>做得好</a:t>
+            </a:r>
+            <a:endParaRPr lang="en-US" sz="1600" dirty="0"/>
+          </a:p>
+        </p:txBody>
+      </p:sp>
+      <p:sp>
+        <p:nvSpPr>
+          <p:cNvPr id="17" name="text-230"/>
           <p:cNvSpPr txBox="1"/>
           <p:nvPr/>
         </p:nvSpPr>
         <p:spPr>
           <a:xfrm>
-            <a:off x="822960" y="4251960"/>
-            <a:ext cx="4937760" cy="777240"/>
+            <a:off x="8595360" y="2487168"/>
+            <a:ext cx="2880360" cy="868680"/>
           </a:xfrm>
           <a:prstGeom prst="rect">
             <a:avLst/>
@@ -6993,75 +7661,39 @@
               <a:buNone/>
             </a:pPr>
             <a:r>
-              <a:rPr lang="en-US" sz="1600" dirty="0">
-                <a:solidFill>
-                  <a:schemeClr val="tx1"/>
-                </a:solidFill>
-              </a:rPr>
-              <a:t>只有高層次的文字提示，可能沒有幫助甚至誤導；更具體的提示較能幫到新手</a:t>
-            </a:r>
-            <a:endParaRPr lang="en-US" sz="1600" dirty="0"/>
-          </a:p>
-        </p:txBody>
-      </p:sp>
-      <p:sp>
-        <p:nvSpPr>
-          <p:cNvPr id="12" name="text-209"/>
-          <p:cNvSpPr txBox="1"/>
-          <p:nvPr/>
-        </p:nvSpPr>
-        <p:spPr>
-          <a:xfrm>
-            <a:off x="822960" y="5074920"/>
-            <a:ext cx="4937760" cy="365760"/>
-          </a:xfrm>
-          <a:prstGeom prst="rect">
-            <a:avLst/>
-          </a:prstGeom>
-          <a:noFill/>
-          <a:ln/>
-        </p:spPr>
-        <p:txBody>
-          <a:bodyPr wrap="square" lIns="0" tIns="0" rIns="0" bIns="0" rtlCol="0" anchor="t"/>
-          <a:lstStyle/>
-          <a:p>
-            <a:pPr indent="0" marL="0">
-              <a:buNone/>
-            </a:pPr>
-            <a:r>
-              <a:rPr lang="en-US" sz="1200" dirty="0">
+              <a:rPr lang="en-US" sz="1300" dirty="0">
                 <a:solidFill>
                   <a:schemeClr val="tx2"/>
                 </a:solidFill>
               </a:rPr>
-              <a:t>Xiao et al., 2024</a:t>
-            </a:r>
-            <a:endParaRPr lang="en-US" sz="1200" dirty="0"/>
-          </a:p>
-        </p:txBody>
-      </p:sp>
-      <p:sp>
-        <p:nvSpPr>
-          <p:cNvPr id="13" name="obs-210"/>
+              <a:t>沒有給程式碼、用問句引導；指到具體的失敗輸入和虛擬碼步驟</a:t>
+            </a:r>
+            <a:endParaRPr lang="en-US" sz="1300" dirty="0"/>
+          </a:p>
+        </p:txBody>
+      </p:sp>
+      <p:sp>
+        <p:nvSpPr>
+          <p:cNvPr id="18" name="card-231"/>
           <p:cNvSpPr/>
           <p:nvPr/>
         </p:nvSpPr>
         <p:spPr>
           <a:xfrm>
-            <a:off x="6263640" y="1645920"/>
-            <a:ext cx="5376672" cy="3931920"/>
+            <a:off x="8366760" y="3520440"/>
+            <a:ext cx="3273552" cy="1371600"/>
           </a:xfrm>
           <a:prstGeom prst="roundRect">
             <a:avLst>
-              <a:gd name="adj" fmla="val 1860"/>
+              <a:gd name="adj" fmla="val 5333"/>
             </a:avLst>
           </a:prstGeom>
           <a:solidFill>
             <a:schemeClr val="bg2"/>
           </a:solidFill>
-          <a:ln w="15875">
+          <a:ln w="9525">
             <a:solidFill>
-              <a:schemeClr val="accent4"/>
+              <a:schemeClr val="accent6"/>
             </a:solidFill>
             <a:prstDash val="solid"/>
           </a:ln>
@@ -7069,14 +7701,14 @@
       </p:sp>
       <p:sp>
         <p:nvSpPr>
-          <p:cNvPr id="14" name="text-211"/>
+          <p:cNvPr id="19" name="text-232"/>
           <p:cNvSpPr txBox="1"/>
           <p:nvPr/>
         </p:nvSpPr>
         <p:spPr>
           <a:xfrm>
-            <a:off x="6537960" y="1783080"/>
-            <a:ext cx="4828032" cy="365760"/>
+            <a:off x="8595360" y="3630168"/>
+            <a:ext cx="2834640" cy="365760"/>
           </a:xfrm>
           <a:prstGeom prst="rect">
             <a:avLst/>
@@ -7092,38 +7724,110 @@
               <a:buNone/>
             </a:pPr>
             <a:r>
-              <a:rPr lang="en-US" sz="1400" b="1" dirty="0">
-                <a:solidFill>
-                  <a:schemeClr val="accent4"/>
-                </a:solidFill>
-              </a:rPr>
-              <a:t>本專題觀察　</a:t>
-            </a:r>
-            <a:pPr indent="0" marL="0">
-              <a:buNone/>
-            </a:pPr>
-            <a:r>
-              <a:rPr lang="en-US" sz="1400" b="1" dirty="0">
+              <a:rPr lang="en-US" sz="1600" b="1" dirty="0">
+                <a:solidFill>
+                  <a:schemeClr val="accent2"/>
+                </a:solidFill>
+              </a:rPr>
+              <a:t>還不夠</a:t>
+            </a:r>
+            <a:endParaRPr lang="en-US" sz="1600" dirty="0"/>
+          </a:p>
+        </p:txBody>
+      </p:sp>
+      <p:sp>
+        <p:nvSpPr>
+          <p:cNvPr id="20" name="text-233"/>
+          <p:cNvSpPr txBox="1"/>
+          <p:nvPr/>
+        </p:nvSpPr>
+        <p:spPr>
+          <a:xfrm>
+            <a:off x="8595360" y="3995928"/>
+            <a:ext cx="2880360" cy="868680"/>
+          </a:xfrm>
+          <a:prstGeom prst="rect">
+            <a:avLst/>
+          </a:prstGeom>
+          <a:noFill/>
+          <a:ln/>
+        </p:spPr>
+        <p:txBody>
+          <a:bodyPr wrap="square" lIns="0" tIns="0" rIns="0" bIns="0" rtlCol="0" anchor="t"/>
+          <a:lstStyle/>
+          <a:p>
+            <a:pPr indent="0" marL="0">
+              <a:buNone/>
+            </a:pPr>
+            <a:r>
+              <a:rPr lang="en-US" sz="1300" dirty="0">
+                <a:solidFill>
+                  <a:schemeClr val="tx2"/>
+                </a:solidFill>
+              </a:rPr>
+              <a:t>AI 看不到程式，以為學生照虛擬碼用了 stack——其實學生根本沒用，提示可能帶錯方向</a:t>
+            </a:r>
+            <a:endParaRPr lang="en-US" sz="1300" dirty="0"/>
+          </a:p>
+        </p:txBody>
+      </p:sp>
+      <p:sp>
+        <p:nvSpPr>
+          <p:cNvPr id="21" name="text-234"/>
+          <p:cNvSpPr txBox="1"/>
+          <p:nvPr/>
+        </p:nvSpPr>
+        <p:spPr>
+          <a:xfrm>
+            <a:off x="548640" y="5212080"/>
+            <a:ext cx="11094415" cy="457200"/>
+          </a:xfrm>
+          <a:prstGeom prst="rect">
+            <a:avLst/>
+          </a:prstGeom>
+          <a:noFill/>
+          <a:ln/>
+        </p:spPr>
+        <p:txBody>
+          <a:bodyPr wrap="square" lIns="0" tIns="0" rIns="0" bIns="0" rtlCol="0" anchor="t"/>
+          <a:lstStyle/>
+          <a:p>
+            <a:pPr indent="0" marL="0">
+              <a:buNone/>
+            </a:pPr>
+            <a:r>
+              <a:rPr lang="en-US" sz="1600" b="1" dirty="0">
+                <a:solidFill>
+                  <a:srgbClr val="DFA050"/>
+                </a:solidFill>
+              </a:rPr>
+              <a:t>看不到程式碼，換來不洩漏答案；</a:t>
+            </a:r>
+            <a:pPr indent="0" marL="0">
+              <a:buNone/>
+            </a:pPr>
+            <a:r>
+              <a:rPr lang="en-US" sz="1600" dirty="0">
                 <a:solidFill>
                   <a:schemeClr val="tx1"/>
                 </a:solidFill>
               </a:rPr>
-              <a:t>本專題的對應做法</a:t>
-            </a:r>
-            <a:endParaRPr lang="en-US" sz="1400" dirty="0"/>
-          </a:p>
-        </p:txBody>
-      </p:sp>
-      <p:sp>
-        <p:nvSpPr>
-          <p:cNvPr id="15" name="text-212"/>
+              <a:t>代價是有時會猜錯學生的思路。</a:t>
+            </a:r>
+            <a:endParaRPr lang="en-US" sz="1600" dirty="0"/>
+          </a:p>
+        </p:txBody>
+      </p:sp>
+      <p:sp>
+        <p:nvSpPr>
+          <p:cNvPr id="22" name="text-235"/>
           <p:cNvSpPr txBox="1"/>
           <p:nvPr/>
         </p:nvSpPr>
         <p:spPr>
           <a:xfrm>
-            <a:off x="6537960" y="2286000"/>
-            <a:ext cx="4873752" cy="3154680"/>
+            <a:off x="548640" y="5943600"/>
+            <a:ext cx="11094415" cy="320040"/>
           </a:xfrm>
           <a:prstGeom prst="rect">
             <a:avLst/>
@@ -7135,147 +7839,18 @@
           <a:bodyPr wrap="square" lIns="0" tIns="0" rIns="0" bIns="0" rtlCol="0" anchor="t"/>
           <a:lstStyle/>
           <a:p>
-            <a:pPr marL="203200" indent="-203200">
-              <a:spcAft>
-                <a:spcPts val="1600"/>
-              </a:spcAft>
-              <a:buSzPct val="100000"/>
-              <a:buChar char="•"/>
-            </a:pPr>
-            <a:r>
-              <a:rPr lang="en-US" sz="1700" b="1" dirty="0">
-                <a:solidFill>
-                  <a:schemeClr val="tx1"/>
-                </a:solidFill>
-              </a:rPr>
-              <a:t>看不到程式碼：</a:t>
-            </a:r>
-            <a:pPr indent="0" marL="0">
-              <a:spcAft>
-                <a:spcPts val="1600"/>
-              </a:spcAft>
-              <a:buNone/>
-            </a:pPr>
-            <a:r>
-              <a:rPr lang="en-US" sz="1700" dirty="0">
-                <a:solidFill>
-                  <a:schemeClr val="tx1"/>
-                </a:solidFill>
-              </a:rPr>
-              <a:t>AI 結構上拿不到學生的程式，想代寫也辦不到</a:t>
-            </a:r>
-            <a:endParaRPr lang="en-US" sz="1700" dirty="0"/>
-          </a:p>
-          <a:p>
-            <a:pPr marL="203200" indent="-203200">
-              <a:spcAft>
-                <a:spcPts val="1600"/>
-              </a:spcAft>
-              <a:buSzPct val="100000"/>
-              <a:buChar char="•"/>
-            </a:pPr>
-            <a:r>
-              <a:rPr lang="en-US" sz="1700" b="1" dirty="0">
-                <a:solidFill>
-                  <a:schemeClr val="tx1"/>
-                </a:solidFill>
-              </a:rPr>
-              <a:t>虛擬碼當中間層：</a:t>
-            </a:r>
-            <a:pPr indent="0" marL="0">
-              <a:spcAft>
-                <a:spcPts val="1600"/>
-              </a:spcAft>
-              <a:buNone/>
-            </a:pPr>
-            <a:r>
-              <a:rPr lang="en-US" sz="1700" dirty="0">
-                <a:solidFill>
-                  <a:schemeClr val="tx1"/>
-                </a:solidFill>
-              </a:rPr>
-              <a:t>比文字提示具體，但不是能直接貼上的答案；先通過往返檢查才使用</a:t>
-            </a:r>
-            <a:endParaRPr lang="en-US" sz="1700" dirty="0"/>
-          </a:p>
-          <a:p>
-            <a:pPr marL="203200" indent="-203200">
-              <a:spcAft>
-                <a:spcPts val="1600"/>
-              </a:spcAft>
-              <a:buSzPct val="100000"/>
-              <a:buChar char="•"/>
-            </a:pPr>
-            <a:r>
-              <a:rPr lang="en-US" sz="1700" b="1" dirty="0">
-                <a:solidFill>
-                  <a:schemeClr val="tx1"/>
-                </a:solidFill>
-              </a:rPr>
-              <a:t>檢查關：</a:t>
-            </a:r>
-            <a:pPr indent="0" marL="0">
-              <a:spcAft>
-                <a:spcPts val="1600"/>
-              </a:spcAft>
-              <a:buNone/>
-            </a:pPr>
-            <a:r>
-              <a:rPr lang="en-US" sz="1700" dirty="0">
-                <a:solidFill>
-                  <a:schemeClr val="tx1"/>
-                </a:solidFill>
-              </a:rPr>
-              <a:t>擋下夾帶程式碼或照抄虛擬碼的提示</a:t>
-            </a:r>
-            <a:endParaRPr lang="en-US" sz="1700" dirty="0"/>
-          </a:p>
-        </p:txBody>
-      </p:sp>
-      <p:sp>
-        <p:nvSpPr>
-          <p:cNvPr id="16" name="text-213"/>
-          <p:cNvSpPr txBox="1"/>
-          <p:nvPr/>
-        </p:nvSpPr>
-        <p:spPr>
-          <a:xfrm>
-            <a:off x="548640" y="5715000"/>
-            <a:ext cx="11094415" cy="640080"/>
-          </a:xfrm>
-          <a:prstGeom prst="rect">
-            <a:avLst/>
-          </a:prstGeom>
-          <a:noFill/>
-          <a:ln/>
-        </p:spPr>
-        <p:txBody>
-          <a:bodyPr wrap="square" lIns="0" tIns="0" rIns="0" bIns="0" rtlCol="0" anchor="t"/>
-          <a:lstStyle/>
-          <a:p>
-            <a:pPr indent="0" marL="0">
-              <a:buNone/>
-            </a:pPr>
-            <a:r>
-              <a:rPr lang="en-US" sz="1500" b="1" dirty="0">
-                <a:solidFill>
-                  <a:schemeClr val="accent1"/>
-                </a:solidFill>
-              </a:rPr>
-              <a:t>意涵　</a:t>
-            </a:r>
-            <a:pPr indent="0" marL="0">
-              <a:buNone/>
-            </a:pPr>
-            <a:r>
-              <a:rPr lang="en-US" sz="1500" dirty="0">
-                <a:solidFill>
-                  <a:schemeClr val="tx2"/>
-                </a:solidFill>
-              </a:rPr>
-              <a:t>在「太抽象沒用」與「太具體變答案」之間取中間層；提示方向好不好，機器判斷不了，仍需要人看</a:t>
-            </a:r>
-            <a:endParaRPr lang="en-US" sz="1500" dirty="0"/>
+            <a:pPr indent="0" marL="0">
+              <a:buNone/>
+            </a:pPr>
+            <a:r>
+              <a:rPr lang="en-US" sz="1200" dirty="0">
+                <a:solidFill>
+                  <a:schemeClr val="accent5"/>
+                </a:solidFill>
+              </a:rPr>
+              <a:t>對照文獻：不直接給答案（Kazemitabaar et al., CodeAid [12]）；提示可能誤導（Xiao et al. [11]）</a:t>
+            </a:r>
+            <a:endParaRPr lang="en-US" sz="1200" dirty="0"/>
           </a:p>
         </p:txBody>
       </p:sp>
@@ -7387,7 +7962,7 @@
                 <a:ea typeface="Consolas" pitchFamily="34" charset="-122"/>
                 <a:cs typeface="Consolas" pitchFamily="34" charset="-120"/>
               </a:rPr>
-              <a:t>DEMO</a:t>
+              <a:t>成效展現 4／4</a:t>
             </a:r>
             <a:endParaRPr lang="en-US" sz="1300" dirty="0"/>
           </a:p>
@@ -7425,7 +8000,7 @@
                   <a:schemeClr val="tx1"/>
                 </a:solidFill>
               </a:rPr>
-              <a:t>Demo：對照文獻的設計原則來看</a:t>
+              <a:t>跟著一位學生走一遍（Demo）</a:t>
             </a:r>
             <a:endParaRPr lang="en-US" sz="3000" dirty="0"/>
           </a:p>
@@ -7433,18 +8008,18 @@
       </p:sp>
       <p:sp>
         <p:nvSpPr>
-          <p:cNvPr id="5" name="card-214"/>
+          <p:cNvPr id="5" name="card-236"/>
           <p:cNvSpPr/>
           <p:nvPr/>
         </p:nvSpPr>
         <p:spPr>
           <a:xfrm>
-            <a:off x="548640" y="1645920"/>
-            <a:ext cx="3520440" cy="2377440"/>
+            <a:off x="548640" y="1691640"/>
+            <a:ext cx="2011680" cy="2240280"/>
           </a:xfrm>
           <a:prstGeom prst="roundRect">
             <a:avLst>
-              <a:gd name="adj" fmla="val 3077"/>
+              <a:gd name="adj" fmla="val 3636"/>
             </a:avLst>
           </a:prstGeom>
           <a:solidFill>
@@ -7460,14 +8035,14 @@
       </p:sp>
       <p:sp>
         <p:nvSpPr>
-          <p:cNvPr id="6" name="text-215"/>
+          <p:cNvPr id="6" name="text-237"/>
           <p:cNvSpPr txBox="1"/>
           <p:nvPr/>
         </p:nvSpPr>
         <p:spPr>
           <a:xfrm>
-            <a:off x="822960" y="1783080"/>
-            <a:ext cx="3017520" cy="365760"/>
+            <a:off x="777240" y="1828800"/>
+            <a:ext cx="548640" cy="502920"/>
           </a:xfrm>
           <a:prstGeom prst="rect">
             <a:avLst/>
@@ -7483,18 +8058,7 @@
               <a:buNone/>
             </a:pPr>
             <a:r>
-              <a:rPr lang="en-US" sz="1300" b="1" dirty="0">
-                <a:solidFill>
-                  <a:schemeClr val="accent1"/>
-                </a:solidFill>
-              </a:rPr>
-              <a:t>設計原則　</a:t>
-            </a:r>
-            <a:pPr indent="0" marL="0">
-              <a:buNone/>
-            </a:pPr>
-            <a:r>
-              <a:rPr lang="en-US" sz="1300" dirty="0">
+              <a:rPr lang="en-US" sz="2400" b="1" dirty="0">
                 <a:solidFill>
                   <a:schemeClr val="accent1"/>
                 </a:solidFill>
@@ -7502,22 +8066,22 @@
                 <a:ea typeface="Consolas" pitchFamily="34" charset="-122"/>
                 <a:cs typeface="Consolas" pitchFamily="34" charset="-120"/>
               </a:rPr>
-              <a:t>[12]</a:t>
-            </a:r>
-            <a:endParaRPr lang="en-US" sz="1300" dirty="0"/>
-          </a:p>
-        </p:txBody>
-      </p:sp>
-      <p:sp>
-        <p:nvSpPr>
-          <p:cNvPr id="7" name="text-216"/>
+              <a:t>1</a:t>
+            </a:r>
+            <a:endParaRPr lang="en-US" sz="2400" dirty="0"/>
+          </a:p>
+        </p:txBody>
+      </p:sp>
+      <p:sp>
+        <p:nvSpPr>
+          <p:cNvPr id="7" name="text-238"/>
           <p:cNvSpPr txBox="1"/>
           <p:nvPr/>
         </p:nvSpPr>
         <p:spPr>
           <a:xfrm>
-            <a:off x="822960" y="2194560"/>
-            <a:ext cx="3017520" cy="457200"/>
+            <a:off x="777240" y="2350008"/>
+            <a:ext cx="1600200" cy="457200"/>
           </a:xfrm>
           <a:prstGeom prst="rect">
             <a:avLst/>
@@ -7533,27 +8097,27 @@
               <a:buNone/>
             </a:pPr>
             <a:r>
-              <a:rPr lang="en-US" sz="2000" b="1" dirty="0">
+              <a:rPr lang="en-US" sz="1700" b="1" dirty="0">
                 <a:solidFill>
                   <a:schemeClr val="tx1"/>
                 </a:solidFill>
               </a:rPr>
-              <a:t>不給完整答案</a:t>
-            </a:r>
-            <a:endParaRPr lang="en-US" sz="2000" dirty="0"/>
-          </a:p>
-        </p:txBody>
-      </p:sp>
-      <p:sp>
-        <p:nvSpPr>
-          <p:cNvPr id="8" name="text-217"/>
+              <a:t>讀題</a:t>
+            </a:r>
+            <a:endParaRPr lang="en-US" sz="1700" dirty="0"/>
+          </a:p>
+        </p:txBody>
+      </p:sp>
+      <p:sp>
+        <p:nvSpPr>
+          <p:cNvPr id="8" name="text-239"/>
           <p:cNvSpPr txBox="1"/>
           <p:nvPr/>
         </p:nvSpPr>
         <p:spPr>
           <a:xfrm>
-            <a:off x="822960" y="2788920"/>
-            <a:ext cx="3017520" cy="1097280"/>
+            <a:off x="777240" y="2834640"/>
+            <a:ext cx="1600200" cy="1005840"/>
           </a:xfrm>
           <a:prstGeom prst="rect">
             <a:avLst/>
@@ -7569,45 +8133,69 @@
               <a:buNone/>
             </a:pPr>
             <a:r>
-              <a:rPr lang="en-US" sz="1500" b="1" dirty="0">
-                <a:solidFill>
-                  <a:schemeClr val="accent4"/>
-                </a:solidFill>
-              </a:rPr>
-              <a:t>Demo 時看：</a:t>
-            </a:r>
-            <a:endParaRPr lang="en-US" sz="1500" dirty="0"/>
-          </a:p>
-          <a:p>
-            <a:pPr indent="0" marL="0">
-              <a:buNone/>
-            </a:pPr>
-            <a:r>
-              <a:rPr lang="en-US" sz="1500" dirty="0">
+              <a:rPr lang="en-US" sz="1400" dirty="0">
                 <a:solidFill>
                   <a:schemeClr val="tx2"/>
                 </a:solidFill>
               </a:rPr>
-              <a:t>提示裡沒有可以直接貼上的程式</a:t>
-            </a:r>
-            <a:endParaRPr lang="en-US" sz="1500" dirty="0"/>
-          </a:p>
-        </p:txBody>
-      </p:sp>
-      <p:sp>
-        <p:nvSpPr>
-          <p:cNvPr id="9" name="card-218"/>
+              <a:t>展開虛擬碼</a:t>
+            </a:r>
+            <a:endParaRPr lang="en-US" sz="1400" dirty="0"/>
+          </a:p>
+          <a:p>
+            <a:pPr indent="0" marL="0">
+              <a:buNone/>
+            </a:pPr>
+            <a:r>
+              <a:rPr lang="en-US" sz="1400" dirty="0">
+                <a:solidFill>
+                  <a:schemeClr val="tx2"/>
+                </a:solidFill>
+              </a:rPr>
+              <a:t>了解解法的步驟</a:t>
+            </a:r>
+            <a:endParaRPr lang="en-US" sz="1400" dirty="0"/>
+          </a:p>
+        </p:txBody>
+      </p:sp>
+      <p:sp>
+        <p:nvSpPr>
+          <p:cNvPr id="9" name="arrow-240"/>
           <p:cNvSpPr/>
           <p:nvPr/>
         </p:nvSpPr>
         <p:spPr>
           <a:xfrm>
-            <a:off x="4297680" y="1645920"/>
-            <a:ext cx="3520440" cy="2377440"/>
+            <a:off x="2578608" y="2807208"/>
+            <a:ext cx="219456" cy="0"/>
+          </a:xfrm>
+          <a:prstGeom prst="line">
+            <a:avLst/>
+          </a:prstGeom>
+          <a:noFill/>
+          <a:ln w="19050">
+            <a:solidFill>
+              <a:schemeClr val="accent1"/>
+            </a:solidFill>
+            <a:prstDash val="solid"/>
+            <a:tailEnd type="triangle"/>
+          </a:ln>
+        </p:spPr>
+      </p:sp>
+      <p:sp>
+        <p:nvSpPr>
+          <p:cNvPr id="10" name="card-241"/>
+          <p:cNvSpPr/>
+          <p:nvPr/>
+        </p:nvSpPr>
+        <p:spPr>
+          <a:xfrm>
+            <a:off x="2816352" y="1691640"/>
+            <a:ext cx="2011680" cy="2240280"/>
           </a:xfrm>
           <a:prstGeom prst="roundRect">
             <a:avLst>
-              <a:gd name="adj" fmla="val 3077"/>
+              <a:gd name="adj" fmla="val 3636"/>
             </a:avLst>
           </a:prstGeom>
           <a:solidFill>
@@ -7623,14 +8211,14 @@
       </p:sp>
       <p:sp>
         <p:nvSpPr>
-          <p:cNvPr id="10" name="text-219"/>
+          <p:cNvPr id="11" name="text-242"/>
           <p:cNvSpPr txBox="1"/>
           <p:nvPr/>
         </p:nvSpPr>
         <p:spPr>
           <a:xfrm>
-            <a:off x="4572000" y="1783080"/>
-            <a:ext cx="3017520" cy="365760"/>
+            <a:off x="3044952" y="1828800"/>
+            <a:ext cx="548640" cy="502920"/>
           </a:xfrm>
           <a:prstGeom prst="rect">
             <a:avLst/>
@@ -7646,18 +8234,7 @@
               <a:buNone/>
             </a:pPr>
             <a:r>
-              <a:rPr lang="en-US" sz="1300" b="1" dirty="0">
-                <a:solidFill>
-                  <a:schemeClr val="accent1"/>
-                </a:solidFill>
-              </a:rPr>
-              <a:t>設計原則　</a:t>
-            </a:r>
-            <a:pPr indent="0" marL="0">
-              <a:buNone/>
-            </a:pPr>
-            <a:r>
-              <a:rPr lang="en-US" sz="1300" dirty="0">
+              <a:rPr lang="en-US" sz="2400" b="1" dirty="0">
                 <a:solidFill>
                   <a:schemeClr val="accent1"/>
                 </a:solidFill>
@@ -7665,22 +8242,22 @@
                 <a:ea typeface="Consolas" pitchFamily="34" charset="-122"/>
                 <a:cs typeface="Consolas" pitchFamily="34" charset="-120"/>
               </a:rPr>
-              <a:t>[11]</a:t>
-            </a:r>
-            <a:endParaRPr lang="en-US" sz="1300" dirty="0"/>
-          </a:p>
-        </p:txBody>
-      </p:sp>
-      <p:sp>
-        <p:nvSpPr>
-          <p:cNvPr id="11" name="text-220"/>
+              <a:t>2</a:t>
+            </a:r>
+            <a:endParaRPr lang="en-US" sz="2400" dirty="0"/>
+          </a:p>
+        </p:txBody>
+      </p:sp>
+      <p:sp>
+        <p:nvSpPr>
+          <p:cNvPr id="12" name="text-243"/>
           <p:cNvSpPr txBox="1"/>
           <p:nvPr/>
         </p:nvSpPr>
         <p:spPr>
           <a:xfrm>
-            <a:off x="4572000" y="2194560"/>
-            <a:ext cx="3017520" cy="457200"/>
+            <a:off x="3044952" y="2350008"/>
+            <a:ext cx="1600200" cy="457200"/>
           </a:xfrm>
           <a:prstGeom prst="rect">
             <a:avLst/>
@@ -7696,27 +8273,27 @@
               <a:buNone/>
             </a:pPr>
             <a:r>
-              <a:rPr lang="en-US" sz="2000" b="1" dirty="0">
+              <a:rPr lang="en-US" sz="1700" b="1" dirty="0">
                 <a:solidFill>
                   <a:schemeClr val="tx1"/>
                 </a:solidFill>
               </a:rPr>
-              <a:t>比文字提示更具體</a:t>
-            </a:r>
-            <a:endParaRPr lang="en-US" sz="2000" dirty="0"/>
-          </a:p>
-        </p:txBody>
-      </p:sp>
-      <p:sp>
-        <p:nvSpPr>
-          <p:cNvPr id="12" name="text-221"/>
+              <a:t>送出</a:t>
+            </a:r>
+            <a:endParaRPr lang="en-US" sz="1700" dirty="0"/>
+          </a:p>
+        </p:txBody>
+      </p:sp>
+      <p:sp>
+        <p:nvSpPr>
+          <p:cNvPr id="13" name="text-244"/>
           <p:cNvSpPr txBox="1"/>
           <p:nvPr/>
         </p:nvSpPr>
         <p:spPr>
           <a:xfrm>
-            <a:off x="4572000" y="2788920"/>
-            <a:ext cx="3017520" cy="1097280"/>
+            <a:off x="3044952" y="2834640"/>
+            <a:ext cx="1600200" cy="1005840"/>
           </a:xfrm>
           <a:prstGeom prst="rect">
             <a:avLst/>
@@ -7732,45 +8309,69 @@
               <a:buNone/>
             </a:pPr>
             <a:r>
-              <a:rPr lang="en-US" sz="1500" b="1" dirty="0">
-                <a:solidFill>
-                  <a:schemeClr val="accent4"/>
-                </a:solidFill>
-              </a:rPr>
-              <a:t>Demo 時看：</a:t>
-            </a:r>
-            <a:endParaRPr lang="en-US" sz="1500" dirty="0"/>
-          </a:p>
-          <a:p>
-            <a:pPr indent="0" marL="0">
-              <a:buNone/>
-            </a:pPr>
-            <a:r>
-              <a:rPr lang="en-US" sz="1500" dirty="0">
+              <a:rPr lang="en-US" sz="1400" dirty="0">
                 <a:solidFill>
                   <a:schemeClr val="tx2"/>
                 </a:solidFill>
               </a:rPr>
-              <a:t>提示會指到虛擬碼的步驟</a:t>
-            </a:r>
-            <a:endParaRPr lang="en-US" sz="1500" dirty="0"/>
-          </a:p>
-        </p:txBody>
-      </p:sp>
-      <p:sp>
-        <p:nvSpPr>
-          <p:cNvPr id="13" name="card-222"/>
+              <a:t>寫出直覺的解法</a:t>
+            </a:r>
+            <a:endParaRPr lang="en-US" sz="1400" dirty="0"/>
+          </a:p>
+          <a:p>
+            <a:pPr indent="0" marL="0">
+              <a:buNone/>
+            </a:pPr>
+            <a:r>
+              <a:rPr lang="en-US" sz="1400" dirty="0">
+                <a:solidFill>
+                  <a:schemeClr val="tx2"/>
+                </a:solidFill>
+              </a:rPr>
+              <a:t>交給系統</a:t>
+            </a:r>
+            <a:endParaRPr lang="en-US" sz="1400" dirty="0"/>
+          </a:p>
+        </p:txBody>
+      </p:sp>
+      <p:sp>
+        <p:nvSpPr>
+          <p:cNvPr id="14" name="arrow-245"/>
           <p:cNvSpPr/>
           <p:nvPr/>
         </p:nvSpPr>
         <p:spPr>
           <a:xfrm>
-            <a:off x="8046720" y="1645920"/>
-            <a:ext cx="3520440" cy="2377440"/>
+            <a:off x="4846320" y="2807208"/>
+            <a:ext cx="219456" cy="0"/>
+          </a:xfrm>
+          <a:prstGeom prst="line">
+            <a:avLst/>
+          </a:prstGeom>
+          <a:noFill/>
+          <a:ln w="19050">
+            <a:solidFill>
+              <a:schemeClr val="accent1"/>
+            </a:solidFill>
+            <a:prstDash val="solid"/>
+            <a:tailEnd type="triangle"/>
+          </a:ln>
+        </p:spPr>
+      </p:sp>
+      <p:sp>
+        <p:nvSpPr>
+          <p:cNvPr id="15" name="card-246"/>
+          <p:cNvSpPr/>
+          <p:nvPr/>
+        </p:nvSpPr>
+        <p:spPr>
+          <a:xfrm>
+            <a:off x="5084064" y="1691640"/>
+            <a:ext cx="2011680" cy="2240280"/>
           </a:xfrm>
           <a:prstGeom prst="roundRect">
             <a:avLst>
-              <a:gd name="adj" fmla="val 3077"/>
+              <a:gd name="adj" fmla="val 3636"/>
             </a:avLst>
           </a:prstGeom>
           <a:solidFill>
@@ -7786,14 +8387,14 @@
       </p:sp>
       <p:sp>
         <p:nvSpPr>
-          <p:cNvPr id="14" name="text-223"/>
+          <p:cNvPr id="16" name="text-247"/>
           <p:cNvSpPr txBox="1"/>
           <p:nvPr/>
         </p:nvSpPr>
         <p:spPr>
           <a:xfrm>
-            <a:off x="8321040" y="1783080"/>
-            <a:ext cx="3017520" cy="365760"/>
+            <a:off x="5312664" y="1828800"/>
+            <a:ext cx="548640" cy="502920"/>
           </a:xfrm>
           <a:prstGeom prst="rect">
             <a:avLst/>
@@ -7809,18 +8410,7 @@
               <a:buNone/>
             </a:pPr>
             <a:r>
-              <a:rPr lang="en-US" sz="1300" b="1" dirty="0">
-                <a:solidFill>
-                  <a:schemeClr val="accent1"/>
-                </a:solidFill>
-              </a:rPr>
-              <a:t>設計原則　</a:t>
-            </a:r>
-            <a:pPr indent="0" marL="0">
-              <a:buNone/>
-            </a:pPr>
-            <a:r>
-              <a:rPr lang="en-US" sz="1300" dirty="0">
+              <a:rPr lang="en-US" sz="2400" b="1" dirty="0">
                 <a:solidFill>
                   <a:schemeClr val="accent1"/>
                 </a:solidFill>
@@ -7828,22 +8418,22 @@
                 <a:ea typeface="Consolas" pitchFamily="34" charset="-122"/>
                 <a:cs typeface="Consolas" pitchFamily="34" charset="-120"/>
               </a:rPr>
-              <a:t>[12]</a:t>
-            </a:r>
-            <a:endParaRPr lang="en-US" sz="1300" dirty="0"/>
-          </a:p>
-        </p:txBody>
-      </p:sp>
-      <p:sp>
-        <p:nvSpPr>
-          <p:cNvPr id="15" name="text-224"/>
+              <a:t>3</a:t>
+            </a:r>
+            <a:endParaRPr lang="en-US" sz="2400" dirty="0"/>
+          </a:p>
+        </p:txBody>
+      </p:sp>
+      <p:sp>
+        <p:nvSpPr>
+          <p:cNvPr id="17" name="text-248"/>
           <p:cNvSpPr txBox="1"/>
           <p:nvPr/>
         </p:nvSpPr>
         <p:spPr>
           <a:xfrm>
-            <a:off x="8321040" y="2194560"/>
-            <a:ext cx="3017520" cy="457200"/>
+            <a:off x="5312664" y="2350008"/>
+            <a:ext cx="1600200" cy="457200"/>
           </a:xfrm>
           <a:prstGeom prst="rect">
             <a:avLst/>
@@ -7859,27 +8449,27 @@
               <a:buNone/>
             </a:pPr>
             <a:r>
-              <a:rPr lang="en-US" sz="2000" b="1" dirty="0">
+              <a:rPr lang="en-US" sz="1700" b="1" dirty="0">
                 <a:solidFill>
                   <a:schemeClr val="tx1"/>
                 </a:solidFill>
               </a:rPr>
-              <a:t>讓學生自己判斷</a:t>
-            </a:r>
-            <a:endParaRPr lang="en-US" sz="2000" dirty="0"/>
-          </a:p>
-        </p:txBody>
-      </p:sp>
-      <p:sp>
-        <p:nvSpPr>
-          <p:cNvPr id="16" name="text-225"/>
+              <a:t>看哪裡錯</a:t>
+            </a:r>
+            <a:endParaRPr lang="en-US" sz="1700" dirty="0"/>
+          </a:p>
+        </p:txBody>
+      </p:sp>
+      <p:sp>
+        <p:nvSpPr>
+          <p:cNvPr id="18" name="text-249"/>
           <p:cNvSpPr txBox="1"/>
           <p:nvPr/>
         </p:nvSpPr>
         <p:spPr>
           <a:xfrm>
-            <a:off x="8321040" y="2788920"/>
-            <a:ext cx="3017520" cy="1097280"/>
+            <a:off x="5312664" y="2834640"/>
+            <a:ext cx="1600200" cy="1005840"/>
           </a:xfrm>
           <a:prstGeom prst="rect">
             <a:avLst/>
@@ -7895,140 +8485,55 @@
               <a:buNone/>
             </a:pPr>
             <a:r>
-              <a:rPr lang="en-US" sz="1500" b="1" dirty="0">
-                <a:solidFill>
-                  <a:schemeClr val="accent4"/>
-                </a:solidFill>
-              </a:rPr>
-              <a:t>Demo 時看：</a:t>
-            </a:r>
-            <a:endParaRPr lang="en-US" sz="1500" dirty="0"/>
-          </a:p>
-          <a:p>
-            <a:pPr indent="0" marL="0">
-              <a:buNone/>
-            </a:pPr>
-            <a:r>
-              <a:rPr lang="en-US" sz="1500" dirty="0">
+              <a:rPr lang="en-US" sz="1400" dirty="0">
                 <a:solidFill>
                   <a:schemeClr val="tx2"/>
                 </a:solidFill>
               </a:rPr>
-              <a:t>輸入、預期、實際結果都攤開</a:t>
-            </a:r>
-            <a:endParaRPr lang="en-US" sz="1500" dirty="0"/>
-          </a:p>
-        </p:txBody>
-      </p:sp>
-      <p:sp>
-        <p:nvSpPr>
-          <p:cNvPr id="17" name="text-226"/>
-          <p:cNvSpPr txBox="1"/>
-          <p:nvPr/>
-        </p:nvSpPr>
-        <p:spPr>
-          <a:xfrm>
-            <a:off x="548640" y="4297680"/>
-            <a:ext cx="1828800" cy="365760"/>
-          </a:xfrm>
-          <a:prstGeom prst="rect">
-            <a:avLst/>
-          </a:prstGeom>
-          <a:noFill/>
-          <a:ln/>
-        </p:spPr>
-        <p:txBody>
-          <a:bodyPr wrap="square" lIns="0" tIns="0" rIns="0" bIns="0" rtlCol="0" anchor="t"/>
-          <a:lstStyle/>
-          <a:p>
-            <a:pPr indent="0" marL="0">
-              <a:buNone/>
-            </a:pPr>
-            <a:r>
-              <a:rPr lang="en-US" sz="1600" b="1" dirty="0">
-                <a:solidFill>
-                  <a:schemeClr val="accent1"/>
-                </a:solidFill>
-              </a:rPr>
-              <a:t>操作</a:t>
-            </a:r>
-            <a:endParaRPr lang="en-US" sz="1600" dirty="0"/>
-          </a:p>
-        </p:txBody>
-      </p:sp>
-      <p:sp>
-        <p:nvSpPr>
-          <p:cNvPr id="18" name="demo-227"/>
+              <a:t>哪道測資沒過</a:t>
+            </a:r>
+            <a:endParaRPr lang="en-US" sz="1400" dirty="0"/>
+          </a:p>
+          <a:p>
+            <a:pPr indent="0" marL="0">
+              <a:buNone/>
+            </a:pPr>
+            <a:r>
+              <a:rPr lang="en-US" sz="1400" dirty="0">
+                <a:solidFill>
+                  <a:schemeClr val="tx2"/>
+                </a:solidFill>
+              </a:rPr>
+              <a:t>輸入、預期、實際</a:t>
+            </a:r>
+            <a:endParaRPr lang="en-US" sz="1400" dirty="0"/>
+          </a:p>
+          <a:p>
+            <a:pPr indent="0" marL="0">
+              <a:buNone/>
+            </a:pPr>
+            <a:r>
+              <a:rPr lang="en-US" sz="1400" dirty="0">
+                <a:solidFill>
+                  <a:schemeClr val="tx2"/>
+                </a:solidFill>
+              </a:rPr>
+              <a:t>都攤開</a:t>
+            </a:r>
+            <a:endParaRPr lang="en-US" sz="1400" dirty="0"/>
+          </a:p>
+        </p:txBody>
+      </p:sp>
+      <p:sp>
+        <p:nvSpPr>
+          <p:cNvPr id="19" name="arrow-250"/>
           <p:cNvSpPr/>
           <p:nvPr/>
         </p:nvSpPr>
         <p:spPr>
           <a:xfrm>
-            <a:off x="548640" y="4709160"/>
-            <a:ext cx="3291840" cy="685800"/>
-          </a:xfrm>
-          <a:prstGeom prst="roundRect">
-            <a:avLst>
-              <a:gd name="adj" fmla="val 10667"/>
-            </a:avLst>
-          </a:prstGeom>
-          <a:solidFill>
-            <a:schemeClr val="bg2"/>
-          </a:solidFill>
-          <a:ln w="15875">
-            <a:solidFill>
-              <a:schemeClr val="accent1"/>
-            </a:solidFill>
-            <a:prstDash val="solid"/>
-          </a:ln>
-        </p:spPr>
-      </p:sp>
-      <p:sp>
-        <p:nvSpPr>
-          <p:cNvPr id="19" name="text-228"/>
-          <p:cNvSpPr txBox="1"/>
-          <p:nvPr/>
-        </p:nvSpPr>
-        <p:spPr>
-          <a:xfrm>
-            <a:off x="731520" y="4709160"/>
-            <a:ext cx="3017520" cy="685800"/>
-          </a:xfrm>
-          <a:prstGeom prst="rect">
-            <a:avLst/>
-          </a:prstGeom>
-          <a:noFill/>
-          <a:ln/>
-        </p:spPr>
-        <p:txBody>
-          <a:bodyPr wrap="square" lIns="0" tIns="0" rIns="0" bIns="0" rtlCol="0" anchor="ctr"/>
-          <a:lstStyle/>
-          <a:p>
-            <a:pPr indent="0" marL="0">
-              <a:buNone/>
-            </a:pPr>
-            <a:r>
-              <a:rPr lang="en-US" sz="1500" dirty="0">
-                <a:solidFill>
-                  <a:schemeClr val="tx1"/>
-                </a:solidFill>
-              </a:rPr>
-              <a:t>1　打開題目頁、展開虛擬碼</a:t>
-            </a:r>
-            <a:endParaRPr lang="en-US" sz="1500" dirty="0"/>
-          </a:p>
-        </p:txBody>
-      </p:sp>
-      <p:sp>
-        <p:nvSpPr>
-          <p:cNvPr id="20" name="arrow-229"/>
-          <p:cNvSpPr/>
-          <p:nvPr/>
-        </p:nvSpPr>
-        <p:spPr>
-          <a:xfrm>
-            <a:off x="3867912" y="5052060"/>
-            <a:ext cx="402336" cy="0"/>
+            <a:off x="7114032" y="2807208"/>
+            <a:ext cx="219456" cy="0"/>
           </a:xfrm>
           <a:prstGeom prst="line">
             <a:avLst/>
@@ -8045,26 +8550,26 @@
       </p:sp>
       <p:sp>
         <p:nvSpPr>
-          <p:cNvPr id="21" name="demo-230"/>
+          <p:cNvPr id="20" name="card-251"/>
           <p:cNvSpPr/>
           <p:nvPr/>
         </p:nvSpPr>
         <p:spPr>
           <a:xfrm>
-            <a:off x="4297680" y="4709160"/>
-            <a:ext cx="3291840" cy="685800"/>
+            <a:off x="7351776" y="1691640"/>
+            <a:ext cx="2011680" cy="2240280"/>
           </a:xfrm>
           <a:prstGeom prst="roundRect">
             <a:avLst>
-              <a:gd name="adj" fmla="val 10667"/>
+              <a:gd name="adj" fmla="val 3636"/>
             </a:avLst>
           </a:prstGeom>
           <a:solidFill>
             <a:schemeClr val="bg2"/>
           </a:solidFill>
-          <a:ln w="15875">
+          <a:ln w="9525">
             <a:solidFill>
-              <a:schemeClr val="accent1"/>
+              <a:schemeClr val="accent6"/>
             </a:solidFill>
             <a:prstDash val="solid"/>
           </a:ln>
@@ -8072,50 +8577,139 @@
       </p:sp>
       <p:sp>
         <p:nvSpPr>
-          <p:cNvPr id="22" name="text-231"/>
+          <p:cNvPr id="21" name="text-252"/>
           <p:cNvSpPr txBox="1"/>
           <p:nvPr/>
         </p:nvSpPr>
         <p:spPr>
           <a:xfrm>
-            <a:off x="4480560" y="4709160"/>
-            <a:ext cx="3017520" cy="685800"/>
-          </a:xfrm>
-          <a:prstGeom prst="rect">
-            <a:avLst/>
-          </a:prstGeom>
-          <a:noFill/>
-          <a:ln/>
-        </p:spPr>
-        <p:txBody>
-          <a:bodyPr wrap="square" lIns="0" tIns="0" rIns="0" bIns="0" rtlCol="0" anchor="ctr"/>
-          <a:lstStyle/>
-          <a:p>
-            <a:pPr indent="0" marL="0">
-              <a:buNone/>
-            </a:pPr>
-            <a:r>
-              <a:rPr lang="en-US" sz="1500" dirty="0">
+            <a:off x="7580376" y="1828800"/>
+            <a:ext cx="548640" cy="502920"/>
+          </a:xfrm>
+          <a:prstGeom prst="rect">
+            <a:avLst/>
+          </a:prstGeom>
+          <a:noFill/>
+          <a:ln/>
+        </p:spPr>
+        <p:txBody>
+          <a:bodyPr wrap="square" lIns="0" tIns="0" rIns="0" bIns="0" rtlCol="0" anchor="t"/>
+          <a:lstStyle/>
+          <a:p>
+            <a:pPr indent="0" marL="0">
+              <a:buNone/>
+            </a:pPr>
+            <a:r>
+              <a:rPr lang="en-US" sz="2400" b="1" dirty="0">
+                <a:solidFill>
+                  <a:schemeClr val="accent1"/>
+                </a:solidFill>
+                <a:latin typeface="Consolas" pitchFamily="34" charset="0"/>
+                <a:ea typeface="Consolas" pitchFamily="34" charset="-122"/>
+                <a:cs typeface="Consolas" pitchFamily="34" charset="-120"/>
+              </a:rPr>
+              <a:t>4</a:t>
+            </a:r>
+            <a:endParaRPr lang="en-US" sz="2400" dirty="0"/>
+          </a:p>
+        </p:txBody>
+      </p:sp>
+      <p:sp>
+        <p:nvSpPr>
+          <p:cNvPr id="22" name="text-253"/>
+          <p:cNvSpPr txBox="1"/>
+          <p:nvPr/>
+        </p:nvSpPr>
+        <p:spPr>
+          <a:xfrm>
+            <a:off x="7580376" y="2350008"/>
+            <a:ext cx="1600200" cy="457200"/>
+          </a:xfrm>
+          <a:prstGeom prst="rect">
+            <a:avLst/>
+          </a:prstGeom>
+          <a:noFill/>
+          <a:ln/>
+        </p:spPr>
+        <p:txBody>
+          <a:bodyPr wrap="square" lIns="0" tIns="0" rIns="0" bIns="0" rtlCol="0" anchor="t"/>
+          <a:lstStyle/>
+          <a:p>
+            <a:pPr indent="0" marL="0">
+              <a:buNone/>
+            </a:pPr>
+            <a:r>
+              <a:rPr lang="en-US" sz="1700" b="1" dirty="0">
                 <a:solidFill>
                   <a:schemeClr val="tx1"/>
                 </a:solidFill>
               </a:rPr>
-              <a:t>2　交一份常見錯解</a:t>
-            </a:r>
-            <a:endParaRPr lang="en-US" sz="1500" dirty="0"/>
-          </a:p>
-        </p:txBody>
-      </p:sp>
-      <p:sp>
-        <p:nvSpPr>
-          <p:cNvPr id="23" name="arrow-232"/>
+              <a:t>讀提示</a:t>
+            </a:r>
+            <a:endParaRPr lang="en-US" sz="1700" dirty="0"/>
+          </a:p>
+        </p:txBody>
+      </p:sp>
+      <p:sp>
+        <p:nvSpPr>
+          <p:cNvPr id="23" name="text-254"/>
+          <p:cNvSpPr txBox="1"/>
+          <p:nvPr/>
+        </p:nvSpPr>
+        <p:spPr>
+          <a:xfrm>
+            <a:off x="7580376" y="2834640"/>
+            <a:ext cx="1600200" cy="1005840"/>
+          </a:xfrm>
+          <a:prstGeom prst="rect">
+            <a:avLst/>
+          </a:prstGeom>
+          <a:noFill/>
+          <a:ln/>
+        </p:spPr>
+        <p:txBody>
+          <a:bodyPr wrap="square" lIns="0" tIns="0" rIns="0" bIns="0" rtlCol="0" anchor="t"/>
+          <a:lstStyle/>
+          <a:p>
+            <a:pPr indent="0" marL="0">
+              <a:buNone/>
+            </a:pPr>
+            <a:r>
+              <a:rPr lang="en-US" sz="1400" dirty="0">
+                <a:solidFill>
+                  <a:schemeClr val="tx2"/>
+                </a:solidFill>
+              </a:rPr>
+              <a:t>AI 用問句提醒</a:t>
+            </a:r>
+            <a:endParaRPr lang="en-US" sz="1400" dirty="0"/>
+          </a:p>
+          <a:p>
+            <a:pPr indent="0" marL="0">
+              <a:buNone/>
+            </a:pPr>
+            <a:r>
+              <a:rPr lang="en-US" sz="1400" dirty="0">
+                <a:solidFill>
+                  <a:schemeClr val="tx2"/>
+                </a:solidFill>
+              </a:rPr>
+              <a:t>回頭對照虛擬碼步驟</a:t>
+            </a:r>
+            <a:endParaRPr lang="en-US" sz="1400" dirty="0"/>
+          </a:p>
+        </p:txBody>
+      </p:sp>
+      <p:sp>
+        <p:nvSpPr>
+          <p:cNvPr id="24" name="arrow-255"/>
           <p:cNvSpPr/>
           <p:nvPr/>
         </p:nvSpPr>
         <p:spPr>
           <a:xfrm>
-            <a:off x="7616952" y="5052060"/>
-            <a:ext cx="402336" cy="0"/>
+            <a:off x="9381744" y="2807208"/>
+            <a:ext cx="219456" cy="0"/>
           </a:xfrm>
           <a:prstGeom prst="line">
             <a:avLst/>
@@ -8132,26 +8726,26 @@
       </p:sp>
       <p:sp>
         <p:nvSpPr>
-          <p:cNvPr id="24" name="demo-233"/>
+          <p:cNvPr id="25" name="card-256"/>
           <p:cNvSpPr/>
           <p:nvPr/>
         </p:nvSpPr>
         <p:spPr>
           <a:xfrm>
-            <a:off x="8046720" y="4709160"/>
-            <a:ext cx="3291840" cy="685800"/>
+            <a:off x="9619488" y="1691640"/>
+            <a:ext cx="2011680" cy="2240280"/>
           </a:xfrm>
           <a:prstGeom prst="roundRect">
             <a:avLst>
-              <a:gd name="adj" fmla="val 10667"/>
+              <a:gd name="adj" fmla="val 3636"/>
             </a:avLst>
           </a:prstGeom>
           <a:solidFill>
             <a:schemeClr val="bg2"/>
           </a:solidFill>
-          <a:ln w="15875">
+          <a:ln w="9525">
             <a:solidFill>
-              <a:schemeClr val="accent1"/>
+              <a:schemeClr val="accent6"/>
             </a:solidFill>
             <a:prstDash val="solid"/>
           </a:ln>
@@ -8159,35 +8753,173 @@
       </p:sp>
       <p:sp>
         <p:nvSpPr>
-          <p:cNvPr id="25" name="text-234"/>
+          <p:cNvPr id="26" name="text-257"/>
           <p:cNvSpPr txBox="1"/>
           <p:nvPr/>
         </p:nvSpPr>
         <p:spPr>
           <a:xfrm>
-            <a:off x="8229600" y="4709160"/>
-            <a:ext cx="3017520" cy="685800"/>
-          </a:xfrm>
-          <a:prstGeom prst="rect">
-            <a:avLst/>
-          </a:prstGeom>
-          <a:noFill/>
-          <a:ln/>
-        </p:spPr>
-        <p:txBody>
-          <a:bodyPr wrap="square" lIns="0" tIns="0" rIns="0" bIns="0" rtlCol="0" anchor="ctr"/>
-          <a:lstStyle/>
-          <a:p>
-            <a:pPr indent="0" marL="0">
-              <a:buNone/>
-            </a:pPr>
-            <a:r>
-              <a:rPr lang="en-US" sz="1500" dirty="0">
+            <a:off x="9848088" y="1828800"/>
+            <a:ext cx="548640" cy="502920"/>
+          </a:xfrm>
+          <a:prstGeom prst="rect">
+            <a:avLst/>
+          </a:prstGeom>
+          <a:noFill/>
+          <a:ln/>
+        </p:spPr>
+        <p:txBody>
+          <a:bodyPr wrap="square" lIns="0" tIns="0" rIns="0" bIns="0" rtlCol="0" anchor="t"/>
+          <a:lstStyle/>
+          <a:p>
+            <a:pPr indent="0" marL="0">
+              <a:buNone/>
+            </a:pPr>
+            <a:r>
+              <a:rPr lang="en-US" sz="2400" b="1" dirty="0">
+                <a:solidFill>
+                  <a:schemeClr val="accent1"/>
+                </a:solidFill>
+                <a:latin typeface="Consolas" pitchFamily="34" charset="0"/>
+                <a:ea typeface="Consolas" pitchFamily="34" charset="-122"/>
+                <a:cs typeface="Consolas" pitchFamily="34" charset="-120"/>
+              </a:rPr>
+              <a:t>5</a:t>
+            </a:r>
+            <a:endParaRPr lang="en-US" sz="2400" dirty="0"/>
+          </a:p>
+        </p:txBody>
+      </p:sp>
+      <p:sp>
+        <p:nvSpPr>
+          <p:cNvPr id="27" name="text-258"/>
+          <p:cNvSpPr txBox="1"/>
+          <p:nvPr/>
+        </p:nvSpPr>
+        <p:spPr>
+          <a:xfrm>
+            <a:off x="9848088" y="2350008"/>
+            <a:ext cx="1600200" cy="457200"/>
+          </a:xfrm>
+          <a:prstGeom prst="rect">
+            <a:avLst/>
+          </a:prstGeom>
+          <a:noFill/>
+          <a:ln/>
+        </p:spPr>
+        <p:txBody>
+          <a:bodyPr wrap="square" lIns="0" tIns="0" rIns="0" bIns="0" rtlCol="0" anchor="t"/>
+          <a:lstStyle/>
+          <a:p>
+            <a:pPr indent="0" marL="0">
+              <a:buNone/>
+            </a:pPr>
+            <a:r>
+              <a:rPr lang="en-US" sz="1700" b="1" dirty="0">
                 <a:solidFill>
                   <a:schemeClr val="tx1"/>
                 </a:solidFill>
               </a:rPr>
-              <a:t>3　看系統怎麼判、AI 怎麼提示</a:t>
+              <a:t>再試一次</a:t>
+            </a:r>
+            <a:endParaRPr lang="en-US" sz="1700" dirty="0"/>
+          </a:p>
+        </p:txBody>
+      </p:sp>
+      <p:sp>
+        <p:nvSpPr>
+          <p:cNvPr id="28" name="text-259"/>
+          <p:cNvSpPr txBox="1"/>
+          <p:nvPr/>
+        </p:nvSpPr>
+        <p:spPr>
+          <a:xfrm>
+            <a:off x="9848088" y="2834640"/>
+            <a:ext cx="1600200" cy="1005840"/>
+          </a:xfrm>
+          <a:prstGeom prst="rect">
+            <a:avLst/>
+          </a:prstGeom>
+          <a:noFill/>
+          <a:ln/>
+        </p:spPr>
+        <p:txBody>
+          <a:bodyPr wrap="square" lIns="0" tIns="0" rIns="0" bIns="0" rtlCol="0" anchor="t"/>
+          <a:lstStyle/>
+          <a:p>
+            <a:pPr indent="0" marL="0">
+              <a:buNone/>
+            </a:pPr>
+            <a:r>
+              <a:rPr lang="en-US" sz="1400" dirty="0">
+                <a:solidFill>
+                  <a:schemeClr val="tx2"/>
+                </a:solidFill>
+              </a:rPr>
+              <a:t>修改後重新送出</a:t>
+            </a:r>
+            <a:endParaRPr lang="en-US" sz="1400" dirty="0"/>
+          </a:p>
+        </p:txBody>
+      </p:sp>
+      <p:sp>
+        <p:nvSpPr>
+          <p:cNvPr id="29" name="card-260"/>
+          <p:cNvSpPr/>
+          <p:nvPr/>
+        </p:nvSpPr>
+        <p:spPr>
+          <a:xfrm>
+            <a:off x="548640" y="4206240"/>
+            <a:ext cx="11094415" cy="1188720"/>
+          </a:xfrm>
+          <a:prstGeom prst="roundRect">
+            <a:avLst>
+              <a:gd name="adj" fmla="val 6154"/>
+            </a:avLst>
+          </a:prstGeom>
+          <a:solidFill>
+            <a:schemeClr val="bg2"/>
+          </a:solidFill>
+          <a:ln w="9525">
+            <a:solidFill>
+              <a:schemeClr val="accent6"/>
+            </a:solidFill>
+            <a:prstDash val="solid"/>
+          </a:ln>
+        </p:spPr>
+      </p:sp>
+      <p:sp>
+        <p:nvSpPr>
+          <p:cNvPr id="30" name="text-261"/>
+          <p:cNvSpPr txBox="1"/>
+          <p:nvPr/>
+        </p:nvSpPr>
+        <p:spPr>
+          <a:xfrm>
+            <a:off x="868680" y="4315968"/>
+            <a:ext cx="4572000" cy="365760"/>
+          </a:xfrm>
+          <a:prstGeom prst="rect">
+            <a:avLst/>
+          </a:prstGeom>
+          <a:noFill/>
+          <a:ln/>
+        </p:spPr>
+        <p:txBody>
+          <a:bodyPr wrap="square" lIns="0" tIns="0" rIns="0" bIns="0" rtlCol="0" anchor="t"/>
+          <a:lstStyle/>
+          <a:p>
+            <a:pPr indent="0" marL="0">
+              <a:buNone/>
+            </a:pPr>
+            <a:r>
+              <a:rPr lang="en-US" sz="1500" b="1" dirty="0">
+                <a:solidFill>
+                  <a:schemeClr val="accent4"/>
+                </a:solidFill>
+              </a:rPr>
+              <a:t>Demo 時請留意</a:t>
             </a:r>
             <a:endParaRPr lang="en-US" sz="1500" dirty="0"/>
           </a:p>
@@ -8195,13 +8927,49 @@
       </p:sp>
       <p:sp>
         <p:nvSpPr>
-          <p:cNvPr id="26" name="text-235"/>
+          <p:cNvPr id="31" name="text-262"/>
           <p:cNvSpPr txBox="1"/>
           <p:nvPr/>
         </p:nvSpPr>
         <p:spPr>
           <a:xfrm>
-            <a:off x="548640" y="5669280"/>
+            <a:off x="868680" y="4709160"/>
+            <a:ext cx="10454335" cy="548640"/>
+          </a:xfrm>
+          <a:prstGeom prst="rect">
+            <a:avLst/>
+          </a:prstGeom>
+          <a:noFill/>
+          <a:ln/>
+        </p:spPr>
+        <p:txBody>
+          <a:bodyPr wrap="square" lIns="0" tIns="0" rIns="0" bIns="0" rtlCol="0" anchor="t"/>
+          <a:lstStyle/>
+          <a:p>
+            <a:pPr indent="0" marL="0">
+              <a:buNone/>
+            </a:pPr>
+            <a:r>
+              <a:rPr lang="en-US" sz="1700" dirty="0">
+                <a:solidFill>
+                  <a:schemeClr val="tx1"/>
+                </a:solidFill>
+              </a:rPr>
+              <a:t>提示裡沒有可以直接貼上的程式；提示會指到具體的測資與虛擬碼步驟。</a:t>
+            </a:r>
+            <a:endParaRPr lang="en-US" sz="1700" dirty="0"/>
+          </a:p>
+        </p:txBody>
+      </p:sp>
+      <p:sp>
+        <p:nvSpPr>
+          <p:cNvPr id="32" name="text-263"/>
+          <p:cNvSpPr txBox="1"/>
+          <p:nvPr/>
+        </p:nvSpPr>
+        <p:spPr>
+          <a:xfrm>
+            <a:off x="548640" y="5532120"/>
             <a:ext cx="11094415" cy="365760"/>
           </a:xfrm>
           <a:prstGeom prst="rect">
@@ -8383,7 +9151,7 @@
       </p:sp>
       <p:sp>
         <p:nvSpPr>
-          <p:cNvPr id="5" name="card-236"/>
+          <p:cNvPr id="5" name="card-264"/>
           <p:cNvSpPr/>
           <p:nvPr/>
         </p:nvSpPr>
@@ -8410,7 +9178,7 @@
       </p:sp>
       <p:sp>
         <p:nvSpPr>
-          <p:cNvPr id="6" name="text-237"/>
+          <p:cNvPr id="6" name="text-265"/>
           <p:cNvSpPr txBox="1"/>
           <p:nvPr/>
         </p:nvSpPr>
@@ -8446,7 +9214,7 @@
       </p:sp>
       <p:sp>
         <p:nvSpPr>
-          <p:cNvPr id="7" name="text-238"/>
+          <p:cNvPr id="7" name="text-266"/>
           <p:cNvSpPr txBox="1"/>
           <p:nvPr/>
         </p:nvSpPr>
@@ -8482,7 +9250,7 @@
       </p:sp>
       <p:sp>
         <p:nvSpPr>
-          <p:cNvPr id="8" name="card-239"/>
+          <p:cNvPr id="8" name="card-267"/>
           <p:cNvSpPr/>
           <p:nvPr/>
         </p:nvSpPr>
@@ -8509,7 +9277,7 @@
       </p:sp>
       <p:sp>
         <p:nvSpPr>
-          <p:cNvPr id="9" name="text-240"/>
+          <p:cNvPr id="9" name="text-268"/>
           <p:cNvSpPr txBox="1"/>
           <p:nvPr/>
         </p:nvSpPr>
@@ -8545,7 +9313,7 @@
       </p:sp>
       <p:sp>
         <p:nvSpPr>
-          <p:cNvPr id="10" name="text-241"/>
+          <p:cNvPr id="10" name="text-269"/>
           <p:cNvSpPr txBox="1"/>
           <p:nvPr/>
         </p:nvSpPr>
@@ -8581,7 +9349,7 @@
       </p:sp>
       <p:sp>
         <p:nvSpPr>
-          <p:cNvPr id="11" name="card-242"/>
+          <p:cNvPr id="11" name="card-270"/>
           <p:cNvSpPr/>
           <p:nvPr/>
         </p:nvSpPr>
@@ -8608,7 +9376,7 @@
       </p:sp>
       <p:sp>
         <p:nvSpPr>
-          <p:cNvPr id="12" name="text-243"/>
+          <p:cNvPr id="12" name="text-271"/>
           <p:cNvSpPr txBox="1"/>
           <p:nvPr/>
         </p:nvSpPr>
@@ -8644,7 +9412,7 @@
       </p:sp>
       <p:sp>
         <p:nvSpPr>
-          <p:cNvPr id="13" name="text-244"/>
+          <p:cNvPr id="13" name="text-272"/>
           <p:cNvSpPr txBox="1"/>
           <p:nvPr/>
         </p:nvSpPr>
@@ -8680,7 +9448,7 @@
       </p:sp>
       <p:sp>
         <p:nvSpPr>
-          <p:cNvPr id="14" name="card-245"/>
+          <p:cNvPr id="14" name="card-273"/>
           <p:cNvSpPr/>
           <p:nvPr/>
         </p:nvSpPr>
@@ -8707,7 +9475,7 @@
       </p:sp>
       <p:sp>
         <p:nvSpPr>
-          <p:cNvPr id="15" name="text-246"/>
+          <p:cNvPr id="15" name="text-274"/>
           <p:cNvSpPr txBox="1"/>
           <p:nvPr/>
         </p:nvSpPr>
@@ -8743,7 +9511,7 @@
       </p:sp>
       <p:sp>
         <p:nvSpPr>
-          <p:cNvPr id="16" name="text-247"/>
+          <p:cNvPr id="16" name="text-275"/>
           <p:cNvSpPr txBox="1"/>
           <p:nvPr/>
         </p:nvSpPr>
@@ -8779,7 +9547,7 @@
       </p:sp>
       <p:sp>
         <p:nvSpPr>
-          <p:cNvPr id="17" name="card-248"/>
+          <p:cNvPr id="17" name="card-276"/>
           <p:cNvSpPr/>
           <p:nvPr/>
         </p:nvSpPr>
@@ -8806,7 +9574,7 @@
       </p:sp>
       <p:sp>
         <p:nvSpPr>
-          <p:cNvPr id="18" name="text-249"/>
+          <p:cNvPr id="18" name="text-277"/>
           <p:cNvSpPr txBox="1"/>
           <p:nvPr/>
         </p:nvSpPr>
@@ -8842,7 +9610,7 @@
       </p:sp>
       <p:sp>
         <p:nvSpPr>
-          <p:cNvPr id="19" name="text-250"/>
+          <p:cNvPr id="19" name="text-278"/>
           <p:cNvSpPr txBox="1"/>
           <p:nvPr/>
         </p:nvSpPr>
@@ -8878,7 +9646,7 @@
       </p:sp>
       <p:sp>
         <p:nvSpPr>
-          <p:cNvPr id="20" name="card-251"/>
+          <p:cNvPr id="20" name="card-279"/>
           <p:cNvSpPr/>
           <p:nvPr/>
         </p:nvSpPr>
@@ -8905,7 +9673,7 @@
       </p:sp>
       <p:sp>
         <p:nvSpPr>
-          <p:cNvPr id="21" name="text-252"/>
+          <p:cNvPr id="21" name="text-280"/>
           <p:cNvSpPr txBox="1"/>
           <p:nvPr/>
         </p:nvSpPr>
@@ -8941,7 +9709,7 @@
       </p:sp>
       <p:sp>
         <p:nvSpPr>
-          <p:cNvPr id="22" name="text-253"/>
+          <p:cNvPr id="22" name="text-281"/>
           <p:cNvSpPr txBox="1"/>
           <p:nvPr/>
         </p:nvSpPr>
@@ -9143,7 +9911,7 @@
       </p:sp>
       <p:sp>
         <p:nvSpPr>
-          <p:cNvPr id="5" name="card-254"/>
+          <p:cNvPr id="5" name="card-282"/>
           <p:cNvSpPr/>
           <p:nvPr/>
         </p:nvSpPr>
@@ -9170,7 +9938,7 @@
       </p:sp>
       <p:sp>
         <p:nvSpPr>
-          <p:cNvPr id="6" name="text-255"/>
+          <p:cNvPr id="6" name="text-283"/>
           <p:cNvSpPr txBox="1"/>
           <p:nvPr/>
         </p:nvSpPr>
@@ -9206,7 +9974,7 @@
       </p:sp>
       <p:sp>
         <p:nvSpPr>
-          <p:cNvPr id="7" name="text-256"/>
+          <p:cNvPr id="7" name="text-284"/>
           <p:cNvSpPr txBox="1"/>
           <p:nvPr/>
         </p:nvSpPr>
@@ -9242,7 +10010,7 @@
       </p:sp>
       <p:sp>
         <p:nvSpPr>
-          <p:cNvPr id="8" name="card-257"/>
+          <p:cNvPr id="8" name="card-285"/>
           <p:cNvSpPr/>
           <p:nvPr/>
         </p:nvSpPr>
@@ -9269,7 +10037,7 @@
       </p:sp>
       <p:sp>
         <p:nvSpPr>
-          <p:cNvPr id="9" name="text-258"/>
+          <p:cNvPr id="9" name="text-286"/>
           <p:cNvSpPr txBox="1"/>
           <p:nvPr/>
         </p:nvSpPr>
@@ -9305,7 +10073,7 @@
       </p:sp>
       <p:sp>
         <p:nvSpPr>
-          <p:cNvPr id="10" name="text-259"/>
+          <p:cNvPr id="10" name="text-287"/>
           <p:cNvSpPr txBox="1"/>
           <p:nvPr/>
         </p:nvSpPr>
@@ -9355,7 +10123,7 @@
       </p:sp>
       <p:sp>
         <p:nvSpPr>
-          <p:cNvPr id="11" name="text-260"/>
+          <p:cNvPr id="11" name="text-288"/>
           <p:cNvSpPr txBox="1"/>
           <p:nvPr/>
         </p:nvSpPr>
@@ -9405,7 +10173,7 @@
       </p:sp>
       <p:sp>
         <p:nvSpPr>
-          <p:cNvPr id="12" name="text-261"/>
+          <p:cNvPr id="12" name="text-289"/>
           <p:cNvSpPr txBox="1"/>
           <p:nvPr/>
         </p:nvSpPr>
@@ -9593,7 +10361,7 @@
       </p:sp>
       <p:sp>
         <p:nvSpPr>
-          <p:cNvPr id="5" name="text-262"/>
+          <p:cNvPr id="5" name="text-290"/>
           <p:cNvSpPr txBox="1"/>
           <p:nvPr/>
         </p:nvSpPr>
@@ -9632,7 +10400,7 @@
       </p:sp>
       <p:sp>
         <p:nvSpPr>
-          <p:cNvPr id="6" name="text-263"/>
+          <p:cNvPr id="6" name="text-291"/>
           <p:cNvSpPr txBox="1"/>
           <p:nvPr/>
         </p:nvSpPr>
@@ -9668,7 +10436,7 @@
       </p:sp>
       <p:sp>
         <p:nvSpPr>
-          <p:cNvPr id="7" name="text-264"/>
+          <p:cNvPr id="7" name="text-292"/>
           <p:cNvSpPr txBox="1"/>
           <p:nvPr/>
         </p:nvSpPr>
@@ -9699,7 +10467,7 @@
                 <a:ea typeface="Consolas" pitchFamily="34" charset="-122"/>
                 <a:cs typeface="Consolas" pitchFamily="34" charset="-120"/>
               </a:rPr>
-              <a:t>[9]</a:t>
+              <a:t>[11]</a:t>
             </a:r>
             <a:endParaRPr lang="en-US" sz="1500" dirty="0"/>
           </a:p>
@@ -9707,7 +10475,7 @@
       </p:sp>
       <p:sp>
         <p:nvSpPr>
-          <p:cNvPr id="8" name="text-265"/>
+          <p:cNvPr id="8" name="text-293"/>
           <p:cNvSpPr txBox="1"/>
           <p:nvPr/>
         </p:nvSpPr>
@@ -9735,7 +10503,7 @@
                   <a:schemeClr val="tx1"/>
                 </a:solidFill>
               </a:rPr>
-              <a:t>X. Wang et al., "Human-LLM Collaborative Annotation Through Effective Verification of LLM Labels," in Proc. CHI '24, 2024.</a:t>
+              <a:t>R. Xiao, X. Hou, and J. Stamper, "Exploring How Multiple Levels of GPT-Generated Programming Hints Support or Disappoint Novices," arXiv:2404.02213, 2024.</a:t>
             </a:r>
             <a:endParaRPr lang="en-US" sz="1400" dirty="0"/>
           </a:p>
@@ -9743,7 +10511,7 @@
       </p:sp>
       <p:sp>
         <p:nvSpPr>
-          <p:cNvPr id="9" name="text-266"/>
+          <p:cNvPr id="9" name="text-294"/>
           <p:cNvSpPr txBox="1"/>
           <p:nvPr/>
         </p:nvSpPr>
@@ -9774,7 +10542,7 @@
                 <a:ea typeface="Consolas" pitchFamily="34" charset="-122"/>
                 <a:cs typeface="Consolas" pitchFamily="34" charset="-120"/>
               </a:rPr>
-              <a:t>[11]</a:t>
+              <a:t>[12]</a:t>
             </a:r>
             <a:endParaRPr lang="en-US" sz="1500" dirty="0"/>
           </a:p>
@@ -9782,7 +10550,7 @@
       </p:sp>
       <p:sp>
         <p:nvSpPr>
-          <p:cNvPr id="10" name="text-267"/>
+          <p:cNvPr id="10" name="text-295"/>
           <p:cNvSpPr txBox="1"/>
           <p:nvPr/>
         </p:nvSpPr>
@@ -9810,7 +10578,7 @@
                   <a:schemeClr val="tx1"/>
                 </a:solidFill>
               </a:rPr>
-              <a:t>R. Xiao, X. Hou, and J. Stamper, "Exploring How Multiple Levels of GPT-Generated Programming Hints Support or Disappoint Novices," arXiv:2404.02213, 2024.</a:t>
+              <a:t>M. Kazemitabaar et al., "CodeAid: Evaluating a Classroom Deployment of an LLM-based Programming Assistant that Balances Student and Educator Needs," arXiv:2401.11314, 2024.</a:t>
             </a:r>
             <a:endParaRPr lang="en-US" sz="1400" dirty="0"/>
           </a:p>
@@ -9818,7 +10586,7 @@
       </p:sp>
       <p:sp>
         <p:nvSpPr>
-          <p:cNvPr id="11" name="text-268"/>
+          <p:cNvPr id="11" name="text-296"/>
           <p:cNvSpPr txBox="1"/>
           <p:nvPr/>
         </p:nvSpPr>
@@ -9849,7 +10617,7 @@
                 <a:ea typeface="Consolas" pitchFamily="34" charset="-122"/>
                 <a:cs typeface="Consolas" pitchFamily="34" charset="-120"/>
               </a:rPr>
-              <a:t>[12]</a:t>
+              <a:t>[13]</a:t>
             </a:r>
             <a:endParaRPr lang="en-US" sz="1500" dirty="0"/>
           </a:p>
@@ -9857,88 +10625,13 @@
       </p:sp>
       <p:sp>
         <p:nvSpPr>
-          <p:cNvPr id="12" name="text-269"/>
+          <p:cNvPr id="12" name="text-297"/>
           <p:cNvSpPr txBox="1"/>
           <p:nvPr/>
         </p:nvSpPr>
         <p:spPr>
           <a:xfrm>
             <a:off x="1371600" y="4251960"/>
-            <a:ext cx="10271455" cy="777240"/>
-          </a:xfrm>
-          <a:prstGeom prst="rect">
-            <a:avLst/>
-          </a:prstGeom>
-          <a:noFill/>
-          <a:ln/>
-        </p:spPr>
-        <p:txBody>
-          <a:bodyPr wrap="square" lIns="0" tIns="0" rIns="0" bIns="0" rtlCol="0" anchor="t"/>
-          <a:lstStyle/>
-          <a:p>
-            <a:pPr indent="0" marL="0">
-              <a:buNone/>
-            </a:pPr>
-            <a:r>
-              <a:rPr lang="en-US" sz="1400" dirty="0">
-                <a:solidFill>
-                  <a:schemeClr val="tx1"/>
-                </a:solidFill>
-              </a:rPr>
-              <a:t>M. Kazemitabaar et al., "CodeAid: Evaluating a Classroom Deployment of an LLM-based Programming Assistant that Balances Student and Educator Needs," arXiv:2401.11314, 2024.</a:t>
-            </a:r>
-            <a:endParaRPr lang="en-US" sz="1400" dirty="0"/>
-          </a:p>
-        </p:txBody>
-      </p:sp>
-      <p:sp>
-        <p:nvSpPr>
-          <p:cNvPr id="13" name="text-270"/>
-          <p:cNvSpPr txBox="1"/>
-          <p:nvPr/>
-        </p:nvSpPr>
-        <p:spPr>
-          <a:xfrm>
-            <a:off x="548640" y="5120640"/>
-            <a:ext cx="731520" cy="731520"/>
-          </a:xfrm>
-          <a:prstGeom prst="rect">
-            <a:avLst/>
-          </a:prstGeom>
-          <a:noFill/>
-          <a:ln/>
-        </p:spPr>
-        <p:txBody>
-          <a:bodyPr wrap="square" lIns="0" tIns="0" rIns="0" bIns="0" rtlCol="0" anchor="t"/>
-          <a:lstStyle/>
-          <a:p>
-            <a:pPr indent="0" marL="0">
-              <a:buNone/>
-            </a:pPr>
-            <a:r>
-              <a:rPr lang="en-US" sz="1500" b="1" dirty="0">
-                <a:solidFill>
-                  <a:schemeClr val="accent1"/>
-                </a:solidFill>
-                <a:latin typeface="Consolas" pitchFamily="34" charset="0"/>
-                <a:ea typeface="Consolas" pitchFamily="34" charset="-122"/>
-                <a:cs typeface="Consolas" pitchFamily="34" charset="-120"/>
-              </a:rPr>
-              <a:t>[13]</a:t>
-            </a:r>
-            <a:endParaRPr lang="en-US" sz="1500" dirty="0"/>
-          </a:p>
-        </p:txBody>
-      </p:sp>
-      <p:sp>
-        <p:nvSpPr>
-          <p:cNvPr id="14" name="text-271"/>
-          <p:cNvSpPr txBox="1"/>
-          <p:nvPr/>
-        </p:nvSpPr>
-        <p:spPr>
-          <a:xfrm>
-            <a:off x="1371600" y="5120640"/>
             <a:ext cx="10271455" cy="777240"/>
           </a:xfrm>
           <a:prstGeom prst="rect">
@@ -10120,7 +10813,7 @@
       </p:sp>
       <p:graphicFrame>
         <p:nvGraphicFramePr>
-          <p:cNvPr id="20" name="table-272"/>
+          <p:cNvPr id="20" name="table-298"/>
           <p:cNvGraphicFramePr>
             <a:graphicFrameLocks noGrp="1"/>
           </p:cNvGraphicFramePr>
@@ -12306,7 +12999,7 @@
       </p:sp>
       <p:sp>
         <p:nvSpPr>
-          <p:cNvPr id="5" name="card-273"/>
+          <p:cNvPr id="5" name="card-299"/>
           <p:cNvSpPr/>
           <p:nvPr/>
         </p:nvSpPr>
@@ -12333,7 +13026,7 @@
       </p:sp>
       <p:sp>
         <p:nvSpPr>
-          <p:cNvPr id="6" name="text-274"/>
+          <p:cNvPr id="6" name="text-300"/>
           <p:cNvSpPr txBox="1"/>
           <p:nvPr/>
         </p:nvSpPr>
@@ -12372,7 +13065,7 @@
       </p:sp>
       <p:sp>
         <p:nvSpPr>
-          <p:cNvPr id="7" name="text-275"/>
+          <p:cNvPr id="7" name="text-301"/>
           <p:cNvSpPr txBox="1"/>
           <p:nvPr/>
         </p:nvSpPr>
@@ -12408,7 +13101,7 @@
       </p:sp>
       <p:sp>
         <p:nvSpPr>
-          <p:cNvPr id="8" name="text-276"/>
+          <p:cNvPr id="8" name="text-302"/>
           <p:cNvSpPr txBox="1"/>
           <p:nvPr/>
         </p:nvSpPr>
@@ -12444,7 +13137,7 @@
       </p:sp>
       <p:sp>
         <p:nvSpPr>
-          <p:cNvPr id="9" name="card-277"/>
+          <p:cNvPr id="9" name="card-303"/>
           <p:cNvSpPr/>
           <p:nvPr/>
         </p:nvSpPr>
@@ -12471,7 +13164,7 @@
       </p:sp>
       <p:sp>
         <p:nvSpPr>
-          <p:cNvPr id="10" name="text-278"/>
+          <p:cNvPr id="10" name="text-304"/>
           <p:cNvSpPr txBox="1"/>
           <p:nvPr/>
         </p:nvSpPr>
@@ -12510,7 +13203,7 @@
       </p:sp>
       <p:sp>
         <p:nvSpPr>
-          <p:cNvPr id="11" name="text-279"/>
+          <p:cNvPr id="11" name="text-305"/>
           <p:cNvSpPr txBox="1"/>
           <p:nvPr/>
         </p:nvSpPr>
@@ -12546,7 +13239,7 @@
       </p:sp>
       <p:sp>
         <p:nvSpPr>
-          <p:cNvPr id="12" name="text-280"/>
+          <p:cNvPr id="12" name="text-306"/>
           <p:cNvSpPr txBox="1"/>
           <p:nvPr/>
         </p:nvSpPr>
@@ -12582,7 +13275,7 @@
       </p:sp>
       <p:sp>
         <p:nvSpPr>
-          <p:cNvPr id="13" name="card-281"/>
+          <p:cNvPr id="13" name="card-307"/>
           <p:cNvSpPr/>
           <p:nvPr/>
         </p:nvSpPr>
@@ -12609,7 +13302,7 @@
       </p:sp>
       <p:sp>
         <p:nvSpPr>
-          <p:cNvPr id="14" name="text-282"/>
+          <p:cNvPr id="14" name="text-308"/>
           <p:cNvSpPr txBox="1"/>
           <p:nvPr/>
         </p:nvSpPr>
@@ -12648,7 +13341,7 @@
       </p:sp>
       <p:sp>
         <p:nvSpPr>
-          <p:cNvPr id="15" name="text-283"/>
+          <p:cNvPr id="15" name="text-309"/>
           <p:cNvSpPr txBox="1"/>
           <p:nvPr/>
         </p:nvSpPr>
@@ -12684,7 +13377,7 @@
       </p:sp>
       <p:sp>
         <p:nvSpPr>
-          <p:cNvPr id="16" name="text-284"/>
+          <p:cNvPr id="16" name="text-310"/>
           <p:cNvSpPr txBox="1"/>
           <p:nvPr/>
         </p:nvSpPr>
@@ -12720,7 +13413,7 @@
       </p:sp>
       <p:sp>
         <p:nvSpPr>
-          <p:cNvPr id="17" name="card-285"/>
+          <p:cNvPr id="17" name="card-311"/>
           <p:cNvSpPr/>
           <p:nvPr/>
         </p:nvSpPr>
@@ -12747,7 +13440,7 @@
       </p:sp>
       <p:sp>
         <p:nvSpPr>
-          <p:cNvPr id="18" name="text-286"/>
+          <p:cNvPr id="18" name="text-312"/>
           <p:cNvSpPr txBox="1"/>
           <p:nvPr/>
         </p:nvSpPr>
@@ -12786,7 +13479,7 @@
       </p:sp>
       <p:sp>
         <p:nvSpPr>
-          <p:cNvPr id="19" name="text-287"/>
+          <p:cNvPr id="19" name="text-313"/>
           <p:cNvSpPr txBox="1"/>
           <p:nvPr/>
         </p:nvSpPr>
@@ -12822,7 +13515,7 @@
       </p:sp>
       <p:sp>
         <p:nvSpPr>
-          <p:cNvPr id="20" name="text-288"/>
+          <p:cNvPr id="20" name="text-314"/>
           <p:cNvSpPr txBox="1"/>
           <p:nvPr/>
         </p:nvSpPr>
@@ -12858,7 +13551,7 @@
       </p:sp>
       <p:sp>
         <p:nvSpPr>
-          <p:cNvPr id="21" name="text-289"/>
+          <p:cNvPr id="21" name="text-315"/>
           <p:cNvSpPr txBox="1"/>
           <p:nvPr/>
         </p:nvSpPr>
@@ -13104,7 +13797,7 @@
       </p:sp>
       <p:sp>
         <p:nvSpPr>
-          <p:cNvPr id="5" name="card-290"/>
+          <p:cNvPr id="5" name="card-316"/>
           <p:cNvSpPr/>
           <p:nvPr/>
         </p:nvSpPr>
@@ -13131,7 +13824,7 @@
       </p:sp>
       <p:sp>
         <p:nvSpPr>
-          <p:cNvPr id="6" name="text-291"/>
+          <p:cNvPr id="6" name="text-317"/>
           <p:cNvSpPr txBox="1"/>
           <p:nvPr/>
         </p:nvSpPr>
@@ -13167,7 +13860,7 @@
       </p:sp>
       <p:sp>
         <p:nvSpPr>
-          <p:cNvPr id="7" name="text-292"/>
+          <p:cNvPr id="7" name="text-318"/>
           <p:cNvSpPr txBox="1"/>
           <p:nvPr/>
         </p:nvSpPr>
@@ -13217,7 +13910,7 @@
       </p:sp>
       <p:sp>
         <p:nvSpPr>
-          <p:cNvPr id="8" name="card-293"/>
+          <p:cNvPr id="8" name="card-319"/>
           <p:cNvSpPr/>
           <p:nvPr/>
         </p:nvSpPr>
@@ -13244,7 +13937,7 @@
       </p:sp>
       <p:sp>
         <p:nvSpPr>
-          <p:cNvPr id="9" name="text-294"/>
+          <p:cNvPr id="9" name="text-320"/>
           <p:cNvSpPr txBox="1"/>
           <p:nvPr/>
         </p:nvSpPr>
@@ -13280,7 +13973,7 @@
       </p:sp>
       <p:sp>
         <p:nvSpPr>
-          <p:cNvPr id="10" name="text-295"/>
+          <p:cNvPr id="10" name="text-321"/>
           <p:cNvSpPr txBox="1"/>
           <p:nvPr/>
         </p:nvSpPr>
@@ -13319,7 +14012,7 @@
       </p:sp>
       <p:sp>
         <p:nvSpPr>
-          <p:cNvPr id="11" name="text-296"/>
+          <p:cNvPr id="11" name="text-322"/>
           <p:cNvSpPr txBox="1"/>
           <p:nvPr/>
         </p:nvSpPr>
@@ -13355,7 +14048,7 @@
       </p:sp>
       <p:sp>
         <p:nvSpPr>
-          <p:cNvPr id="12" name="text-297"/>
+          <p:cNvPr id="12" name="text-323"/>
           <p:cNvSpPr txBox="1"/>
           <p:nvPr/>
         </p:nvSpPr>
@@ -13394,7 +14087,7 @@
       </p:sp>
       <p:sp>
         <p:nvSpPr>
-          <p:cNvPr id="13" name="text-298"/>
+          <p:cNvPr id="13" name="text-324"/>
           <p:cNvSpPr txBox="1"/>
           <p:nvPr/>
         </p:nvSpPr>
@@ -13430,7 +14123,7 @@
       </p:sp>
       <p:sp>
         <p:nvSpPr>
-          <p:cNvPr id="14" name="text-299"/>
+          <p:cNvPr id="14" name="text-325"/>
           <p:cNvSpPr txBox="1"/>
           <p:nvPr/>
         </p:nvSpPr>
@@ -13618,7 +14311,7 @@
       </p:sp>
       <p:sp>
         <p:nvSpPr>
-          <p:cNvPr id="5" name="card-300"/>
+          <p:cNvPr id="5" name="card-326"/>
           <p:cNvSpPr/>
           <p:nvPr/>
         </p:nvSpPr>
@@ -13645,7 +14338,7 @@
       </p:sp>
       <p:sp>
         <p:nvSpPr>
-          <p:cNvPr id="6" name="text-301"/>
+          <p:cNvPr id="6" name="text-327"/>
           <p:cNvSpPr txBox="1"/>
           <p:nvPr/>
         </p:nvSpPr>
@@ -13681,7 +14374,7 @@
       </p:sp>
       <p:sp>
         <p:nvSpPr>
-          <p:cNvPr id="7" name="text-302"/>
+          <p:cNvPr id="7" name="text-328"/>
           <p:cNvSpPr txBox="1"/>
           <p:nvPr/>
         </p:nvSpPr>
@@ -13717,7 +14410,7 @@
       </p:sp>
       <p:sp>
         <p:nvSpPr>
-          <p:cNvPr id="8" name="card-303"/>
+          <p:cNvPr id="8" name="card-329"/>
           <p:cNvSpPr/>
           <p:nvPr/>
         </p:nvSpPr>
@@ -13744,7 +14437,7 @@
       </p:sp>
       <p:sp>
         <p:nvSpPr>
-          <p:cNvPr id="9" name="text-304"/>
+          <p:cNvPr id="9" name="text-330"/>
           <p:cNvSpPr txBox="1"/>
           <p:nvPr/>
         </p:nvSpPr>
@@ -13780,7 +14473,7 @@
       </p:sp>
       <p:sp>
         <p:nvSpPr>
-          <p:cNvPr id="10" name="text-305"/>
+          <p:cNvPr id="10" name="text-331"/>
           <p:cNvSpPr txBox="1"/>
           <p:nvPr/>
         </p:nvSpPr>
@@ -13816,7 +14509,7 @@
       </p:sp>
       <p:sp>
         <p:nvSpPr>
-          <p:cNvPr id="11" name="card-306"/>
+          <p:cNvPr id="11" name="card-332"/>
           <p:cNvSpPr/>
           <p:nvPr/>
         </p:nvSpPr>
@@ -13843,7 +14536,7 @@
       </p:sp>
       <p:sp>
         <p:nvSpPr>
-          <p:cNvPr id="12" name="text-307"/>
+          <p:cNvPr id="12" name="text-333"/>
           <p:cNvSpPr txBox="1"/>
           <p:nvPr/>
         </p:nvSpPr>
@@ -13879,7 +14572,7 @@
       </p:sp>
       <p:sp>
         <p:nvSpPr>
-          <p:cNvPr id="13" name="text-308"/>
+          <p:cNvPr id="13" name="text-334"/>
           <p:cNvSpPr txBox="1"/>
           <p:nvPr/>
         </p:nvSpPr>
@@ -14067,7 +14760,7 @@
       </p:sp>
       <p:sp>
         <p:nvSpPr>
-          <p:cNvPr id="5" name="dot-309"/>
+          <p:cNvPr id="5" name="dot-335"/>
           <p:cNvSpPr/>
           <p:nvPr/>
         </p:nvSpPr>
@@ -14092,7 +14785,7 @@
       </p:sp>
       <p:sp>
         <p:nvSpPr>
-          <p:cNvPr id="6" name="text-310"/>
+          <p:cNvPr id="6" name="text-336"/>
           <p:cNvSpPr txBox="1"/>
           <p:nvPr/>
         </p:nvSpPr>
@@ -14128,7 +14821,7 @@
       </p:sp>
       <p:sp>
         <p:nvSpPr>
-          <p:cNvPr id="7" name="text-311"/>
+          <p:cNvPr id="7" name="text-337"/>
           <p:cNvSpPr txBox="1"/>
           <p:nvPr/>
         </p:nvSpPr>
@@ -14164,7 +14857,7 @@
       </p:sp>
       <p:sp>
         <p:nvSpPr>
-          <p:cNvPr id="8" name="dot-312"/>
+          <p:cNvPr id="8" name="dot-338"/>
           <p:cNvSpPr/>
           <p:nvPr/>
         </p:nvSpPr>
@@ -14189,7 +14882,7 @@
       </p:sp>
       <p:sp>
         <p:nvSpPr>
-          <p:cNvPr id="9" name="text-313"/>
+          <p:cNvPr id="9" name="text-339"/>
           <p:cNvSpPr txBox="1"/>
           <p:nvPr/>
         </p:nvSpPr>
@@ -14225,7 +14918,7 @@
       </p:sp>
       <p:sp>
         <p:nvSpPr>
-          <p:cNvPr id="10" name="text-314"/>
+          <p:cNvPr id="10" name="text-340"/>
           <p:cNvSpPr txBox="1"/>
           <p:nvPr/>
         </p:nvSpPr>
@@ -14261,7 +14954,7 @@
       </p:sp>
       <p:sp>
         <p:nvSpPr>
-          <p:cNvPr id="11" name="dot-315"/>
+          <p:cNvPr id="11" name="dot-341"/>
           <p:cNvSpPr/>
           <p:nvPr/>
         </p:nvSpPr>
@@ -14286,7 +14979,7 @@
       </p:sp>
       <p:sp>
         <p:nvSpPr>
-          <p:cNvPr id="12" name="text-316"/>
+          <p:cNvPr id="12" name="text-342"/>
           <p:cNvSpPr txBox="1"/>
           <p:nvPr/>
         </p:nvSpPr>
@@ -14322,7 +15015,7 @@
       </p:sp>
       <p:sp>
         <p:nvSpPr>
-          <p:cNvPr id="13" name="text-317"/>
+          <p:cNvPr id="13" name="text-343"/>
           <p:cNvSpPr txBox="1"/>
           <p:nvPr/>
         </p:nvSpPr>
@@ -14358,7 +15051,7 @@
       </p:sp>
       <p:sp>
         <p:nvSpPr>
-          <p:cNvPr id="14" name="dot-318"/>
+          <p:cNvPr id="14" name="dot-344"/>
           <p:cNvSpPr/>
           <p:nvPr/>
         </p:nvSpPr>
@@ -14383,7 +15076,7 @@
       </p:sp>
       <p:sp>
         <p:nvSpPr>
-          <p:cNvPr id="15" name="text-319"/>
+          <p:cNvPr id="15" name="text-345"/>
           <p:cNvSpPr txBox="1"/>
           <p:nvPr/>
         </p:nvSpPr>
@@ -14419,7 +15112,7 @@
       </p:sp>
       <p:sp>
         <p:nvSpPr>
-          <p:cNvPr id="16" name="text-320"/>
+          <p:cNvPr id="16" name="text-346"/>
           <p:cNvSpPr txBox="1"/>
           <p:nvPr/>
         </p:nvSpPr>
@@ -14455,7 +15148,7 @@
       </p:sp>
       <p:sp>
         <p:nvSpPr>
-          <p:cNvPr id="17" name="dot-321"/>
+          <p:cNvPr id="17" name="dot-347"/>
           <p:cNvSpPr/>
           <p:nvPr/>
         </p:nvSpPr>
@@ -14480,7 +15173,7 @@
       </p:sp>
       <p:sp>
         <p:nvSpPr>
-          <p:cNvPr id="18" name="text-322"/>
+          <p:cNvPr id="18" name="text-348"/>
           <p:cNvSpPr txBox="1"/>
           <p:nvPr/>
         </p:nvSpPr>
@@ -14516,7 +15209,7 @@
       </p:sp>
       <p:sp>
         <p:nvSpPr>
-          <p:cNvPr id="19" name="text-323"/>
+          <p:cNvPr id="19" name="text-349"/>
           <p:cNvSpPr txBox="1"/>
           <p:nvPr/>
         </p:nvSpPr>
